--- a/slides/08-week8/02-thur/UrbanEconomicsIntrotoDiscrimination.pptx
+++ b/slides/08-week8/02-thur/UrbanEconomicsIntrotoDiscrimination.pptx
@@ -1,46 +1,558 @@
 
 <file path=ppt/presentation.xml><?xml version="1.0" encoding="utf-8"?>
-<p:presentation xmlns:a="http://schemas.openxmlformats.org/drawingml/2006/main" xmlns:p="http://schemas.openxmlformats.org/presentationml/2006/main" xmlns:r="http://schemas.openxmlformats.org/officeDocument/2006/relationships" xmlns:p14="http://schemas.microsoft.com/office/powerpoint/2010/main" xmlns:p15="http://schemas.microsoft.com/office/powerpoint/2012/main" xmlns:mc="http://schemas.openxmlformats.org/markup-compatibility/2006">
+<p:presentation xmlns:a="http://schemas.openxmlformats.org/drawingml/2006/main" xmlns:r="http://schemas.openxmlformats.org/officeDocument/2006/relationships" xmlns:p="http://schemas.openxmlformats.org/presentationml/2006/main">
   <p:sldMasterIdLst>
-    <p:sldMasterId id="2147483648" r:id="rId2"/>
-    <p:sldMasterId id="2147483661" r:id="rId3"/>
+    <p:sldMasterId id="2147483648" r:id="rId1"/>
+    <p:sldMasterId id="2147483661" r:id="rId2"/>
   </p:sldMasterIdLst>
   <p:notesMasterIdLst>
-    <p:notesMasterId r:id="rId4"/>
+    <p:notesMasterId r:id="rId27"/>
   </p:notesMasterIdLst>
   <p:sldIdLst>
-    <p:sldId id="256" r:id="rId5"/>
-    <p:sldId id="257" r:id="rId6"/>
-    <p:sldId id="258" r:id="rId7"/>
-    <p:sldId id="259" r:id="rId8"/>
-    <p:sldId id="260" r:id="rId9"/>
-    <p:sldId id="261" r:id="rId10"/>
-    <p:sldId id="262" r:id="rId11"/>
-    <p:sldId id="263" r:id="rId12"/>
-    <p:sldId id="264" r:id="rId13"/>
-    <p:sldId id="265" r:id="rId14"/>
-    <p:sldId id="266" r:id="rId15"/>
-    <p:sldId id="267" r:id="rId16"/>
-    <p:sldId id="268" r:id="rId17"/>
-    <p:sldId id="269" r:id="rId18"/>
-    <p:sldId id="270" r:id="rId19"/>
-    <p:sldId id="271" r:id="rId20"/>
-    <p:sldId id="272" r:id="rId21"/>
-    <p:sldId id="273" r:id="rId22"/>
-    <p:sldId id="274" r:id="rId23"/>
-    <p:sldId id="275" r:id="rId24"/>
-    <p:sldId id="276" r:id="rId25"/>
-    <p:sldId id="277" r:id="rId26"/>
-    <p:sldId id="278" r:id="rId27"/>
-    <p:sldId id="279" r:id="rId28"/>
+    <p:sldId id="256" r:id="rId3"/>
+    <p:sldId id="257" r:id="rId4"/>
+    <p:sldId id="258" r:id="rId5"/>
+    <p:sldId id="259" r:id="rId6"/>
+    <p:sldId id="260" r:id="rId7"/>
+    <p:sldId id="261" r:id="rId8"/>
+    <p:sldId id="262" r:id="rId9"/>
+    <p:sldId id="263" r:id="rId10"/>
+    <p:sldId id="264" r:id="rId11"/>
+    <p:sldId id="265" r:id="rId12"/>
+    <p:sldId id="266" r:id="rId13"/>
+    <p:sldId id="267" r:id="rId14"/>
+    <p:sldId id="268" r:id="rId15"/>
+    <p:sldId id="269" r:id="rId16"/>
+    <p:sldId id="270" r:id="rId17"/>
+    <p:sldId id="271" r:id="rId18"/>
+    <p:sldId id="272" r:id="rId19"/>
+    <p:sldId id="273" r:id="rId20"/>
+    <p:sldId id="274" r:id="rId21"/>
+    <p:sldId id="275" r:id="rId22"/>
+    <p:sldId id="276" r:id="rId23"/>
+    <p:sldId id="277" r:id="rId24"/>
+    <p:sldId id="278" r:id="rId25"/>
+    <p:sldId id="279" r:id="rId26"/>
   </p:sldIdLst>
   <p:sldSz cx="12192000" cy="6858000"/>
   <p:notesSz cx="6858000" cy="9144000"/>
+  <p:defaultTextStyle>
+    <a:defPPr>
+      <a:defRPr lang="en-US"/>
+    </a:defPPr>
+    <a:lvl1pPr marL="0" algn="l" defTabSz="914400" rtl="0" eaLnBrk="1" latinLnBrk="0" hangingPunct="1">
+      <a:defRPr sz="1800" kern="1200">
+        <a:solidFill>
+          <a:schemeClr val="tx1"/>
+        </a:solidFill>
+        <a:latin typeface="+mn-lt"/>
+        <a:ea typeface="+mn-ea"/>
+        <a:cs typeface="+mn-cs"/>
+      </a:defRPr>
+    </a:lvl1pPr>
+    <a:lvl2pPr marL="457200" algn="l" defTabSz="914400" rtl="0" eaLnBrk="1" latinLnBrk="0" hangingPunct="1">
+      <a:defRPr sz="1800" kern="1200">
+        <a:solidFill>
+          <a:schemeClr val="tx1"/>
+        </a:solidFill>
+        <a:latin typeface="+mn-lt"/>
+        <a:ea typeface="+mn-ea"/>
+        <a:cs typeface="+mn-cs"/>
+      </a:defRPr>
+    </a:lvl2pPr>
+    <a:lvl3pPr marL="914400" algn="l" defTabSz="914400" rtl="0" eaLnBrk="1" latinLnBrk="0" hangingPunct="1">
+      <a:defRPr sz="1800" kern="1200">
+        <a:solidFill>
+          <a:schemeClr val="tx1"/>
+        </a:solidFill>
+        <a:latin typeface="+mn-lt"/>
+        <a:ea typeface="+mn-ea"/>
+        <a:cs typeface="+mn-cs"/>
+      </a:defRPr>
+    </a:lvl3pPr>
+    <a:lvl4pPr marL="1371600" algn="l" defTabSz="914400" rtl="0" eaLnBrk="1" latinLnBrk="0" hangingPunct="1">
+      <a:defRPr sz="1800" kern="1200">
+        <a:solidFill>
+          <a:schemeClr val="tx1"/>
+        </a:solidFill>
+        <a:latin typeface="+mn-lt"/>
+        <a:ea typeface="+mn-ea"/>
+        <a:cs typeface="+mn-cs"/>
+      </a:defRPr>
+    </a:lvl4pPr>
+    <a:lvl5pPr marL="1828800" algn="l" defTabSz="914400" rtl="0" eaLnBrk="1" latinLnBrk="0" hangingPunct="1">
+      <a:defRPr sz="1800" kern="1200">
+        <a:solidFill>
+          <a:schemeClr val="tx1"/>
+        </a:solidFill>
+        <a:latin typeface="+mn-lt"/>
+        <a:ea typeface="+mn-ea"/>
+        <a:cs typeface="+mn-cs"/>
+      </a:defRPr>
+    </a:lvl5pPr>
+    <a:lvl6pPr marL="2286000" algn="l" defTabSz="914400" rtl="0" eaLnBrk="1" latinLnBrk="0" hangingPunct="1">
+      <a:defRPr sz="1800" kern="1200">
+        <a:solidFill>
+          <a:schemeClr val="tx1"/>
+        </a:solidFill>
+        <a:latin typeface="+mn-lt"/>
+        <a:ea typeface="+mn-ea"/>
+        <a:cs typeface="+mn-cs"/>
+      </a:defRPr>
+    </a:lvl6pPr>
+    <a:lvl7pPr marL="2743200" algn="l" defTabSz="914400" rtl="0" eaLnBrk="1" latinLnBrk="0" hangingPunct="1">
+      <a:defRPr sz="1800" kern="1200">
+        <a:solidFill>
+          <a:schemeClr val="tx1"/>
+        </a:solidFill>
+        <a:latin typeface="+mn-lt"/>
+        <a:ea typeface="+mn-ea"/>
+        <a:cs typeface="+mn-cs"/>
+      </a:defRPr>
+    </a:lvl7pPr>
+    <a:lvl8pPr marL="3200400" algn="l" defTabSz="914400" rtl="0" eaLnBrk="1" latinLnBrk="0" hangingPunct="1">
+      <a:defRPr sz="1800" kern="1200">
+        <a:solidFill>
+          <a:schemeClr val="tx1"/>
+        </a:solidFill>
+        <a:latin typeface="+mn-lt"/>
+        <a:ea typeface="+mn-ea"/>
+        <a:cs typeface="+mn-cs"/>
+      </a:defRPr>
+    </a:lvl8pPr>
+    <a:lvl9pPr marL="3657600" algn="l" defTabSz="914400" rtl="0" eaLnBrk="1" latinLnBrk="0" hangingPunct="1">
+      <a:defRPr sz="1800" kern="1200">
+        <a:solidFill>
+          <a:schemeClr val="tx1"/>
+        </a:solidFill>
+        <a:latin typeface="+mn-lt"/>
+        <a:ea typeface="+mn-ea"/>
+        <a:cs typeface="+mn-cs"/>
+      </a:defRPr>
+    </a:lvl9pPr>
+  </p:defaultTextStyle>
 </p:presentation>
 </file>
 
 <file path=ppt/notesMasters/notesMaster1.xml><?xml version="1.0" encoding="utf-8"?>
-<p:notesMaster xmlns:a="http://schemas.openxmlformats.org/drawingml/2006/main" xmlns:p="http://schemas.openxmlformats.org/presentationml/2006/main" xmlns:r="http://schemas.openxmlformats.org/officeDocument/2006/relationships" xmlns:p14="http://schemas.microsoft.com/office/powerpoint/2010/main" xmlns:p15="http://schemas.microsoft.com/office/powerpoint/2012/main" xmlns:mc="http://schemas.openxmlformats.org/markup-compatibility/2006">
+<p:notesMaster xmlns:a="http://schemas.openxmlformats.org/drawingml/2006/main" xmlns:r="http://schemas.openxmlformats.org/officeDocument/2006/relationships" xmlns:p="http://schemas.openxmlformats.org/presentationml/2006/main">
+  <p:cSld>
+    <p:bg>
+      <p:bgRef idx="1001">
+        <a:schemeClr val="bg1"/>
+      </p:bgRef>
+    </p:bg>
+    <p:spTree>
+      <p:nvGrpSpPr>
+        <p:cNvPr id="1" name=""/>
+        <p:cNvGrpSpPr/>
+        <p:nvPr/>
+      </p:nvGrpSpPr>
+      <p:grpSpPr>
+        <a:xfrm>
+          <a:off x="0" y="0"/>
+          <a:ext cx="0" cy="0"/>
+          <a:chOff x="0" y="0"/>
+          <a:chExt cx="0" cy="0"/>
+        </a:xfrm>
+      </p:grpSpPr>
+      <p:sp>
+        <p:nvSpPr>
+          <p:cNvPr id="82" name="PlaceHolder 1"/>
+          <p:cNvSpPr>
+            <a:spLocks noGrp="1" noRot="1" noChangeAspect="1"/>
+          </p:cNvSpPr>
+          <p:nvPr>
+            <p:ph type="sldImg"/>
+          </p:nvPr>
+        </p:nvSpPr>
+        <p:spPr>
+          <a:xfrm>
+            <a:off x="533520" y="764280"/>
+            <a:ext cx="6704640" cy="3771360"/>
+          </a:xfrm>
+          <a:prstGeom prst="rect">
+            <a:avLst/>
+          </a:prstGeom>
+          <a:noFill/>
+          <a:ln w="0">
+            <a:noFill/>
+          </a:ln>
+        </p:spPr>
+        <p:txBody>
+          <a:bodyPr lIns="0" tIns="0" rIns="0" bIns="0" anchor="ctr">
+            <a:noAutofit/>
+          </a:bodyPr>
+          <a:lstStyle/>
+          <a:p>
+            <a:r>
+              <a:rPr lang="en-US" sz="3800" b="0" strike="noStrike" spc="-1">
+                <a:solidFill>
+                  <a:srgbClr val="000000"/>
+                </a:solidFill>
+                <a:latin typeface="Calibri"/>
+              </a:rPr>
+              <a:t>Click to move the slide</a:t>
+            </a:r>
+          </a:p>
+        </p:txBody>
+      </p:sp>
+      <p:sp>
+        <p:nvSpPr>
+          <p:cNvPr id="83" name="PlaceHolder 2"/>
+          <p:cNvSpPr>
+            <a:spLocks noGrp="1"/>
+          </p:cNvSpPr>
+          <p:nvPr>
+            <p:ph type="body"/>
+          </p:nvPr>
+        </p:nvSpPr>
+        <p:spPr>
+          <a:xfrm>
+            <a:off x="777240" y="4777560"/>
+            <a:ext cx="6217560" cy="4525920"/>
+          </a:xfrm>
+          <a:prstGeom prst="rect">
+            <a:avLst/>
+          </a:prstGeom>
+          <a:noFill/>
+          <a:ln w="0">
+            <a:noFill/>
+          </a:ln>
+        </p:spPr>
+        <p:txBody>
+          <a:bodyPr lIns="0" tIns="0" rIns="0" bIns="0" anchor="t">
+            <a:noAutofit/>
+          </a:bodyPr>
+          <a:lstStyle/>
+          <a:p>
+            <a:pPr marL="216000" indent="0">
+              <a:buNone/>
+            </a:pPr>
+            <a:r>
+              <a:rPr lang="en-US" sz="2000" b="0" strike="noStrike" spc="-1">
+                <a:solidFill>
+                  <a:srgbClr val="000000"/>
+                </a:solidFill>
+                <a:latin typeface="Arial"/>
+              </a:rPr>
+              <a:t>Click to edit the notes format</a:t>
+            </a:r>
+          </a:p>
+        </p:txBody>
+      </p:sp>
+      <p:sp>
+        <p:nvSpPr>
+          <p:cNvPr id="84" name="PlaceHolder 3"/>
+          <p:cNvSpPr>
+            <a:spLocks noGrp="1"/>
+          </p:cNvSpPr>
+          <p:nvPr>
+            <p:ph type="hdr"/>
+          </p:nvPr>
+        </p:nvSpPr>
+        <p:spPr>
+          <a:xfrm>
+            <a:off x="0" y="0"/>
+            <a:ext cx="3372840" cy="502560"/>
+          </a:xfrm>
+          <a:prstGeom prst="rect">
+            <a:avLst/>
+          </a:prstGeom>
+          <a:noFill/>
+          <a:ln w="0">
+            <a:noFill/>
+          </a:ln>
+        </p:spPr>
+        <p:txBody>
+          <a:bodyPr lIns="0" tIns="0" rIns="0" bIns="0" anchor="t">
+            <a:noAutofit/>
+          </a:bodyPr>
+          <a:lstStyle/>
+          <a:p>
+            <a:pPr indent="0">
+              <a:buNone/>
+            </a:pPr>
+            <a:r>
+              <a:rPr lang="en-US" sz="1400" b="0" strike="noStrike" spc="-1">
+                <a:solidFill>
+                  <a:srgbClr val="000000"/>
+                </a:solidFill>
+                <a:latin typeface="Times New Roman"/>
+              </a:rPr>
+              <a:t>&lt;header&gt;</a:t>
+            </a:r>
+          </a:p>
+        </p:txBody>
+      </p:sp>
+      <p:sp>
+        <p:nvSpPr>
+          <p:cNvPr id="85" name="PlaceHolder 4"/>
+          <p:cNvSpPr>
+            <a:spLocks noGrp="1"/>
+          </p:cNvSpPr>
+          <p:nvPr>
+            <p:ph type="dt" idx="5"/>
+          </p:nvPr>
+        </p:nvSpPr>
+        <p:spPr>
+          <a:xfrm>
+            <a:off x="4399200" y="0"/>
+            <a:ext cx="3372840" cy="502560"/>
+          </a:xfrm>
+          <a:prstGeom prst="rect">
+            <a:avLst/>
+          </a:prstGeom>
+          <a:noFill/>
+          <a:ln w="0">
+            <a:noFill/>
+          </a:ln>
+        </p:spPr>
+        <p:txBody>
+          <a:bodyPr lIns="0" tIns="0" rIns="0" bIns="0" anchor="t">
+            <a:noAutofit/>
+          </a:bodyPr>
+          <a:lstStyle>
+            <a:lvl1pPr indent="0" algn="r">
+              <a:buNone/>
+              <a:defRPr lang="en-US" sz="1400" b="0" strike="noStrike" spc="-1">
+                <a:solidFill>
+                  <a:srgbClr val="000000"/>
+                </a:solidFill>
+                <a:latin typeface="Times New Roman"/>
+              </a:defRPr>
+            </a:lvl1pPr>
+          </a:lstStyle>
+          <a:p>
+            <a:pPr indent="0" algn="r">
+              <a:buNone/>
+            </a:pPr>
+            <a:r>
+              <a:rPr lang="en-US" sz="1400" b="0" strike="noStrike" spc="-1">
+                <a:solidFill>
+                  <a:srgbClr val="000000"/>
+                </a:solidFill>
+                <a:latin typeface="Times New Roman"/>
+              </a:rPr>
+              <a:t>&lt;date/time&gt;</a:t>
+            </a:r>
+          </a:p>
+        </p:txBody>
+      </p:sp>
+      <p:sp>
+        <p:nvSpPr>
+          <p:cNvPr id="86" name="PlaceHolder 5"/>
+          <p:cNvSpPr>
+            <a:spLocks noGrp="1"/>
+          </p:cNvSpPr>
+          <p:nvPr>
+            <p:ph type="ftr" idx="6"/>
+          </p:nvPr>
+        </p:nvSpPr>
+        <p:spPr>
+          <a:xfrm>
+            <a:off x="0" y="9555480"/>
+            <a:ext cx="3372840" cy="502560"/>
+          </a:xfrm>
+          <a:prstGeom prst="rect">
+            <a:avLst/>
+          </a:prstGeom>
+          <a:noFill/>
+          <a:ln w="0">
+            <a:noFill/>
+          </a:ln>
+        </p:spPr>
+        <p:txBody>
+          <a:bodyPr lIns="0" tIns="0" rIns="0" bIns="0" anchor="b">
+            <a:noAutofit/>
+          </a:bodyPr>
+          <a:lstStyle>
+            <a:lvl1pPr indent="0">
+              <a:buNone/>
+              <a:defRPr lang="en-US" sz="1400" b="0" strike="noStrike" spc="-1">
+                <a:solidFill>
+                  <a:srgbClr val="000000"/>
+                </a:solidFill>
+                <a:latin typeface="Times New Roman"/>
+              </a:defRPr>
+            </a:lvl1pPr>
+          </a:lstStyle>
+          <a:p>
+            <a:pPr indent="0">
+              <a:buNone/>
+            </a:pPr>
+            <a:r>
+              <a:rPr lang="en-US" sz="1400" b="0" strike="noStrike" spc="-1">
+                <a:solidFill>
+                  <a:srgbClr val="000000"/>
+                </a:solidFill>
+                <a:latin typeface="Times New Roman"/>
+              </a:rPr>
+              <a:t>&lt;footer&gt;</a:t>
+            </a:r>
+          </a:p>
+        </p:txBody>
+      </p:sp>
+      <p:sp>
+        <p:nvSpPr>
+          <p:cNvPr id="87" name="PlaceHolder 6"/>
+          <p:cNvSpPr>
+            <a:spLocks noGrp="1"/>
+          </p:cNvSpPr>
+          <p:nvPr>
+            <p:ph type="sldNum" idx="7"/>
+          </p:nvPr>
+        </p:nvSpPr>
+        <p:spPr>
+          <a:xfrm>
+            <a:off x="4399200" y="9555480"/>
+            <a:ext cx="3372840" cy="502560"/>
+          </a:xfrm>
+          <a:prstGeom prst="rect">
+            <a:avLst/>
+          </a:prstGeom>
+          <a:noFill/>
+          <a:ln w="0">
+            <a:noFill/>
+          </a:ln>
+        </p:spPr>
+        <p:txBody>
+          <a:bodyPr lIns="0" tIns="0" rIns="0" bIns="0" anchor="b">
+            <a:noAutofit/>
+          </a:bodyPr>
+          <a:lstStyle>
+            <a:lvl1pPr indent="0" algn="r">
+              <a:buNone/>
+              <a:defRPr lang="en-US" sz="1400" b="0" strike="noStrike" spc="-1">
+                <a:solidFill>
+                  <a:srgbClr val="000000"/>
+                </a:solidFill>
+                <a:latin typeface="Times New Roman"/>
+              </a:defRPr>
+            </a:lvl1pPr>
+          </a:lstStyle>
+          <a:p>
+            <a:pPr indent="0" algn="r">
+              <a:buNone/>
+            </a:pPr>
+            <a:fld id="{9F2042CC-11B2-441D-A735-A1848AC55C49}" type="slidenum">
+              <a:rPr lang="en-US" sz="1400" b="0" strike="noStrike" spc="-1">
+                <a:solidFill>
+                  <a:srgbClr val="000000"/>
+                </a:solidFill>
+                <a:latin typeface="Times New Roman"/>
+              </a:rPr>
+              <a:t>‹#›</a:t>
+            </a:fld>
+            <a:endParaRPr lang="en-US" sz="1400" b="0" strike="noStrike" spc="-1">
+              <a:solidFill>
+                <a:srgbClr val="000000"/>
+              </a:solidFill>
+              <a:latin typeface="Times New Roman"/>
+            </a:endParaRPr>
+          </a:p>
+        </p:txBody>
+      </p:sp>
+    </p:spTree>
+  </p:cSld>
+  <p:clrMap bg1="lt1" tx1="dk1" bg2="lt2" tx2="dk2" accent1="accent1" accent2="accent2" accent3="accent3" accent4="accent4" accent5="accent5" accent6="accent6" hlink="hlink" folHlink="folHlink"/>
+  <p:notesStyle>
+    <a:lvl1pPr marL="0" algn="l" defTabSz="914400" rtl="0" eaLnBrk="1" latinLnBrk="0" hangingPunct="1">
+      <a:defRPr sz="1200" kern="1200">
+        <a:solidFill>
+          <a:schemeClr val="tx1"/>
+        </a:solidFill>
+        <a:latin typeface="+mn-lt"/>
+        <a:ea typeface="+mn-ea"/>
+        <a:cs typeface="+mn-cs"/>
+      </a:defRPr>
+    </a:lvl1pPr>
+    <a:lvl2pPr marL="457200" algn="l" defTabSz="914400" rtl="0" eaLnBrk="1" latinLnBrk="0" hangingPunct="1">
+      <a:defRPr sz="1200" kern="1200">
+        <a:solidFill>
+          <a:schemeClr val="tx1"/>
+        </a:solidFill>
+        <a:latin typeface="+mn-lt"/>
+        <a:ea typeface="+mn-ea"/>
+        <a:cs typeface="+mn-cs"/>
+      </a:defRPr>
+    </a:lvl2pPr>
+    <a:lvl3pPr marL="914400" algn="l" defTabSz="914400" rtl="0" eaLnBrk="1" latinLnBrk="0" hangingPunct="1">
+      <a:defRPr sz="1200" kern="1200">
+        <a:solidFill>
+          <a:schemeClr val="tx1"/>
+        </a:solidFill>
+        <a:latin typeface="+mn-lt"/>
+        <a:ea typeface="+mn-ea"/>
+        <a:cs typeface="+mn-cs"/>
+      </a:defRPr>
+    </a:lvl3pPr>
+    <a:lvl4pPr marL="1371600" algn="l" defTabSz="914400" rtl="0" eaLnBrk="1" latinLnBrk="0" hangingPunct="1">
+      <a:defRPr sz="1200" kern="1200">
+        <a:solidFill>
+          <a:schemeClr val="tx1"/>
+        </a:solidFill>
+        <a:latin typeface="+mn-lt"/>
+        <a:ea typeface="+mn-ea"/>
+        <a:cs typeface="+mn-cs"/>
+      </a:defRPr>
+    </a:lvl4pPr>
+    <a:lvl5pPr marL="1828800" algn="l" defTabSz="914400" rtl="0" eaLnBrk="1" latinLnBrk="0" hangingPunct="1">
+      <a:defRPr sz="1200" kern="1200">
+        <a:solidFill>
+          <a:schemeClr val="tx1"/>
+        </a:solidFill>
+        <a:latin typeface="+mn-lt"/>
+        <a:ea typeface="+mn-ea"/>
+        <a:cs typeface="+mn-cs"/>
+      </a:defRPr>
+    </a:lvl5pPr>
+    <a:lvl6pPr marL="2286000" algn="l" defTabSz="914400" rtl="0" eaLnBrk="1" latinLnBrk="0" hangingPunct="1">
+      <a:defRPr sz="1200" kern="1200">
+        <a:solidFill>
+          <a:schemeClr val="tx1"/>
+        </a:solidFill>
+        <a:latin typeface="+mn-lt"/>
+        <a:ea typeface="+mn-ea"/>
+        <a:cs typeface="+mn-cs"/>
+      </a:defRPr>
+    </a:lvl6pPr>
+    <a:lvl7pPr marL="2743200" algn="l" defTabSz="914400" rtl="0" eaLnBrk="1" latinLnBrk="0" hangingPunct="1">
+      <a:defRPr sz="1200" kern="1200">
+        <a:solidFill>
+          <a:schemeClr val="tx1"/>
+        </a:solidFill>
+        <a:latin typeface="+mn-lt"/>
+        <a:ea typeface="+mn-ea"/>
+        <a:cs typeface="+mn-cs"/>
+      </a:defRPr>
+    </a:lvl7pPr>
+    <a:lvl8pPr marL="3200400" algn="l" defTabSz="914400" rtl="0" eaLnBrk="1" latinLnBrk="0" hangingPunct="1">
+      <a:defRPr sz="1200" kern="1200">
+        <a:solidFill>
+          <a:schemeClr val="tx1"/>
+        </a:solidFill>
+        <a:latin typeface="+mn-lt"/>
+        <a:ea typeface="+mn-ea"/>
+        <a:cs typeface="+mn-cs"/>
+      </a:defRPr>
+    </a:lvl8pPr>
+    <a:lvl9pPr marL="3657600" algn="l" defTabSz="914400" rtl="0" eaLnBrk="1" latinLnBrk="0" hangingPunct="1">
+      <a:defRPr sz="1200" kern="1200">
+        <a:solidFill>
+          <a:schemeClr val="tx1"/>
+        </a:solidFill>
+        <a:latin typeface="+mn-lt"/>
+        <a:ea typeface="+mn-ea"/>
+        <a:cs typeface="+mn-cs"/>
+      </a:defRPr>
+    </a:lvl9pPr>
+  </p:notesStyle>
+</p:notesMaster>
+</file>
+
+<file path=ppt/notesSlides/notesSlide1.xml><?xml version="1.0" encoding="utf-8"?>
+<p:notes xmlns:a="http://schemas.openxmlformats.org/drawingml/2006/main" xmlns:r="http://schemas.openxmlformats.org/officeDocument/2006/relationships" xmlns:p="http://schemas.openxmlformats.org/presentationml/2006/main">
   <p:cSld>
     <p:spTree>
       <p:nvGrpSpPr>
@@ -58,9 +570,9 @@
       </p:grpSpPr>
       <p:sp>
         <p:nvSpPr>
-          <p:cNvPr id="82" name="PlaceHolder 1"/>
-          <p:cNvSpPr>
-            <a:spLocks noGrp="1"/>
+          <p:cNvPr id="141" name="PlaceHolder 1"/>
+          <p:cNvSpPr>
+            <a:spLocks noGrp="1" noRot="1" noChangeAspect="1"/>
           </p:cNvSpPr>
           <p:nvPr>
             <p:ph type="sldImg"/>
@@ -68,81 +580,50 @@
         </p:nvSpPr>
         <p:spPr>
           <a:xfrm>
-            <a:off x="533520" y="764280"/>
-            <a:ext cx="6704640" cy="3771360"/>
-          </a:xfrm>
-          <a:prstGeom prst="rect">
-            <a:avLst/>
-          </a:prstGeom>
-          <a:noFill/>
-          <a:ln w="0">
-            <a:noFill/>
-          </a:ln>
-        </p:spPr>
-        <p:txBody>
-          <a:bodyPr lIns="0" rIns="0" tIns="0" bIns="0" anchor="ctr">
+            <a:off x="685800" y="1143000"/>
+            <a:ext cx="5486040" cy="3085920"/>
+          </a:xfrm>
+          <a:prstGeom prst="rect">
+            <a:avLst/>
+          </a:prstGeom>
+          <a:ln w="0">
+            <a:noFill/>
+          </a:ln>
+        </p:spPr>
+      </p:sp>
+      <p:sp>
+        <p:nvSpPr>
+          <p:cNvPr id="142" name="PlaceHolder 2"/>
+          <p:cNvSpPr>
+            <a:spLocks noGrp="1"/>
+          </p:cNvSpPr>
+          <p:nvPr>
+            <p:ph type="body"/>
+          </p:nvPr>
+        </p:nvSpPr>
+        <p:spPr>
+          <a:xfrm>
+            <a:off x="685800" y="4400640"/>
+            <a:ext cx="5486040" cy="3600000"/>
+          </a:xfrm>
+          <a:prstGeom prst="rect">
+            <a:avLst/>
+          </a:prstGeom>
+          <a:noFill/>
+          <a:ln w="0">
+            <a:noFill/>
+          </a:ln>
+        </p:spPr>
+        <p:txBody>
+          <a:bodyPr numCol="1" spcCol="0" anchor="t">
             <a:noAutofit/>
           </a:bodyPr>
-          <a:p>
-            <a:r>
-              <a:rPr b="0" lang="en-US" sz="3800" spc="-1" strike="noStrike">
-                <a:solidFill>
-                  <a:srgbClr val="000000"/>
-                </a:solidFill>
-                <a:latin typeface="Calibri"/>
-              </a:rPr>
-              <a:t>Click to move the slide</a:t>
-            </a:r>
-            <a:endParaRPr b="0" lang="en-US" sz="3800" spc="-1" strike="noStrike">
-              <a:solidFill>
-                <a:srgbClr val="000000"/>
-              </a:solidFill>
-              <a:latin typeface="Calibri"/>
-            </a:endParaRPr>
-          </a:p>
-        </p:txBody>
-      </p:sp>
-      <p:sp>
-        <p:nvSpPr>
-          <p:cNvPr id="83" name="PlaceHolder 2"/>
-          <p:cNvSpPr>
-            <a:spLocks noGrp="1"/>
-          </p:cNvSpPr>
-          <p:nvPr>
-            <p:ph type="body"/>
-          </p:nvPr>
-        </p:nvSpPr>
-        <p:spPr>
-          <a:xfrm>
-            <a:off x="777240" y="4777560"/>
-            <a:ext cx="6217560" cy="4525920"/>
-          </a:xfrm>
-          <a:prstGeom prst="rect">
-            <a:avLst/>
-          </a:prstGeom>
-          <a:noFill/>
-          <a:ln w="0">
-            <a:noFill/>
-          </a:ln>
-        </p:spPr>
-        <p:txBody>
-          <a:bodyPr lIns="0" rIns="0" tIns="0" bIns="0" anchor="t">
-            <a:noAutofit/>
-          </a:bodyPr>
+          <a:lstStyle/>
           <a:p>
             <a:pPr marL="216000" indent="0">
               <a:buNone/>
             </a:pPr>
-            <a:r>
-              <a:rPr b="0" lang="en-US" sz="2000" spc="-1" strike="noStrike">
-                <a:solidFill>
-                  <a:srgbClr val="000000"/>
-                </a:solidFill>
-                <a:latin typeface="Arial"/>
-              </a:rPr>
-              <a:t>Click to edit the notes format</a:t>
-            </a:r>
-            <a:endParaRPr b="0" lang="en-US" sz="2000" spc="-1" strike="noStrike">
+            <a:endParaRPr lang="en-US" sz="1800" b="0" strike="noStrike" spc="-1">
               <a:solidFill>
                 <a:srgbClr val="000000"/>
               </a:solidFill>
@@ -153,45 +634,62 @@
       </p:sp>
       <p:sp>
         <p:nvSpPr>
-          <p:cNvPr id="84" name="PlaceHolder 3"/>
-          <p:cNvSpPr>
-            <a:spLocks noGrp="1"/>
-          </p:cNvSpPr>
-          <p:nvPr>
-            <p:ph type="hdr"/>
-          </p:nvPr>
-        </p:nvSpPr>
-        <p:spPr>
-          <a:xfrm>
-            <a:off x="0" y="0"/>
-            <a:ext cx="3372840" cy="502560"/>
-          </a:xfrm>
-          <a:prstGeom prst="rect">
-            <a:avLst/>
-          </a:prstGeom>
-          <a:noFill/>
-          <a:ln w="0">
-            <a:noFill/>
-          </a:ln>
-        </p:spPr>
-        <p:txBody>
-          <a:bodyPr lIns="0" rIns="0" tIns="0" bIns="0" anchor="t">
+          <p:cNvPr id="143" name="PlaceHolder 3"/>
+          <p:cNvSpPr>
+            <a:spLocks noGrp="1"/>
+          </p:cNvSpPr>
+          <p:nvPr>
+            <p:ph type="sldNum" idx="8"/>
+          </p:nvPr>
+        </p:nvSpPr>
+        <p:spPr>
+          <a:xfrm>
+            <a:off x="3884760" y="8685360"/>
+            <a:ext cx="2971440" cy="458280"/>
+          </a:xfrm>
+          <a:prstGeom prst="rect">
+            <a:avLst/>
+          </a:prstGeom>
+          <a:noFill/>
+          <a:ln w="0">
+            <a:noFill/>
+          </a:ln>
+        </p:spPr>
+        <p:txBody>
+          <a:bodyPr numCol="1" spcCol="0" anchor="b">
             <a:noAutofit/>
           </a:bodyPr>
-          <a:p>
-            <a:pPr indent="0">
+          <a:lstStyle>
+            <a:lvl1pPr indent="0" algn="r">
+              <a:lnSpc>
+                <a:spcPct val="100000"/>
+              </a:lnSpc>
               <a:buNone/>
-            </a:pPr>
-            <a:r>
-              <a:rPr b="0" lang="en-US" sz="1400" spc="-1" strike="noStrike">
+              <a:defRPr lang="en-US" sz="1200" b="0" strike="noStrike" spc="-1">
                 <a:solidFill>
                   <a:srgbClr val="000000"/>
                 </a:solidFill>
-                <a:latin typeface="Times New Roman"/>
-              </a:rPr>
-              <a:t>&lt;header&gt;</a:t>
-            </a:r>
-            <a:endParaRPr b="0" lang="en-US" sz="1400" spc="-1" strike="noStrike">
+                <a:latin typeface="Calibri"/>
+              </a:defRPr>
+            </a:lvl1pPr>
+          </a:lstStyle>
+          <a:p>
+            <a:pPr indent="0" algn="r">
+              <a:lnSpc>
+                <a:spcPct val="100000"/>
+              </a:lnSpc>
+              <a:buNone/>
+            </a:pPr>
+            <a:fld id="{18E6D8C3-5A9F-4A67-BDB0-FD98E79BD8F8}" type="slidenum">
+              <a:rPr lang="en-US" sz="1200" b="0" strike="noStrike" spc="-1">
+                <a:solidFill>
+                  <a:srgbClr val="000000"/>
+                </a:solidFill>
+                <a:latin typeface="Calibri"/>
+              </a:rPr>
+              <a:t>1</a:t>
+            </a:fld>
+            <a:endParaRPr lang="en-US" sz="1200" b="0" strike="noStrike" spc="-1">
               <a:solidFill>
                 <a:srgbClr val="000000"/>
               </a:solidFill>
@@ -200,345 +698,16 @@
           </a:p>
         </p:txBody>
       </p:sp>
-      <p:sp>
-        <p:nvSpPr>
-          <p:cNvPr id="85" name="PlaceHolder 4"/>
-          <p:cNvSpPr>
-            <a:spLocks noGrp="1"/>
-          </p:cNvSpPr>
-          <p:nvPr>
-            <p:ph type="dt" idx="5"/>
-          </p:nvPr>
-        </p:nvSpPr>
-        <p:spPr>
-          <a:xfrm>
-            <a:off x="4399200" y="0"/>
-            <a:ext cx="3372840" cy="502560"/>
-          </a:xfrm>
-          <a:prstGeom prst="rect">
-            <a:avLst/>
-          </a:prstGeom>
-          <a:noFill/>
-          <a:ln w="0">
-            <a:noFill/>
-          </a:ln>
-        </p:spPr>
-        <p:txBody>
-          <a:bodyPr lIns="0" rIns="0" tIns="0" bIns="0" anchor="t">
-            <a:noAutofit/>
-          </a:bodyPr>
-          <a:lstStyle>
-            <a:lvl1pPr indent="0" algn="r">
-              <a:buNone/>
-              <a:defRPr b="0" lang="en-US" sz="1400" spc="-1" strike="noStrike">
-                <a:solidFill>
-                  <a:srgbClr val="000000"/>
-                </a:solidFill>
-                <a:latin typeface="Times New Roman"/>
-              </a:defRPr>
-            </a:lvl1pPr>
-          </a:lstStyle>
-          <a:p>
-            <a:pPr indent="0" algn="r">
-              <a:buNone/>
-            </a:pPr>
-            <a:r>
-              <a:rPr b="0" lang="en-US" sz="1400" spc="-1" strike="noStrike">
-                <a:solidFill>
-                  <a:srgbClr val="000000"/>
-                </a:solidFill>
-                <a:latin typeface="Times New Roman"/>
-              </a:rPr>
-              <a:t>&lt;date/time&gt;</a:t>
-            </a:r>
-            <a:endParaRPr b="0" lang="en-US" sz="1400" spc="-1" strike="noStrike">
-              <a:solidFill>
-                <a:srgbClr val="000000"/>
-              </a:solidFill>
-              <a:latin typeface="Times New Roman"/>
-            </a:endParaRPr>
-          </a:p>
-        </p:txBody>
-      </p:sp>
-      <p:sp>
-        <p:nvSpPr>
-          <p:cNvPr id="86" name="PlaceHolder 5"/>
-          <p:cNvSpPr>
-            <a:spLocks noGrp="1"/>
-          </p:cNvSpPr>
-          <p:nvPr>
-            <p:ph type="ftr" idx="6"/>
-          </p:nvPr>
-        </p:nvSpPr>
-        <p:spPr>
-          <a:xfrm>
-            <a:off x="0" y="9555480"/>
-            <a:ext cx="3372840" cy="502560"/>
-          </a:xfrm>
-          <a:prstGeom prst="rect">
-            <a:avLst/>
-          </a:prstGeom>
-          <a:noFill/>
-          <a:ln w="0">
-            <a:noFill/>
-          </a:ln>
-        </p:spPr>
-        <p:txBody>
-          <a:bodyPr lIns="0" rIns="0" tIns="0" bIns="0" anchor="b">
-            <a:noAutofit/>
-          </a:bodyPr>
-          <a:lstStyle>
-            <a:lvl1pPr indent="0">
-              <a:buNone/>
-              <a:defRPr b="0" lang="en-US" sz="1400" spc="-1" strike="noStrike">
-                <a:solidFill>
-                  <a:srgbClr val="000000"/>
-                </a:solidFill>
-                <a:latin typeface="Times New Roman"/>
-              </a:defRPr>
-            </a:lvl1pPr>
-          </a:lstStyle>
-          <a:p>
-            <a:pPr indent="0">
-              <a:buNone/>
-            </a:pPr>
-            <a:r>
-              <a:rPr b="0" lang="en-US" sz="1400" spc="-1" strike="noStrike">
-                <a:solidFill>
-                  <a:srgbClr val="000000"/>
-                </a:solidFill>
-                <a:latin typeface="Times New Roman"/>
-              </a:rPr>
-              <a:t>&lt;footer&gt;</a:t>
-            </a:r>
-            <a:endParaRPr b="0" lang="en-US" sz="1400" spc="-1" strike="noStrike">
-              <a:solidFill>
-                <a:srgbClr val="000000"/>
-              </a:solidFill>
-              <a:latin typeface="Times New Roman"/>
-            </a:endParaRPr>
-          </a:p>
-        </p:txBody>
-      </p:sp>
-      <p:sp>
-        <p:nvSpPr>
-          <p:cNvPr id="87" name="PlaceHolder 6"/>
-          <p:cNvSpPr>
-            <a:spLocks noGrp="1"/>
-          </p:cNvSpPr>
-          <p:nvPr>
-            <p:ph type="sldNum" idx="7"/>
-          </p:nvPr>
-        </p:nvSpPr>
-        <p:spPr>
-          <a:xfrm>
-            <a:off x="4399200" y="9555480"/>
-            <a:ext cx="3372840" cy="502560"/>
-          </a:xfrm>
-          <a:prstGeom prst="rect">
-            <a:avLst/>
-          </a:prstGeom>
-          <a:noFill/>
-          <a:ln w="0">
-            <a:noFill/>
-          </a:ln>
-        </p:spPr>
-        <p:txBody>
-          <a:bodyPr lIns="0" rIns="0" tIns="0" bIns="0" anchor="b">
-            <a:noAutofit/>
-          </a:bodyPr>
-          <a:lstStyle>
-            <a:lvl1pPr indent="0" algn="r">
-              <a:buNone/>
-              <a:defRPr b="0" lang="en-US" sz="1400" spc="-1" strike="noStrike">
-                <a:solidFill>
-                  <a:srgbClr val="000000"/>
-                </a:solidFill>
-                <a:latin typeface="Times New Roman"/>
-              </a:defRPr>
-            </a:lvl1pPr>
-          </a:lstStyle>
-          <a:p>
-            <a:pPr indent="0" algn="r">
-              <a:buNone/>
-            </a:pPr>
-            <a:fld id="{9F2042CC-11B2-441D-A735-A1848AC55C49}" type="slidenum">
-              <a:rPr b="0" lang="en-US" sz="1400" spc="-1" strike="noStrike">
-                <a:solidFill>
-                  <a:srgbClr val="000000"/>
-                </a:solidFill>
-                <a:latin typeface="Times New Roman"/>
-              </a:rPr>
-              <a:t>&lt;number&gt;</a:t>
-            </a:fld>
-            <a:endParaRPr b="0" lang="en-US" sz="1400" spc="-1" strike="noStrike">
-              <a:solidFill>
-                <a:srgbClr val="000000"/>
-              </a:solidFill>
-              <a:latin typeface="Times New Roman"/>
-            </a:endParaRPr>
-          </a:p>
-        </p:txBody>
-      </p:sp>
     </p:spTree>
   </p:cSld>
-  <p:clrMap bg1="lt1" bg2="lt2" tx1="dk1" tx2="dk2" accent1="accent1" accent2="accent2" accent3="accent3" accent4="accent4" accent5="accent5" accent6="accent6" hlink="hlink" folHlink="folHlink"/>
-</p:notesMaster>
-</file>
-
-<file path=ppt/notesSlides/notesSlide1.xml><?xml version="1.0" encoding="utf-8"?>
-<p:notes xmlns:a="http://schemas.openxmlformats.org/drawingml/2006/main" xmlns:p="http://schemas.openxmlformats.org/presentationml/2006/main" xmlns:r="http://schemas.openxmlformats.org/officeDocument/2006/relationships" xmlns:p14="http://schemas.microsoft.com/office/powerpoint/2010/main" xmlns:p15="http://schemas.microsoft.com/office/powerpoint/2012/main" xmlns:mc="http://schemas.openxmlformats.org/markup-compatibility/2006">
-  <p:cSld>
-    <p:spTree>
-      <p:nvGrpSpPr>
-        <p:cNvPr id="1" name=""/>
-        <p:cNvGrpSpPr/>
-        <p:nvPr/>
-      </p:nvGrpSpPr>
-      <p:grpSpPr>
-        <a:xfrm>
-          <a:off x="0" y="0"/>
-          <a:ext cx="0" cy="0"/>
-          <a:chOff x="0" y="0"/>
-          <a:chExt cx="0" cy="0"/>
-        </a:xfrm>
-      </p:grpSpPr>
-      <p:sp>
-        <p:nvSpPr>
-          <p:cNvPr id="141" name="PlaceHolder 1"/>
-          <p:cNvSpPr>
-            <a:spLocks noGrp="1"/>
-          </p:cNvSpPr>
-          <p:nvPr>
-            <p:ph type="sldImg"/>
-          </p:nvPr>
-        </p:nvSpPr>
-        <p:spPr>
-          <a:xfrm>
-            <a:off x="685800" y="1143000"/>
-            <a:ext cx="5486040" cy="3085920"/>
-          </a:xfrm>
-          <a:prstGeom prst="rect">
-            <a:avLst/>
-          </a:prstGeom>
-          <a:ln w="0">
-            <a:noFill/>
-          </a:ln>
-        </p:spPr>
-      </p:sp>
-      <p:sp>
-        <p:nvSpPr>
-          <p:cNvPr id="142" name="PlaceHolder 2"/>
-          <p:cNvSpPr>
-            <a:spLocks noGrp="1"/>
-          </p:cNvSpPr>
-          <p:nvPr>
-            <p:ph type="body"/>
-          </p:nvPr>
-        </p:nvSpPr>
-        <p:spPr>
-          <a:xfrm>
-            <a:off x="685800" y="4400640"/>
-            <a:ext cx="5486040" cy="3600000"/>
-          </a:xfrm>
-          <a:prstGeom prst="rect">
-            <a:avLst/>
-          </a:prstGeom>
-          <a:noFill/>
-          <a:ln w="0">
-            <a:noFill/>
-          </a:ln>
-        </p:spPr>
-        <p:txBody>
-          <a:bodyPr numCol="1" spcCol="0" anchor="t">
-            <a:noAutofit/>
-          </a:bodyPr>
-          <a:p>
-            <a:pPr marL="216000" indent="0">
-              <a:buNone/>
-            </a:pPr>
-            <a:endParaRPr b="0" lang="en-US" sz="1800" spc="-1" strike="noStrike">
-              <a:solidFill>
-                <a:srgbClr val="000000"/>
-              </a:solidFill>
-              <a:latin typeface="Arial"/>
-            </a:endParaRPr>
-          </a:p>
-        </p:txBody>
-      </p:sp>
-      <p:sp>
-        <p:nvSpPr>
-          <p:cNvPr id="143" name="PlaceHolder 3"/>
-          <p:cNvSpPr>
-            <a:spLocks noGrp="1"/>
-          </p:cNvSpPr>
-          <p:nvPr>
-            <p:ph type="sldNum" idx="8"/>
-          </p:nvPr>
-        </p:nvSpPr>
-        <p:spPr>
-          <a:xfrm>
-            <a:off x="3884760" y="8685360"/>
-            <a:ext cx="2971440" cy="458280"/>
-          </a:xfrm>
-          <a:prstGeom prst="rect">
-            <a:avLst/>
-          </a:prstGeom>
-          <a:noFill/>
-          <a:ln w="0">
-            <a:noFill/>
-          </a:ln>
-        </p:spPr>
-        <p:txBody>
-          <a:bodyPr numCol="1" spcCol="0" anchor="b">
-            <a:noAutofit/>
-          </a:bodyPr>
-          <a:lstStyle>
-            <a:lvl1pPr indent="0" algn="r">
-              <a:lnSpc>
-                <a:spcPct val="100000"/>
-              </a:lnSpc>
-              <a:buNone/>
-              <a:defRPr b="0" lang="en-US" sz="1200" spc="-1" strike="noStrike">
-                <a:solidFill>
-                  <a:srgbClr val="000000"/>
-                </a:solidFill>
-                <a:latin typeface="Calibri"/>
-              </a:defRPr>
-            </a:lvl1pPr>
-          </a:lstStyle>
-          <a:p>
-            <a:pPr indent="0" algn="r">
-              <a:lnSpc>
-                <a:spcPct val="100000"/>
-              </a:lnSpc>
-              <a:buNone/>
-            </a:pPr>
-            <a:fld id="{18E6D8C3-5A9F-4A67-BDB0-FD98E79BD8F8}" type="slidenum">
-              <a:rPr b="0" lang="en-US" sz="1200" spc="-1" strike="noStrike">
-                <a:solidFill>
-                  <a:srgbClr val="000000"/>
-                </a:solidFill>
-                <a:latin typeface="Calibri"/>
-              </a:rPr>
-              <a:t>&lt;number&gt;</a:t>
-            </a:fld>
-            <a:endParaRPr b="0" lang="en-US" sz="1200" spc="-1" strike="noStrike">
-              <a:solidFill>
-                <a:srgbClr val="000000"/>
-              </a:solidFill>
-              <a:latin typeface="Times New Roman"/>
-            </a:endParaRPr>
-          </a:p>
-        </p:txBody>
-      </p:sp>
-    </p:spTree>
-  </p:cSld>
+  <p:clrMapOvr>
+    <a:masterClrMapping/>
+  </p:clrMapOvr>
 </p:notes>
 </file>
 
 <file path=ppt/slideLayouts/slideLayout1.xml><?xml version="1.0" encoding="utf-8"?>
-<p:sldLayout xmlns:a="http://schemas.openxmlformats.org/drawingml/2006/main" xmlns:p="http://schemas.openxmlformats.org/presentationml/2006/main" xmlns:r="http://schemas.openxmlformats.org/officeDocument/2006/relationships" xmlns:p14="http://schemas.microsoft.com/office/powerpoint/2010/main" xmlns:p15="http://schemas.microsoft.com/office/powerpoint/2012/main" xmlns:mc="http://schemas.openxmlformats.org/markup-compatibility/2006" type="blank" preserve="1">
+<p:sldLayout xmlns:a="http://schemas.openxmlformats.org/drawingml/2006/main" xmlns:r="http://schemas.openxmlformats.org/officeDocument/2006/relationships" xmlns:p="http://schemas.openxmlformats.org/presentationml/2006/main" type="blank" preserve="1">
   <p:cSld name="Blank Slide">
     <p:spTree>
       <p:nvGrpSpPr>
@@ -567,6 +736,7 @@
         <p:spPr/>
         <p:txBody>
           <a:bodyPr/>
+          <a:lstStyle/>
           <a:p>
             <a:r>
               <a:t>Footer</a:t>
@@ -587,20 +757,25 @@
         <p:spPr/>
         <p:txBody>
           <a:bodyPr/>
+          <a:lstStyle/>
           <a:p>
             <a:fld id="{879F9E97-AC34-4701-9130-5F3434F66B68}" type="slidenum">
-              <a:t>&lt;#&gt;</a:t>
+              <a:t>‹#›</a:t>
             </a:fld>
+            <a:endParaRPr/>
           </a:p>
         </p:txBody>
       </p:sp>
     </p:spTree>
   </p:cSld>
+  <p:clrMapOvr>
+    <a:masterClrMapping/>
+  </p:clrMapOvr>
 </p:sldLayout>
 </file>
 
 <file path=ppt/slideLayouts/slideLayout10.xml><?xml version="1.0" encoding="utf-8"?>
-<p:sldLayout xmlns:a="http://schemas.openxmlformats.org/drawingml/2006/main" xmlns:p="http://schemas.openxmlformats.org/presentationml/2006/main" xmlns:r="http://schemas.openxmlformats.org/officeDocument/2006/relationships" xmlns:p14="http://schemas.microsoft.com/office/powerpoint/2010/main" xmlns:p15="http://schemas.microsoft.com/office/powerpoint/2012/main" xmlns:mc="http://schemas.openxmlformats.org/markup-compatibility/2006" type="objOverTx" preserve="1">
+<p:sldLayout xmlns:a="http://schemas.openxmlformats.org/drawingml/2006/main" xmlns:r="http://schemas.openxmlformats.org/officeDocument/2006/relationships" xmlns:p="http://schemas.openxmlformats.org/presentationml/2006/main" type="objOverTx" preserve="1">
   <p:cSld name="Title, Content over Content">
     <p:spTree>
       <p:nvGrpSpPr>
@@ -640,14 +815,15 @@
           </a:ln>
         </p:spPr>
         <p:txBody>
-          <a:bodyPr lIns="0" rIns="0" tIns="0" bIns="0" anchor="ctr">
+          <a:bodyPr lIns="0" tIns="0" rIns="0" bIns="0" anchor="ctr">
             <a:noAutofit/>
           </a:bodyPr>
+          <a:lstStyle/>
           <a:p>
             <a:pPr indent="0">
               <a:buNone/>
             </a:pPr>
-            <a:endParaRPr b="0" lang="en-US" sz="3800" spc="-1" strike="noStrike">
+            <a:endParaRPr lang="en-US" sz="3800" b="0" strike="noStrike" spc="-1">
               <a:solidFill>
                 <a:srgbClr val="000000"/>
               </a:solidFill>
@@ -680,9 +856,10 @@
           </a:ln>
         </p:spPr>
         <p:txBody>
-          <a:bodyPr lIns="0" rIns="0" tIns="0" bIns="0" anchor="t">
+          <a:bodyPr lIns="0" tIns="0" rIns="0" bIns="0" anchor="t">
             <a:normAutofit/>
           </a:bodyPr>
+          <a:lstStyle/>
           <a:p>
             <a:pPr indent="0">
               <a:lnSpc>
@@ -693,7 +870,7 @@
               </a:spcBef>
               <a:buNone/>
             </a:pPr>
-            <a:endParaRPr b="0" lang="en-US" sz="2800" spc="-1" strike="noStrike">
+            <a:endParaRPr lang="en-US" sz="2800" b="0" strike="noStrike" spc="-1">
               <a:solidFill>
                 <a:srgbClr val="404040"/>
               </a:solidFill>
@@ -726,9 +903,10 @@
           </a:ln>
         </p:spPr>
         <p:txBody>
-          <a:bodyPr lIns="0" rIns="0" tIns="0" bIns="0" anchor="t">
+          <a:bodyPr lIns="0" tIns="0" rIns="0" bIns="0" anchor="t">
             <a:normAutofit/>
           </a:bodyPr>
+          <a:lstStyle/>
           <a:p>
             <a:pPr indent="0">
               <a:lnSpc>
@@ -739,7 +917,7 @@
               </a:spcBef>
               <a:buNone/>
             </a:pPr>
-            <a:endParaRPr b="0" lang="en-US" sz="2800" spc="-1" strike="noStrike">
+            <a:endParaRPr lang="en-US" sz="2800" b="0" strike="noStrike" spc="-1">
               <a:solidFill>
                 <a:srgbClr val="404040"/>
               </a:solidFill>
@@ -761,6 +939,7 @@
         <p:spPr/>
         <p:txBody>
           <a:bodyPr/>
+          <a:lstStyle/>
           <a:p>
             <a:r>
               <a:t>Footer</a:t>
@@ -781,20 +960,25 @@
         <p:spPr/>
         <p:txBody>
           <a:bodyPr/>
+          <a:lstStyle/>
           <a:p>
             <a:fld id="{1CB2F005-AFC1-4162-A249-E9CD29BA8DC9}" type="slidenum">
-              <a:t>&lt;#&gt;</a:t>
+              <a:t>‹#›</a:t>
             </a:fld>
+            <a:endParaRPr/>
           </a:p>
         </p:txBody>
       </p:sp>
     </p:spTree>
   </p:cSld>
+  <p:clrMapOvr>
+    <a:masterClrMapping/>
+  </p:clrMapOvr>
 </p:sldLayout>
 </file>
 
 <file path=ppt/slideLayouts/slideLayout11.xml><?xml version="1.0" encoding="utf-8"?>
-<p:sldLayout xmlns:a="http://schemas.openxmlformats.org/drawingml/2006/main" xmlns:p="http://schemas.openxmlformats.org/presentationml/2006/main" xmlns:r="http://schemas.openxmlformats.org/officeDocument/2006/relationships" xmlns:p14="http://schemas.microsoft.com/office/powerpoint/2010/main" xmlns:p15="http://schemas.microsoft.com/office/powerpoint/2012/main" xmlns:mc="http://schemas.openxmlformats.org/markup-compatibility/2006" type="fourObj" preserve="1">
+<p:sldLayout xmlns:a="http://schemas.openxmlformats.org/drawingml/2006/main" xmlns:r="http://schemas.openxmlformats.org/officeDocument/2006/relationships" xmlns:p="http://schemas.openxmlformats.org/presentationml/2006/main" type="fourObj" preserve="1">
   <p:cSld name="Title, 4 Content">
     <p:spTree>
       <p:nvGrpSpPr>
@@ -834,14 +1018,15 @@
           </a:ln>
         </p:spPr>
         <p:txBody>
-          <a:bodyPr lIns="0" rIns="0" tIns="0" bIns="0" anchor="ctr">
+          <a:bodyPr lIns="0" tIns="0" rIns="0" bIns="0" anchor="ctr">
             <a:noAutofit/>
           </a:bodyPr>
+          <a:lstStyle/>
           <a:p>
             <a:pPr indent="0">
               <a:buNone/>
             </a:pPr>
-            <a:endParaRPr b="0" lang="en-US" sz="3800" spc="-1" strike="noStrike">
+            <a:endParaRPr lang="en-US" sz="3800" b="0" strike="noStrike" spc="-1">
               <a:solidFill>
                 <a:srgbClr val="000000"/>
               </a:solidFill>
@@ -874,9 +1059,10 @@
           </a:ln>
         </p:spPr>
         <p:txBody>
-          <a:bodyPr lIns="0" rIns="0" tIns="0" bIns="0" anchor="t">
+          <a:bodyPr lIns="0" tIns="0" rIns="0" bIns="0" anchor="t">
             <a:normAutofit/>
           </a:bodyPr>
+          <a:lstStyle/>
           <a:p>
             <a:pPr indent="0">
               <a:lnSpc>
@@ -887,7 +1073,7 @@
               </a:spcBef>
               <a:buNone/>
             </a:pPr>
-            <a:endParaRPr b="0" lang="en-US" sz="2800" spc="-1" strike="noStrike">
+            <a:endParaRPr lang="en-US" sz="2800" b="0" strike="noStrike" spc="-1">
               <a:solidFill>
                 <a:srgbClr val="404040"/>
               </a:solidFill>
@@ -920,9 +1106,10 @@
           </a:ln>
         </p:spPr>
         <p:txBody>
-          <a:bodyPr lIns="0" rIns="0" tIns="0" bIns="0" anchor="t">
+          <a:bodyPr lIns="0" tIns="0" rIns="0" bIns="0" anchor="t">
             <a:normAutofit/>
           </a:bodyPr>
+          <a:lstStyle/>
           <a:p>
             <a:pPr indent="0">
               <a:lnSpc>
@@ -933,7 +1120,7 @@
               </a:spcBef>
               <a:buNone/>
             </a:pPr>
-            <a:endParaRPr b="0" lang="en-US" sz="2800" spc="-1" strike="noStrike">
+            <a:endParaRPr lang="en-US" sz="2800" b="0" strike="noStrike" spc="-1">
               <a:solidFill>
                 <a:srgbClr val="404040"/>
               </a:solidFill>
@@ -966,9 +1153,10 @@
           </a:ln>
         </p:spPr>
         <p:txBody>
-          <a:bodyPr lIns="0" rIns="0" tIns="0" bIns="0" anchor="t">
+          <a:bodyPr lIns="0" tIns="0" rIns="0" bIns="0" anchor="t">
             <a:normAutofit/>
           </a:bodyPr>
+          <a:lstStyle/>
           <a:p>
             <a:pPr indent="0">
               <a:lnSpc>
@@ -979,7 +1167,7 @@
               </a:spcBef>
               <a:buNone/>
             </a:pPr>
-            <a:endParaRPr b="0" lang="en-US" sz="2800" spc="-1" strike="noStrike">
+            <a:endParaRPr lang="en-US" sz="2800" b="0" strike="noStrike" spc="-1">
               <a:solidFill>
                 <a:srgbClr val="404040"/>
               </a:solidFill>
@@ -1012,9 +1200,10 @@
           </a:ln>
         </p:spPr>
         <p:txBody>
-          <a:bodyPr lIns="0" rIns="0" tIns="0" bIns="0" anchor="t">
+          <a:bodyPr lIns="0" tIns="0" rIns="0" bIns="0" anchor="t">
             <a:normAutofit/>
           </a:bodyPr>
+          <a:lstStyle/>
           <a:p>
             <a:pPr indent="0">
               <a:lnSpc>
@@ -1025,7 +1214,7 @@
               </a:spcBef>
               <a:buNone/>
             </a:pPr>
-            <a:endParaRPr b="0" lang="en-US" sz="2800" spc="-1" strike="noStrike">
+            <a:endParaRPr lang="en-US" sz="2800" b="0" strike="noStrike" spc="-1">
               <a:solidFill>
                 <a:srgbClr val="404040"/>
               </a:solidFill>
@@ -1047,6 +1236,7 @@
         <p:spPr/>
         <p:txBody>
           <a:bodyPr/>
+          <a:lstStyle/>
           <a:p>
             <a:r>
               <a:t>Footer</a:t>
@@ -1067,20 +1257,25 @@
         <p:spPr/>
         <p:txBody>
           <a:bodyPr/>
+          <a:lstStyle/>
           <a:p>
             <a:fld id="{1A289560-C06A-46E7-B8A9-1289EDE32313}" type="slidenum">
-              <a:t>&lt;#&gt;</a:t>
+              <a:t>‹#›</a:t>
             </a:fld>
+            <a:endParaRPr/>
           </a:p>
         </p:txBody>
       </p:sp>
     </p:spTree>
   </p:cSld>
+  <p:clrMapOvr>
+    <a:masterClrMapping/>
+  </p:clrMapOvr>
 </p:sldLayout>
 </file>
 
 <file path=ppt/slideLayouts/slideLayout12.xml><?xml version="1.0" encoding="utf-8"?>
-<p:sldLayout xmlns:a="http://schemas.openxmlformats.org/drawingml/2006/main" xmlns:p="http://schemas.openxmlformats.org/presentationml/2006/main" xmlns:r="http://schemas.openxmlformats.org/officeDocument/2006/relationships" xmlns:p14="http://schemas.microsoft.com/office/powerpoint/2010/main" xmlns:p15="http://schemas.microsoft.com/office/powerpoint/2012/main" xmlns:mc="http://schemas.openxmlformats.org/markup-compatibility/2006" type="blank" preserve="1">
+<p:sldLayout xmlns:a="http://schemas.openxmlformats.org/drawingml/2006/main" xmlns:r="http://schemas.openxmlformats.org/officeDocument/2006/relationships" xmlns:p="http://schemas.openxmlformats.org/presentationml/2006/main" type="blank" preserve="1">
   <p:cSld name="Title, 6 Content">
     <p:spTree>
       <p:nvGrpSpPr>
@@ -1120,14 +1315,15 @@
           </a:ln>
         </p:spPr>
         <p:txBody>
-          <a:bodyPr lIns="0" rIns="0" tIns="0" bIns="0" anchor="ctr">
+          <a:bodyPr lIns="0" tIns="0" rIns="0" bIns="0" anchor="ctr">
             <a:noAutofit/>
           </a:bodyPr>
+          <a:lstStyle/>
           <a:p>
             <a:pPr indent="0">
               <a:buNone/>
             </a:pPr>
-            <a:endParaRPr b="0" lang="en-US" sz="3800" spc="-1" strike="noStrike">
+            <a:endParaRPr lang="en-US" sz="3800" b="0" strike="noStrike" spc="-1">
               <a:solidFill>
                 <a:srgbClr val="000000"/>
               </a:solidFill>
@@ -1160,9 +1356,10 @@
           </a:ln>
         </p:spPr>
         <p:txBody>
-          <a:bodyPr lIns="0" rIns="0" tIns="0" bIns="0" anchor="t">
+          <a:bodyPr lIns="0" tIns="0" rIns="0" bIns="0" anchor="t">
             <a:normAutofit/>
           </a:bodyPr>
+          <a:lstStyle/>
           <a:p>
             <a:pPr indent="0">
               <a:lnSpc>
@@ -1173,7 +1370,7 @@
               </a:spcBef>
               <a:buNone/>
             </a:pPr>
-            <a:endParaRPr b="0" lang="en-US" sz="2800" spc="-1" strike="noStrike">
+            <a:endParaRPr lang="en-US" sz="2800" b="0" strike="noStrike" spc="-1">
               <a:solidFill>
                 <a:srgbClr val="404040"/>
               </a:solidFill>
@@ -1206,9 +1403,10 @@
           </a:ln>
         </p:spPr>
         <p:txBody>
-          <a:bodyPr lIns="0" rIns="0" tIns="0" bIns="0" anchor="t">
+          <a:bodyPr lIns="0" tIns="0" rIns="0" bIns="0" anchor="t">
             <a:normAutofit/>
           </a:bodyPr>
+          <a:lstStyle/>
           <a:p>
             <a:pPr indent="0">
               <a:lnSpc>
@@ -1219,7 +1417,7 @@
               </a:spcBef>
               <a:buNone/>
             </a:pPr>
-            <a:endParaRPr b="0" lang="en-US" sz="2800" spc="-1" strike="noStrike">
+            <a:endParaRPr lang="en-US" sz="2800" b="0" strike="noStrike" spc="-1">
               <a:solidFill>
                 <a:srgbClr val="404040"/>
               </a:solidFill>
@@ -1252,9 +1450,10 @@
           </a:ln>
         </p:spPr>
         <p:txBody>
-          <a:bodyPr lIns="0" rIns="0" tIns="0" bIns="0" anchor="t">
+          <a:bodyPr lIns="0" tIns="0" rIns="0" bIns="0" anchor="t">
             <a:normAutofit/>
           </a:bodyPr>
+          <a:lstStyle/>
           <a:p>
             <a:pPr indent="0">
               <a:lnSpc>
@@ -1265,7 +1464,7 @@
               </a:spcBef>
               <a:buNone/>
             </a:pPr>
-            <a:endParaRPr b="0" lang="en-US" sz="2800" spc="-1" strike="noStrike">
+            <a:endParaRPr lang="en-US" sz="2800" b="0" strike="noStrike" spc="-1">
               <a:solidFill>
                 <a:srgbClr val="404040"/>
               </a:solidFill>
@@ -1298,9 +1497,10 @@
           </a:ln>
         </p:spPr>
         <p:txBody>
-          <a:bodyPr lIns="0" rIns="0" tIns="0" bIns="0" anchor="t">
+          <a:bodyPr lIns="0" tIns="0" rIns="0" bIns="0" anchor="t">
             <a:normAutofit/>
           </a:bodyPr>
+          <a:lstStyle/>
           <a:p>
             <a:pPr indent="0">
               <a:lnSpc>
@@ -1311,7 +1511,7 @@
               </a:spcBef>
               <a:buNone/>
             </a:pPr>
-            <a:endParaRPr b="0" lang="en-US" sz="2800" spc="-1" strike="noStrike">
+            <a:endParaRPr lang="en-US" sz="2800" b="0" strike="noStrike" spc="-1">
               <a:solidFill>
                 <a:srgbClr val="404040"/>
               </a:solidFill>
@@ -1344,9 +1544,10 @@
           </a:ln>
         </p:spPr>
         <p:txBody>
-          <a:bodyPr lIns="0" rIns="0" tIns="0" bIns="0" anchor="t">
+          <a:bodyPr lIns="0" tIns="0" rIns="0" bIns="0" anchor="t">
             <a:normAutofit/>
           </a:bodyPr>
+          <a:lstStyle/>
           <a:p>
             <a:pPr indent="0">
               <a:lnSpc>
@@ -1357,7 +1558,7 @@
               </a:spcBef>
               <a:buNone/>
             </a:pPr>
-            <a:endParaRPr b="0" lang="en-US" sz="2800" spc="-1" strike="noStrike">
+            <a:endParaRPr lang="en-US" sz="2800" b="0" strike="noStrike" spc="-1">
               <a:solidFill>
                 <a:srgbClr val="404040"/>
               </a:solidFill>
@@ -1390,9 +1591,10 @@
           </a:ln>
         </p:spPr>
         <p:txBody>
-          <a:bodyPr lIns="0" rIns="0" tIns="0" bIns="0" anchor="t">
+          <a:bodyPr lIns="0" tIns="0" rIns="0" bIns="0" anchor="t">
             <a:normAutofit/>
           </a:bodyPr>
+          <a:lstStyle/>
           <a:p>
             <a:pPr indent="0">
               <a:lnSpc>
@@ -1403,7 +1605,7 @@
               </a:spcBef>
               <a:buNone/>
             </a:pPr>
-            <a:endParaRPr b="0" lang="en-US" sz="2800" spc="-1" strike="noStrike">
+            <a:endParaRPr lang="en-US" sz="2800" b="0" strike="noStrike" spc="-1">
               <a:solidFill>
                 <a:srgbClr val="404040"/>
               </a:solidFill>
@@ -1425,6 +1627,7 @@
         <p:spPr/>
         <p:txBody>
           <a:bodyPr/>
+          <a:lstStyle/>
           <a:p>
             <a:r>
               <a:t>Footer</a:t>
@@ -1445,20 +1648,25 @@
         <p:spPr/>
         <p:txBody>
           <a:bodyPr/>
+          <a:lstStyle/>
           <a:p>
             <a:fld id="{04EF4C93-4DB9-48C9-BEB2-4458A0306EBE}" type="slidenum">
-              <a:t>&lt;#&gt;</a:t>
+              <a:t>‹#›</a:t>
             </a:fld>
+            <a:endParaRPr/>
           </a:p>
         </p:txBody>
       </p:sp>
     </p:spTree>
   </p:cSld>
+  <p:clrMapOvr>
+    <a:masterClrMapping/>
+  </p:clrMapOvr>
 </p:sldLayout>
 </file>
 
 <file path=ppt/slideLayouts/slideLayout13.xml><?xml version="1.0" encoding="utf-8"?>
-<p:sldLayout xmlns:a="http://schemas.openxmlformats.org/drawingml/2006/main" xmlns:p="http://schemas.openxmlformats.org/presentationml/2006/main" xmlns:r="http://schemas.openxmlformats.org/officeDocument/2006/relationships" xmlns:p14="http://schemas.microsoft.com/office/powerpoint/2010/main" xmlns:p15="http://schemas.microsoft.com/office/powerpoint/2012/main" xmlns:mc="http://schemas.openxmlformats.org/markup-compatibility/2006" type="blank" preserve="1">
+<p:sldLayout xmlns:a="http://schemas.openxmlformats.org/drawingml/2006/main" xmlns:r="http://schemas.openxmlformats.org/officeDocument/2006/relationships" xmlns:p="http://schemas.openxmlformats.org/presentationml/2006/main" type="blank" preserve="1">
   <p:cSld name="Blank Slide">
     <p:spTree>
       <p:nvGrpSpPr>
@@ -1487,6 +1695,7 @@
         <p:spPr/>
         <p:txBody>
           <a:bodyPr/>
+          <a:lstStyle/>
           <a:p>
             <a:r>
               <a:t>Footer</a:t>
@@ -1507,20 +1716,25 @@
         <p:spPr/>
         <p:txBody>
           <a:bodyPr/>
+          <a:lstStyle/>
           <a:p>
             <a:fld id="{3F949A5F-0FD5-4ABB-942D-2950100476B0}" type="slidenum">
-              <a:t>&lt;#&gt;</a:t>
+              <a:t>‹#›</a:t>
             </a:fld>
+            <a:endParaRPr/>
           </a:p>
         </p:txBody>
       </p:sp>
     </p:spTree>
   </p:cSld>
+  <p:clrMapOvr>
+    <a:masterClrMapping/>
+  </p:clrMapOvr>
 </p:sldLayout>
 </file>
 
 <file path=ppt/slideLayouts/slideLayout14.xml><?xml version="1.0" encoding="utf-8"?>
-<p:sldLayout xmlns:a="http://schemas.openxmlformats.org/drawingml/2006/main" xmlns:p="http://schemas.openxmlformats.org/presentationml/2006/main" xmlns:r="http://schemas.openxmlformats.org/officeDocument/2006/relationships" xmlns:p14="http://schemas.microsoft.com/office/powerpoint/2010/main" xmlns:p15="http://schemas.microsoft.com/office/powerpoint/2012/main" xmlns:mc="http://schemas.openxmlformats.org/markup-compatibility/2006" type="tx" preserve="1">
+<p:sldLayout xmlns:a="http://schemas.openxmlformats.org/drawingml/2006/main" xmlns:r="http://schemas.openxmlformats.org/officeDocument/2006/relationships" xmlns:p="http://schemas.openxmlformats.org/presentationml/2006/main" type="tx" preserve="1">
   <p:cSld name="Title Slide">
     <p:spTree>
       <p:nvGrpSpPr>
@@ -1560,14 +1774,15 @@
           </a:ln>
         </p:spPr>
         <p:txBody>
-          <a:bodyPr lIns="0" rIns="0" tIns="0" bIns="0" anchor="ctr">
+          <a:bodyPr lIns="0" tIns="0" rIns="0" bIns="0" anchor="ctr">
             <a:noAutofit/>
           </a:bodyPr>
+          <a:lstStyle/>
           <a:p>
             <a:pPr indent="0">
               <a:buNone/>
             </a:pPr>
-            <a:endParaRPr b="0" lang="en-US" sz="3800" spc="-1" strike="noStrike">
+            <a:endParaRPr lang="en-US" sz="3800" b="0" strike="noStrike" spc="-1">
               <a:solidFill>
                 <a:srgbClr val="000000"/>
               </a:solidFill>
@@ -1600,14 +1815,15 @@
           </a:ln>
         </p:spPr>
         <p:txBody>
-          <a:bodyPr lIns="0" rIns="0" tIns="0" bIns="0" anchor="ctr">
+          <a:bodyPr lIns="0" tIns="0" rIns="0" bIns="0" anchor="ctr">
             <a:noAutofit/>
           </a:bodyPr>
+          <a:lstStyle/>
           <a:p>
             <a:pPr indent="0" algn="ctr">
               <a:buNone/>
             </a:pPr>
-            <a:endParaRPr b="0" lang="en-US" sz="3200" spc="-1" strike="noStrike">
+            <a:endParaRPr lang="en-US" sz="3200" b="0" strike="noStrike" spc="-1">
               <a:solidFill>
                 <a:srgbClr val="000000"/>
               </a:solidFill>
@@ -1629,6 +1845,7 @@
         <p:spPr/>
         <p:txBody>
           <a:bodyPr/>
+          <a:lstStyle/>
           <a:p>
             <a:r>
               <a:t>Footer</a:t>
@@ -1649,20 +1866,25 @@
         <p:spPr/>
         <p:txBody>
           <a:bodyPr/>
+          <a:lstStyle/>
           <a:p>
             <a:fld id="{8F24CF87-3F1C-47F7-9614-99D5331767BF}" type="slidenum">
-              <a:t>&lt;#&gt;</a:t>
+              <a:t>‹#›</a:t>
             </a:fld>
+            <a:endParaRPr/>
           </a:p>
         </p:txBody>
       </p:sp>
     </p:spTree>
   </p:cSld>
+  <p:clrMapOvr>
+    <a:masterClrMapping/>
+  </p:clrMapOvr>
 </p:sldLayout>
 </file>
 
 <file path=ppt/slideLayouts/slideLayout15.xml><?xml version="1.0" encoding="utf-8"?>
-<p:sldLayout xmlns:a="http://schemas.openxmlformats.org/drawingml/2006/main" xmlns:p="http://schemas.openxmlformats.org/presentationml/2006/main" xmlns:r="http://schemas.openxmlformats.org/officeDocument/2006/relationships" xmlns:p14="http://schemas.microsoft.com/office/powerpoint/2010/main" xmlns:p15="http://schemas.microsoft.com/office/powerpoint/2012/main" xmlns:mc="http://schemas.openxmlformats.org/markup-compatibility/2006" type="obj" preserve="1">
+<p:sldLayout xmlns:a="http://schemas.openxmlformats.org/drawingml/2006/main" xmlns:r="http://schemas.openxmlformats.org/officeDocument/2006/relationships" xmlns:p="http://schemas.openxmlformats.org/presentationml/2006/main" type="obj" preserve="1">
   <p:cSld name="Title, Content">
     <p:spTree>
       <p:nvGrpSpPr>
@@ -1702,14 +1924,15 @@
           </a:ln>
         </p:spPr>
         <p:txBody>
-          <a:bodyPr lIns="0" rIns="0" tIns="0" bIns="0" anchor="ctr">
+          <a:bodyPr lIns="0" tIns="0" rIns="0" bIns="0" anchor="ctr">
             <a:noAutofit/>
           </a:bodyPr>
+          <a:lstStyle/>
           <a:p>
             <a:pPr indent="0">
               <a:buNone/>
             </a:pPr>
-            <a:endParaRPr b="0" lang="en-US" sz="3800" spc="-1" strike="noStrike">
+            <a:endParaRPr lang="en-US" sz="3800" b="0" strike="noStrike" spc="-1">
               <a:solidFill>
                 <a:srgbClr val="000000"/>
               </a:solidFill>
@@ -1742,9 +1965,10 @@
           </a:ln>
         </p:spPr>
         <p:txBody>
-          <a:bodyPr lIns="0" rIns="0" tIns="0" bIns="0" anchor="t">
+          <a:bodyPr lIns="0" tIns="0" rIns="0" bIns="0" anchor="t">
             <a:normAutofit/>
           </a:bodyPr>
+          <a:lstStyle/>
           <a:p>
             <a:pPr indent="0">
               <a:lnSpc>
@@ -1755,7 +1979,7 @@
               </a:spcBef>
               <a:buNone/>
             </a:pPr>
-            <a:endParaRPr b="0" lang="en-US" sz="2800" spc="-1" strike="noStrike">
+            <a:endParaRPr lang="en-US" sz="2800" b="0" strike="noStrike" spc="-1">
               <a:solidFill>
                 <a:srgbClr val="404040"/>
               </a:solidFill>
@@ -1777,6 +2001,7 @@
         <p:spPr/>
         <p:txBody>
           <a:bodyPr/>
+          <a:lstStyle/>
           <a:p>
             <a:r>
               <a:t>Footer</a:t>
@@ -1797,20 +2022,25 @@
         <p:spPr/>
         <p:txBody>
           <a:bodyPr/>
+          <a:lstStyle/>
           <a:p>
             <a:fld id="{25571BE8-FEBD-429A-B23C-A0944F8D67E2}" type="slidenum">
-              <a:t>&lt;#&gt;</a:t>
+              <a:t>‹#›</a:t>
             </a:fld>
+            <a:endParaRPr/>
           </a:p>
         </p:txBody>
       </p:sp>
     </p:spTree>
   </p:cSld>
+  <p:clrMapOvr>
+    <a:masterClrMapping/>
+  </p:clrMapOvr>
 </p:sldLayout>
 </file>
 
 <file path=ppt/slideLayouts/slideLayout16.xml><?xml version="1.0" encoding="utf-8"?>
-<p:sldLayout xmlns:a="http://schemas.openxmlformats.org/drawingml/2006/main" xmlns:p="http://schemas.openxmlformats.org/presentationml/2006/main" xmlns:r="http://schemas.openxmlformats.org/officeDocument/2006/relationships" xmlns:p14="http://schemas.microsoft.com/office/powerpoint/2010/main" xmlns:p15="http://schemas.microsoft.com/office/powerpoint/2012/main" xmlns:mc="http://schemas.openxmlformats.org/markup-compatibility/2006" type="twoObj" preserve="1">
+<p:sldLayout xmlns:a="http://schemas.openxmlformats.org/drawingml/2006/main" xmlns:r="http://schemas.openxmlformats.org/officeDocument/2006/relationships" xmlns:p="http://schemas.openxmlformats.org/presentationml/2006/main" type="twoObj" preserve="1">
   <p:cSld name="Title, 2 Content">
     <p:spTree>
       <p:nvGrpSpPr>
@@ -1850,14 +2080,15 @@
           </a:ln>
         </p:spPr>
         <p:txBody>
-          <a:bodyPr lIns="0" rIns="0" tIns="0" bIns="0" anchor="ctr">
+          <a:bodyPr lIns="0" tIns="0" rIns="0" bIns="0" anchor="ctr">
             <a:noAutofit/>
           </a:bodyPr>
+          <a:lstStyle/>
           <a:p>
             <a:pPr indent="0">
               <a:buNone/>
             </a:pPr>
-            <a:endParaRPr b="0" lang="en-US" sz="3800" spc="-1" strike="noStrike">
+            <a:endParaRPr lang="en-US" sz="3800" b="0" strike="noStrike" spc="-1">
               <a:solidFill>
                 <a:srgbClr val="000000"/>
               </a:solidFill>
@@ -1890,9 +2121,10 @@
           </a:ln>
         </p:spPr>
         <p:txBody>
-          <a:bodyPr lIns="0" rIns="0" tIns="0" bIns="0" anchor="t">
+          <a:bodyPr lIns="0" tIns="0" rIns="0" bIns="0" anchor="t">
             <a:normAutofit/>
           </a:bodyPr>
+          <a:lstStyle/>
           <a:p>
             <a:pPr indent="0">
               <a:lnSpc>
@@ -1903,7 +2135,7 @@
               </a:spcBef>
               <a:buNone/>
             </a:pPr>
-            <a:endParaRPr b="0" lang="en-US" sz="2800" spc="-1" strike="noStrike">
+            <a:endParaRPr lang="en-US" sz="2800" b="0" strike="noStrike" spc="-1">
               <a:solidFill>
                 <a:srgbClr val="404040"/>
               </a:solidFill>
@@ -1936,9 +2168,10 @@
           </a:ln>
         </p:spPr>
         <p:txBody>
-          <a:bodyPr lIns="0" rIns="0" tIns="0" bIns="0" anchor="t">
+          <a:bodyPr lIns="0" tIns="0" rIns="0" bIns="0" anchor="t">
             <a:normAutofit/>
           </a:bodyPr>
+          <a:lstStyle/>
           <a:p>
             <a:pPr indent="0">
               <a:lnSpc>
@@ -1949,7 +2182,7 @@
               </a:spcBef>
               <a:buNone/>
             </a:pPr>
-            <a:endParaRPr b="0" lang="en-US" sz="2800" spc="-1" strike="noStrike">
+            <a:endParaRPr lang="en-US" sz="2800" b="0" strike="noStrike" spc="-1">
               <a:solidFill>
                 <a:srgbClr val="404040"/>
               </a:solidFill>
@@ -1971,6 +2204,7 @@
         <p:spPr/>
         <p:txBody>
           <a:bodyPr/>
+          <a:lstStyle/>
           <a:p>
             <a:r>
               <a:t>Footer</a:t>
@@ -1991,20 +2225,25 @@
         <p:spPr/>
         <p:txBody>
           <a:bodyPr/>
+          <a:lstStyle/>
           <a:p>
             <a:fld id="{1962E12A-6346-4649-A587-0BD9F250F9D4}" type="slidenum">
-              <a:t>&lt;#&gt;</a:t>
+              <a:t>‹#›</a:t>
             </a:fld>
+            <a:endParaRPr/>
           </a:p>
         </p:txBody>
       </p:sp>
     </p:spTree>
   </p:cSld>
+  <p:clrMapOvr>
+    <a:masterClrMapping/>
+  </p:clrMapOvr>
 </p:sldLayout>
 </file>
 
 <file path=ppt/slideLayouts/slideLayout17.xml><?xml version="1.0" encoding="utf-8"?>
-<p:sldLayout xmlns:a="http://schemas.openxmlformats.org/drawingml/2006/main" xmlns:p="http://schemas.openxmlformats.org/presentationml/2006/main" xmlns:r="http://schemas.openxmlformats.org/officeDocument/2006/relationships" xmlns:p14="http://schemas.microsoft.com/office/powerpoint/2010/main" xmlns:p15="http://schemas.microsoft.com/office/powerpoint/2012/main" xmlns:mc="http://schemas.openxmlformats.org/markup-compatibility/2006" type="titleOnly" preserve="1">
+<p:sldLayout xmlns:a="http://schemas.openxmlformats.org/drawingml/2006/main" xmlns:r="http://schemas.openxmlformats.org/officeDocument/2006/relationships" xmlns:p="http://schemas.openxmlformats.org/presentationml/2006/main" type="titleOnly" preserve="1">
   <p:cSld name="Title Only">
     <p:spTree>
       <p:nvGrpSpPr>
@@ -2044,14 +2283,15 @@
           </a:ln>
         </p:spPr>
         <p:txBody>
-          <a:bodyPr lIns="0" rIns="0" tIns="0" bIns="0" anchor="ctr">
+          <a:bodyPr lIns="0" tIns="0" rIns="0" bIns="0" anchor="ctr">
             <a:noAutofit/>
           </a:bodyPr>
+          <a:lstStyle/>
           <a:p>
             <a:pPr indent="0">
               <a:buNone/>
             </a:pPr>
-            <a:endParaRPr b="0" lang="en-US" sz="3800" spc="-1" strike="noStrike">
+            <a:endParaRPr lang="en-US" sz="3800" b="0" strike="noStrike" spc="-1">
               <a:solidFill>
                 <a:srgbClr val="000000"/>
               </a:solidFill>
@@ -2073,6 +2313,7 @@
         <p:spPr/>
         <p:txBody>
           <a:bodyPr/>
+          <a:lstStyle/>
           <a:p>
             <a:r>
               <a:t>Footer</a:t>
@@ -2093,20 +2334,25 @@
         <p:spPr/>
         <p:txBody>
           <a:bodyPr/>
+          <a:lstStyle/>
           <a:p>
             <a:fld id="{77E1A237-F8A2-4BE2-902D-38AA291F2483}" type="slidenum">
-              <a:t>&lt;#&gt;</a:t>
+              <a:t>‹#›</a:t>
             </a:fld>
+            <a:endParaRPr/>
           </a:p>
         </p:txBody>
       </p:sp>
     </p:spTree>
   </p:cSld>
+  <p:clrMapOvr>
+    <a:masterClrMapping/>
+  </p:clrMapOvr>
 </p:sldLayout>
 </file>
 
 <file path=ppt/slideLayouts/slideLayout18.xml><?xml version="1.0" encoding="utf-8"?>
-<p:sldLayout xmlns:a="http://schemas.openxmlformats.org/drawingml/2006/main" xmlns:p="http://schemas.openxmlformats.org/presentationml/2006/main" xmlns:r="http://schemas.openxmlformats.org/officeDocument/2006/relationships" xmlns:p14="http://schemas.microsoft.com/office/powerpoint/2010/main" xmlns:p15="http://schemas.microsoft.com/office/powerpoint/2012/main" xmlns:mc="http://schemas.openxmlformats.org/markup-compatibility/2006" type="objOnly" preserve="1">
+<p:sldLayout xmlns:a="http://schemas.openxmlformats.org/drawingml/2006/main" xmlns:r="http://schemas.openxmlformats.org/officeDocument/2006/relationships" xmlns:p="http://schemas.openxmlformats.org/presentationml/2006/main" type="objOnly" preserve="1">
   <p:cSld name="Centered Text">
     <p:spTree>
       <p:nvGrpSpPr>
@@ -2146,12 +2392,13 @@
           </a:ln>
         </p:spPr>
         <p:txBody>
-          <a:bodyPr lIns="0" rIns="0" tIns="0" bIns="0" anchor="ctr">
+          <a:bodyPr lIns="0" tIns="0" rIns="0" bIns="0" anchor="ctr">
             <a:noAutofit/>
           </a:bodyPr>
+          <a:lstStyle/>
           <a:p>
             <a:pPr algn="ctr"/>
-            <a:endParaRPr b="0" lang="en-US" sz="3200" spc="-1" strike="noStrike">
+            <a:endParaRPr lang="en-US" sz="3200" b="0" strike="noStrike" spc="-1">
               <a:solidFill>
                 <a:srgbClr val="000000"/>
               </a:solidFill>
@@ -2173,6 +2420,7 @@
         <p:spPr/>
         <p:txBody>
           <a:bodyPr/>
+          <a:lstStyle/>
           <a:p>
             <a:r>
               <a:t>Footer</a:t>
@@ -2193,20 +2441,25 @@
         <p:spPr/>
         <p:txBody>
           <a:bodyPr/>
+          <a:lstStyle/>
           <a:p>
             <a:fld id="{D60D97C4-4781-4F0F-89E0-6E4E320DF791}" type="slidenum">
-              <a:t>&lt;#&gt;</a:t>
+              <a:t>‹#›</a:t>
             </a:fld>
+            <a:endParaRPr/>
           </a:p>
         </p:txBody>
       </p:sp>
     </p:spTree>
   </p:cSld>
+  <p:clrMapOvr>
+    <a:masterClrMapping/>
+  </p:clrMapOvr>
 </p:sldLayout>
 </file>
 
 <file path=ppt/slideLayouts/slideLayout19.xml><?xml version="1.0" encoding="utf-8"?>
-<p:sldLayout xmlns:a="http://schemas.openxmlformats.org/drawingml/2006/main" xmlns:p="http://schemas.openxmlformats.org/presentationml/2006/main" xmlns:r="http://schemas.openxmlformats.org/officeDocument/2006/relationships" xmlns:p14="http://schemas.microsoft.com/office/powerpoint/2010/main" xmlns:p15="http://schemas.microsoft.com/office/powerpoint/2012/main" xmlns:mc="http://schemas.openxmlformats.org/markup-compatibility/2006" type="twoObjAndObj" preserve="1">
+<p:sldLayout xmlns:a="http://schemas.openxmlformats.org/drawingml/2006/main" xmlns:r="http://schemas.openxmlformats.org/officeDocument/2006/relationships" xmlns:p="http://schemas.openxmlformats.org/presentationml/2006/main" type="twoObjAndObj" preserve="1">
   <p:cSld name="Title, 2 Content and Content">
     <p:spTree>
       <p:nvGrpSpPr>
@@ -2246,14 +2499,15 @@
           </a:ln>
         </p:spPr>
         <p:txBody>
-          <a:bodyPr lIns="0" rIns="0" tIns="0" bIns="0" anchor="ctr">
+          <a:bodyPr lIns="0" tIns="0" rIns="0" bIns="0" anchor="ctr">
             <a:noAutofit/>
           </a:bodyPr>
+          <a:lstStyle/>
           <a:p>
             <a:pPr indent="0">
               <a:buNone/>
             </a:pPr>
-            <a:endParaRPr b="0" lang="en-US" sz="3800" spc="-1" strike="noStrike">
+            <a:endParaRPr lang="en-US" sz="3800" b="0" strike="noStrike" spc="-1">
               <a:solidFill>
                 <a:srgbClr val="000000"/>
               </a:solidFill>
@@ -2286,9 +2540,10 @@
           </a:ln>
         </p:spPr>
         <p:txBody>
-          <a:bodyPr lIns="0" rIns="0" tIns="0" bIns="0" anchor="t">
+          <a:bodyPr lIns="0" tIns="0" rIns="0" bIns="0" anchor="t">
             <a:normAutofit/>
           </a:bodyPr>
+          <a:lstStyle/>
           <a:p>
             <a:pPr indent="0">
               <a:lnSpc>
@@ -2299,7 +2554,7 @@
               </a:spcBef>
               <a:buNone/>
             </a:pPr>
-            <a:endParaRPr b="0" lang="en-US" sz="2800" spc="-1" strike="noStrike">
+            <a:endParaRPr lang="en-US" sz="2800" b="0" strike="noStrike" spc="-1">
               <a:solidFill>
                 <a:srgbClr val="404040"/>
               </a:solidFill>
@@ -2332,9 +2587,10 @@
           </a:ln>
         </p:spPr>
         <p:txBody>
-          <a:bodyPr lIns="0" rIns="0" tIns="0" bIns="0" anchor="t">
+          <a:bodyPr lIns="0" tIns="0" rIns="0" bIns="0" anchor="t">
             <a:normAutofit/>
           </a:bodyPr>
+          <a:lstStyle/>
           <a:p>
             <a:pPr indent="0">
               <a:lnSpc>
@@ -2345,7 +2601,7 @@
               </a:spcBef>
               <a:buNone/>
             </a:pPr>
-            <a:endParaRPr b="0" lang="en-US" sz="2800" spc="-1" strike="noStrike">
+            <a:endParaRPr lang="en-US" sz="2800" b="0" strike="noStrike" spc="-1">
               <a:solidFill>
                 <a:srgbClr val="404040"/>
               </a:solidFill>
@@ -2378,9 +2634,10 @@
           </a:ln>
         </p:spPr>
         <p:txBody>
-          <a:bodyPr lIns="0" rIns="0" tIns="0" bIns="0" anchor="t">
+          <a:bodyPr lIns="0" tIns="0" rIns="0" bIns="0" anchor="t">
             <a:normAutofit/>
           </a:bodyPr>
+          <a:lstStyle/>
           <a:p>
             <a:pPr indent="0">
               <a:lnSpc>
@@ -2391,7 +2648,7 @@
               </a:spcBef>
               <a:buNone/>
             </a:pPr>
-            <a:endParaRPr b="0" lang="en-US" sz="2800" spc="-1" strike="noStrike">
+            <a:endParaRPr lang="en-US" sz="2800" b="0" strike="noStrike" spc="-1">
               <a:solidFill>
                 <a:srgbClr val="404040"/>
               </a:solidFill>
@@ -2413,6 +2670,7 @@
         <p:spPr/>
         <p:txBody>
           <a:bodyPr/>
+          <a:lstStyle/>
           <a:p>
             <a:r>
               <a:t>Footer</a:t>
@@ -2433,20 +2691,25 @@
         <p:spPr/>
         <p:txBody>
           <a:bodyPr/>
+          <a:lstStyle/>
           <a:p>
             <a:fld id="{C8F5A616-D2A2-401E-A578-142F11C92D6A}" type="slidenum">
-              <a:t>&lt;#&gt;</a:t>
+              <a:t>‹#›</a:t>
             </a:fld>
+            <a:endParaRPr/>
           </a:p>
         </p:txBody>
       </p:sp>
     </p:spTree>
   </p:cSld>
+  <p:clrMapOvr>
+    <a:masterClrMapping/>
+  </p:clrMapOvr>
 </p:sldLayout>
 </file>
 
 <file path=ppt/slideLayouts/slideLayout2.xml><?xml version="1.0" encoding="utf-8"?>
-<p:sldLayout xmlns:a="http://schemas.openxmlformats.org/drawingml/2006/main" xmlns:p="http://schemas.openxmlformats.org/presentationml/2006/main" xmlns:r="http://schemas.openxmlformats.org/officeDocument/2006/relationships" xmlns:p14="http://schemas.microsoft.com/office/powerpoint/2010/main" xmlns:p15="http://schemas.microsoft.com/office/powerpoint/2012/main" xmlns:mc="http://schemas.openxmlformats.org/markup-compatibility/2006" type="tx" preserve="1">
+<p:sldLayout xmlns:a="http://schemas.openxmlformats.org/drawingml/2006/main" xmlns:r="http://schemas.openxmlformats.org/officeDocument/2006/relationships" xmlns:p="http://schemas.openxmlformats.org/presentationml/2006/main" type="tx" preserve="1">
   <p:cSld name="Title Slide">
     <p:spTree>
       <p:nvGrpSpPr>
@@ -2486,14 +2749,15 @@
           </a:ln>
         </p:spPr>
         <p:txBody>
-          <a:bodyPr lIns="0" rIns="0" tIns="0" bIns="0" anchor="ctr">
+          <a:bodyPr lIns="0" tIns="0" rIns="0" bIns="0" anchor="ctr">
             <a:noAutofit/>
           </a:bodyPr>
+          <a:lstStyle/>
           <a:p>
             <a:pPr indent="0">
               <a:buNone/>
             </a:pPr>
-            <a:endParaRPr b="0" lang="en-US" sz="3800" spc="-1" strike="noStrike">
+            <a:endParaRPr lang="en-US" sz="3800" b="0" strike="noStrike" spc="-1">
               <a:solidFill>
                 <a:srgbClr val="000000"/>
               </a:solidFill>
@@ -2526,14 +2790,15 @@
           </a:ln>
         </p:spPr>
         <p:txBody>
-          <a:bodyPr lIns="0" rIns="0" tIns="0" bIns="0" anchor="ctr">
+          <a:bodyPr lIns="0" tIns="0" rIns="0" bIns="0" anchor="ctr">
             <a:noAutofit/>
           </a:bodyPr>
+          <a:lstStyle/>
           <a:p>
             <a:pPr indent="0" algn="ctr">
               <a:buNone/>
             </a:pPr>
-            <a:endParaRPr b="0" lang="en-US" sz="3200" spc="-1" strike="noStrike">
+            <a:endParaRPr lang="en-US" sz="3200" b="0" strike="noStrike" spc="-1">
               <a:solidFill>
                 <a:srgbClr val="000000"/>
               </a:solidFill>
@@ -2555,6 +2820,7 @@
         <p:spPr/>
         <p:txBody>
           <a:bodyPr/>
+          <a:lstStyle/>
           <a:p>
             <a:r>
               <a:t>Footer</a:t>
@@ -2564,7 +2830,7 @@
       </p:sp>
       <p:sp>
         <p:nvSpPr>
-          <p:cNvPr id="5" name="PlaceHolder 4"/>
+          <p:cNvPr id="2" name="PlaceHolder 4"/>
           <p:cNvSpPr>
             <a:spLocks noGrp="1"/>
           </p:cNvSpPr>
@@ -2575,20 +2841,25 @@
         <p:spPr/>
         <p:txBody>
           <a:bodyPr/>
+          <a:lstStyle/>
           <a:p>
             <a:fld id="{1CBF03C6-5684-4F56-84ED-270BFEE346A6}" type="slidenum">
-              <a:t>&lt;#&gt;</a:t>
+              <a:t>‹#›</a:t>
             </a:fld>
+            <a:endParaRPr/>
           </a:p>
         </p:txBody>
       </p:sp>
     </p:spTree>
   </p:cSld>
+  <p:clrMapOvr>
+    <a:masterClrMapping/>
+  </p:clrMapOvr>
 </p:sldLayout>
 </file>
 
 <file path=ppt/slideLayouts/slideLayout20.xml><?xml version="1.0" encoding="utf-8"?>
-<p:sldLayout xmlns:a="http://schemas.openxmlformats.org/drawingml/2006/main" xmlns:p="http://schemas.openxmlformats.org/presentationml/2006/main" xmlns:r="http://schemas.openxmlformats.org/officeDocument/2006/relationships" xmlns:p14="http://schemas.microsoft.com/office/powerpoint/2010/main" xmlns:p15="http://schemas.microsoft.com/office/powerpoint/2012/main" xmlns:mc="http://schemas.openxmlformats.org/markup-compatibility/2006" type="objAndTwoObj" preserve="1">
+<p:sldLayout xmlns:a="http://schemas.openxmlformats.org/drawingml/2006/main" xmlns:r="http://schemas.openxmlformats.org/officeDocument/2006/relationships" xmlns:p="http://schemas.openxmlformats.org/presentationml/2006/main" type="objAndTwoObj" preserve="1">
   <p:cSld name="Title Content and 2 Content">
     <p:spTree>
       <p:nvGrpSpPr>
@@ -2628,14 +2899,15 @@
           </a:ln>
         </p:spPr>
         <p:txBody>
-          <a:bodyPr lIns="0" rIns="0" tIns="0" bIns="0" anchor="ctr">
+          <a:bodyPr lIns="0" tIns="0" rIns="0" bIns="0" anchor="ctr">
             <a:noAutofit/>
           </a:bodyPr>
+          <a:lstStyle/>
           <a:p>
             <a:pPr indent="0">
               <a:buNone/>
             </a:pPr>
-            <a:endParaRPr b="0" lang="en-US" sz="3800" spc="-1" strike="noStrike">
+            <a:endParaRPr lang="en-US" sz="3800" b="0" strike="noStrike" spc="-1">
               <a:solidFill>
                 <a:srgbClr val="000000"/>
               </a:solidFill>
@@ -2668,9 +2940,10 @@
           </a:ln>
         </p:spPr>
         <p:txBody>
-          <a:bodyPr lIns="0" rIns="0" tIns="0" bIns="0" anchor="t">
+          <a:bodyPr lIns="0" tIns="0" rIns="0" bIns="0" anchor="t">
             <a:normAutofit/>
           </a:bodyPr>
+          <a:lstStyle/>
           <a:p>
             <a:pPr indent="0">
               <a:lnSpc>
@@ -2681,7 +2954,7 @@
               </a:spcBef>
               <a:buNone/>
             </a:pPr>
-            <a:endParaRPr b="0" lang="en-US" sz="2800" spc="-1" strike="noStrike">
+            <a:endParaRPr lang="en-US" sz="2800" b="0" strike="noStrike" spc="-1">
               <a:solidFill>
                 <a:srgbClr val="404040"/>
               </a:solidFill>
@@ -2714,9 +2987,10 @@
           </a:ln>
         </p:spPr>
         <p:txBody>
-          <a:bodyPr lIns="0" rIns="0" tIns="0" bIns="0" anchor="t">
+          <a:bodyPr lIns="0" tIns="0" rIns="0" bIns="0" anchor="t">
             <a:normAutofit/>
           </a:bodyPr>
+          <a:lstStyle/>
           <a:p>
             <a:pPr indent="0">
               <a:lnSpc>
@@ -2727,7 +3001,7 @@
               </a:spcBef>
               <a:buNone/>
             </a:pPr>
-            <a:endParaRPr b="0" lang="en-US" sz="2800" spc="-1" strike="noStrike">
+            <a:endParaRPr lang="en-US" sz="2800" b="0" strike="noStrike" spc="-1">
               <a:solidFill>
                 <a:srgbClr val="404040"/>
               </a:solidFill>
@@ -2760,9 +3034,10 @@
           </a:ln>
         </p:spPr>
         <p:txBody>
-          <a:bodyPr lIns="0" rIns="0" tIns="0" bIns="0" anchor="t">
+          <a:bodyPr lIns="0" tIns="0" rIns="0" bIns="0" anchor="t">
             <a:normAutofit/>
           </a:bodyPr>
+          <a:lstStyle/>
           <a:p>
             <a:pPr indent="0">
               <a:lnSpc>
@@ -2773,7 +3048,7 @@
               </a:spcBef>
               <a:buNone/>
             </a:pPr>
-            <a:endParaRPr b="0" lang="en-US" sz="2800" spc="-1" strike="noStrike">
+            <a:endParaRPr lang="en-US" sz="2800" b="0" strike="noStrike" spc="-1">
               <a:solidFill>
                 <a:srgbClr val="404040"/>
               </a:solidFill>
@@ -2795,6 +3070,7 @@
         <p:spPr/>
         <p:txBody>
           <a:bodyPr/>
+          <a:lstStyle/>
           <a:p>
             <a:r>
               <a:t>Footer</a:t>
@@ -2815,20 +3091,25 @@
         <p:spPr/>
         <p:txBody>
           <a:bodyPr/>
+          <a:lstStyle/>
           <a:p>
             <a:fld id="{22891106-EA89-4809-91FA-67D0019C17A6}" type="slidenum">
-              <a:t>&lt;#&gt;</a:t>
+              <a:t>‹#›</a:t>
             </a:fld>
+            <a:endParaRPr/>
           </a:p>
         </p:txBody>
       </p:sp>
     </p:spTree>
   </p:cSld>
+  <p:clrMapOvr>
+    <a:masterClrMapping/>
+  </p:clrMapOvr>
 </p:sldLayout>
 </file>
 
 <file path=ppt/slideLayouts/slideLayout21.xml><?xml version="1.0" encoding="utf-8"?>
-<p:sldLayout xmlns:a="http://schemas.openxmlformats.org/drawingml/2006/main" xmlns:p="http://schemas.openxmlformats.org/presentationml/2006/main" xmlns:r="http://schemas.openxmlformats.org/officeDocument/2006/relationships" xmlns:p14="http://schemas.microsoft.com/office/powerpoint/2010/main" xmlns:p15="http://schemas.microsoft.com/office/powerpoint/2012/main" xmlns:mc="http://schemas.openxmlformats.org/markup-compatibility/2006" type="twoObjOverTx" preserve="1">
+<p:sldLayout xmlns:a="http://schemas.openxmlformats.org/drawingml/2006/main" xmlns:r="http://schemas.openxmlformats.org/officeDocument/2006/relationships" xmlns:p="http://schemas.openxmlformats.org/presentationml/2006/main" type="twoObjOverTx" preserve="1">
   <p:cSld name="Title, 2 Content over Content">
     <p:spTree>
       <p:nvGrpSpPr>
@@ -2868,14 +3149,15 @@
           </a:ln>
         </p:spPr>
         <p:txBody>
-          <a:bodyPr lIns="0" rIns="0" tIns="0" bIns="0" anchor="ctr">
+          <a:bodyPr lIns="0" tIns="0" rIns="0" bIns="0" anchor="ctr">
             <a:noAutofit/>
           </a:bodyPr>
+          <a:lstStyle/>
           <a:p>
             <a:pPr indent="0">
               <a:buNone/>
             </a:pPr>
-            <a:endParaRPr b="0" lang="en-US" sz="3800" spc="-1" strike="noStrike">
+            <a:endParaRPr lang="en-US" sz="3800" b="0" strike="noStrike" spc="-1">
               <a:solidFill>
                 <a:srgbClr val="000000"/>
               </a:solidFill>
@@ -2908,9 +3190,10 @@
           </a:ln>
         </p:spPr>
         <p:txBody>
-          <a:bodyPr lIns="0" rIns="0" tIns="0" bIns="0" anchor="t">
+          <a:bodyPr lIns="0" tIns="0" rIns="0" bIns="0" anchor="t">
             <a:normAutofit/>
           </a:bodyPr>
+          <a:lstStyle/>
           <a:p>
             <a:pPr indent="0">
               <a:lnSpc>
@@ -2921,7 +3204,7 @@
               </a:spcBef>
               <a:buNone/>
             </a:pPr>
-            <a:endParaRPr b="0" lang="en-US" sz="2800" spc="-1" strike="noStrike">
+            <a:endParaRPr lang="en-US" sz="2800" b="0" strike="noStrike" spc="-1">
               <a:solidFill>
                 <a:srgbClr val="404040"/>
               </a:solidFill>
@@ -2954,9 +3237,10 @@
           </a:ln>
         </p:spPr>
         <p:txBody>
-          <a:bodyPr lIns="0" rIns="0" tIns="0" bIns="0" anchor="t">
+          <a:bodyPr lIns="0" tIns="0" rIns="0" bIns="0" anchor="t">
             <a:normAutofit/>
           </a:bodyPr>
+          <a:lstStyle/>
           <a:p>
             <a:pPr indent="0">
               <a:lnSpc>
@@ -2967,7 +3251,7 @@
               </a:spcBef>
               <a:buNone/>
             </a:pPr>
-            <a:endParaRPr b="0" lang="en-US" sz="2800" spc="-1" strike="noStrike">
+            <a:endParaRPr lang="en-US" sz="2800" b="0" strike="noStrike" spc="-1">
               <a:solidFill>
                 <a:srgbClr val="404040"/>
               </a:solidFill>
@@ -3000,9 +3284,10 @@
           </a:ln>
         </p:spPr>
         <p:txBody>
-          <a:bodyPr lIns="0" rIns="0" tIns="0" bIns="0" anchor="t">
+          <a:bodyPr lIns="0" tIns="0" rIns="0" bIns="0" anchor="t">
             <a:normAutofit/>
           </a:bodyPr>
+          <a:lstStyle/>
           <a:p>
             <a:pPr indent="0">
               <a:lnSpc>
@@ -3013,7 +3298,7 @@
               </a:spcBef>
               <a:buNone/>
             </a:pPr>
-            <a:endParaRPr b="0" lang="en-US" sz="2800" spc="-1" strike="noStrike">
+            <a:endParaRPr lang="en-US" sz="2800" b="0" strike="noStrike" spc="-1">
               <a:solidFill>
                 <a:srgbClr val="404040"/>
               </a:solidFill>
@@ -3035,6 +3320,7 @@
         <p:spPr/>
         <p:txBody>
           <a:bodyPr/>
+          <a:lstStyle/>
           <a:p>
             <a:r>
               <a:t>Footer</a:t>
@@ -3055,20 +3341,25 @@
         <p:spPr/>
         <p:txBody>
           <a:bodyPr/>
+          <a:lstStyle/>
           <a:p>
             <a:fld id="{45FBA0D2-D43F-4146-9871-9A3621607781}" type="slidenum">
-              <a:t>&lt;#&gt;</a:t>
+              <a:t>‹#›</a:t>
             </a:fld>
+            <a:endParaRPr/>
           </a:p>
         </p:txBody>
       </p:sp>
     </p:spTree>
   </p:cSld>
+  <p:clrMapOvr>
+    <a:masterClrMapping/>
+  </p:clrMapOvr>
 </p:sldLayout>
 </file>
 
 <file path=ppt/slideLayouts/slideLayout22.xml><?xml version="1.0" encoding="utf-8"?>
-<p:sldLayout xmlns:a="http://schemas.openxmlformats.org/drawingml/2006/main" xmlns:p="http://schemas.openxmlformats.org/presentationml/2006/main" xmlns:r="http://schemas.openxmlformats.org/officeDocument/2006/relationships" xmlns:p14="http://schemas.microsoft.com/office/powerpoint/2010/main" xmlns:p15="http://schemas.microsoft.com/office/powerpoint/2012/main" xmlns:mc="http://schemas.openxmlformats.org/markup-compatibility/2006" type="objOverTx" preserve="1">
+<p:sldLayout xmlns:a="http://schemas.openxmlformats.org/drawingml/2006/main" xmlns:r="http://schemas.openxmlformats.org/officeDocument/2006/relationships" xmlns:p="http://schemas.openxmlformats.org/presentationml/2006/main" type="objOverTx" preserve="1">
   <p:cSld name="Title, Content over Content">
     <p:spTree>
       <p:nvGrpSpPr>
@@ -3108,14 +3399,15 @@
           </a:ln>
         </p:spPr>
         <p:txBody>
-          <a:bodyPr lIns="0" rIns="0" tIns="0" bIns="0" anchor="ctr">
+          <a:bodyPr lIns="0" tIns="0" rIns="0" bIns="0" anchor="ctr">
             <a:noAutofit/>
           </a:bodyPr>
+          <a:lstStyle/>
           <a:p>
             <a:pPr indent="0">
               <a:buNone/>
             </a:pPr>
-            <a:endParaRPr b="0" lang="en-US" sz="3800" spc="-1" strike="noStrike">
+            <a:endParaRPr lang="en-US" sz="3800" b="0" strike="noStrike" spc="-1">
               <a:solidFill>
                 <a:srgbClr val="000000"/>
               </a:solidFill>
@@ -3148,9 +3440,10 @@
           </a:ln>
         </p:spPr>
         <p:txBody>
-          <a:bodyPr lIns="0" rIns="0" tIns="0" bIns="0" anchor="t">
+          <a:bodyPr lIns="0" tIns="0" rIns="0" bIns="0" anchor="t">
             <a:normAutofit/>
           </a:bodyPr>
+          <a:lstStyle/>
           <a:p>
             <a:pPr indent="0">
               <a:lnSpc>
@@ -3161,7 +3454,7 @@
               </a:spcBef>
               <a:buNone/>
             </a:pPr>
-            <a:endParaRPr b="0" lang="en-US" sz="2800" spc="-1" strike="noStrike">
+            <a:endParaRPr lang="en-US" sz="2800" b="0" strike="noStrike" spc="-1">
               <a:solidFill>
                 <a:srgbClr val="404040"/>
               </a:solidFill>
@@ -3194,9 +3487,10 @@
           </a:ln>
         </p:spPr>
         <p:txBody>
-          <a:bodyPr lIns="0" rIns="0" tIns="0" bIns="0" anchor="t">
+          <a:bodyPr lIns="0" tIns="0" rIns="0" bIns="0" anchor="t">
             <a:normAutofit/>
           </a:bodyPr>
+          <a:lstStyle/>
           <a:p>
             <a:pPr indent="0">
               <a:lnSpc>
@@ -3207,7 +3501,7 @@
               </a:spcBef>
               <a:buNone/>
             </a:pPr>
-            <a:endParaRPr b="0" lang="en-US" sz="2800" spc="-1" strike="noStrike">
+            <a:endParaRPr lang="en-US" sz="2800" b="0" strike="noStrike" spc="-1">
               <a:solidFill>
                 <a:srgbClr val="404040"/>
               </a:solidFill>
@@ -3229,6 +3523,7 @@
         <p:spPr/>
         <p:txBody>
           <a:bodyPr/>
+          <a:lstStyle/>
           <a:p>
             <a:r>
               <a:t>Footer</a:t>
@@ -3249,20 +3544,25 @@
         <p:spPr/>
         <p:txBody>
           <a:bodyPr/>
+          <a:lstStyle/>
           <a:p>
             <a:fld id="{E89D522D-9315-4804-97FC-2EF3FF2057CB}" type="slidenum">
-              <a:t>&lt;#&gt;</a:t>
+              <a:t>‹#›</a:t>
             </a:fld>
+            <a:endParaRPr/>
           </a:p>
         </p:txBody>
       </p:sp>
     </p:spTree>
   </p:cSld>
+  <p:clrMapOvr>
+    <a:masterClrMapping/>
+  </p:clrMapOvr>
 </p:sldLayout>
 </file>
 
 <file path=ppt/slideLayouts/slideLayout23.xml><?xml version="1.0" encoding="utf-8"?>
-<p:sldLayout xmlns:a="http://schemas.openxmlformats.org/drawingml/2006/main" xmlns:p="http://schemas.openxmlformats.org/presentationml/2006/main" xmlns:r="http://schemas.openxmlformats.org/officeDocument/2006/relationships" xmlns:p14="http://schemas.microsoft.com/office/powerpoint/2010/main" xmlns:p15="http://schemas.microsoft.com/office/powerpoint/2012/main" xmlns:mc="http://schemas.openxmlformats.org/markup-compatibility/2006" type="fourObj" preserve="1">
+<p:sldLayout xmlns:a="http://schemas.openxmlformats.org/drawingml/2006/main" xmlns:r="http://schemas.openxmlformats.org/officeDocument/2006/relationships" xmlns:p="http://schemas.openxmlformats.org/presentationml/2006/main" type="fourObj" preserve="1">
   <p:cSld name="Title, 4 Content">
     <p:spTree>
       <p:nvGrpSpPr>
@@ -3302,14 +3602,15 @@
           </a:ln>
         </p:spPr>
         <p:txBody>
-          <a:bodyPr lIns="0" rIns="0" tIns="0" bIns="0" anchor="ctr">
+          <a:bodyPr lIns="0" tIns="0" rIns="0" bIns="0" anchor="ctr">
             <a:noAutofit/>
           </a:bodyPr>
+          <a:lstStyle/>
           <a:p>
             <a:pPr indent="0">
               <a:buNone/>
             </a:pPr>
-            <a:endParaRPr b="0" lang="en-US" sz="3800" spc="-1" strike="noStrike">
+            <a:endParaRPr lang="en-US" sz="3800" b="0" strike="noStrike" spc="-1">
               <a:solidFill>
                 <a:srgbClr val="000000"/>
               </a:solidFill>
@@ -3342,9 +3643,10 @@
           </a:ln>
         </p:spPr>
         <p:txBody>
-          <a:bodyPr lIns="0" rIns="0" tIns="0" bIns="0" anchor="t">
+          <a:bodyPr lIns="0" tIns="0" rIns="0" bIns="0" anchor="t">
             <a:normAutofit/>
           </a:bodyPr>
+          <a:lstStyle/>
           <a:p>
             <a:pPr indent="0">
               <a:lnSpc>
@@ -3355,7 +3657,7 @@
               </a:spcBef>
               <a:buNone/>
             </a:pPr>
-            <a:endParaRPr b="0" lang="en-US" sz="2800" spc="-1" strike="noStrike">
+            <a:endParaRPr lang="en-US" sz="2800" b="0" strike="noStrike" spc="-1">
               <a:solidFill>
                 <a:srgbClr val="404040"/>
               </a:solidFill>
@@ -3388,9 +3690,10 @@
           </a:ln>
         </p:spPr>
         <p:txBody>
-          <a:bodyPr lIns="0" rIns="0" tIns="0" bIns="0" anchor="t">
+          <a:bodyPr lIns="0" tIns="0" rIns="0" bIns="0" anchor="t">
             <a:normAutofit/>
           </a:bodyPr>
+          <a:lstStyle/>
           <a:p>
             <a:pPr indent="0">
               <a:lnSpc>
@@ -3401,7 +3704,7 @@
               </a:spcBef>
               <a:buNone/>
             </a:pPr>
-            <a:endParaRPr b="0" lang="en-US" sz="2800" spc="-1" strike="noStrike">
+            <a:endParaRPr lang="en-US" sz="2800" b="0" strike="noStrike" spc="-1">
               <a:solidFill>
                 <a:srgbClr val="404040"/>
               </a:solidFill>
@@ -3434,9 +3737,10 @@
           </a:ln>
         </p:spPr>
         <p:txBody>
-          <a:bodyPr lIns="0" rIns="0" tIns="0" bIns="0" anchor="t">
+          <a:bodyPr lIns="0" tIns="0" rIns="0" bIns="0" anchor="t">
             <a:normAutofit/>
           </a:bodyPr>
+          <a:lstStyle/>
           <a:p>
             <a:pPr indent="0">
               <a:lnSpc>
@@ -3447,7 +3751,7 @@
               </a:spcBef>
               <a:buNone/>
             </a:pPr>
-            <a:endParaRPr b="0" lang="en-US" sz="2800" spc="-1" strike="noStrike">
+            <a:endParaRPr lang="en-US" sz="2800" b="0" strike="noStrike" spc="-1">
               <a:solidFill>
                 <a:srgbClr val="404040"/>
               </a:solidFill>
@@ -3480,9 +3784,10 @@
           </a:ln>
         </p:spPr>
         <p:txBody>
-          <a:bodyPr lIns="0" rIns="0" tIns="0" bIns="0" anchor="t">
+          <a:bodyPr lIns="0" tIns="0" rIns="0" bIns="0" anchor="t">
             <a:normAutofit/>
           </a:bodyPr>
+          <a:lstStyle/>
           <a:p>
             <a:pPr indent="0">
               <a:lnSpc>
@@ -3493,7 +3798,7 @@
               </a:spcBef>
               <a:buNone/>
             </a:pPr>
-            <a:endParaRPr b="0" lang="en-US" sz="2800" spc="-1" strike="noStrike">
+            <a:endParaRPr lang="en-US" sz="2800" b="0" strike="noStrike" spc="-1">
               <a:solidFill>
                 <a:srgbClr val="404040"/>
               </a:solidFill>
@@ -3515,6 +3820,7 @@
         <p:spPr/>
         <p:txBody>
           <a:bodyPr/>
+          <a:lstStyle/>
           <a:p>
             <a:r>
               <a:t>Footer</a:t>
@@ -3535,20 +3841,25 @@
         <p:spPr/>
         <p:txBody>
           <a:bodyPr/>
+          <a:lstStyle/>
           <a:p>
             <a:fld id="{F7284B54-9FD5-40B1-81B0-60F40B8618A5}" type="slidenum">
-              <a:t>&lt;#&gt;</a:t>
+              <a:t>‹#›</a:t>
             </a:fld>
+            <a:endParaRPr/>
           </a:p>
         </p:txBody>
       </p:sp>
     </p:spTree>
   </p:cSld>
+  <p:clrMapOvr>
+    <a:masterClrMapping/>
+  </p:clrMapOvr>
 </p:sldLayout>
 </file>
 
 <file path=ppt/slideLayouts/slideLayout24.xml><?xml version="1.0" encoding="utf-8"?>
-<p:sldLayout xmlns:a="http://schemas.openxmlformats.org/drawingml/2006/main" xmlns:p="http://schemas.openxmlformats.org/presentationml/2006/main" xmlns:r="http://schemas.openxmlformats.org/officeDocument/2006/relationships" xmlns:p14="http://schemas.microsoft.com/office/powerpoint/2010/main" xmlns:p15="http://schemas.microsoft.com/office/powerpoint/2012/main" xmlns:mc="http://schemas.openxmlformats.org/markup-compatibility/2006" type="blank" preserve="1">
+<p:sldLayout xmlns:a="http://schemas.openxmlformats.org/drawingml/2006/main" xmlns:r="http://schemas.openxmlformats.org/officeDocument/2006/relationships" xmlns:p="http://schemas.openxmlformats.org/presentationml/2006/main" type="blank" preserve="1">
   <p:cSld name="Title, 6 Content">
     <p:spTree>
       <p:nvGrpSpPr>
@@ -3588,14 +3899,15 @@
           </a:ln>
         </p:spPr>
         <p:txBody>
-          <a:bodyPr lIns="0" rIns="0" tIns="0" bIns="0" anchor="ctr">
+          <a:bodyPr lIns="0" tIns="0" rIns="0" bIns="0" anchor="ctr">
             <a:noAutofit/>
           </a:bodyPr>
+          <a:lstStyle/>
           <a:p>
             <a:pPr indent="0">
               <a:buNone/>
             </a:pPr>
-            <a:endParaRPr b="0" lang="en-US" sz="3800" spc="-1" strike="noStrike">
+            <a:endParaRPr lang="en-US" sz="3800" b="0" strike="noStrike" spc="-1">
               <a:solidFill>
                 <a:srgbClr val="000000"/>
               </a:solidFill>
@@ -3628,9 +3940,10 @@
           </a:ln>
         </p:spPr>
         <p:txBody>
-          <a:bodyPr lIns="0" rIns="0" tIns="0" bIns="0" anchor="t">
+          <a:bodyPr lIns="0" tIns="0" rIns="0" bIns="0" anchor="t">
             <a:normAutofit/>
           </a:bodyPr>
+          <a:lstStyle/>
           <a:p>
             <a:pPr indent="0">
               <a:lnSpc>
@@ -3641,7 +3954,7 @@
               </a:spcBef>
               <a:buNone/>
             </a:pPr>
-            <a:endParaRPr b="0" lang="en-US" sz="2800" spc="-1" strike="noStrike">
+            <a:endParaRPr lang="en-US" sz="2800" b="0" strike="noStrike" spc="-1">
               <a:solidFill>
                 <a:srgbClr val="404040"/>
               </a:solidFill>
@@ -3674,9 +3987,10 @@
           </a:ln>
         </p:spPr>
         <p:txBody>
-          <a:bodyPr lIns="0" rIns="0" tIns="0" bIns="0" anchor="t">
+          <a:bodyPr lIns="0" tIns="0" rIns="0" bIns="0" anchor="t">
             <a:normAutofit/>
           </a:bodyPr>
+          <a:lstStyle/>
           <a:p>
             <a:pPr indent="0">
               <a:lnSpc>
@@ -3687,7 +4001,7 @@
               </a:spcBef>
               <a:buNone/>
             </a:pPr>
-            <a:endParaRPr b="0" lang="en-US" sz="2800" spc="-1" strike="noStrike">
+            <a:endParaRPr lang="en-US" sz="2800" b="0" strike="noStrike" spc="-1">
               <a:solidFill>
                 <a:srgbClr val="404040"/>
               </a:solidFill>
@@ -3720,9 +4034,10 @@
           </a:ln>
         </p:spPr>
         <p:txBody>
-          <a:bodyPr lIns="0" rIns="0" tIns="0" bIns="0" anchor="t">
+          <a:bodyPr lIns="0" tIns="0" rIns="0" bIns="0" anchor="t">
             <a:normAutofit/>
           </a:bodyPr>
+          <a:lstStyle/>
           <a:p>
             <a:pPr indent="0">
               <a:lnSpc>
@@ -3733,7 +4048,7 @@
               </a:spcBef>
               <a:buNone/>
             </a:pPr>
-            <a:endParaRPr b="0" lang="en-US" sz="2800" spc="-1" strike="noStrike">
+            <a:endParaRPr lang="en-US" sz="2800" b="0" strike="noStrike" spc="-1">
               <a:solidFill>
                 <a:srgbClr val="404040"/>
               </a:solidFill>
@@ -3766,9 +4081,10 @@
           </a:ln>
         </p:spPr>
         <p:txBody>
-          <a:bodyPr lIns="0" rIns="0" tIns="0" bIns="0" anchor="t">
+          <a:bodyPr lIns="0" tIns="0" rIns="0" bIns="0" anchor="t">
             <a:normAutofit/>
           </a:bodyPr>
+          <a:lstStyle/>
           <a:p>
             <a:pPr indent="0">
               <a:lnSpc>
@@ -3779,7 +4095,7 @@
               </a:spcBef>
               <a:buNone/>
             </a:pPr>
-            <a:endParaRPr b="0" lang="en-US" sz="2800" spc="-1" strike="noStrike">
+            <a:endParaRPr lang="en-US" sz="2800" b="0" strike="noStrike" spc="-1">
               <a:solidFill>
                 <a:srgbClr val="404040"/>
               </a:solidFill>
@@ -3812,9 +4128,10 @@
           </a:ln>
         </p:spPr>
         <p:txBody>
-          <a:bodyPr lIns="0" rIns="0" tIns="0" bIns="0" anchor="t">
+          <a:bodyPr lIns="0" tIns="0" rIns="0" bIns="0" anchor="t">
             <a:normAutofit/>
           </a:bodyPr>
+          <a:lstStyle/>
           <a:p>
             <a:pPr indent="0">
               <a:lnSpc>
@@ -3825,7 +4142,7 @@
               </a:spcBef>
               <a:buNone/>
             </a:pPr>
-            <a:endParaRPr b="0" lang="en-US" sz="2800" spc="-1" strike="noStrike">
+            <a:endParaRPr lang="en-US" sz="2800" b="0" strike="noStrike" spc="-1">
               <a:solidFill>
                 <a:srgbClr val="404040"/>
               </a:solidFill>
@@ -3858,9 +4175,10 @@
           </a:ln>
         </p:spPr>
         <p:txBody>
-          <a:bodyPr lIns="0" rIns="0" tIns="0" bIns="0" anchor="t">
+          <a:bodyPr lIns="0" tIns="0" rIns="0" bIns="0" anchor="t">
             <a:normAutofit/>
           </a:bodyPr>
+          <a:lstStyle/>
           <a:p>
             <a:pPr indent="0">
               <a:lnSpc>
@@ -3871,7 +4189,7 @@
               </a:spcBef>
               <a:buNone/>
             </a:pPr>
-            <a:endParaRPr b="0" lang="en-US" sz="2800" spc="-1" strike="noStrike">
+            <a:endParaRPr lang="en-US" sz="2800" b="0" strike="noStrike" spc="-1">
               <a:solidFill>
                 <a:srgbClr val="404040"/>
               </a:solidFill>
@@ -3893,6 +4211,7 @@
         <p:spPr/>
         <p:txBody>
           <a:bodyPr/>
+          <a:lstStyle/>
           <a:p>
             <a:r>
               <a:t>Footer</a:t>
@@ -3913,20 +4232,25 @@
         <p:spPr/>
         <p:txBody>
           <a:bodyPr/>
+          <a:lstStyle/>
           <a:p>
             <a:fld id="{C2CE65E0-6D20-4909-82B2-42AF359C1AA5}" type="slidenum">
-              <a:t>&lt;#&gt;</a:t>
+              <a:t>‹#›</a:t>
             </a:fld>
+            <a:endParaRPr/>
           </a:p>
         </p:txBody>
       </p:sp>
     </p:spTree>
   </p:cSld>
+  <p:clrMapOvr>
+    <a:masterClrMapping/>
+  </p:clrMapOvr>
 </p:sldLayout>
 </file>
 
 <file path=ppt/slideLayouts/slideLayout3.xml><?xml version="1.0" encoding="utf-8"?>
-<p:sldLayout xmlns:a="http://schemas.openxmlformats.org/drawingml/2006/main" xmlns:p="http://schemas.openxmlformats.org/presentationml/2006/main" xmlns:r="http://schemas.openxmlformats.org/officeDocument/2006/relationships" xmlns:p14="http://schemas.microsoft.com/office/powerpoint/2010/main" xmlns:p15="http://schemas.microsoft.com/office/powerpoint/2012/main" xmlns:mc="http://schemas.openxmlformats.org/markup-compatibility/2006" type="obj" preserve="1">
+<p:sldLayout xmlns:a="http://schemas.openxmlformats.org/drawingml/2006/main" xmlns:r="http://schemas.openxmlformats.org/officeDocument/2006/relationships" xmlns:p="http://schemas.openxmlformats.org/presentationml/2006/main" type="obj" preserve="1">
   <p:cSld name="Title, Content">
     <p:spTree>
       <p:nvGrpSpPr>
@@ -3966,14 +4290,15 @@
           </a:ln>
         </p:spPr>
         <p:txBody>
-          <a:bodyPr lIns="0" rIns="0" tIns="0" bIns="0" anchor="ctr">
+          <a:bodyPr lIns="0" tIns="0" rIns="0" bIns="0" anchor="ctr">
             <a:noAutofit/>
           </a:bodyPr>
+          <a:lstStyle/>
           <a:p>
             <a:pPr indent="0">
               <a:buNone/>
             </a:pPr>
-            <a:endParaRPr b="0" lang="en-US" sz="3800" spc="-1" strike="noStrike">
+            <a:endParaRPr lang="en-US" sz="3800" b="0" strike="noStrike" spc="-1">
               <a:solidFill>
                 <a:srgbClr val="000000"/>
               </a:solidFill>
@@ -4006,9 +4331,10 @@
           </a:ln>
         </p:spPr>
         <p:txBody>
-          <a:bodyPr lIns="0" rIns="0" tIns="0" bIns="0" anchor="t">
+          <a:bodyPr lIns="0" tIns="0" rIns="0" bIns="0" anchor="t">
             <a:normAutofit/>
           </a:bodyPr>
+          <a:lstStyle/>
           <a:p>
             <a:pPr indent="0">
               <a:lnSpc>
@@ -4019,7 +4345,7 @@
               </a:spcBef>
               <a:buNone/>
             </a:pPr>
-            <a:endParaRPr b="0" lang="en-US" sz="2800" spc="-1" strike="noStrike">
+            <a:endParaRPr lang="en-US" sz="2800" b="0" strike="noStrike" spc="-1">
               <a:solidFill>
                 <a:srgbClr val="404040"/>
               </a:solidFill>
@@ -4041,6 +4367,7 @@
         <p:spPr/>
         <p:txBody>
           <a:bodyPr/>
+          <a:lstStyle/>
           <a:p>
             <a:r>
               <a:t>Footer</a:t>
@@ -4061,20 +4388,25 @@
         <p:spPr/>
         <p:txBody>
           <a:bodyPr/>
+          <a:lstStyle/>
           <a:p>
             <a:fld id="{3AF64F81-48D7-4402-81C7-FB7D0A56FDC0}" type="slidenum">
-              <a:t>&lt;#&gt;</a:t>
+              <a:t>‹#›</a:t>
             </a:fld>
+            <a:endParaRPr/>
           </a:p>
         </p:txBody>
       </p:sp>
     </p:spTree>
   </p:cSld>
+  <p:clrMapOvr>
+    <a:masterClrMapping/>
+  </p:clrMapOvr>
 </p:sldLayout>
 </file>
 
 <file path=ppt/slideLayouts/slideLayout4.xml><?xml version="1.0" encoding="utf-8"?>
-<p:sldLayout xmlns:a="http://schemas.openxmlformats.org/drawingml/2006/main" xmlns:p="http://schemas.openxmlformats.org/presentationml/2006/main" xmlns:r="http://schemas.openxmlformats.org/officeDocument/2006/relationships" xmlns:p14="http://schemas.microsoft.com/office/powerpoint/2010/main" xmlns:p15="http://schemas.microsoft.com/office/powerpoint/2012/main" xmlns:mc="http://schemas.openxmlformats.org/markup-compatibility/2006" type="twoObj" preserve="1">
+<p:sldLayout xmlns:a="http://schemas.openxmlformats.org/drawingml/2006/main" xmlns:r="http://schemas.openxmlformats.org/officeDocument/2006/relationships" xmlns:p="http://schemas.openxmlformats.org/presentationml/2006/main" type="twoObj" preserve="1">
   <p:cSld name="Title, 2 Content">
     <p:spTree>
       <p:nvGrpSpPr>
@@ -4114,14 +4446,15 @@
           </a:ln>
         </p:spPr>
         <p:txBody>
-          <a:bodyPr lIns="0" rIns="0" tIns="0" bIns="0" anchor="ctr">
+          <a:bodyPr lIns="0" tIns="0" rIns="0" bIns="0" anchor="ctr">
             <a:noAutofit/>
           </a:bodyPr>
+          <a:lstStyle/>
           <a:p>
             <a:pPr indent="0">
               <a:buNone/>
             </a:pPr>
-            <a:endParaRPr b="0" lang="en-US" sz="3800" spc="-1" strike="noStrike">
+            <a:endParaRPr lang="en-US" sz="3800" b="0" strike="noStrike" spc="-1">
               <a:solidFill>
                 <a:srgbClr val="000000"/>
               </a:solidFill>
@@ -4154,9 +4487,10 @@
           </a:ln>
         </p:spPr>
         <p:txBody>
-          <a:bodyPr lIns="0" rIns="0" tIns="0" bIns="0" anchor="t">
+          <a:bodyPr lIns="0" tIns="0" rIns="0" bIns="0" anchor="t">
             <a:normAutofit/>
           </a:bodyPr>
+          <a:lstStyle/>
           <a:p>
             <a:pPr indent="0">
               <a:lnSpc>
@@ -4167,7 +4501,7 @@
               </a:spcBef>
               <a:buNone/>
             </a:pPr>
-            <a:endParaRPr b="0" lang="en-US" sz="2800" spc="-1" strike="noStrike">
+            <a:endParaRPr lang="en-US" sz="2800" b="0" strike="noStrike" spc="-1">
               <a:solidFill>
                 <a:srgbClr val="404040"/>
               </a:solidFill>
@@ -4200,9 +4534,10 @@
           </a:ln>
         </p:spPr>
         <p:txBody>
-          <a:bodyPr lIns="0" rIns="0" tIns="0" bIns="0" anchor="t">
+          <a:bodyPr lIns="0" tIns="0" rIns="0" bIns="0" anchor="t">
             <a:normAutofit/>
           </a:bodyPr>
+          <a:lstStyle/>
           <a:p>
             <a:pPr indent="0">
               <a:lnSpc>
@@ -4213,7 +4548,7 @@
               </a:spcBef>
               <a:buNone/>
             </a:pPr>
-            <a:endParaRPr b="0" lang="en-US" sz="2800" spc="-1" strike="noStrike">
+            <a:endParaRPr lang="en-US" sz="2800" b="0" strike="noStrike" spc="-1">
               <a:solidFill>
                 <a:srgbClr val="404040"/>
               </a:solidFill>
@@ -4235,6 +4570,7 @@
         <p:spPr/>
         <p:txBody>
           <a:bodyPr/>
+          <a:lstStyle/>
           <a:p>
             <a:r>
               <a:t>Footer</a:t>
@@ -4255,20 +4591,25 @@
         <p:spPr/>
         <p:txBody>
           <a:bodyPr/>
+          <a:lstStyle/>
           <a:p>
             <a:fld id="{6EB012E7-62ED-4DBA-BB2B-C7BB11C3B910}" type="slidenum">
-              <a:t>&lt;#&gt;</a:t>
+              <a:t>‹#›</a:t>
             </a:fld>
+            <a:endParaRPr/>
           </a:p>
         </p:txBody>
       </p:sp>
     </p:spTree>
   </p:cSld>
+  <p:clrMapOvr>
+    <a:masterClrMapping/>
+  </p:clrMapOvr>
 </p:sldLayout>
 </file>
 
 <file path=ppt/slideLayouts/slideLayout5.xml><?xml version="1.0" encoding="utf-8"?>
-<p:sldLayout xmlns:a="http://schemas.openxmlformats.org/drawingml/2006/main" xmlns:p="http://schemas.openxmlformats.org/presentationml/2006/main" xmlns:r="http://schemas.openxmlformats.org/officeDocument/2006/relationships" xmlns:p14="http://schemas.microsoft.com/office/powerpoint/2010/main" xmlns:p15="http://schemas.microsoft.com/office/powerpoint/2012/main" xmlns:mc="http://schemas.openxmlformats.org/markup-compatibility/2006" type="titleOnly" preserve="1">
+<p:sldLayout xmlns:a="http://schemas.openxmlformats.org/drawingml/2006/main" xmlns:r="http://schemas.openxmlformats.org/officeDocument/2006/relationships" xmlns:p="http://schemas.openxmlformats.org/presentationml/2006/main" type="titleOnly" preserve="1">
   <p:cSld name="Title Only">
     <p:spTree>
       <p:nvGrpSpPr>
@@ -4308,14 +4649,15 @@
           </a:ln>
         </p:spPr>
         <p:txBody>
-          <a:bodyPr lIns="0" rIns="0" tIns="0" bIns="0" anchor="ctr">
+          <a:bodyPr lIns="0" tIns="0" rIns="0" bIns="0" anchor="ctr">
             <a:noAutofit/>
           </a:bodyPr>
+          <a:lstStyle/>
           <a:p>
             <a:pPr indent="0">
               <a:buNone/>
             </a:pPr>
-            <a:endParaRPr b="0" lang="en-US" sz="3800" spc="-1" strike="noStrike">
+            <a:endParaRPr lang="en-US" sz="3800" b="0" strike="noStrike" spc="-1">
               <a:solidFill>
                 <a:srgbClr val="000000"/>
               </a:solidFill>
@@ -4337,6 +4679,7 @@
         <p:spPr/>
         <p:txBody>
           <a:bodyPr/>
+          <a:lstStyle/>
           <a:p>
             <a:r>
               <a:t>Footer</a:t>
@@ -4357,20 +4700,25 @@
         <p:spPr/>
         <p:txBody>
           <a:bodyPr/>
+          <a:lstStyle/>
           <a:p>
             <a:fld id="{9A720704-FFB4-4C91-BFFD-C823F6BFFD3F}" type="slidenum">
-              <a:t>&lt;#&gt;</a:t>
+              <a:t>‹#›</a:t>
             </a:fld>
+            <a:endParaRPr/>
           </a:p>
         </p:txBody>
       </p:sp>
     </p:spTree>
   </p:cSld>
+  <p:clrMapOvr>
+    <a:masterClrMapping/>
+  </p:clrMapOvr>
 </p:sldLayout>
 </file>
 
 <file path=ppt/slideLayouts/slideLayout6.xml><?xml version="1.0" encoding="utf-8"?>
-<p:sldLayout xmlns:a="http://schemas.openxmlformats.org/drawingml/2006/main" xmlns:p="http://schemas.openxmlformats.org/presentationml/2006/main" xmlns:r="http://schemas.openxmlformats.org/officeDocument/2006/relationships" xmlns:p14="http://schemas.microsoft.com/office/powerpoint/2010/main" xmlns:p15="http://schemas.microsoft.com/office/powerpoint/2012/main" xmlns:mc="http://schemas.openxmlformats.org/markup-compatibility/2006" type="objOnly" preserve="1">
+<p:sldLayout xmlns:a="http://schemas.openxmlformats.org/drawingml/2006/main" xmlns:r="http://schemas.openxmlformats.org/officeDocument/2006/relationships" xmlns:p="http://schemas.openxmlformats.org/presentationml/2006/main" type="objOnly" preserve="1">
   <p:cSld name="Centered Text">
     <p:spTree>
       <p:nvGrpSpPr>
@@ -4410,12 +4758,13 @@
           </a:ln>
         </p:spPr>
         <p:txBody>
-          <a:bodyPr lIns="0" rIns="0" tIns="0" bIns="0" anchor="ctr">
+          <a:bodyPr lIns="0" tIns="0" rIns="0" bIns="0" anchor="ctr">
             <a:noAutofit/>
           </a:bodyPr>
+          <a:lstStyle/>
           <a:p>
             <a:pPr algn="ctr"/>
-            <a:endParaRPr b="0" lang="en-US" sz="3200" spc="-1" strike="noStrike">
+            <a:endParaRPr lang="en-US" sz="3200" b="0" strike="noStrike" spc="-1">
               <a:solidFill>
                 <a:srgbClr val="000000"/>
               </a:solidFill>
@@ -4437,6 +4786,7 @@
         <p:spPr/>
         <p:txBody>
           <a:bodyPr/>
+          <a:lstStyle/>
           <a:p>
             <a:r>
               <a:t>Footer</a:t>
@@ -4457,20 +4807,25 @@
         <p:spPr/>
         <p:txBody>
           <a:bodyPr/>
+          <a:lstStyle/>
           <a:p>
             <a:fld id="{93248647-E82B-464C-B316-89B7328F542B}" type="slidenum">
-              <a:t>&lt;#&gt;</a:t>
+              <a:t>‹#›</a:t>
             </a:fld>
+            <a:endParaRPr/>
           </a:p>
         </p:txBody>
       </p:sp>
     </p:spTree>
   </p:cSld>
+  <p:clrMapOvr>
+    <a:masterClrMapping/>
+  </p:clrMapOvr>
 </p:sldLayout>
 </file>
 
 <file path=ppt/slideLayouts/slideLayout7.xml><?xml version="1.0" encoding="utf-8"?>
-<p:sldLayout xmlns:a="http://schemas.openxmlformats.org/drawingml/2006/main" xmlns:p="http://schemas.openxmlformats.org/presentationml/2006/main" xmlns:r="http://schemas.openxmlformats.org/officeDocument/2006/relationships" xmlns:p14="http://schemas.microsoft.com/office/powerpoint/2010/main" xmlns:p15="http://schemas.microsoft.com/office/powerpoint/2012/main" xmlns:mc="http://schemas.openxmlformats.org/markup-compatibility/2006" type="twoObjAndObj" preserve="1">
+<p:sldLayout xmlns:a="http://schemas.openxmlformats.org/drawingml/2006/main" xmlns:r="http://schemas.openxmlformats.org/officeDocument/2006/relationships" xmlns:p="http://schemas.openxmlformats.org/presentationml/2006/main" type="twoObjAndObj" preserve="1">
   <p:cSld name="Title, 2 Content and Content">
     <p:spTree>
       <p:nvGrpSpPr>
@@ -4510,14 +4865,15 @@
           </a:ln>
         </p:spPr>
         <p:txBody>
-          <a:bodyPr lIns="0" rIns="0" tIns="0" bIns="0" anchor="ctr">
+          <a:bodyPr lIns="0" tIns="0" rIns="0" bIns="0" anchor="ctr">
             <a:noAutofit/>
           </a:bodyPr>
+          <a:lstStyle/>
           <a:p>
             <a:pPr indent="0">
               <a:buNone/>
             </a:pPr>
-            <a:endParaRPr b="0" lang="en-US" sz="3800" spc="-1" strike="noStrike">
+            <a:endParaRPr lang="en-US" sz="3800" b="0" strike="noStrike" spc="-1">
               <a:solidFill>
                 <a:srgbClr val="000000"/>
               </a:solidFill>
@@ -4550,9 +4906,10 @@
           </a:ln>
         </p:spPr>
         <p:txBody>
-          <a:bodyPr lIns="0" rIns="0" tIns="0" bIns="0" anchor="t">
+          <a:bodyPr lIns="0" tIns="0" rIns="0" bIns="0" anchor="t">
             <a:normAutofit/>
           </a:bodyPr>
+          <a:lstStyle/>
           <a:p>
             <a:pPr indent="0">
               <a:lnSpc>
@@ -4563,7 +4920,7 @@
               </a:spcBef>
               <a:buNone/>
             </a:pPr>
-            <a:endParaRPr b="0" lang="en-US" sz="2800" spc="-1" strike="noStrike">
+            <a:endParaRPr lang="en-US" sz="2800" b="0" strike="noStrike" spc="-1">
               <a:solidFill>
                 <a:srgbClr val="404040"/>
               </a:solidFill>
@@ -4596,9 +4953,10 @@
           </a:ln>
         </p:spPr>
         <p:txBody>
-          <a:bodyPr lIns="0" rIns="0" tIns="0" bIns="0" anchor="t">
+          <a:bodyPr lIns="0" tIns="0" rIns="0" bIns="0" anchor="t">
             <a:normAutofit/>
           </a:bodyPr>
+          <a:lstStyle/>
           <a:p>
             <a:pPr indent="0">
               <a:lnSpc>
@@ -4609,7 +4967,7 @@
               </a:spcBef>
               <a:buNone/>
             </a:pPr>
-            <a:endParaRPr b="0" lang="en-US" sz="2800" spc="-1" strike="noStrike">
+            <a:endParaRPr lang="en-US" sz="2800" b="0" strike="noStrike" spc="-1">
               <a:solidFill>
                 <a:srgbClr val="404040"/>
               </a:solidFill>
@@ -4642,9 +5000,10 @@
           </a:ln>
         </p:spPr>
         <p:txBody>
-          <a:bodyPr lIns="0" rIns="0" tIns="0" bIns="0" anchor="t">
+          <a:bodyPr lIns="0" tIns="0" rIns="0" bIns="0" anchor="t">
             <a:normAutofit/>
           </a:bodyPr>
+          <a:lstStyle/>
           <a:p>
             <a:pPr indent="0">
               <a:lnSpc>
@@ -4655,7 +5014,7 @@
               </a:spcBef>
               <a:buNone/>
             </a:pPr>
-            <a:endParaRPr b="0" lang="en-US" sz="2800" spc="-1" strike="noStrike">
+            <a:endParaRPr lang="en-US" sz="2800" b="0" strike="noStrike" spc="-1">
               <a:solidFill>
                 <a:srgbClr val="404040"/>
               </a:solidFill>
@@ -4677,6 +5036,7 @@
         <p:spPr/>
         <p:txBody>
           <a:bodyPr/>
+          <a:lstStyle/>
           <a:p>
             <a:r>
               <a:t>Footer</a:t>
@@ -4697,20 +5057,25 @@
         <p:spPr/>
         <p:txBody>
           <a:bodyPr/>
+          <a:lstStyle/>
           <a:p>
             <a:fld id="{5FE119E3-34E6-4969-A391-BD591DA871AE}" type="slidenum">
-              <a:t>&lt;#&gt;</a:t>
+              <a:t>‹#›</a:t>
             </a:fld>
+            <a:endParaRPr/>
           </a:p>
         </p:txBody>
       </p:sp>
     </p:spTree>
   </p:cSld>
+  <p:clrMapOvr>
+    <a:masterClrMapping/>
+  </p:clrMapOvr>
 </p:sldLayout>
 </file>
 
 <file path=ppt/slideLayouts/slideLayout8.xml><?xml version="1.0" encoding="utf-8"?>
-<p:sldLayout xmlns:a="http://schemas.openxmlformats.org/drawingml/2006/main" xmlns:p="http://schemas.openxmlformats.org/presentationml/2006/main" xmlns:r="http://schemas.openxmlformats.org/officeDocument/2006/relationships" xmlns:p14="http://schemas.microsoft.com/office/powerpoint/2010/main" xmlns:p15="http://schemas.microsoft.com/office/powerpoint/2012/main" xmlns:mc="http://schemas.openxmlformats.org/markup-compatibility/2006" type="objAndTwoObj" preserve="1">
+<p:sldLayout xmlns:a="http://schemas.openxmlformats.org/drawingml/2006/main" xmlns:r="http://schemas.openxmlformats.org/officeDocument/2006/relationships" xmlns:p="http://schemas.openxmlformats.org/presentationml/2006/main" type="objAndTwoObj" preserve="1">
   <p:cSld name="Title Content and 2 Content">
     <p:spTree>
       <p:nvGrpSpPr>
@@ -4750,14 +5115,15 @@
           </a:ln>
         </p:spPr>
         <p:txBody>
-          <a:bodyPr lIns="0" rIns="0" tIns="0" bIns="0" anchor="ctr">
+          <a:bodyPr lIns="0" tIns="0" rIns="0" bIns="0" anchor="ctr">
             <a:noAutofit/>
           </a:bodyPr>
+          <a:lstStyle/>
           <a:p>
             <a:pPr indent="0">
               <a:buNone/>
             </a:pPr>
-            <a:endParaRPr b="0" lang="en-US" sz="3800" spc="-1" strike="noStrike">
+            <a:endParaRPr lang="en-US" sz="3800" b="0" strike="noStrike" spc="-1">
               <a:solidFill>
                 <a:srgbClr val="000000"/>
               </a:solidFill>
@@ -4790,9 +5156,10 @@
           </a:ln>
         </p:spPr>
         <p:txBody>
-          <a:bodyPr lIns="0" rIns="0" tIns="0" bIns="0" anchor="t">
+          <a:bodyPr lIns="0" tIns="0" rIns="0" bIns="0" anchor="t">
             <a:normAutofit/>
           </a:bodyPr>
+          <a:lstStyle/>
           <a:p>
             <a:pPr indent="0">
               <a:lnSpc>
@@ -4803,7 +5170,7 @@
               </a:spcBef>
               <a:buNone/>
             </a:pPr>
-            <a:endParaRPr b="0" lang="en-US" sz="2800" spc="-1" strike="noStrike">
+            <a:endParaRPr lang="en-US" sz="2800" b="0" strike="noStrike" spc="-1">
               <a:solidFill>
                 <a:srgbClr val="404040"/>
               </a:solidFill>
@@ -4836,9 +5203,10 @@
           </a:ln>
         </p:spPr>
         <p:txBody>
-          <a:bodyPr lIns="0" rIns="0" tIns="0" bIns="0" anchor="t">
+          <a:bodyPr lIns="0" tIns="0" rIns="0" bIns="0" anchor="t">
             <a:normAutofit/>
           </a:bodyPr>
+          <a:lstStyle/>
           <a:p>
             <a:pPr indent="0">
               <a:lnSpc>
@@ -4849,7 +5217,7 @@
               </a:spcBef>
               <a:buNone/>
             </a:pPr>
-            <a:endParaRPr b="0" lang="en-US" sz="2800" spc="-1" strike="noStrike">
+            <a:endParaRPr lang="en-US" sz="2800" b="0" strike="noStrike" spc="-1">
               <a:solidFill>
                 <a:srgbClr val="404040"/>
               </a:solidFill>
@@ -4882,9 +5250,10 @@
           </a:ln>
         </p:spPr>
         <p:txBody>
-          <a:bodyPr lIns="0" rIns="0" tIns="0" bIns="0" anchor="t">
+          <a:bodyPr lIns="0" tIns="0" rIns="0" bIns="0" anchor="t">
             <a:normAutofit/>
           </a:bodyPr>
+          <a:lstStyle/>
           <a:p>
             <a:pPr indent="0">
               <a:lnSpc>
@@ -4895,7 +5264,7 @@
               </a:spcBef>
               <a:buNone/>
             </a:pPr>
-            <a:endParaRPr b="0" lang="en-US" sz="2800" spc="-1" strike="noStrike">
+            <a:endParaRPr lang="en-US" sz="2800" b="0" strike="noStrike" spc="-1">
               <a:solidFill>
                 <a:srgbClr val="404040"/>
               </a:solidFill>
@@ -4917,6 +5286,7 @@
         <p:spPr/>
         <p:txBody>
           <a:bodyPr/>
+          <a:lstStyle/>
           <a:p>
             <a:r>
               <a:t>Footer</a:t>
@@ -4937,20 +5307,25 @@
         <p:spPr/>
         <p:txBody>
           <a:bodyPr/>
+          <a:lstStyle/>
           <a:p>
             <a:fld id="{F4688C2D-9BC5-4898-AAAA-7CFFE8C0F6D7}" type="slidenum">
-              <a:t>&lt;#&gt;</a:t>
+              <a:t>‹#›</a:t>
             </a:fld>
+            <a:endParaRPr/>
           </a:p>
         </p:txBody>
       </p:sp>
     </p:spTree>
   </p:cSld>
+  <p:clrMapOvr>
+    <a:masterClrMapping/>
+  </p:clrMapOvr>
 </p:sldLayout>
 </file>
 
 <file path=ppt/slideLayouts/slideLayout9.xml><?xml version="1.0" encoding="utf-8"?>
-<p:sldLayout xmlns:a="http://schemas.openxmlformats.org/drawingml/2006/main" xmlns:p="http://schemas.openxmlformats.org/presentationml/2006/main" xmlns:r="http://schemas.openxmlformats.org/officeDocument/2006/relationships" xmlns:p14="http://schemas.microsoft.com/office/powerpoint/2010/main" xmlns:p15="http://schemas.microsoft.com/office/powerpoint/2012/main" xmlns:mc="http://schemas.openxmlformats.org/markup-compatibility/2006" type="twoObjOverTx" preserve="1">
+<p:sldLayout xmlns:a="http://schemas.openxmlformats.org/drawingml/2006/main" xmlns:r="http://schemas.openxmlformats.org/officeDocument/2006/relationships" xmlns:p="http://schemas.openxmlformats.org/presentationml/2006/main" type="twoObjOverTx" preserve="1">
   <p:cSld name="Title, 2 Content over Content">
     <p:spTree>
       <p:nvGrpSpPr>
@@ -4990,14 +5365,15 @@
           </a:ln>
         </p:spPr>
         <p:txBody>
-          <a:bodyPr lIns="0" rIns="0" tIns="0" bIns="0" anchor="ctr">
+          <a:bodyPr lIns="0" tIns="0" rIns="0" bIns="0" anchor="ctr">
             <a:noAutofit/>
           </a:bodyPr>
+          <a:lstStyle/>
           <a:p>
             <a:pPr indent="0">
               <a:buNone/>
             </a:pPr>
-            <a:endParaRPr b="0" lang="en-US" sz="3800" spc="-1" strike="noStrike">
+            <a:endParaRPr lang="en-US" sz="3800" b="0" strike="noStrike" spc="-1">
               <a:solidFill>
                 <a:srgbClr val="000000"/>
               </a:solidFill>
@@ -5030,9 +5406,10 @@
           </a:ln>
         </p:spPr>
         <p:txBody>
-          <a:bodyPr lIns="0" rIns="0" tIns="0" bIns="0" anchor="t">
+          <a:bodyPr lIns="0" tIns="0" rIns="0" bIns="0" anchor="t">
             <a:normAutofit/>
           </a:bodyPr>
+          <a:lstStyle/>
           <a:p>
             <a:pPr indent="0">
               <a:lnSpc>
@@ -5043,7 +5420,7 @@
               </a:spcBef>
               <a:buNone/>
             </a:pPr>
-            <a:endParaRPr b="0" lang="en-US" sz="2800" spc="-1" strike="noStrike">
+            <a:endParaRPr lang="en-US" sz="2800" b="0" strike="noStrike" spc="-1">
               <a:solidFill>
                 <a:srgbClr val="404040"/>
               </a:solidFill>
@@ -5076,9 +5453,10 @@
           </a:ln>
         </p:spPr>
         <p:txBody>
-          <a:bodyPr lIns="0" rIns="0" tIns="0" bIns="0" anchor="t">
+          <a:bodyPr lIns="0" tIns="0" rIns="0" bIns="0" anchor="t">
             <a:normAutofit/>
           </a:bodyPr>
+          <a:lstStyle/>
           <a:p>
             <a:pPr indent="0">
               <a:lnSpc>
@@ -5089,7 +5467,7 @@
               </a:spcBef>
               <a:buNone/>
             </a:pPr>
-            <a:endParaRPr b="0" lang="en-US" sz="2800" spc="-1" strike="noStrike">
+            <a:endParaRPr lang="en-US" sz="2800" b="0" strike="noStrike" spc="-1">
               <a:solidFill>
                 <a:srgbClr val="404040"/>
               </a:solidFill>
@@ -5122,9 +5500,10 @@
           </a:ln>
         </p:spPr>
         <p:txBody>
-          <a:bodyPr lIns="0" rIns="0" tIns="0" bIns="0" anchor="t">
+          <a:bodyPr lIns="0" tIns="0" rIns="0" bIns="0" anchor="t">
             <a:normAutofit/>
           </a:bodyPr>
+          <a:lstStyle/>
           <a:p>
             <a:pPr indent="0">
               <a:lnSpc>
@@ -5135,7 +5514,7 @@
               </a:spcBef>
               <a:buNone/>
             </a:pPr>
-            <a:endParaRPr b="0" lang="en-US" sz="2800" spc="-1" strike="noStrike">
+            <a:endParaRPr lang="en-US" sz="2800" b="0" strike="noStrike" spc="-1">
               <a:solidFill>
                 <a:srgbClr val="404040"/>
               </a:solidFill>
@@ -5157,6 +5536,7 @@
         <p:spPr/>
         <p:txBody>
           <a:bodyPr/>
+          <a:lstStyle/>
           <a:p>
             <a:r>
               <a:t>Footer</a:t>
@@ -5177,27 +5557,33 @@
         <p:spPr/>
         <p:txBody>
           <a:bodyPr/>
+          <a:lstStyle/>
           <a:p>
             <a:fld id="{0E5D9B72-BF86-4DA9-A8AE-CF0117EF8ADE}" type="slidenum">
-              <a:t>&lt;#&gt;</a:t>
+              <a:t>‹#›</a:t>
             </a:fld>
+            <a:endParaRPr/>
           </a:p>
         </p:txBody>
       </p:sp>
     </p:spTree>
   </p:cSld>
+  <p:clrMapOvr>
+    <a:masterClrMapping/>
+  </p:clrMapOvr>
 </p:sldLayout>
 </file>
 
 <file path=ppt/slideMasters/slideMaster1.xml><?xml version="1.0" encoding="utf-8"?>
-<p:sldMaster xmlns:a="http://schemas.openxmlformats.org/drawingml/2006/main" xmlns:p="http://schemas.openxmlformats.org/presentationml/2006/main" xmlns:r="http://schemas.openxmlformats.org/officeDocument/2006/relationships" xmlns:p14="http://schemas.microsoft.com/office/powerpoint/2010/main" xmlns:p15="http://schemas.microsoft.com/office/powerpoint/2012/main" xmlns:mc="http://schemas.openxmlformats.org/markup-compatibility/2006">
+<p:sldMaster xmlns:a="http://schemas.openxmlformats.org/drawingml/2006/main" xmlns:r="http://schemas.openxmlformats.org/officeDocument/2006/relationships" xmlns:p="http://schemas.openxmlformats.org/presentationml/2006/main">
   <p:cSld>
     <p:bg>
       <p:bgPr>
         <a:blipFill rotWithShape="0">
-          <a:blip r:embed="rId2"/>
+          <a:blip r:embed="rId14"/>
           <a:stretch/>
         </a:blipFill>
+        <a:effectLst/>
       </p:bgPr>
     </p:bg>
     <p:spTree>
@@ -5216,12 +5602,12 @@
       </p:grpSpPr>
       <p:pic>
         <p:nvPicPr>
-          <p:cNvPr id="0" name="Picture 6" descr=""/>
+          <p:cNvPr id="5" name="Picture 6"/>
           <p:cNvPicPr/>
           <p:nvPr/>
         </p:nvPicPr>
         <p:blipFill>
-          <a:blip r:embed="rId3"/>
+          <a:blip r:embed="rId15"/>
           <a:stretch/>
         </p:blipFill>
         <p:spPr>
@@ -5239,7 +5625,7 @@
       </p:pic>
       <p:sp>
         <p:nvSpPr>
-          <p:cNvPr id="1" name="PlaceHolder 1"/>
+          <p:cNvPr id="6" name="PlaceHolder 1"/>
           <p:cNvSpPr>
             <a:spLocks noGrp="1"/>
           </p:cNvSpPr>
@@ -5270,9 +5656,9 @@
                 <a:spcPct val="100000"/>
               </a:lnSpc>
               <a:buNone/>
-              <a:defRPr b="0" lang="en-US" sz="1000" spc="-1" strike="noStrike">
-                <a:solidFill>
-                  <a:srgbClr val="ffffff"/>
+              <a:defRPr lang="en-US" sz="1000" b="0" strike="noStrike" spc="-1">
+                <a:solidFill>
+                  <a:srgbClr val="FFFFFF"/>
                 </a:solidFill>
                 <a:latin typeface="Century Gothic"/>
               </a:defRPr>
@@ -5286,15 +5672,15 @@
               <a:buNone/>
             </a:pPr>
             <a:fld id="{4B7F546A-608C-4C87-AD84-E3211A62F6AD}" type="slidenum">
-              <a:rPr b="0" lang="en-US" sz="1000" spc="-1" strike="noStrike">
-                <a:solidFill>
-                  <a:srgbClr val="ffffff"/>
-                </a:solidFill>
-                <a:latin typeface="Century Gothic"/>
-              </a:rPr>
-              <a:t>&lt;number&gt;</a:t>
+              <a:rPr lang="en-US" sz="1000" b="0" strike="noStrike" spc="-1">
+                <a:solidFill>
+                  <a:srgbClr val="FFFFFF"/>
+                </a:solidFill>
+                <a:latin typeface="Century Gothic"/>
+              </a:rPr>
+              <a:t>‹#›</a:t>
             </a:fld>
-            <a:endParaRPr b="0" lang="en-US" sz="1000" spc="-1" strike="noStrike">
+            <a:endParaRPr lang="en-US" sz="1000" b="0" strike="noStrike" spc="-1">
               <a:solidFill>
                 <a:srgbClr val="000000"/>
               </a:solidFill>
@@ -5333,7 +5719,7 @@
           <a:lstStyle>
             <a:lvl1pPr indent="0" algn="ctr">
               <a:buNone/>
-              <a:defRPr b="0" lang="en-US" sz="1400" spc="-1" strike="noStrike">
+              <a:defRPr lang="en-US" sz="1400" b="0" strike="noStrike" spc="-1">
                 <a:solidFill>
                   <a:srgbClr val="000000"/>
                 </a:solidFill>
@@ -5346,7 +5732,7 @@
               <a:buNone/>
             </a:pPr>
             <a:r>
-              <a:rPr b="0" lang="en-US" sz="1400" spc="-1" strike="noStrike">
+              <a:rPr lang="en-US" sz="1400" b="0" strike="noStrike" spc="-1">
                 <a:solidFill>
                   <a:srgbClr val="000000"/>
                 </a:solidFill>
@@ -5354,12 +5740,6 @@
               </a:rPr>
               <a:t>&lt;footer&gt;</a:t>
             </a:r>
-            <a:endParaRPr b="0" lang="en-US" sz="1400" spc="-1" strike="noStrike">
-              <a:solidFill>
-                <a:srgbClr val="000000"/>
-              </a:solidFill>
-              <a:latin typeface="Times New Roman"/>
-            </a:endParaRPr>
           </a:p>
         </p:txBody>
       </p:sp>
@@ -5387,15 +5767,16 @@
           </a:ln>
         </p:spPr>
         <p:txBody>
-          <a:bodyPr lIns="0" rIns="0" tIns="0" bIns="0" anchor="ctr">
+          <a:bodyPr lIns="0" tIns="0" rIns="0" bIns="0" anchor="ctr">
             <a:noAutofit/>
           </a:bodyPr>
+          <a:lstStyle/>
           <a:p>
             <a:pPr indent="0">
               <a:buNone/>
             </a:pPr>
             <a:r>
-              <a:rPr b="0" lang="en-US" sz="3800" spc="-1" strike="noStrike">
+              <a:rPr lang="en-US" sz="3800" b="0" strike="noStrike" spc="-1">
                 <a:solidFill>
                   <a:srgbClr val="000000"/>
                 </a:solidFill>
@@ -5403,12 +5784,6 @@
               </a:rPr>
               <a:t>Click to edit the title text format</a:t>
             </a:r>
-            <a:endParaRPr b="0" lang="en-US" sz="3800" spc="-1" strike="noStrike">
-              <a:solidFill>
-                <a:srgbClr val="000000"/>
-              </a:solidFill>
-              <a:latin typeface="Calibri"/>
-            </a:endParaRPr>
           </a:p>
         </p:txBody>
       </p:sp>
@@ -5436,9 +5811,10 @@
           </a:ln>
         </p:spPr>
         <p:txBody>
-          <a:bodyPr lIns="0" rIns="0" tIns="0" bIns="0" anchor="t">
+          <a:bodyPr lIns="0" tIns="0" rIns="0" bIns="0" anchor="t">
             <a:normAutofit/>
           </a:bodyPr>
+          <a:lstStyle/>
           <a:p>
             <a:pPr marL="432000" indent="-324000">
               <a:lnSpc>
@@ -5455,7 +5831,7 @@
               <a:buChar char=""/>
             </a:pPr>
             <a:r>
-              <a:rPr b="0" lang="en-US" sz="2800" spc="-1" strike="noStrike">
+              <a:rPr lang="en-US" sz="2800" b="0" strike="noStrike" spc="-1">
                 <a:solidFill>
                   <a:srgbClr val="404040"/>
                 </a:solidFill>
@@ -5463,15 +5839,9 @@
               </a:rPr>
               <a:t>Click to edit the outline text format</a:t>
             </a:r>
-            <a:endParaRPr b="0" lang="en-US" sz="2800" spc="-1" strike="noStrike">
-              <a:solidFill>
-                <a:srgbClr val="404040"/>
-              </a:solidFill>
-              <a:latin typeface="Century Gothic"/>
-            </a:endParaRPr>
-          </a:p>
-          <a:p>
-            <a:pPr lvl="1" marL="864000" indent="-324000">
+          </a:p>
+          <a:p>
+            <a:pPr marL="864000" lvl="1" indent="-324000">
               <a:lnSpc>
                 <a:spcPct val="90000"/>
               </a:lnSpc>
@@ -5486,7 +5856,7 @@
               <a:buChar char=""/>
             </a:pPr>
             <a:r>
-              <a:rPr b="0" lang="en-US" sz="2000" spc="-1" strike="noStrike">
+              <a:rPr lang="en-US" sz="2000" b="0" strike="noStrike" spc="-1">
                 <a:solidFill>
                   <a:srgbClr val="404040"/>
                 </a:solidFill>
@@ -5494,15 +5864,9 @@
               </a:rPr>
               <a:t>Second Outline Level</a:t>
             </a:r>
-            <a:endParaRPr b="0" lang="en-US" sz="2000" spc="-1" strike="noStrike">
-              <a:solidFill>
-                <a:srgbClr val="404040"/>
-              </a:solidFill>
-              <a:latin typeface="Century Gothic"/>
-            </a:endParaRPr>
-          </a:p>
-          <a:p>
-            <a:pPr lvl="2" marL="1296000" indent="-288000">
+          </a:p>
+          <a:p>
+            <a:pPr marL="1296000" lvl="2" indent="-288000">
               <a:lnSpc>
                 <a:spcPct val="90000"/>
               </a:lnSpc>
@@ -5517,7 +5881,7 @@
               <a:buChar char=""/>
             </a:pPr>
             <a:r>
-              <a:rPr b="0" lang="en-US" sz="1800" spc="-1" strike="noStrike">
+              <a:rPr lang="en-US" sz="1800" b="0" strike="noStrike" spc="-1">
                 <a:solidFill>
                   <a:srgbClr val="404040"/>
                 </a:solidFill>
@@ -5525,15 +5889,9 @@
               </a:rPr>
               <a:t>Third Outline Level</a:t>
             </a:r>
-            <a:endParaRPr b="0" lang="en-US" sz="1800" spc="-1" strike="noStrike">
-              <a:solidFill>
-                <a:srgbClr val="404040"/>
-              </a:solidFill>
-              <a:latin typeface="Century Gothic"/>
-            </a:endParaRPr>
-          </a:p>
-          <a:p>
-            <a:pPr lvl="3" marL="1728000" indent="-216000">
+          </a:p>
+          <a:p>
+            <a:pPr marL="1728000" lvl="3" indent="-216000">
               <a:lnSpc>
                 <a:spcPct val="90000"/>
               </a:lnSpc>
@@ -5548,7 +5906,7 @@
               <a:buChar char=""/>
             </a:pPr>
             <a:r>
-              <a:rPr b="0" lang="en-US" sz="1800" spc="-1" strike="noStrike">
+              <a:rPr lang="en-US" sz="1800" b="0" strike="noStrike" spc="-1">
                 <a:solidFill>
                   <a:srgbClr val="404040"/>
                 </a:solidFill>
@@ -5556,15 +5914,9 @@
               </a:rPr>
               <a:t>Fourth Outline Level</a:t>
             </a:r>
-            <a:endParaRPr b="0" lang="en-US" sz="1800" spc="-1" strike="noStrike">
-              <a:solidFill>
-                <a:srgbClr val="404040"/>
-              </a:solidFill>
-              <a:latin typeface="Century Gothic"/>
-            </a:endParaRPr>
-          </a:p>
-          <a:p>
-            <a:pPr lvl="4" marL="2160000" indent="-216000">
+          </a:p>
+          <a:p>
+            <a:pPr marL="2160000" lvl="4" indent="-216000">
               <a:lnSpc>
                 <a:spcPct val="90000"/>
               </a:lnSpc>
@@ -5579,7 +5931,7 @@
               <a:buChar char=""/>
             </a:pPr>
             <a:r>
-              <a:rPr b="0" lang="en-US" sz="2000" spc="-1" strike="noStrike">
+              <a:rPr lang="en-US" sz="2000" b="0" strike="noStrike" spc="-1">
                 <a:solidFill>
                   <a:srgbClr val="404040"/>
                 </a:solidFill>
@@ -5587,15 +5939,9 @@
               </a:rPr>
               <a:t>Fifth Outline Level</a:t>
             </a:r>
-            <a:endParaRPr b="0" lang="en-US" sz="2000" spc="-1" strike="noStrike">
-              <a:solidFill>
-                <a:srgbClr val="404040"/>
-              </a:solidFill>
-              <a:latin typeface="Century Gothic"/>
-            </a:endParaRPr>
-          </a:p>
-          <a:p>
-            <a:pPr lvl="5" marL="2592000" indent="-216000">
+          </a:p>
+          <a:p>
+            <a:pPr marL="2592000" lvl="5" indent="-216000">
               <a:lnSpc>
                 <a:spcPct val="90000"/>
               </a:lnSpc>
@@ -5610,7 +5956,7 @@
               <a:buChar char=""/>
             </a:pPr>
             <a:r>
-              <a:rPr b="0" lang="en-US" sz="2000" spc="-1" strike="noStrike">
+              <a:rPr lang="en-US" sz="2000" b="0" strike="noStrike" spc="-1">
                 <a:solidFill>
                   <a:srgbClr val="404040"/>
                 </a:solidFill>
@@ -5618,15 +5964,9 @@
               </a:rPr>
               <a:t>Sixth Outline Level</a:t>
             </a:r>
-            <a:endParaRPr b="0" lang="en-US" sz="2000" spc="-1" strike="noStrike">
-              <a:solidFill>
-                <a:srgbClr val="404040"/>
-              </a:solidFill>
-              <a:latin typeface="Century Gothic"/>
-            </a:endParaRPr>
-          </a:p>
-          <a:p>
-            <a:pPr lvl="6" marL="3024000" indent="-216000">
+          </a:p>
+          <a:p>
+            <a:pPr marL="3024000" lvl="6" indent="-216000">
               <a:lnSpc>
                 <a:spcPct val="90000"/>
               </a:lnSpc>
@@ -5641,7 +5981,7 @@
               <a:buChar char=""/>
             </a:pPr>
             <a:r>
-              <a:rPr b="0" lang="en-US" sz="2000" spc="-1" strike="noStrike">
+              <a:rPr lang="en-US" sz="2000" b="0" strike="noStrike" spc="-1">
                 <a:solidFill>
                   <a:srgbClr val="404040"/>
                 </a:solidFill>
@@ -5649,44 +5989,319 @@
               </a:rPr>
               <a:t>Seventh Outline Level</a:t>
             </a:r>
-            <a:endParaRPr b="0" lang="en-US" sz="2000" spc="-1" strike="noStrike">
-              <a:solidFill>
-                <a:srgbClr val="404040"/>
-              </a:solidFill>
-              <a:latin typeface="Century Gothic"/>
-            </a:endParaRPr>
           </a:p>
         </p:txBody>
       </p:sp>
     </p:spTree>
   </p:cSld>
-  <p:clrMap bg1="lt1" bg2="lt2" tx1="dk1" tx2="dk2" accent1="accent1" accent2="accent2" accent3="accent3" accent4="accent4" accent5="accent5" accent6="accent6" hlink="hlink" folHlink="folHlink"/>
+  <p:clrMap bg1="lt1" tx1="dk1" bg2="lt2" tx2="dk2" accent1="accent1" accent2="accent2" accent3="accent3" accent4="accent4" accent5="accent5" accent6="accent6" hlink="hlink" folHlink="folHlink"/>
   <p:sldLayoutIdLst>
-    <p:sldLayoutId id="2147483649" r:id="rId4"/>
-    <p:sldLayoutId id="2147483650" r:id="rId5"/>
-    <p:sldLayoutId id="2147483651" r:id="rId6"/>
-    <p:sldLayoutId id="2147483652" r:id="rId7"/>
-    <p:sldLayoutId id="2147483653" r:id="rId8"/>
-    <p:sldLayoutId id="2147483654" r:id="rId9"/>
-    <p:sldLayoutId id="2147483655" r:id="rId10"/>
-    <p:sldLayoutId id="2147483656" r:id="rId11"/>
-    <p:sldLayoutId id="2147483657" r:id="rId12"/>
-    <p:sldLayoutId id="2147483658" r:id="rId13"/>
-    <p:sldLayoutId id="2147483659" r:id="rId14"/>
-    <p:sldLayoutId id="2147483660" r:id="rId15"/>
+    <p:sldLayoutId id="2147483649" r:id="rId1"/>
+    <p:sldLayoutId id="2147483650" r:id="rId2"/>
+    <p:sldLayoutId id="2147483651" r:id="rId3"/>
+    <p:sldLayoutId id="2147483652" r:id="rId4"/>
+    <p:sldLayoutId id="2147483653" r:id="rId5"/>
+    <p:sldLayoutId id="2147483654" r:id="rId6"/>
+    <p:sldLayoutId id="2147483655" r:id="rId7"/>
+    <p:sldLayoutId id="2147483656" r:id="rId8"/>
+    <p:sldLayoutId id="2147483657" r:id="rId9"/>
+    <p:sldLayoutId id="2147483658" r:id="rId10"/>
+    <p:sldLayoutId id="2147483659" r:id="rId11"/>
+    <p:sldLayoutId id="2147483660" r:id="rId12"/>
   </p:sldLayoutIdLst>
+  <p:txStyles>
+    <p:titleStyle>
+      <a:lvl1pPr algn="l" defTabSz="914400" rtl="0" eaLnBrk="1" latinLnBrk="0" hangingPunct="1">
+        <a:lnSpc>
+          <a:spcPct val="90000"/>
+        </a:lnSpc>
+        <a:spcBef>
+          <a:spcPct val="0"/>
+        </a:spcBef>
+        <a:buNone/>
+        <a:defRPr sz="4400" kern="1200">
+          <a:solidFill>
+            <a:schemeClr val="tx1"/>
+          </a:solidFill>
+          <a:latin typeface="+mj-lt"/>
+          <a:ea typeface="+mj-ea"/>
+          <a:cs typeface="+mj-cs"/>
+        </a:defRPr>
+      </a:lvl1pPr>
+    </p:titleStyle>
+    <p:bodyStyle>
+      <a:lvl1pPr marL="228600" indent="-228600" algn="l" defTabSz="914400" rtl="0" eaLnBrk="1" latinLnBrk="0" hangingPunct="1">
+        <a:lnSpc>
+          <a:spcPct val="90000"/>
+        </a:lnSpc>
+        <a:spcBef>
+          <a:spcPts val="1000"/>
+        </a:spcBef>
+        <a:buFont typeface="Arial" panose="020B0604020202020204" pitchFamily="34" charset="0"/>
+        <a:buChar char="•"/>
+        <a:defRPr sz="2800" kern="1200">
+          <a:solidFill>
+            <a:schemeClr val="tx1"/>
+          </a:solidFill>
+          <a:latin typeface="+mn-lt"/>
+          <a:ea typeface="+mn-ea"/>
+          <a:cs typeface="+mn-cs"/>
+        </a:defRPr>
+      </a:lvl1pPr>
+      <a:lvl2pPr marL="685800" indent="-228600" algn="l" defTabSz="914400" rtl="0" eaLnBrk="1" latinLnBrk="0" hangingPunct="1">
+        <a:lnSpc>
+          <a:spcPct val="90000"/>
+        </a:lnSpc>
+        <a:spcBef>
+          <a:spcPts val="500"/>
+        </a:spcBef>
+        <a:buFont typeface="Arial" panose="020B0604020202020204" pitchFamily="34" charset="0"/>
+        <a:buChar char="•"/>
+        <a:defRPr sz="2400" kern="1200">
+          <a:solidFill>
+            <a:schemeClr val="tx1"/>
+          </a:solidFill>
+          <a:latin typeface="+mn-lt"/>
+          <a:ea typeface="+mn-ea"/>
+          <a:cs typeface="+mn-cs"/>
+        </a:defRPr>
+      </a:lvl2pPr>
+      <a:lvl3pPr marL="1143000" indent="-228600" algn="l" defTabSz="914400" rtl="0" eaLnBrk="1" latinLnBrk="0" hangingPunct="1">
+        <a:lnSpc>
+          <a:spcPct val="90000"/>
+        </a:lnSpc>
+        <a:spcBef>
+          <a:spcPts val="500"/>
+        </a:spcBef>
+        <a:buFont typeface="Arial" panose="020B0604020202020204" pitchFamily="34" charset="0"/>
+        <a:buChar char="•"/>
+        <a:defRPr sz="2000" kern="1200">
+          <a:solidFill>
+            <a:schemeClr val="tx1"/>
+          </a:solidFill>
+          <a:latin typeface="+mn-lt"/>
+          <a:ea typeface="+mn-ea"/>
+          <a:cs typeface="+mn-cs"/>
+        </a:defRPr>
+      </a:lvl3pPr>
+      <a:lvl4pPr marL="1600200" indent="-228600" algn="l" defTabSz="914400" rtl="0" eaLnBrk="1" latinLnBrk="0" hangingPunct="1">
+        <a:lnSpc>
+          <a:spcPct val="90000"/>
+        </a:lnSpc>
+        <a:spcBef>
+          <a:spcPts val="500"/>
+        </a:spcBef>
+        <a:buFont typeface="Arial" panose="020B0604020202020204" pitchFamily="34" charset="0"/>
+        <a:buChar char="•"/>
+        <a:defRPr sz="1800" kern="1200">
+          <a:solidFill>
+            <a:schemeClr val="tx1"/>
+          </a:solidFill>
+          <a:latin typeface="+mn-lt"/>
+          <a:ea typeface="+mn-ea"/>
+          <a:cs typeface="+mn-cs"/>
+        </a:defRPr>
+      </a:lvl4pPr>
+      <a:lvl5pPr marL="2057400" indent="-228600" algn="l" defTabSz="914400" rtl="0" eaLnBrk="1" latinLnBrk="0" hangingPunct="1">
+        <a:lnSpc>
+          <a:spcPct val="90000"/>
+        </a:lnSpc>
+        <a:spcBef>
+          <a:spcPts val="500"/>
+        </a:spcBef>
+        <a:buFont typeface="Arial" panose="020B0604020202020204" pitchFamily="34" charset="0"/>
+        <a:buChar char="•"/>
+        <a:defRPr sz="1800" kern="1200">
+          <a:solidFill>
+            <a:schemeClr val="tx1"/>
+          </a:solidFill>
+          <a:latin typeface="+mn-lt"/>
+          <a:ea typeface="+mn-ea"/>
+          <a:cs typeface="+mn-cs"/>
+        </a:defRPr>
+      </a:lvl5pPr>
+      <a:lvl6pPr marL="2514600" indent="-228600" algn="l" defTabSz="914400" rtl="0" eaLnBrk="1" latinLnBrk="0" hangingPunct="1">
+        <a:lnSpc>
+          <a:spcPct val="90000"/>
+        </a:lnSpc>
+        <a:spcBef>
+          <a:spcPts val="500"/>
+        </a:spcBef>
+        <a:buFont typeface="Arial" panose="020B0604020202020204" pitchFamily="34" charset="0"/>
+        <a:buChar char="•"/>
+        <a:defRPr sz="1800" kern="1200">
+          <a:solidFill>
+            <a:schemeClr val="tx1"/>
+          </a:solidFill>
+          <a:latin typeface="+mn-lt"/>
+          <a:ea typeface="+mn-ea"/>
+          <a:cs typeface="+mn-cs"/>
+        </a:defRPr>
+      </a:lvl6pPr>
+      <a:lvl7pPr marL="2971800" indent="-228600" algn="l" defTabSz="914400" rtl="0" eaLnBrk="1" latinLnBrk="0" hangingPunct="1">
+        <a:lnSpc>
+          <a:spcPct val="90000"/>
+        </a:lnSpc>
+        <a:spcBef>
+          <a:spcPts val="500"/>
+        </a:spcBef>
+        <a:buFont typeface="Arial" panose="020B0604020202020204" pitchFamily="34" charset="0"/>
+        <a:buChar char="•"/>
+        <a:defRPr sz="1800" kern="1200">
+          <a:solidFill>
+            <a:schemeClr val="tx1"/>
+          </a:solidFill>
+          <a:latin typeface="+mn-lt"/>
+          <a:ea typeface="+mn-ea"/>
+          <a:cs typeface="+mn-cs"/>
+        </a:defRPr>
+      </a:lvl7pPr>
+      <a:lvl8pPr marL="3429000" indent="-228600" algn="l" defTabSz="914400" rtl="0" eaLnBrk="1" latinLnBrk="0" hangingPunct="1">
+        <a:lnSpc>
+          <a:spcPct val="90000"/>
+        </a:lnSpc>
+        <a:spcBef>
+          <a:spcPts val="500"/>
+        </a:spcBef>
+        <a:buFont typeface="Arial" panose="020B0604020202020204" pitchFamily="34" charset="0"/>
+        <a:buChar char="•"/>
+        <a:defRPr sz="1800" kern="1200">
+          <a:solidFill>
+            <a:schemeClr val="tx1"/>
+          </a:solidFill>
+          <a:latin typeface="+mn-lt"/>
+          <a:ea typeface="+mn-ea"/>
+          <a:cs typeface="+mn-cs"/>
+        </a:defRPr>
+      </a:lvl8pPr>
+      <a:lvl9pPr marL="3886200" indent="-228600" algn="l" defTabSz="914400" rtl="0" eaLnBrk="1" latinLnBrk="0" hangingPunct="1">
+        <a:lnSpc>
+          <a:spcPct val="90000"/>
+        </a:lnSpc>
+        <a:spcBef>
+          <a:spcPts val="500"/>
+        </a:spcBef>
+        <a:buFont typeface="Arial" panose="020B0604020202020204" pitchFamily="34" charset="0"/>
+        <a:buChar char="•"/>
+        <a:defRPr sz="1800" kern="1200">
+          <a:solidFill>
+            <a:schemeClr val="tx1"/>
+          </a:solidFill>
+          <a:latin typeface="+mn-lt"/>
+          <a:ea typeface="+mn-ea"/>
+          <a:cs typeface="+mn-cs"/>
+        </a:defRPr>
+      </a:lvl9pPr>
+    </p:bodyStyle>
+    <p:otherStyle>
+      <a:defPPr>
+        <a:defRPr lang="en-US"/>
+      </a:defPPr>
+      <a:lvl1pPr marL="0" algn="l" defTabSz="914400" rtl="0" eaLnBrk="1" latinLnBrk="0" hangingPunct="1">
+        <a:defRPr sz="1800" kern="1200">
+          <a:solidFill>
+            <a:schemeClr val="tx1"/>
+          </a:solidFill>
+          <a:latin typeface="+mn-lt"/>
+          <a:ea typeface="+mn-ea"/>
+          <a:cs typeface="+mn-cs"/>
+        </a:defRPr>
+      </a:lvl1pPr>
+      <a:lvl2pPr marL="457200" algn="l" defTabSz="914400" rtl="0" eaLnBrk="1" latinLnBrk="0" hangingPunct="1">
+        <a:defRPr sz="1800" kern="1200">
+          <a:solidFill>
+            <a:schemeClr val="tx1"/>
+          </a:solidFill>
+          <a:latin typeface="+mn-lt"/>
+          <a:ea typeface="+mn-ea"/>
+          <a:cs typeface="+mn-cs"/>
+        </a:defRPr>
+      </a:lvl2pPr>
+      <a:lvl3pPr marL="914400" algn="l" defTabSz="914400" rtl="0" eaLnBrk="1" latinLnBrk="0" hangingPunct="1">
+        <a:defRPr sz="1800" kern="1200">
+          <a:solidFill>
+            <a:schemeClr val="tx1"/>
+          </a:solidFill>
+          <a:latin typeface="+mn-lt"/>
+          <a:ea typeface="+mn-ea"/>
+          <a:cs typeface="+mn-cs"/>
+        </a:defRPr>
+      </a:lvl3pPr>
+      <a:lvl4pPr marL="1371600" algn="l" defTabSz="914400" rtl="0" eaLnBrk="1" latinLnBrk="0" hangingPunct="1">
+        <a:defRPr sz="1800" kern="1200">
+          <a:solidFill>
+            <a:schemeClr val="tx1"/>
+          </a:solidFill>
+          <a:latin typeface="+mn-lt"/>
+          <a:ea typeface="+mn-ea"/>
+          <a:cs typeface="+mn-cs"/>
+        </a:defRPr>
+      </a:lvl4pPr>
+      <a:lvl5pPr marL="1828800" algn="l" defTabSz="914400" rtl="0" eaLnBrk="1" latinLnBrk="0" hangingPunct="1">
+        <a:defRPr sz="1800" kern="1200">
+          <a:solidFill>
+            <a:schemeClr val="tx1"/>
+          </a:solidFill>
+          <a:latin typeface="+mn-lt"/>
+          <a:ea typeface="+mn-ea"/>
+          <a:cs typeface="+mn-cs"/>
+        </a:defRPr>
+      </a:lvl5pPr>
+      <a:lvl6pPr marL="2286000" algn="l" defTabSz="914400" rtl="0" eaLnBrk="1" latinLnBrk="0" hangingPunct="1">
+        <a:defRPr sz="1800" kern="1200">
+          <a:solidFill>
+            <a:schemeClr val="tx1"/>
+          </a:solidFill>
+          <a:latin typeface="+mn-lt"/>
+          <a:ea typeface="+mn-ea"/>
+          <a:cs typeface="+mn-cs"/>
+        </a:defRPr>
+      </a:lvl6pPr>
+      <a:lvl7pPr marL="2743200" algn="l" defTabSz="914400" rtl="0" eaLnBrk="1" latinLnBrk="0" hangingPunct="1">
+        <a:defRPr sz="1800" kern="1200">
+          <a:solidFill>
+            <a:schemeClr val="tx1"/>
+          </a:solidFill>
+          <a:latin typeface="+mn-lt"/>
+          <a:ea typeface="+mn-ea"/>
+          <a:cs typeface="+mn-cs"/>
+        </a:defRPr>
+      </a:lvl7pPr>
+      <a:lvl8pPr marL="3200400" algn="l" defTabSz="914400" rtl="0" eaLnBrk="1" latinLnBrk="0" hangingPunct="1">
+        <a:defRPr sz="1800" kern="1200">
+          <a:solidFill>
+            <a:schemeClr val="tx1"/>
+          </a:solidFill>
+          <a:latin typeface="+mn-lt"/>
+          <a:ea typeface="+mn-ea"/>
+          <a:cs typeface="+mn-cs"/>
+        </a:defRPr>
+      </a:lvl8pPr>
+      <a:lvl9pPr marL="3657600" algn="l" defTabSz="914400" rtl="0" eaLnBrk="1" latinLnBrk="0" hangingPunct="1">
+        <a:defRPr sz="1800" kern="1200">
+          <a:solidFill>
+            <a:schemeClr val="tx1"/>
+          </a:solidFill>
+          <a:latin typeface="+mn-lt"/>
+          <a:ea typeface="+mn-ea"/>
+          <a:cs typeface="+mn-cs"/>
+        </a:defRPr>
+      </a:lvl9pPr>
+    </p:otherStyle>
+  </p:txStyles>
 </p:sldMaster>
 </file>
 
 <file path=ppt/slideMasters/slideMaster2.xml><?xml version="1.0" encoding="utf-8"?>
-<p:sldMaster xmlns:a="http://schemas.openxmlformats.org/drawingml/2006/main" xmlns:p="http://schemas.openxmlformats.org/presentationml/2006/main" xmlns:r="http://schemas.openxmlformats.org/officeDocument/2006/relationships" xmlns:p14="http://schemas.microsoft.com/office/powerpoint/2010/main" xmlns:p15="http://schemas.microsoft.com/office/powerpoint/2012/main" xmlns:mc="http://schemas.openxmlformats.org/markup-compatibility/2006">
+<p:sldMaster xmlns:a="http://schemas.openxmlformats.org/drawingml/2006/main" xmlns:r="http://schemas.openxmlformats.org/officeDocument/2006/relationships" xmlns:p="http://schemas.openxmlformats.org/presentationml/2006/main">
   <p:cSld>
     <p:bg>
       <p:bgPr>
         <a:blipFill rotWithShape="0">
-          <a:blip r:embed="rId2"/>
+          <a:blip r:embed="rId14"/>
           <a:stretch/>
         </a:blipFill>
+        <a:effectLst/>
       </p:bgPr>
     </p:bg>
     <p:spTree>
@@ -5705,12 +6320,12 @@
       </p:grpSpPr>
       <p:pic>
         <p:nvPicPr>
-          <p:cNvPr id="41" name="Picture 6" descr=""/>
+          <p:cNvPr id="41" name="Picture 6"/>
           <p:cNvPicPr/>
           <p:nvPr/>
         </p:nvPicPr>
         <p:blipFill>
-          <a:blip r:embed="rId3"/>
+          <a:blip r:embed="rId15"/>
           <a:stretch/>
         </p:blipFill>
         <p:spPr>
@@ -5753,6 +6368,7 @@
           <a:bodyPr numCol="1" spcCol="0" anchor="ctr">
             <a:noAutofit/>
           </a:bodyPr>
+          <a:lstStyle/>
           <a:p>
             <a:pPr indent="0">
               <a:lnSpc>
@@ -5761,15 +6377,15 @@
               <a:buNone/>
             </a:pPr>
             <a:r>
-              <a:rPr b="0" lang="en-US" sz="3800" spc="-1" strike="noStrike" cap="all">
-                <a:solidFill>
-                  <a:srgbClr val="265b4d"/>
+              <a:rPr lang="en-US" sz="3800" b="0" strike="noStrike" cap="all" spc="-1">
+                <a:solidFill>
+                  <a:srgbClr val="265B4D"/>
                 </a:solidFill>
                 <a:latin typeface="Century Gothic"/>
               </a:rPr>
               <a:t>Click to edit Master title style</a:t>
             </a:r>
-            <a:endParaRPr b="0" lang="en-US" sz="3800" spc="-1" strike="noStrike">
+            <a:endParaRPr lang="en-US" sz="3800" b="0" strike="noStrike" spc="-1">
               <a:solidFill>
                 <a:srgbClr val="000000"/>
               </a:solidFill>
@@ -5805,6 +6421,7 @@
           <a:bodyPr numCol="1" spcCol="0" anchor="t">
             <a:noAutofit/>
           </a:bodyPr>
+          <a:lstStyle/>
           <a:p>
             <a:pPr marL="228600" indent="-228600">
               <a:lnSpc>
@@ -5820,7 +6437,7 @@
               <a:buChar char="•"/>
             </a:pPr>
             <a:r>
-              <a:rPr b="0" lang="en-US" sz="2400" spc="-1" strike="noStrike">
+              <a:rPr lang="en-US" sz="2400" b="0" strike="noStrike" spc="-1">
                 <a:solidFill>
                   <a:srgbClr val="404040"/>
                 </a:solidFill>
@@ -5828,15 +6445,9 @@
               </a:rPr>
               <a:t>Click to edit Master text styles</a:t>
             </a:r>
-            <a:endParaRPr b="0" lang="en-US" sz="2400" spc="-1" strike="noStrike">
-              <a:solidFill>
-                <a:srgbClr val="404040"/>
-              </a:solidFill>
-              <a:latin typeface="Century Gothic"/>
-            </a:endParaRPr>
-          </a:p>
-          <a:p>
-            <a:pPr lvl="1" marL="685800" indent="-228600">
+          </a:p>
+          <a:p>
+            <a:pPr marL="685800" lvl="1" indent="-228600">
               <a:lnSpc>
                 <a:spcPct val="90000"/>
               </a:lnSpc>
@@ -5850,7 +6461,7 @@
               <a:buChar char="•"/>
             </a:pPr>
             <a:r>
-              <a:rPr b="0" lang="en-US" sz="2000" spc="-1" strike="noStrike">
+              <a:rPr lang="en-US" sz="2000" b="0" strike="noStrike" spc="-1">
                 <a:solidFill>
                   <a:srgbClr val="404040"/>
                 </a:solidFill>
@@ -5858,15 +6469,9 @@
               </a:rPr>
               <a:t>Second level</a:t>
             </a:r>
-            <a:endParaRPr b="0" lang="en-US" sz="2000" spc="-1" strike="noStrike">
-              <a:solidFill>
-                <a:srgbClr val="404040"/>
-              </a:solidFill>
-              <a:latin typeface="Century Gothic"/>
-            </a:endParaRPr>
-          </a:p>
-          <a:p>
-            <a:pPr lvl="2" marL="1143000" indent="-228600">
+          </a:p>
+          <a:p>
+            <a:pPr marL="1143000" lvl="2" indent="-228600">
               <a:lnSpc>
                 <a:spcPct val="90000"/>
               </a:lnSpc>
@@ -5880,7 +6485,7 @@
               <a:buChar char="•"/>
             </a:pPr>
             <a:r>
-              <a:rPr b="0" lang="en-US" sz="1800" spc="-1" strike="noStrike">
+              <a:rPr lang="en-US" sz="1800" b="0" strike="noStrike" spc="-1">
                 <a:solidFill>
                   <a:srgbClr val="404040"/>
                 </a:solidFill>
@@ -5888,15 +6493,9 @@
               </a:rPr>
               <a:t>Third level</a:t>
             </a:r>
-            <a:endParaRPr b="0" lang="en-US" sz="1800" spc="-1" strike="noStrike">
-              <a:solidFill>
-                <a:srgbClr val="404040"/>
-              </a:solidFill>
-              <a:latin typeface="Century Gothic"/>
-            </a:endParaRPr>
-          </a:p>
-          <a:p>
-            <a:pPr lvl="3" marL="1600200" indent="-228600">
+          </a:p>
+          <a:p>
+            <a:pPr marL="1600200" lvl="3" indent="-228600">
               <a:lnSpc>
                 <a:spcPct val="90000"/>
               </a:lnSpc>
@@ -5910,7 +6509,7 @@
               <a:buChar char="•"/>
             </a:pPr>
             <a:r>
-              <a:rPr b="0" lang="en-US" sz="1600" spc="-1" strike="noStrike">
+              <a:rPr lang="en-US" sz="1600" b="0" strike="noStrike" spc="-1">
                 <a:solidFill>
                   <a:srgbClr val="404040"/>
                 </a:solidFill>
@@ -5918,15 +6517,9 @@
               </a:rPr>
               <a:t>Fourth level</a:t>
             </a:r>
-            <a:endParaRPr b="0" lang="en-US" sz="1600" spc="-1" strike="noStrike">
-              <a:solidFill>
-                <a:srgbClr val="404040"/>
-              </a:solidFill>
-              <a:latin typeface="Century Gothic"/>
-            </a:endParaRPr>
-          </a:p>
-          <a:p>
-            <a:pPr lvl="4" marL="2057400" indent="-228600">
+          </a:p>
+          <a:p>
+            <a:pPr marL="2057400" lvl="4" indent="-228600">
               <a:lnSpc>
                 <a:spcPct val="90000"/>
               </a:lnSpc>
@@ -5940,7 +6533,7 @@
               <a:buChar char="•"/>
             </a:pPr>
             <a:r>
-              <a:rPr b="0" lang="en-US" sz="1600" spc="-1" strike="noStrike">
+              <a:rPr lang="en-US" sz="1600" b="0" strike="noStrike" spc="-1">
                 <a:solidFill>
                   <a:srgbClr val="404040"/>
                 </a:solidFill>
@@ -5948,12 +6541,6 @@
               </a:rPr>
               <a:t>Fifth level</a:t>
             </a:r>
-            <a:endParaRPr b="0" lang="en-US" sz="1600" spc="-1" strike="noStrike">
-              <a:solidFill>
-                <a:srgbClr val="404040"/>
-              </a:solidFill>
-              <a:latin typeface="Century Gothic"/>
-            </a:endParaRPr>
           </a:p>
         </p:txBody>
       </p:sp>
@@ -5990,9 +6577,9 @@
                 <a:spcPct val="100000"/>
               </a:lnSpc>
               <a:buNone/>
-              <a:defRPr b="0" lang="en-US" sz="1000" spc="-1" strike="noStrike">
-                <a:solidFill>
-                  <a:srgbClr val="ffffff"/>
+              <a:defRPr lang="en-US" sz="1000" b="0" strike="noStrike" spc="-1">
+                <a:solidFill>
+                  <a:srgbClr val="FFFFFF"/>
                 </a:solidFill>
                 <a:latin typeface="Century Gothic"/>
               </a:defRPr>
@@ -6006,15 +6593,15 @@
               <a:buNone/>
             </a:pPr>
             <a:fld id="{7576B517-5F38-4F95-992E-50DB230AEACD}" type="slidenum">
-              <a:rPr b="0" lang="en-US" sz="1000" spc="-1" strike="noStrike">
-                <a:solidFill>
-                  <a:srgbClr val="ffffff"/>
-                </a:solidFill>
-                <a:latin typeface="Century Gothic"/>
-              </a:rPr>
-              <a:t>&lt;number&gt;</a:t>
+              <a:rPr lang="en-US" sz="1000" b="0" strike="noStrike" spc="-1">
+                <a:solidFill>
+                  <a:srgbClr val="FFFFFF"/>
+                </a:solidFill>
+                <a:latin typeface="Century Gothic"/>
+              </a:rPr>
+              <a:t>‹#›</a:t>
             </a:fld>
-            <a:endParaRPr b="0" lang="en-US" sz="1000" spc="-1" strike="noStrike">
+            <a:endParaRPr lang="en-US" sz="1000" b="0" strike="noStrike" spc="-1">
               <a:solidFill>
                 <a:srgbClr val="000000"/>
               </a:solidFill>
@@ -6053,7 +6640,7 @@
           <a:lstStyle>
             <a:lvl1pPr indent="0" algn="ctr">
               <a:buNone/>
-              <a:defRPr b="0" lang="en-US" sz="1400" spc="-1" strike="noStrike">
+              <a:defRPr lang="en-US" sz="1400" b="0" strike="noStrike" spc="-1">
                 <a:solidFill>
                   <a:srgbClr val="000000"/>
                 </a:solidFill>
@@ -6066,7 +6653,7 @@
               <a:buNone/>
             </a:pPr>
             <a:r>
-              <a:rPr b="0" lang="en-US" sz="1400" spc="-1" strike="noStrike">
+              <a:rPr lang="en-US" sz="1400" b="0" strike="noStrike" spc="-1">
                 <a:solidFill>
                   <a:srgbClr val="000000"/>
                 </a:solidFill>
@@ -6074,44 +6661,319 @@
               </a:rPr>
               <a:t>&lt;footer&gt;</a:t>
             </a:r>
-            <a:endParaRPr b="0" lang="en-US" sz="1400" spc="-1" strike="noStrike">
-              <a:solidFill>
-                <a:srgbClr val="000000"/>
-              </a:solidFill>
-              <a:latin typeface="Times New Roman"/>
-            </a:endParaRPr>
           </a:p>
         </p:txBody>
       </p:sp>
     </p:spTree>
   </p:cSld>
-  <p:clrMap bg1="lt1" bg2="lt2" tx1="dk1" tx2="dk2" accent1="accent1" accent2="accent2" accent3="accent3" accent4="accent4" accent5="accent5" accent6="accent6" hlink="hlink" folHlink="folHlink"/>
+  <p:clrMap bg1="lt1" tx1="dk1" bg2="lt2" tx2="dk2" accent1="accent1" accent2="accent2" accent3="accent3" accent4="accent4" accent5="accent5" accent6="accent6" hlink="hlink" folHlink="folHlink"/>
   <p:sldLayoutIdLst>
-    <p:sldLayoutId id="2147483662" r:id="rId4"/>
-    <p:sldLayoutId id="2147483663" r:id="rId5"/>
-    <p:sldLayoutId id="2147483664" r:id="rId6"/>
-    <p:sldLayoutId id="2147483665" r:id="rId7"/>
-    <p:sldLayoutId id="2147483666" r:id="rId8"/>
-    <p:sldLayoutId id="2147483667" r:id="rId9"/>
-    <p:sldLayoutId id="2147483668" r:id="rId10"/>
-    <p:sldLayoutId id="2147483669" r:id="rId11"/>
-    <p:sldLayoutId id="2147483670" r:id="rId12"/>
-    <p:sldLayoutId id="2147483671" r:id="rId13"/>
-    <p:sldLayoutId id="2147483672" r:id="rId14"/>
-    <p:sldLayoutId id="2147483673" r:id="rId15"/>
+    <p:sldLayoutId id="2147483662" r:id="rId1"/>
+    <p:sldLayoutId id="2147483663" r:id="rId2"/>
+    <p:sldLayoutId id="2147483664" r:id="rId3"/>
+    <p:sldLayoutId id="2147483665" r:id="rId4"/>
+    <p:sldLayoutId id="2147483666" r:id="rId5"/>
+    <p:sldLayoutId id="2147483667" r:id="rId6"/>
+    <p:sldLayoutId id="2147483668" r:id="rId7"/>
+    <p:sldLayoutId id="2147483669" r:id="rId8"/>
+    <p:sldLayoutId id="2147483670" r:id="rId9"/>
+    <p:sldLayoutId id="2147483671" r:id="rId10"/>
+    <p:sldLayoutId id="2147483672" r:id="rId11"/>
+    <p:sldLayoutId id="2147483673" r:id="rId12"/>
   </p:sldLayoutIdLst>
+  <p:txStyles>
+    <p:titleStyle>
+      <a:lvl1pPr algn="l" defTabSz="914400" rtl="0" eaLnBrk="1" latinLnBrk="0" hangingPunct="1">
+        <a:lnSpc>
+          <a:spcPct val="90000"/>
+        </a:lnSpc>
+        <a:spcBef>
+          <a:spcPct val="0"/>
+        </a:spcBef>
+        <a:buNone/>
+        <a:defRPr sz="4400" kern="1200">
+          <a:solidFill>
+            <a:schemeClr val="tx1"/>
+          </a:solidFill>
+          <a:latin typeface="+mj-lt"/>
+          <a:ea typeface="+mj-ea"/>
+          <a:cs typeface="+mj-cs"/>
+        </a:defRPr>
+      </a:lvl1pPr>
+    </p:titleStyle>
+    <p:bodyStyle>
+      <a:lvl1pPr marL="228600" indent="-228600" algn="l" defTabSz="914400" rtl="0" eaLnBrk="1" latinLnBrk="0" hangingPunct="1">
+        <a:lnSpc>
+          <a:spcPct val="90000"/>
+        </a:lnSpc>
+        <a:spcBef>
+          <a:spcPts val="1000"/>
+        </a:spcBef>
+        <a:buFont typeface="Arial" panose="020B0604020202020204" pitchFamily="34" charset="0"/>
+        <a:buChar char="•"/>
+        <a:defRPr sz="2800" kern="1200">
+          <a:solidFill>
+            <a:schemeClr val="tx1"/>
+          </a:solidFill>
+          <a:latin typeface="+mn-lt"/>
+          <a:ea typeface="+mn-ea"/>
+          <a:cs typeface="+mn-cs"/>
+        </a:defRPr>
+      </a:lvl1pPr>
+      <a:lvl2pPr marL="685800" indent="-228600" algn="l" defTabSz="914400" rtl="0" eaLnBrk="1" latinLnBrk="0" hangingPunct="1">
+        <a:lnSpc>
+          <a:spcPct val="90000"/>
+        </a:lnSpc>
+        <a:spcBef>
+          <a:spcPts val="500"/>
+        </a:spcBef>
+        <a:buFont typeface="Arial" panose="020B0604020202020204" pitchFamily="34" charset="0"/>
+        <a:buChar char="•"/>
+        <a:defRPr sz="2400" kern="1200">
+          <a:solidFill>
+            <a:schemeClr val="tx1"/>
+          </a:solidFill>
+          <a:latin typeface="+mn-lt"/>
+          <a:ea typeface="+mn-ea"/>
+          <a:cs typeface="+mn-cs"/>
+        </a:defRPr>
+      </a:lvl2pPr>
+      <a:lvl3pPr marL="1143000" indent="-228600" algn="l" defTabSz="914400" rtl="0" eaLnBrk="1" latinLnBrk="0" hangingPunct="1">
+        <a:lnSpc>
+          <a:spcPct val="90000"/>
+        </a:lnSpc>
+        <a:spcBef>
+          <a:spcPts val="500"/>
+        </a:spcBef>
+        <a:buFont typeface="Arial" panose="020B0604020202020204" pitchFamily="34" charset="0"/>
+        <a:buChar char="•"/>
+        <a:defRPr sz="2000" kern="1200">
+          <a:solidFill>
+            <a:schemeClr val="tx1"/>
+          </a:solidFill>
+          <a:latin typeface="+mn-lt"/>
+          <a:ea typeface="+mn-ea"/>
+          <a:cs typeface="+mn-cs"/>
+        </a:defRPr>
+      </a:lvl3pPr>
+      <a:lvl4pPr marL="1600200" indent="-228600" algn="l" defTabSz="914400" rtl="0" eaLnBrk="1" latinLnBrk="0" hangingPunct="1">
+        <a:lnSpc>
+          <a:spcPct val="90000"/>
+        </a:lnSpc>
+        <a:spcBef>
+          <a:spcPts val="500"/>
+        </a:spcBef>
+        <a:buFont typeface="Arial" panose="020B0604020202020204" pitchFamily="34" charset="0"/>
+        <a:buChar char="•"/>
+        <a:defRPr sz="1800" kern="1200">
+          <a:solidFill>
+            <a:schemeClr val="tx1"/>
+          </a:solidFill>
+          <a:latin typeface="+mn-lt"/>
+          <a:ea typeface="+mn-ea"/>
+          <a:cs typeface="+mn-cs"/>
+        </a:defRPr>
+      </a:lvl4pPr>
+      <a:lvl5pPr marL="2057400" indent="-228600" algn="l" defTabSz="914400" rtl="0" eaLnBrk="1" latinLnBrk="0" hangingPunct="1">
+        <a:lnSpc>
+          <a:spcPct val="90000"/>
+        </a:lnSpc>
+        <a:spcBef>
+          <a:spcPts val="500"/>
+        </a:spcBef>
+        <a:buFont typeface="Arial" panose="020B0604020202020204" pitchFamily="34" charset="0"/>
+        <a:buChar char="•"/>
+        <a:defRPr sz="1800" kern="1200">
+          <a:solidFill>
+            <a:schemeClr val="tx1"/>
+          </a:solidFill>
+          <a:latin typeface="+mn-lt"/>
+          <a:ea typeface="+mn-ea"/>
+          <a:cs typeface="+mn-cs"/>
+        </a:defRPr>
+      </a:lvl5pPr>
+      <a:lvl6pPr marL="2514600" indent="-228600" algn="l" defTabSz="914400" rtl="0" eaLnBrk="1" latinLnBrk="0" hangingPunct="1">
+        <a:lnSpc>
+          <a:spcPct val="90000"/>
+        </a:lnSpc>
+        <a:spcBef>
+          <a:spcPts val="500"/>
+        </a:spcBef>
+        <a:buFont typeface="Arial" panose="020B0604020202020204" pitchFamily="34" charset="0"/>
+        <a:buChar char="•"/>
+        <a:defRPr sz="1800" kern="1200">
+          <a:solidFill>
+            <a:schemeClr val="tx1"/>
+          </a:solidFill>
+          <a:latin typeface="+mn-lt"/>
+          <a:ea typeface="+mn-ea"/>
+          <a:cs typeface="+mn-cs"/>
+        </a:defRPr>
+      </a:lvl6pPr>
+      <a:lvl7pPr marL="2971800" indent="-228600" algn="l" defTabSz="914400" rtl="0" eaLnBrk="1" latinLnBrk="0" hangingPunct="1">
+        <a:lnSpc>
+          <a:spcPct val="90000"/>
+        </a:lnSpc>
+        <a:spcBef>
+          <a:spcPts val="500"/>
+        </a:spcBef>
+        <a:buFont typeface="Arial" panose="020B0604020202020204" pitchFamily="34" charset="0"/>
+        <a:buChar char="•"/>
+        <a:defRPr sz="1800" kern="1200">
+          <a:solidFill>
+            <a:schemeClr val="tx1"/>
+          </a:solidFill>
+          <a:latin typeface="+mn-lt"/>
+          <a:ea typeface="+mn-ea"/>
+          <a:cs typeface="+mn-cs"/>
+        </a:defRPr>
+      </a:lvl7pPr>
+      <a:lvl8pPr marL="3429000" indent="-228600" algn="l" defTabSz="914400" rtl="0" eaLnBrk="1" latinLnBrk="0" hangingPunct="1">
+        <a:lnSpc>
+          <a:spcPct val="90000"/>
+        </a:lnSpc>
+        <a:spcBef>
+          <a:spcPts val="500"/>
+        </a:spcBef>
+        <a:buFont typeface="Arial" panose="020B0604020202020204" pitchFamily="34" charset="0"/>
+        <a:buChar char="•"/>
+        <a:defRPr sz="1800" kern="1200">
+          <a:solidFill>
+            <a:schemeClr val="tx1"/>
+          </a:solidFill>
+          <a:latin typeface="+mn-lt"/>
+          <a:ea typeface="+mn-ea"/>
+          <a:cs typeface="+mn-cs"/>
+        </a:defRPr>
+      </a:lvl8pPr>
+      <a:lvl9pPr marL="3886200" indent="-228600" algn="l" defTabSz="914400" rtl="0" eaLnBrk="1" latinLnBrk="0" hangingPunct="1">
+        <a:lnSpc>
+          <a:spcPct val="90000"/>
+        </a:lnSpc>
+        <a:spcBef>
+          <a:spcPts val="500"/>
+        </a:spcBef>
+        <a:buFont typeface="Arial" panose="020B0604020202020204" pitchFamily="34" charset="0"/>
+        <a:buChar char="•"/>
+        <a:defRPr sz="1800" kern="1200">
+          <a:solidFill>
+            <a:schemeClr val="tx1"/>
+          </a:solidFill>
+          <a:latin typeface="+mn-lt"/>
+          <a:ea typeface="+mn-ea"/>
+          <a:cs typeface="+mn-cs"/>
+        </a:defRPr>
+      </a:lvl9pPr>
+    </p:bodyStyle>
+    <p:otherStyle>
+      <a:defPPr>
+        <a:defRPr lang="en-US"/>
+      </a:defPPr>
+      <a:lvl1pPr marL="0" algn="l" defTabSz="914400" rtl="0" eaLnBrk="1" latinLnBrk="0" hangingPunct="1">
+        <a:defRPr sz="1800" kern="1200">
+          <a:solidFill>
+            <a:schemeClr val="tx1"/>
+          </a:solidFill>
+          <a:latin typeface="+mn-lt"/>
+          <a:ea typeface="+mn-ea"/>
+          <a:cs typeface="+mn-cs"/>
+        </a:defRPr>
+      </a:lvl1pPr>
+      <a:lvl2pPr marL="457200" algn="l" defTabSz="914400" rtl="0" eaLnBrk="1" latinLnBrk="0" hangingPunct="1">
+        <a:defRPr sz="1800" kern="1200">
+          <a:solidFill>
+            <a:schemeClr val="tx1"/>
+          </a:solidFill>
+          <a:latin typeface="+mn-lt"/>
+          <a:ea typeface="+mn-ea"/>
+          <a:cs typeface="+mn-cs"/>
+        </a:defRPr>
+      </a:lvl2pPr>
+      <a:lvl3pPr marL="914400" algn="l" defTabSz="914400" rtl="0" eaLnBrk="1" latinLnBrk="0" hangingPunct="1">
+        <a:defRPr sz="1800" kern="1200">
+          <a:solidFill>
+            <a:schemeClr val="tx1"/>
+          </a:solidFill>
+          <a:latin typeface="+mn-lt"/>
+          <a:ea typeface="+mn-ea"/>
+          <a:cs typeface="+mn-cs"/>
+        </a:defRPr>
+      </a:lvl3pPr>
+      <a:lvl4pPr marL="1371600" algn="l" defTabSz="914400" rtl="0" eaLnBrk="1" latinLnBrk="0" hangingPunct="1">
+        <a:defRPr sz="1800" kern="1200">
+          <a:solidFill>
+            <a:schemeClr val="tx1"/>
+          </a:solidFill>
+          <a:latin typeface="+mn-lt"/>
+          <a:ea typeface="+mn-ea"/>
+          <a:cs typeface="+mn-cs"/>
+        </a:defRPr>
+      </a:lvl4pPr>
+      <a:lvl5pPr marL="1828800" algn="l" defTabSz="914400" rtl="0" eaLnBrk="1" latinLnBrk="0" hangingPunct="1">
+        <a:defRPr sz="1800" kern="1200">
+          <a:solidFill>
+            <a:schemeClr val="tx1"/>
+          </a:solidFill>
+          <a:latin typeface="+mn-lt"/>
+          <a:ea typeface="+mn-ea"/>
+          <a:cs typeface="+mn-cs"/>
+        </a:defRPr>
+      </a:lvl5pPr>
+      <a:lvl6pPr marL="2286000" algn="l" defTabSz="914400" rtl="0" eaLnBrk="1" latinLnBrk="0" hangingPunct="1">
+        <a:defRPr sz="1800" kern="1200">
+          <a:solidFill>
+            <a:schemeClr val="tx1"/>
+          </a:solidFill>
+          <a:latin typeface="+mn-lt"/>
+          <a:ea typeface="+mn-ea"/>
+          <a:cs typeface="+mn-cs"/>
+        </a:defRPr>
+      </a:lvl6pPr>
+      <a:lvl7pPr marL="2743200" algn="l" defTabSz="914400" rtl="0" eaLnBrk="1" latinLnBrk="0" hangingPunct="1">
+        <a:defRPr sz="1800" kern="1200">
+          <a:solidFill>
+            <a:schemeClr val="tx1"/>
+          </a:solidFill>
+          <a:latin typeface="+mn-lt"/>
+          <a:ea typeface="+mn-ea"/>
+          <a:cs typeface="+mn-cs"/>
+        </a:defRPr>
+      </a:lvl7pPr>
+      <a:lvl8pPr marL="3200400" algn="l" defTabSz="914400" rtl="0" eaLnBrk="1" latinLnBrk="0" hangingPunct="1">
+        <a:defRPr sz="1800" kern="1200">
+          <a:solidFill>
+            <a:schemeClr val="tx1"/>
+          </a:solidFill>
+          <a:latin typeface="+mn-lt"/>
+          <a:ea typeface="+mn-ea"/>
+          <a:cs typeface="+mn-cs"/>
+        </a:defRPr>
+      </a:lvl8pPr>
+      <a:lvl9pPr marL="3657600" algn="l" defTabSz="914400" rtl="0" eaLnBrk="1" latinLnBrk="0" hangingPunct="1">
+        <a:defRPr sz="1800" kern="1200">
+          <a:solidFill>
+            <a:schemeClr val="tx1"/>
+          </a:solidFill>
+          <a:latin typeface="+mn-lt"/>
+          <a:ea typeface="+mn-ea"/>
+          <a:cs typeface="+mn-cs"/>
+        </a:defRPr>
+      </a:lvl9pPr>
+    </p:otherStyle>
+  </p:txStyles>
 </p:sldMaster>
 </file>
 
 <file path=ppt/slides/slide1.xml><?xml version="1.0" encoding="utf-8"?>
-<p:sld xmlns:a="http://schemas.openxmlformats.org/drawingml/2006/main" xmlns:p="http://schemas.openxmlformats.org/presentationml/2006/main" xmlns:r="http://schemas.openxmlformats.org/officeDocument/2006/relationships" xmlns:p14="http://schemas.microsoft.com/office/powerpoint/2010/main" xmlns:p15="http://schemas.microsoft.com/office/powerpoint/2012/main" xmlns:mc="http://schemas.openxmlformats.org/markup-compatibility/2006">
+<p:sld xmlns:a="http://schemas.openxmlformats.org/drawingml/2006/main" xmlns:r="http://schemas.openxmlformats.org/officeDocument/2006/relationships" xmlns:p="http://schemas.openxmlformats.org/presentationml/2006/main">
   <p:cSld>
     <p:bg>
       <p:bgPr>
         <a:blipFill rotWithShape="0">
-          <a:blip r:embed="rId1"/>
+          <a:blip r:embed="rId3"/>
           <a:stretch/>
         </a:blipFill>
+        <a:effectLst/>
       </p:bgPr>
     </p:bg>
     <p:spTree>
@@ -6148,15 +7010,22 @@
           </a:ln>
         </p:spPr>
         <p:style>
-          <a:lnRef idx="0"/>
-          <a:fillRef idx="0"/>
-          <a:effectRef idx="0"/>
+          <a:lnRef idx="0">
+            <a:scrgbClr r="0" g="0" b="0"/>
+          </a:lnRef>
+          <a:fillRef idx="0">
+            <a:scrgbClr r="0" g="0" b="0"/>
+          </a:fillRef>
+          <a:effectRef idx="0">
+            <a:scrgbClr r="0" g="0" b="0"/>
+          </a:effectRef>
           <a:fontRef idx="minor"/>
         </p:style>
         <p:txBody>
-          <a:bodyPr lIns="90000" rIns="90000" tIns="45000" bIns="45000" anchor="t">
+          <a:bodyPr lIns="90000" tIns="45000" rIns="90000" bIns="45000" anchor="t">
             <a:noAutofit/>
           </a:bodyPr>
+          <a:lstStyle/>
           <a:p>
             <a:pPr>
               <a:lnSpc>
@@ -6164,16 +7033,16 @@
               </a:lnSpc>
             </a:pPr>
             <a:r>
-              <a:rPr b="1" lang="en-US" sz="4000" spc="-1" strike="noStrike" cap="all">
-                <a:solidFill>
-                  <a:srgbClr val="ffffff"/>
+              <a:rPr lang="en-US" sz="4000" b="1" strike="noStrike" cap="all" spc="-1">
+                <a:solidFill>
+                  <a:srgbClr val="FFFFFF"/>
                 </a:solidFill>
                 <a:latin typeface="Century Gothic"/>
                 <a:ea typeface="Century Gothic"/>
               </a:rPr>
               <a:t>Urban Economics</a:t>
             </a:r>
-            <a:endParaRPr b="0" lang="en-US" sz="4000" spc="-1" strike="noStrike">
+            <a:endParaRPr lang="en-US" sz="4000" b="0" strike="noStrike" spc="-1">
               <a:solidFill>
                 <a:srgbClr val="000000"/>
               </a:solidFill>
@@ -6187,16 +7056,16 @@
               </a:lnSpc>
             </a:pPr>
             <a:r>
-              <a:rPr b="1" lang="en-US" sz="6000" spc="-1" strike="noStrike" cap="all">
-                <a:solidFill>
-                  <a:srgbClr val="ffffff"/>
+              <a:rPr lang="en-US" sz="6000" b="1" strike="noStrike" cap="all" spc="-1">
+                <a:solidFill>
+                  <a:srgbClr val="FFFFFF"/>
                 </a:solidFill>
                 <a:latin typeface="Century Gothic"/>
                 <a:ea typeface="Century Gothic"/>
               </a:rPr>
               <a:t>Introduction to the Economics of Discrimination</a:t>
             </a:r>
-            <a:endParaRPr b="0" lang="en-US" sz="6000" spc="-1" strike="noStrike">
+            <a:endParaRPr lang="en-US" sz="6000" b="0" strike="noStrike" spc="-1">
               <a:solidFill>
                 <a:srgbClr val="000000"/>
               </a:solidFill>
@@ -6210,16 +7079,16 @@
               </a:lnSpc>
             </a:pPr>
             <a:r>
-              <a:rPr b="1" lang="en-US" sz="4000" spc="-1" strike="noStrike" cap="all">
-                <a:solidFill>
-                  <a:srgbClr val="ffffff"/>
+              <a:rPr lang="en-US" sz="4000" b="1" strike="noStrike" cap="all" spc="-1">
+                <a:solidFill>
+                  <a:srgbClr val="FFFFFF"/>
                 </a:solidFill>
                 <a:latin typeface="Century Gothic"/>
                 <a:ea typeface="Century Gothic"/>
               </a:rPr>
               <a:t>Prof. HUSSAIN HADAH</a:t>
             </a:r>
-            <a:endParaRPr b="0" lang="en-US" sz="4000" spc="-1" strike="noStrike">
+            <a:endParaRPr lang="en-US" sz="4000" b="0" strike="noStrike" spc="-1">
               <a:solidFill>
                 <a:srgbClr val="000000"/>
               </a:solidFill>
@@ -6230,19 +7099,14 @@
       </p:sp>
     </p:spTree>
   </p:cSld>
-  <mc:AlternateContent>
-    <mc:Choice Requires="p14">
-      <p:transition spd="slow" p14:dur="2000"/>
-    </mc:Choice>
-    <mc:Fallback>
-      <p:transition spd="slow"/>
-    </mc:Fallback>
-  </mc:AlternateContent>
+  <p:clrMapOvr>
+    <a:masterClrMapping/>
+  </p:clrMapOvr>
 </p:sld>
 </file>
 
 <file path=ppt/slides/slide10.xml><?xml version="1.0" encoding="utf-8"?>
-<p:sld xmlns:a="http://schemas.openxmlformats.org/drawingml/2006/main" xmlns:p="http://schemas.openxmlformats.org/presentationml/2006/main" xmlns:r="http://schemas.openxmlformats.org/officeDocument/2006/relationships" xmlns:p14="http://schemas.microsoft.com/office/powerpoint/2010/main" xmlns:p15="http://schemas.microsoft.com/office/powerpoint/2012/main" xmlns:mc="http://schemas.openxmlformats.org/markup-compatibility/2006">
+<p:sld xmlns:a="http://schemas.openxmlformats.org/drawingml/2006/main" xmlns:r="http://schemas.openxmlformats.org/officeDocument/2006/relationships" xmlns:p="http://schemas.openxmlformats.org/presentationml/2006/main">
   <p:cSld>
     <p:spTree>
       <p:nvGrpSpPr>
@@ -6285,6 +7149,7 @@
           <a:bodyPr numCol="1" spcCol="0" anchor="ctr">
             <a:noAutofit/>
           </a:bodyPr>
+          <a:lstStyle/>
           <a:p>
             <a:pPr indent="0">
               <a:lnSpc>
@@ -6293,15 +7158,15 @@
               <a:buNone/>
             </a:pPr>
             <a:r>
-              <a:rPr b="0" lang="en-US" sz="3800" spc="-1" strike="noStrike" cap="all">
-                <a:solidFill>
-                  <a:srgbClr val="265b4d"/>
+              <a:rPr lang="en-US" sz="3800" b="0" strike="noStrike" cap="all" spc="-1">
+                <a:solidFill>
+                  <a:srgbClr val="265B4D"/>
                 </a:solidFill>
                 <a:latin typeface="Century Gothic"/>
               </a:rPr>
               <a:t>Statistical discrimination - Housing</a:t>
             </a:r>
-            <a:endParaRPr b="0" lang="en-US" sz="3800" spc="-1" strike="noStrike">
+            <a:endParaRPr lang="en-US" sz="3800" b="0" strike="noStrike" spc="-1">
               <a:solidFill>
                 <a:srgbClr val="000000"/>
               </a:solidFill>
@@ -6337,6 +7202,7 @@
           <a:bodyPr numCol="1" spcCol="0" anchor="t">
             <a:noAutofit/>
           </a:bodyPr>
+          <a:lstStyle/>
           <a:p>
             <a:pPr marL="228600" indent="-228600">
               <a:lnSpc>
@@ -6352,7 +7218,7 @@
               <a:buChar char="•"/>
             </a:pPr>
             <a:r>
-              <a:rPr b="0" lang="en-US" sz="2400" spc="-1" strike="noStrike">
+              <a:rPr lang="en-US" sz="2400" b="0" strike="noStrike" spc="-1">
                 <a:solidFill>
                   <a:srgbClr val="404040"/>
                 </a:solidFill>
@@ -6360,12 +7226,6 @@
               </a:rPr>
               <a:t>You’ll hear later in the course about a research project I am working on that quantifies sexual orientation discrimination in access to mortgage loans.</a:t>
             </a:r>
-            <a:endParaRPr b="0" lang="en-US" sz="2400" spc="-1" strike="noStrike">
-              <a:solidFill>
-                <a:srgbClr val="404040"/>
-              </a:solidFill>
-              <a:latin typeface="Century Gothic"/>
-            </a:endParaRPr>
           </a:p>
           <a:p>
             <a:pPr marL="228600" indent="-228600">
@@ -6382,7 +7242,7 @@
               <a:buChar char="•"/>
             </a:pPr>
             <a:r>
-              <a:rPr b="0" lang="en-US" sz="2400" spc="-1" strike="noStrike">
+              <a:rPr lang="en-US" sz="2400" b="0" strike="noStrike" spc="-1">
                 <a:solidFill>
                   <a:srgbClr val="404040"/>
                 </a:solidFill>
@@ -6390,12 +7250,6 @@
               </a:rPr>
               <a:t>One concern we have is that mortgage loan originators – who people work with to get mortgages – may statistically discriminate against applicants based on perceptions of their credit worthiness.</a:t>
             </a:r>
-            <a:endParaRPr b="0" lang="en-US" sz="2400" spc="-1" strike="noStrike">
-              <a:solidFill>
-                <a:srgbClr val="404040"/>
-              </a:solidFill>
-              <a:latin typeface="Century Gothic"/>
-            </a:endParaRPr>
           </a:p>
           <a:p>
             <a:pPr marL="228600" indent="-228600">
@@ -6412,7 +7266,7 @@
               <a:buChar char="•"/>
             </a:pPr>
             <a:r>
-              <a:rPr b="0" lang="en-US" sz="2400" spc="-1" strike="noStrike">
+              <a:rPr lang="en-US" sz="2400" b="0" strike="noStrike" spc="-1">
                 <a:solidFill>
                   <a:srgbClr val="404040"/>
                 </a:solidFill>
@@ -6420,30 +7274,19 @@
               </a:rPr>
               <a:t>E.g., may assume that same-gender male couples are more creditworthy (since two men, and men on-average earn more) while same-gender female couples are less credit worthy (since two women, and women on-average earn less).</a:t>
             </a:r>
-            <a:endParaRPr b="0" lang="en-US" sz="2400" spc="-1" strike="noStrike">
-              <a:solidFill>
-                <a:srgbClr val="404040"/>
-              </a:solidFill>
-              <a:latin typeface="Century Gothic"/>
-            </a:endParaRPr>
           </a:p>
         </p:txBody>
       </p:sp>
     </p:spTree>
   </p:cSld>
-  <mc:AlternateContent>
-    <mc:Choice Requires="p14">
-      <p:transition spd="slow" p14:dur="2000"/>
-    </mc:Choice>
-    <mc:Fallback>
-      <p:transition spd="slow"/>
-    </mc:Fallback>
-  </mc:AlternateContent>
+  <p:clrMapOvr>
+    <a:masterClrMapping/>
+  </p:clrMapOvr>
 </p:sld>
 </file>
 
 <file path=ppt/slides/slide11.xml><?xml version="1.0" encoding="utf-8"?>
-<p:sld xmlns:a="http://schemas.openxmlformats.org/drawingml/2006/main" xmlns:p="http://schemas.openxmlformats.org/presentationml/2006/main" xmlns:r="http://schemas.openxmlformats.org/officeDocument/2006/relationships" xmlns:p14="http://schemas.microsoft.com/office/powerpoint/2010/main" xmlns:p15="http://schemas.microsoft.com/office/powerpoint/2012/main" xmlns:mc="http://schemas.openxmlformats.org/markup-compatibility/2006">
+<p:sld xmlns:a="http://schemas.openxmlformats.org/drawingml/2006/main" xmlns:r="http://schemas.openxmlformats.org/officeDocument/2006/relationships" xmlns:p="http://schemas.openxmlformats.org/presentationml/2006/main">
   <p:cSld>
     <p:spTree>
       <p:nvGrpSpPr>
@@ -6486,6 +7329,7 @@
           <a:bodyPr numCol="1" spcCol="0" anchor="ctr">
             <a:noAutofit/>
           </a:bodyPr>
+          <a:lstStyle/>
           <a:p>
             <a:pPr indent="0">
               <a:lnSpc>
@@ -6494,15 +7338,15 @@
               <a:buNone/>
             </a:pPr>
             <a:r>
-              <a:rPr b="0" lang="en-US" sz="3800" spc="-1" strike="noStrike" cap="all">
-                <a:solidFill>
-                  <a:srgbClr val="265b4d"/>
+              <a:rPr lang="en-US" sz="3800" b="0" strike="noStrike" cap="all" spc="-1">
+                <a:solidFill>
+                  <a:srgbClr val="265B4D"/>
                 </a:solidFill>
                 <a:latin typeface="Century Gothic"/>
               </a:rPr>
               <a:t>Statistical discrimination - Policing</a:t>
             </a:r>
-            <a:endParaRPr b="0" lang="en-US" sz="3800" spc="-1" strike="noStrike">
+            <a:endParaRPr lang="en-US" sz="3800" b="0" strike="noStrike" spc="-1">
               <a:solidFill>
                 <a:srgbClr val="000000"/>
               </a:solidFill>
@@ -6538,6 +7382,7 @@
           <a:bodyPr numCol="1" spcCol="0" anchor="t">
             <a:noAutofit/>
           </a:bodyPr>
+          <a:lstStyle/>
           <a:p>
             <a:pPr marL="228600" indent="-228600">
               <a:lnSpc>
@@ -6553,7 +7398,7 @@
               <a:buChar char="•"/>
             </a:pPr>
             <a:r>
-              <a:rPr b="0" lang="en-US" sz="2400" spc="-1" strike="noStrike">
+              <a:rPr lang="en-US" sz="2400" b="0" strike="noStrike" spc="-1">
                 <a:solidFill>
                   <a:srgbClr val="404040"/>
                 </a:solidFill>
@@ -6561,137 +7406,108 @@
               </a:rPr>
               <a:t>Police offers could (and likely do) statistically discriminate in interactions with citizens.</a:t>
             </a:r>
-            <a:endParaRPr b="0" lang="en-US" sz="2400" spc="-1" strike="noStrike">
+          </a:p>
+          <a:p>
+            <a:pPr marL="228600" indent="-228600">
+              <a:lnSpc>
+                <a:spcPct val="90000"/>
+              </a:lnSpc>
+              <a:spcBef>
+                <a:spcPts val="1001"/>
+              </a:spcBef>
+              <a:buClr>
+                <a:srgbClr val="404040"/>
+              </a:buClr>
+              <a:buFont typeface="Arial"/>
+              <a:buChar char="•"/>
+            </a:pPr>
+            <a:r>
+              <a:rPr lang="en-US" sz="2400" b="0" strike="noStrike" spc="-1">
+                <a:solidFill>
+                  <a:srgbClr val="404040"/>
+                </a:solidFill>
+                <a:latin typeface="Century Gothic"/>
+              </a:rPr>
+              <a:t>They may, for example, be more likely to assume that people of color have done something wrong, have drugs in their car, etc., </a:t>
+            </a:r>
+          </a:p>
+          <a:p>
+            <a:pPr marL="228600" indent="-228600">
+              <a:lnSpc>
+                <a:spcPct val="90000"/>
+              </a:lnSpc>
+              <a:spcBef>
+                <a:spcPts val="1001"/>
+              </a:spcBef>
+              <a:buClr>
+                <a:srgbClr val="404040"/>
+              </a:buClr>
+              <a:buFont typeface="Arial"/>
+              <a:buChar char="•"/>
+            </a:pPr>
+            <a:r>
+              <a:rPr lang="en-US" sz="2400" b="0" strike="noStrike" spc="-1">
+                <a:solidFill>
+                  <a:srgbClr val="404040"/>
+                </a:solidFill>
+                <a:latin typeface="Century Gothic"/>
+              </a:rPr>
+              <a:t>For these “reasons”, police may be more likely to search people of color through car searches, “stop and frisk” etc.</a:t>
+            </a:r>
+          </a:p>
+          <a:p>
+            <a:pPr marL="228600" indent="-228600">
+              <a:lnSpc>
+                <a:spcPct val="90000"/>
+              </a:lnSpc>
+              <a:spcBef>
+                <a:spcPts val="1001"/>
+              </a:spcBef>
+              <a:buClr>
+                <a:srgbClr val="404040"/>
+              </a:buClr>
+              <a:buFont typeface="Arial"/>
+              <a:buChar char="•"/>
+            </a:pPr>
+            <a:r>
+              <a:rPr lang="en-US" sz="2400" b="0" strike="noStrike" spc="-1">
+                <a:solidFill>
+                  <a:srgbClr val="404040"/>
+                </a:solidFill>
+                <a:latin typeface="Century Gothic"/>
+              </a:rPr>
+              <a:t>In this example, race is used as a proxy for assumptions about criminality.</a:t>
+            </a:r>
+          </a:p>
+          <a:p>
+            <a:pPr indent="0">
+              <a:lnSpc>
+                <a:spcPct val="90000"/>
+              </a:lnSpc>
+              <a:spcBef>
+                <a:spcPts val="1001"/>
+              </a:spcBef>
+              <a:buNone/>
+            </a:pPr>
+            <a:endParaRPr lang="en-US" sz="2400" b="0" strike="noStrike" spc="-1">
               <a:solidFill>
                 <a:srgbClr val="404040"/>
               </a:solidFill>
               <a:latin typeface="Century Gothic"/>
             </a:endParaRPr>
           </a:p>
-          <a:p>
-            <a:pPr marL="228600" indent="-228600">
-              <a:lnSpc>
-                <a:spcPct val="90000"/>
-              </a:lnSpc>
-              <a:spcBef>
-                <a:spcPts val="1001"/>
-              </a:spcBef>
-              <a:buClr>
-                <a:srgbClr val="404040"/>
-              </a:buClr>
-              <a:buFont typeface="Arial"/>
-              <a:buChar char="•"/>
-            </a:pPr>
-            <a:r>
-              <a:rPr b="0" lang="en-US" sz="2400" spc="-1" strike="noStrike">
-                <a:solidFill>
-                  <a:srgbClr val="404040"/>
-                </a:solidFill>
-                <a:latin typeface="Century Gothic"/>
-              </a:rPr>
-              <a:t>They may, for example, be more likely to assume that people of color have done something wrong, have drugs in their car, etc., </a:t>
-            </a:r>
-            <a:endParaRPr b="0" lang="en-US" sz="2400" spc="-1" strike="noStrike">
-              <a:solidFill>
-                <a:srgbClr val="404040"/>
-              </a:solidFill>
-              <a:latin typeface="Century Gothic"/>
-            </a:endParaRPr>
-          </a:p>
-          <a:p>
-            <a:pPr marL="228600" indent="-228600">
-              <a:lnSpc>
-                <a:spcPct val="90000"/>
-              </a:lnSpc>
-              <a:spcBef>
-                <a:spcPts val="1001"/>
-              </a:spcBef>
-              <a:buClr>
-                <a:srgbClr val="404040"/>
-              </a:buClr>
-              <a:buFont typeface="Arial"/>
-              <a:buChar char="•"/>
-            </a:pPr>
-            <a:r>
-              <a:rPr b="0" lang="en-US" sz="2400" spc="-1" strike="noStrike">
-                <a:solidFill>
-                  <a:srgbClr val="404040"/>
-                </a:solidFill>
-                <a:latin typeface="Century Gothic"/>
-              </a:rPr>
-              <a:t>For these “reasons”, police may be more likely to search people of color through car searches, “stop and frisk” etc.</a:t>
-            </a:r>
-            <a:endParaRPr b="0" lang="en-US" sz="2400" spc="-1" strike="noStrike">
-              <a:solidFill>
-                <a:srgbClr val="404040"/>
-              </a:solidFill>
-              <a:latin typeface="Century Gothic"/>
-            </a:endParaRPr>
-          </a:p>
-          <a:p>
-            <a:pPr marL="228600" indent="-228600">
-              <a:lnSpc>
-                <a:spcPct val="90000"/>
-              </a:lnSpc>
-              <a:spcBef>
-                <a:spcPts val="1001"/>
-              </a:spcBef>
-              <a:buClr>
-                <a:srgbClr val="404040"/>
-              </a:buClr>
-              <a:buFont typeface="Arial"/>
-              <a:buChar char="•"/>
-            </a:pPr>
-            <a:r>
-              <a:rPr b="0" lang="en-US" sz="2400" spc="-1" strike="noStrike">
-                <a:solidFill>
-                  <a:srgbClr val="404040"/>
-                </a:solidFill>
-                <a:latin typeface="Century Gothic"/>
-              </a:rPr>
-              <a:t>In this example, race is used as a proxy for assumptions about criminality.</a:t>
-            </a:r>
-            <a:endParaRPr b="0" lang="en-US" sz="2400" spc="-1" strike="noStrike">
-              <a:solidFill>
-                <a:srgbClr val="404040"/>
-              </a:solidFill>
-              <a:latin typeface="Century Gothic"/>
-            </a:endParaRPr>
-          </a:p>
-          <a:p>
-            <a:pPr indent="0">
-              <a:lnSpc>
-                <a:spcPct val="90000"/>
-              </a:lnSpc>
-              <a:spcBef>
-                <a:spcPts val="1001"/>
-              </a:spcBef>
-              <a:buNone/>
-            </a:pPr>
-            <a:endParaRPr b="0" lang="en-US" sz="2400" spc="-1" strike="noStrike">
-              <a:solidFill>
-                <a:srgbClr val="404040"/>
-              </a:solidFill>
-              <a:latin typeface="Century Gothic"/>
-            </a:endParaRPr>
-          </a:p>
         </p:txBody>
       </p:sp>
     </p:spTree>
   </p:cSld>
-  <mc:AlternateContent>
-    <mc:Choice Requires="p14">
-      <p:transition spd="slow" p14:dur="2000"/>
-    </mc:Choice>
-    <mc:Fallback>
-      <p:transition spd="slow"/>
-    </mc:Fallback>
-  </mc:AlternateContent>
+  <p:clrMapOvr>
+    <a:masterClrMapping/>
+  </p:clrMapOvr>
 </p:sld>
 </file>
 
 <file path=ppt/slides/slide12.xml><?xml version="1.0" encoding="utf-8"?>
-<p:sld xmlns:a="http://schemas.openxmlformats.org/drawingml/2006/main" xmlns:p="http://schemas.openxmlformats.org/presentationml/2006/main" xmlns:r="http://schemas.openxmlformats.org/officeDocument/2006/relationships" xmlns:p14="http://schemas.microsoft.com/office/powerpoint/2010/main" xmlns:p15="http://schemas.microsoft.com/office/powerpoint/2012/main" xmlns:mc="http://schemas.openxmlformats.org/markup-compatibility/2006">
+<p:sld xmlns:a="http://schemas.openxmlformats.org/drawingml/2006/main" xmlns:r="http://schemas.openxmlformats.org/officeDocument/2006/relationships" xmlns:p="http://schemas.openxmlformats.org/presentationml/2006/main">
   <p:cSld>
     <p:spTree>
       <p:nvGrpSpPr>
@@ -6734,6 +7550,7 @@
           <a:bodyPr numCol="1" spcCol="0" anchor="ctr">
             <a:noAutofit/>
           </a:bodyPr>
+          <a:lstStyle/>
           <a:p>
             <a:pPr indent="0">
               <a:lnSpc>
@@ -6742,15 +7559,15 @@
               <a:buNone/>
             </a:pPr>
             <a:r>
-              <a:rPr b="0" lang="en-US" sz="3800" spc="-1" strike="noStrike" cap="all">
-                <a:solidFill>
-                  <a:srgbClr val="265b4d"/>
+              <a:rPr lang="en-US" sz="3800" b="0" strike="noStrike" cap="all" spc="-1">
+                <a:solidFill>
+                  <a:srgbClr val="265B4D"/>
                 </a:solidFill>
                 <a:latin typeface="Century Gothic"/>
               </a:rPr>
               <a:t>Implicit Discrimination</a:t>
             </a:r>
-            <a:endParaRPr b="0" lang="en-US" sz="3800" spc="-1" strike="noStrike">
+            <a:endParaRPr lang="en-US" sz="3800" b="0" strike="noStrike" spc="-1">
               <a:solidFill>
                 <a:srgbClr val="000000"/>
               </a:solidFill>
@@ -6786,6 +7603,7 @@
           <a:bodyPr numCol="1" spcCol="0" anchor="t">
             <a:noAutofit/>
           </a:bodyPr>
+          <a:lstStyle/>
           <a:p>
             <a:pPr marL="228600" indent="-228600">
               <a:lnSpc>
@@ -6801,7 +7619,7 @@
               <a:buChar char="•"/>
             </a:pPr>
             <a:r>
-              <a:rPr b="0" lang="en-US" sz="2400" spc="-1" strike="noStrike">
+              <a:rPr lang="en-US" sz="2400" b="0" strike="noStrike" spc="-1">
                 <a:solidFill>
                   <a:srgbClr val="404040"/>
                 </a:solidFill>
@@ -6809,7 +7627,114 @@
               </a:rPr>
               <a:t>A type of discrimination that occurs due to implicit bias.</a:t>
             </a:r>
-            <a:endParaRPr b="0" lang="en-US" sz="2400" spc="-1" strike="noStrike">
+          </a:p>
+          <a:p>
+            <a:pPr marL="228600" indent="-228600">
+              <a:lnSpc>
+                <a:spcPct val="90000"/>
+              </a:lnSpc>
+              <a:spcBef>
+                <a:spcPts val="1001"/>
+              </a:spcBef>
+              <a:buClr>
+                <a:srgbClr val="404040"/>
+              </a:buClr>
+              <a:buFont typeface="Arial"/>
+              <a:buChar char="•"/>
+            </a:pPr>
+            <a:r>
+              <a:rPr lang="en-US" sz="2400" b="0" strike="noStrike" spc="-1">
+                <a:solidFill>
+                  <a:srgbClr val="404040"/>
+                </a:solidFill>
+                <a:latin typeface="Century Gothic"/>
+              </a:rPr>
+              <a:t>Implicit bias is an unconscious form of bias discovered by psychologists </a:t>
+            </a:r>
+          </a:p>
+          <a:p>
+            <a:pPr marL="228600" indent="-228600">
+              <a:lnSpc>
+                <a:spcPct val="90000"/>
+              </a:lnSpc>
+              <a:spcBef>
+                <a:spcPts val="1001"/>
+              </a:spcBef>
+              <a:buClr>
+                <a:srgbClr val="404040"/>
+              </a:buClr>
+              <a:buFont typeface="Arial"/>
+              <a:buChar char="•"/>
+            </a:pPr>
+            <a:r>
+              <a:rPr lang="en-US" sz="2400" b="0" strike="noStrike" spc="-1">
+                <a:solidFill>
+                  <a:srgbClr val="404040"/>
+                </a:solidFill>
+                <a:latin typeface="Century Gothic"/>
+              </a:rPr>
+              <a:t>It’s a bias that most people are often not aware that they have.</a:t>
+            </a:r>
+          </a:p>
+          <a:p>
+            <a:pPr marL="228600" indent="-228600">
+              <a:lnSpc>
+                <a:spcPct val="90000"/>
+              </a:lnSpc>
+              <a:spcBef>
+                <a:spcPts val="1001"/>
+              </a:spcBef>
+              <a:buClr>
+                <a:srgbClr val="404040"/>
+              </a:buClr>
+              <a:buFont typeface="Arial"/>
+              <a:buChar char="•"/>
+            </a:pPr>
+            <a:r>
+              <a:rPr lang="en-US" sz="2400" b="0" strike="noStrike" spc="-1">
+                <a:solidFill>
+                  <a:srgbClr val="404040"/>
+                </a:solidFill>
+                <a:latin typeface="Century Gothic"/>
+              </a:rPr>
+              <a:t>Implicit bias usually appears when making quick decisions such as quickly reviewing resumes. </a:t>
+            </a:r>
+          </a:p>
+          <a:p>
+            <a:pPr marL="685800" lvl="1" indent="-228600">
+              <a:lnSpc>
+                <a:spcPct val="90000"/>
+              </a:lnSpc>
+              <a:spcBef>
+                <a:spcPts val="499"/>
+              </a:spcBef>
+              <a:buClr>
+                <a:srgbClr val="404040"/>
+              </a:buClr>
+              <a:buFont typeface="Arial"/>
+              <a:buChar char="•"/>
+            </a:pPr>
+            <a:r>
+              <a:rPr lang="en-US" sz="2000" b="0" strike="noStrike" spc="-1">
+                <a:solidFill>
+                  <a:srgbClr val="404040"/>
+                </a:solidFill>
+                <a:latin typeface="Century Gothic"/>
+              </a:rPr>
+              <a:t>In these situations, you may be more likely to rely on implicit bias.</a:t>
+            </a:r>
+          </a:p>
+          <a:p>
+            <a:pPr indent="0">
+              <a:lnSpc>
+                <a:spcPct val="90000"/>
+              </a:lnSpc>
+              <a:spcBef>
+                <a:spcPts val="1001"/>
+              </a:spcBef>
+              <a:buNone/>
+            </a:pPr>
+            <a:endParaRPr lang="en-US" sz="2400" b="0" strike="noStrike" spc="-1">
               <a:solidFill>
                 <a:srgbClr val="404040"/>
               </a:solidFill>
@@ -6817,176 +7742,34 @@
             </a:endParaRPr>
           </a:p>
           <a:p>
-            <a:pPr marL="228600" indent="-228600">
+            <a:pPr indent="0">
               <a:lnSpc>
                 <a:spcPct val="90000"/>
               </a:lnSpc>
               <a:spcBef>
                 <a:spcPts val="1001"/>
               </a:spcBef>
-              <a:buClr>
-                <a:srgbClr val="404040"/>
-              </a:buClr>
-              <a:buFont typeface="Arial"/>
-              <a:buChar char="•"/>
-            </a:pPr>
-            <a:r>
-              <a:rPr b="0" lang="en-US" sz="2400" spc="-1" strike="noStrike">
-                <a:solidFill>
-                  <a:srgbClr val="404040"/>
-                </a:solidFill>
-                <a:latin typeface="Century Gothic"/>
-              </a:rPr>
-              <a:t>Implicit bias is an unconscious form of bias discovered by psychologists </a:t>
-            </a:r>
-            <a:endParaRPr b="0" lang="en-US" sz="2400" spc="-1" strike="noStrike">
+              <a:buNone/>
+            </a:pPr>
+            <a:endParaRPr lang="en-US" sz="2400" b="0" strike="noStrike" spc="-1">
               <a:solidFill>
                 <a:srgbClr val="404040"/>
               </a:solidFill>
               <a:latin typeface="Century Gothic"/>
             </a:endParaRPr>
           </a:p>
-          <a:p>
-            <a:pPr marL="228600" indent="-228600">
-              <a:lnSpc>
-                <a:spcPct val="90000"/>
-              </a:lnSpc>
-              <a:spcBef>
-                <a:spcPts val="1001"/>
-              </a:spcBef>
-              <a:buClr>
-                <a:srgbClr val="404040"/>
-              </a:buClr>
-              <a:buFont typeface="Arial"/>
-              <a:buChar char="•"/>
-            </a:pPr>
-            <a:r>
-              <a:rPr b="0" lang="en-US" sz="2400" spc="-1" strike="noStrike">
-                <a:solidFill>
-                  <a:srgbClr val="404040"/>
-                </a:solidFill>
-                <a:latin typeface="Century Gothic"/>
-              </a:rPr>
-              <a:t>It’s a bias that most people are often not aware that they have.</a:t>
-            </a:r>
-            <a:endParaRPr b="0" lang="en-US" sz="2400" spc="-1" strike="noStrike">
-              <a:solidFill>
-                <a:srgbClr val="404040"/>
-              </a:solidFill>
-              <a:latin typeface="Century Gothic"/>
-            </a:endParaRPr>
-          </a:p>
-          <a:p>
-            <a:pPr marL="228600" indent="-228600">
-              <a:lnSpc>
-                <a:spcPct val="90000"/>
-              </a:lnSpc>
-              <a:spcBef>
-                <a:spcPts val="1001"/>
-              </a:spcBef>
-              <a:buClr>
-                <a:srgbClr val="404040"/>
-              </a:buClr>
-              <a:buFont typeface="Arial"/>
-              <a:buChar char="•"/>
-            </a:pPr>
-            <a:r>
-              <a:rPr b="0" lang="en-US" sz="2400" spc="-1" strike="noStrike">
-                <a:solidFill>
-                  <a:srgbClr val="404040"/>
-                </a:solidFill>
-                <a:latin typeface="Century Gothic"/>
-              </a:rPr>
-              <a:t>Implicit bias usually appears when making quick decisions such as quickly reviewing resumes. </a:t>
-            </a:r>
-            <a:endParaRPr b="0" lang="en-US" sz="2400" spc="-1" strike="noStrike">
-              <a:solidFill>
-                <a:srgbClr val="404040"/>
-              </a:solidFill>
-              <a:latin typeface="Century Gothic"/>
-            </a:endParaRPr>
-          </a:p>
-          <a:p>
-            <a:pPr lvl="1" marL="685800" indent="-228600">
-              <a:lnSpc>
-                <a:spcPct val="90000"/>
-              </a:lnSpc>
-              <a:spcBef>
-                <a:spcPts val="499"/>
-              </a:spcBef>
-              <a:buClr>
-                <a:srgbClr val="404040"/>
-              </a:buClr>
-              <a:buFont typeface="Arial"/>
-              <a:buChar char="•"/>
-            </a:pPr>
-            <a:r>
-              <a:rPr b="0" lang="en-US" sz="2000" spc="-1" strike="noStrike">
-                <a:solidFill>
-                  <a:srgbClr val="404040"/>
-                </a:solidFill>
-                <a:latin typeface="Century Gothic"/>
-              </a:rPr>
-              <a:t>In these situations, you may be more likely to rely on implicit bias.</a:t>
-            </a:r>
-            <a:endParaRPr b="0" lang="en-US" sz="2000" spc="-1" strike="noStrike">
-              <a:solidFill>
-                <a:srgbClr val="404040"/>
-              </a:solidFill>
-              <a:latin typeface="Century Gothic"/>
-            </a:endParaRPr>
-          </a:p>
-          <a:p>
-            <a:pPr indent="0">
-              <a:lnSpc>
-                <a:spcPct val="90000"/>
-              </a:lnSpc>
-              <a:spcBef>
-                <a:spcPts val="1001"/>
-              </a:spcBef>
-              <a:buNone/>
-            </a:pPr>
-            <a:endParaRPr b="0" lang="en-US" sz="2400" spc="-1" strike="noStrike">
-              <a:solidFill>
-                <a:srgbClr val="404040"/>
-              </a:solidFill>
-              <a:latin typeface="Century Gothic"/>
-            </a:endParaRPr>
-          </a:p>
-          <a:p>
-            <a:pPr indent="0">
-              <a:lnSpc>
-                <a:spcPct val="90000"/>
-              </a:lnSpc>
-              <a:spcBef>
-                <a:spcPts val="1001"/>
-              </a:spcBef>
-              <a:buNone/>
-            </a:pPr>
-            <a:endParaRPr b="0" lang="en-US" sz="2400" spc="-1" strike="noStrike">
-              <a:solidFill>
-                <a:srgbClr val="404040"/>
-              </a:solidFill>
-              <a:latin typeface="Century Gothic"/>
-            </a:endParaRPr>
-          </a:p>
         </p:txBody>
       </p:sp>
     </p:spTree>
   </p:cSld>
-  <mc:AlternateContent>
-    <mc:Choice Requires="p14">
-      <p:transition spd="slow" p14:dur="2000"/>
-    </mc:Choice>
-    <mc:Fallback>
-      <p:transition spd="slow"/>
-    </mc:Fallback>
-  </mc:AlternateContent>
+  <p:clrMapOvr>
+    <a:masterClrMapping/>
+  </p:clrMapOvr>
 </p:sld>
 </file>
 
 <file path=ppt/slides/slide13.xml><?xml version="1.0" encoding="utf-8"?>
-<p:sld xmlns:a="http://schemas.openxmlformats.org/drawingml/2006/main" xmlns:p="http://schemas.openxmlformats.org/presentationml/2006/main" xmlns:r="http://schemas.openxmlformats.org/officeDocument/2006/relationships" xmlns:p14="http://schemas.microsoft.com/office/powerpoint/2010/main" xmlns:p15="http://schemas.microsoft.com/office/powerpoint/2012/main" xmlns:mc="http://schemas.openxmlformats.org/markup-compatibility/2006">
+<p:sld xmlns:a="http://schemas.openxmlformats.org/drawingml/2006/main" xmlns:r="http://schemas.openxmlformats.org/officeDocument/2006/relationships" xmlns:p="http://schemas.openxmlformats.org/presentationml/2006/main">
   <p:cSld>
     <p:spTree>
       <p:nvGrpSpPr>
@@ -7029,6 +7812,7 @@
           <a:bodyPr numCol="1" spcCol="0" anchor="ctr">
             <a:noAutofit/>
           </a:bodyPr>
+          <a:lstStyle/>
           <a:p>
             <a:pPr indent="0">
               <a:lnSpc>
@@ -7037,15 +7821,15 @@
               <a:buNone/>
             </a:pPr>
             <a:r>
-              <a:rPr b="0" lang="en-US" sz="3800" spc="-1" strike="noStrike" cap="all">
-                <a:solidFill>
-                  <a:srgbClr val="265b4d"/>
+              <a:rPr lang="en-US" sz="3800" b="0" strike="noStrike" cap="all" spc="-1">
+                <a:solidFill>
+                  <a:srgbClr val="265B4D"/>
                 </a:solidFill>
                 <a:latin typeface="Century Gothic"/>
               </a:rPr>
               <a:t>Implicit bias is pervasive</a:t>
             </a:r>
-            <a:endParaRPr b="0" lang="en-US" sz="3800" spc="-1" strike="noStrike">
+            <a:endParaRPr lang="en-US" sz="3800" b="0" strike="noStrike" spc="-1">
               <a:solidFill>
                 <a:srgbClr val="000000"/>
               </a:solidFill>
@@ -7081,6 +7865,7 @@
           <a:bodyPr numCol="1" spcCol="0" anchor="t">
             <a:noAutofit/>
           </a:bodyPr>
+          <a:lstStyle/>
           <a:p>
             <a:pPr marL="228600" indent="-228600">
               <a:lnSpc>
@@ -7096,7 +7881,7 @@
               <a:buChar char="•"/>
             </a:pPr>
             <a:r>
-              <a:rPr b="0" lang="en-US" sz="2400" spc="-1" strike="noStrike">
+              <a:rPr lang="en-US" sz="2400" b="0" strike="noStrike" spc="-1">
                 <a:solidFill>
                   <a:srgbClr val="000000"/>
                 </a:solidFill>
@@ -7104,7 +7889,7 @@
               </a:rPr>
               <a:t>They appear as statistically "large" effects that are often shown by majorities of samples of Americans. </a:t>
             </a:r>
-            <a:endParaRPr b="0" lang="en-US" sz="2400" spc="-1" strike="noStrike">
+            <a:endParaRPr lang="en-US" sz="2400" b="0" strike="noStrike" spc="-1">
               <a:solidFill>
                 <a:srgbClr val="404040"/>
               </a:solidFill>
@@ -7126,7 +7911,7 @@
               <a:buChar char="•"/>
             </a:pPr>
             <a:r>
-              <a:rPr b="0" lang="en-US" sz="2400" spc="-1" strike="noStrike">
+              <a:rPr lang="en-US" sz="2400" b="0" strike="noStrike" spc="-1">
                 <a:solidFill>
                   <a:srgbClr val="000000"/>
                 </a:solidFill>
@@ -7134,7 +7919,7 @@
               </a:rPr>
               <a:t>Over 80% of web respondents show implicit negativity toward the elderly compared to the young</a:t>
             </a:r>
-            <a:endParaRPr b="0" lang="en-US" sz="2400" spc="-1" strike="noStrike">
+            <a:endParaRPr lang="en-US" sz="2400" b="0" strike="noStrike" spc="-1">
               <a:solidFill>
                 <a:srgbClr val="404040"/>
               </a:solidFill>
@@ -7156,7 +7941,7 @@
               <a:buChar char="•"/>
             </a:pPr>
             <a:r>
-              <a:rPr b="0" lang="en-US" sz="2400" spc="-1" strike="noStrike">
+              <a:rPr lang="en-US" sz="2400" b="0" strike="noStrike" spc="-1">
                 <a:solidFill>
                   <a:srgbClr val="000000"/>
                 </a:solidFill>
@@ -7164,7 +7949,7 @@
               </a:rPr>
               <a:t>75-80% of self-identified Whites and Asians show an implicit preference for racial White relative to Black.</a:t>
             </a:r>
-            <a:endParaRPr b="0" lang="en-US" sz="2400" spc="-1" strike="noStrike">
+            <a:endParaRPr lang="en-US" sz="2400" b="0" strike="noStrike" spc="-1">
               <a:solidFill>
                 <a:srgbClr val="404040"/>
               </a:solidFill>
@@ -7186,7 +7971,7 @@
               <a:buChar char="•"/>
             </a:pPr>
             <a:r>
-              <a:rPr b="0" lang="en-US" sz="2000" spc="-1" strike="noStrike">
+              <a:rPr lang="en-US" sz="2000" b="0" strike="noStrike" spc="-1">
                 <a:solidFill>
                   <a:srgbClr val="000000"/>
                 </a:solidFill>
@@ -7195,18 +7980,18 @@
               <a:t>(Finding from </a:t>
             </a:r>
             <a:r>
-              <a:rPr b="0" lang="en-US" sz="2000" spc="-1" strike="noStrike" u="sng">
-                <a:solidFill>
-                  <a:srgbClr val="71c5e8"/>
+              <a:rPr lang="en-US" sz="2000" b="0" u="sng" strike="noStrike" spc="-1">
+                <a:solidFill>
+                  <a:srgbClr val="71C5E8"/>
                 </a:solidFill>
                 <a:uFillTx/>
                 <a:latin typeface="Century Gothic"/>
-                <a:hlinkClick r:id="rId1"/>
+                <a:hlinkClick r:id="rId2"/>
               </a:rPr>
               <a:t>http://www.projectimplicit.net/about.html</a:t>
             </a:r>
             <a:r>
-              <a:rPr b="0" lang="en-US" sz="2000" spc="-1" strike="noStrike">
+              <a:rPr lang="en-US" sz="2000" b="0" strike="noStrike" spc="-1">
                 <a:solidFill>
                   <a:srgbClr val="000000"/>
                 </a:solidFill>
@@ -7215,18 +8000,18 @@
               <a:t> via </a:t>
             </a:r>
             <a:r>
-              <a:rPr b="0" lang="en-US" sz="2000" spc="-1" strike="noStrike" u="sng">
-                <a:solidFill>
-                  <a:srgbClr val="71c5e8"/>
+              <a:rPr lang="en-US" sz="2000" b="0" u="sng" strike="noStrike" spc="-1">
+                <a:solidFill>
+                  <a:srgbClr val="71C5E8"/>
                 </a:solidFill>
                 <a:uFillTx/>
                 <a:latin typeface="Century Gothic"/>
-                <a:hlinkClick r:id="rId2"/>
+                <a:hlinkClick r:id="rId3"/>
               </a:rPr>
               <a:t>http://diversifyingecon.org/index.php?title=Personal_prejudices</a:t>
             </a:r>
             <a:r>
-              <a:rPr b="0" lang="en-US" sz="2000" spc="-1" strike="noStrike">
+              <a:rPr lang="en-US" sz="2000" b="0" strike="noStrike" spc="-1">
                 <a:solidFill>
                   <a:srgbClr val="000000"/>
                 </a:solidFill>
@@ -7234,7 +8019,7 @@
               </a:rPr>
               <a:t>)</a:t>
             </a:r>
-            <a:endParaRPr b="0" lang="en-US" sz="2000" spc="-1" strike="noStrike">
+            <a:endParaRPr lang="en-US" sz="2000" b="0" strike="noStrike" spc="-1">
               <a:solidFill>
                 <a:srgbClr val="404040"/>
               </a:solidFill>
@@ -7245,19 +8030,14 @@
       </p:sp>
     </p:spTree>
   </p:cSld>
-  <mc:AlternateContent>
-    <mc:Choice Requires="p14">
-      <p:transition spd="slow" p14:dur="2000"/>
-    </mc:Choice>
-    <mc:Fallback>
-      <p:transition spd="slow"/>
-    </mc:Fallback>
-  </mc:AlternateContent>
+  <p:clrMapOvr>
+    <a:masterClrMapping/>
+  </p:clrMapOvr>
 </p:sld>
 </file>
 
 <file path=ppt/slides/slide14.xml><?xml version="1.0" encoding="utf-8"?>
-<p:sld xmlns:a="http://schemas.openxmlformats.org/drawingml/2006/main" xmlns:p="http://schemas.openxmlformats.org/presentationml/2006/main" xmlns:r="http://schemas.openxmlformats.org/officeDocument/2006/relationships" xmlns:p14="http://schemas.microsoft.com/office/powerpoint/2010/main" xmlns:p15="http://schemas.microsoft.com/office/powerpoint/2012/main" xmlns:mc="http://schemas.openxmlformats.org/markup-compatibility/2006">
+<p:sld xmlns:a="http://schemas.openxmlformats.org/drawingml/2006/main" xmlns:r="http://schemas.openxmlformats.org/officeDocument/2006/relationships" xmlns:p="http://schemas.openxmlformats.org/presentationml/2006/main">
   <p:cSld>
     <p:spTree>
       <p:nvGrpSpPr>
@@ -7300,6 +8080,7 @@
           <a:bodyPr numCol="1" spcCol="0" anchor="ctr">
             <a:noAutofit/>
           </a:bodyPr>
+          <a:lstStyle/>
           <a:p>
             <a:pPr indent="0">
               <a:lnSpc>
@@ -7308,15 +8089,15 @@
               <a:buNone/>
             </a:pPr>
             <a:r>
-              <a:rPr b="0" lang="en-US" sz="3800" spc="-1" strike="noStrike" cap="all">
-                <a:solidFill>
-                  <a:srgbClr val="265b4d"/>
+              <a:rPr lang="en-US" sz="3800" b="0" strike="noStrike" cap="all" spc="-1">
+                <a:solidFill>
+                  <a:srgbClr val="265B4D"/>
                 </a:solidFill>
                 <a:latin typeface="Century Gothic"/>
               </a:rPr>
               <a:t>Implicit association test</a:t>
             </a:r>
-            <a:endParaRPr b="0" lang="en-US" sz="3800" spc="-1" strike="noStrike">
+            <a:endParaRPr lang="en-US" sz="3800" b="0" strike="noStrike" spc="-1">
               <a:solidFill>
                 <a:srgbClr val="000000"/>
               </a:solidFill>
@@ -7352,6 +8133,7 @@
           <a:bodyPr numCol="1" spcCol="0" anchor="t">
             <a:noAutofit/>
           </a:bodyPr>
+          <a:lstStyle/>
           <a:p>
             <a:pPr marL="228600" indent="-228600">
               <a:lnSpc>
@@ -7367,7 +8149,7 @@
               <a:buChar char="•"/>
             </a:pPr>
             <a:r>
-              <a:rPr b="0" lang="en-US" sz="2400" spc="-1" strike="noStrike">
+              <a:rPr lang="en-US" sz="2400" b="0" strike="noStrike" spc="-1">
                 <a:solidFill>
                   <a:srgbClr val="404040"/>
                 </a:solidFill>
@@ -7375,7 +8157,42 @@
               </a:rPr>
               <a:t>Psychologists use the Implicit Association Test (IAT) to try to measure implicit bias.</a:t>
             </a:r>
-            <a:endParaRPr b="0" lang="en-US" sz="2400" spc="-1" strike="noStrike">
+          </a:p>
+          <a:p>
+            <a:pPr marL="228600" indent="-228600">
+              <a:lnSpc>
+                <a:spcPct val="90000"/>
+              </a:lnSpc>
+              <a:spcBef>
+                <a:spcPts val="1001"/>
+              </a:spcBef>
+              <a:buClr>
+                <a:srgbClr val="404040"/>
+              </a:buClr>
+              <a:buFont typeface="Arial"/>
+              <a:buChar char="•"/>
+            </a:pPr>
+            <a:r>
+              <a:rPr lang="en-US" sz="2400" b="0" strike="noStrike" spc="-1">
+                <a:solidFill>
+                  <a:srgbClr val="404040"/>
+                </a:solidFill>
+                <a:latin typeface="Century Gothic"/>
+              </a:rPr>
+              <a:t>You can take the test yourself at: </a:t>
+            </a:r>
+            <a:r>
+              <a:rPr lang="en-US" sz="2400" b="0" u="sng" strike="noStrike" spc="-1">
+                <a:solidFill>
+                  <a:srgbClr val="71C5E8"/>
+                </a:solidFill>
+                <a:uFillTx/>
+                <a:latin typeface="Century Gothic"/>
+                <a:hlinkClick r:id="rId2"/>
+              </a:rPr>
+              <a:t>https://implicit.harvard.edu/implicit/</a:t>
+            </a:r>
+            <a:endParaRPr lang="en-US" sz="2400" b="0" strike="noStrike" spc="-1">
               <a:solidFill>
                 <a:srgbClr val="404040"/>
               </a:solidFill>
@@ -7397,39 +8214,22 @@
               <a:buChar char="•"/>
             </a:pPr>
             <a:r>
-              <a:rPr b="0" lang="en-US" sz="2400" spc="-1" strike="noStrike">
+              <a:rPr lang="en-US" sz="2400" b="0" strike="noStrike" spc="-1">
                 <a:solidFill>
                   <a:srgbClr val="404040"/>
                 </a:solidFill>
                 <a:latin typeface="Century Gothic"/>
               </a:rPr>
-              <a:t>You can take the test yourself at: </a:t>
-            </a:r>
-            <a:r>
-              <a:rPr b="0" lang="en-US" sz="2400" spc="-1" strike="noStrike" u="sng">
-                <a:solidFill>
-                  <a:srgbClr val="71c5e8"/>
-                </a:solidFill>
-                <a:uFillTx/>
-                <a:latin typeface="Century Gothic"/>
-                <a:hlinkClick r:id="rId1"/>
-              </a:rPr>
-              <a:t>https://implicit.harvard.edu/implicit/</a:t>
-            </a:r>
-            <a:endParaRPr b="0" lang="en-US" sz="2400" spc="-1" strike="noStrike">
-              <a:solidFill>
-                <a:srgbClr val="404040"/>
-              </a:solidFill>
-              <a:latin typeface="Century Gothic"/>
-            </a:endParaRPr>
-          </a:p>
-          <a:p>
-            <a:pPr marL="228600" indent="-228600">
-              <a:lnSpc>
-                <a:spcPct val="90000"/>
-              </a:lnSpc>
-              <a:spcBef>
-                <a:spcPts val="1001"/>
+              <a:t>There are numerous versions:</a:t>
+            </a:r>
+          </a:p>
+          <a:p>
+            <a:pPr marL="685800" lvl="1" indent="-228600">
+              <a:lnSpc>
+                <a:spcPct val="90000"/>
+              </a:lnSpc>
+              <a:spcBef>
+                <a:spcPts val="499"/>
               </a:spcBef>
               <a:buClr>
                 <a:srgbClr val="404040"/>
@@ -7438,23 +8238,17 @@
               <a:buChar char="•"/>
             </a:pPr>
             <a:r>
-              <a:rPr b="0" lang="en-US" sz="2400" spc="-1" strike="noStrike">
+              <a:rPr lang="en-US" sz="2000" b="0" strike="noStrike" spc="-1">
                 <a:solidFill>
                   <a:srgbClr val="404040"/>
                 </a:solidFill>
                 <a:latin typeface="Century Gothic"/>
               </a:rPr>
-              <a:t>There are numerous versions:</a:t>
-            </a:r>
-            <a:endParaRPr b="0" lang="en-US" sz="2400" spc="-1" strike="noStrike">
-              <a:solidFill>
-                <a:srgbClr val="404040"/>
-              </a:solidFill>
-              <a:latin typeface="Century Gothic"/>
-            </a:endParaRPr>
-          </a:p>
-          <a:p>
-            <a:pPr lvl="1" marL="685800" indent="-228600">
+              <a:t>Race IAT (bias against black people)</a:t>
+            </a:r>
+          </a:p>
+          <a:p>
+            <a:pPr marL="685800" lvl="1" indent="-228600">
               <a:lnSpc>
                 <a:spcPct val="90000"/>
               </a:lnSpc>
@@ -7468,23 +8262,17 @@
               <a:buChar char="•"/>
             </a:pPr>
             <a:r>
-              <a:rPr b="0" lang="en-US" sz="2000" spc="-1" strike="noStrike">
+              <a:rPr lang="en-US" sz="2000" b="0" strike="noStrike" spc="-1">
                 <a:solidFill>
                   <a:srgbClr val="404040"/>
                 </a:solidFill>
                 <a:latin typeface="Century Gothic"/>
               </a:rPr>
-              <a:t>Race IAT (bias against black people)</a:t>
-            </a:r>
-            <a:endParaRPr b="0" lang="en-US" sz="2000" spc="-1" strike="noStrike">
-              <a:solidFill>
-                <a:srgbClr val="404040"/>
-              </a:solidFill>
-              <a:latin typeface="Century Gothic"/>
-            </a:endParaRPr>
-          </a:p>
-          <a:p>
-            <a:pPr lvl="1" marL="685800" indent="-228600">
+              <a:t>Asian IAT (bias against Asian people)</a:t>
+            </a:r>
+          </a:p>
+          <a:p>
+            <a:pPr marL="685800" lvl="1" indent="-228600">
               <a:lnSpc>
                 <a:spcPct val="90000"/>
               </a:lnSpc>
@@ -7498,23 +8286,17 @@
               <a:buChar char="•"/>
             </a:pPr>
             <a:r>
-              <a:rPr b="0" lang="en-US" sz="2000" spc="-1" strike="noStrike">
+              <a:rPr lang="en-US" sz="2000" b="0" strike="noStrike" spc="-1">
                 <a:solidFill>
                   <a:srgbClr val="404040"/>
                 </a:solidFill>
                 <a:latin typeface="Century Gothic"/>
               </a:rPr>
-              <a:t>Asian IAT (bias against Asian people)</a:t>
-            </a:r>
-            <a:endParaRPr b="0" lang="en-US" sz="2000" spc="-1" strike="noStrike">
-              <a:solidFill>
-                <a:srgbClr val="404040"/>
-              </a:solidFill>
-              <a:latin typeface="Century Gothic"/>
-            </a:endParaRPr>
-          </a:p>
-          <a:p>
-            <a:pPr lvl="1" marL="685800" indent="-228600">
+              <a:t>Gender-Career IAT (bias against women in employment)</a:t>
+            </a:r>
+          </a:p>
+          <a:p>
+            <a:pPr marL="685800" lvl="1" indent="-228600">
               <a:lnSpc>
                 <a:spcPct val="90000"/>
               </a:lnSpc>
@@ -7528,23 +8310,17 @@
               <a:buChar char="•"/>
             </a:pPr>
             <a:r>
-              <a:rPr b="0" lang="en-US" sz="2000" spc="-1" strike="noStrike">
+              <a:rPr lang="en-US" sz="2000" b="0" strike="noStrike" spc="-1">
                 <a:solidFill>
                   <a:srgbClr val="404040"/>
                 </a:solidFill>
                 <a:latin typeface="Century Gothic"/>
               </a:rPr>
-              <a:t>Gender-Career IAT (bias against women in employment)</a:t>
-            </a:r>
-            <a:endParaRPr b="0" lang="en-US" sz="2000" spc="-1" strike="noStrike">
-              <a:solidFill>
-                <a:srgbClr val="404040"/>
-              </a:solidFill>
-              <a:latin typeface="Century Gothic"/>
-            </a:endParaRPr>
-          </a:p>
-          <a:p>
-            <a:pPr lvl="1" marL="685800" indent="-228600">
+              <a:t>Transgender IAT (bias against trans people)</a:t>
+            </a:r>
+          </a:p>
+          <a:p>
+            <a:pPr marL="685800" lvl="1" indent="-228600">
               <a:lnSpc>
                 <a:spcPct val="90000"/>
               </a:lnSpc>
@@ -7558,50 +8334,14 @@
               <a:buChar char="•"/>
             </a:pPr>
             <a:r>
-              <a:rPr b="0" lang="en-US" sz="2000" spc="-1" strike="noStrike">
+              <a:rPr lang="en-US" sz="2000" b="0" strike="noStrike" spc="-1">
                 <a:solidFill>
                   <a:srgbClr val="404040"/>
                 </a:solidFill>
                 <a:latin typeface="Century Gothic"/>
               </a:rPr>
-              <a:t>Transgender IAT (bias against trans people)</a:t>
-            </a:r>
-            <a:endParaRPr b="0" lang="en-US" sz="2000" spc="-1" strike="noStrike">
-              <a:solidFill>
-                <a:srgbClr val="404040"/>
-              </a:solidFill>
-              <a:latin typeface="Century Gothic"/>
-            </a:endParaRPr>
-          </a:p>
-          <a:p>
-            <a:pPr lvl="1" marL="685800" indent="-228600">
-              <a:lnSpc>
-                <a:spcPct val="90000"/>
-              </a:lnSpc>
-              <a:spcBef>
-                <a:spcPts val="499"/>
-              </a:spcBef>
-              <a:buClr>
-                <a:srgbClr val="404040"/>
-              </a:buClr>
-              <a:buFont typeface="Arial"/>
-              <a:buChar char="•"/>
-            </a:pPr>
-            <a:r>
-              <a:rPr b="0" lang="en-US" sz="2000" spc="-1" strike="noStrike">
-                <a:solidFill>
-                  <a:srgbClr val="404040"/>
-                </a:solidFill>
-                <a:latin typeface="Century Gothic"/>
-              </a:rPr>
               <a:t>…</a:t>
             </a:r>
-            <a:endParaRPr b="0" lang="en-US" sz="2000" spc="-1" strike="noStrike">
-              <a:solidFill>
-                <a:srgbClr val="404040"/>
-              </a:solidFill>
-              <a:latin typeface="Century Gothic"/>
-            </a:endParaRPr>
           </a:p>
         </p:txBody>
       </p:sp>
@@ -7612,7 +8352,7 @@
           <p:nvPr/>
         </p:nvPicPr>
         <p:blipFill>
-          <a:blip r:embed="rId2"/>
+          <a:blip r:embed="rId3"/>
           <a:stretch/>
         </p:blipFill>
         <p:spPr>
@@ -7630,19 +8370,14 @@
       </p:pic>
     </p:spTree>
   </p:cSld>
-  <mc:AlternateContent>
-    <mc:Choice Requires="p14">
-      <p:transition spd="slow" p14:dur="2000"/>
-    </mc:Choice>
-    <mc:Fallback>
-      <p:transition spd="slow"/>
-    </mc:Fallback>
-  </mc:AlternateContent>
+  <p:clrMapOvr>
+    <a:masterClrMapping/>
+  </p:clrMapOvr>
 </p:sld>
 </file>
 
 <file path=ppt/slides/slide15.xml><?xml version="1.0" encoding="utf-8"?>
-<p:sld xmlns:a="http://schemas.openxmlformats.org/drawingml/2006/main" xmlns:p="http://schemas.openxmlformats.org/presentationml/2006/main" xmlns:r="http://schemas.openxmlformats.org/officeDocument/2006/relationships" xmlns:p14="http://schemas.microsoft.com/office/powerpoint/2010/main" xmlns:p15="http://schemas.microsoft.com/office/powerpoint/2012/main" xmlns:mc="http://schemas.openxmlformats.org/markup-compatibility/2006">
+<p:sld xmlns:a="http://schemas.openxmlformats.org/drawingml/2006/main" xmlns:r="http://schemas.openxmlformats.org/officeDocument/2006/relationships" xmlns:p="http://schemas.openxmlformats.org/presentationml/2006/main">
   <p:cSld>
     <p:spTree>
       <p:nvGrpSpPr>
@@ -7685,6 +8420,7 @@
           <a:bodyPr numCol="1" spcCol="0" anchor="ctr">
             <a:noAutofit/>
           </a:bodyPr>
+          <a:lstStyle/>
           <a:p>
             <a:pPr indent="0">
               <a:lnSpc>
@@ -7693,15 +8429,15 @@
               <a:buNone/>
             </a:pPr>
             <a:r>
-              <a:rPr b="0" lang="en-US" sz="3800" spc="-1" strike="noStrike" cap="all">
-                <a:solidFill>
-                  <a:srgbClr val="265b4d"/>
+              <a:rPr lang="en-US" sz="3800" b="0" strike="noStrike" cap="all" spc="-1">
+                <a:solidFill>
+                  <a:srgbClr val="265B4D"/>
                 </a:solidFill>
                 <a:latin typeface="Century Gothic"/>
               </a:rPr>
               <a:t>Implicit association test</a:t>
             </a:r>
-            <a:endParaRPr b="0" lang="en-US" sz="3800" spc="-1" strike="noStrike">
+            <a:endParaRPr lang="en-US" sz="3800" b="0" strike="noStrike" spc="-1">
               <a:solidFill>
                 <a:srgbClr val="000000"/>
               </a:solidFill>
@@ -7737,6 +8473,7 @@
           <a:bodyPr numCol="1" spcCol="0" anchor="t">
             <a:noAutofit/>
           </a:bodyPr>
+          <a:lstStyle/>
           <a:p>
             <a:pPr marL="228600" indent="-228600">
               <a:lnSpc>
@@ -7752,7 +8489,7 @@
               <a:buChar char="•"/>
             </a:pPr>
             <a:r>
-              <a:rPr b="0" lang="en-US" sz="2400" spc="-1" strike="noStrike">
+              <a:rPr lang="en-US" sz="2400" b="0" strike="noStrike" spc="-1">
                 <a:solidFill>
                   <a:srgbClr val="404040"/>
                 </a:solidFill>
@@ -7760,12 +8497,6 @@
               </a:rPr>
               <a:t>The idea behind the IAT is that you have to quickly sort photos of people (e.g., black vs. white people) and good or bad words by pressing the left or right keys on a keyboard.</a:t>
             </a:r>
-            <a:endParaRPr b="0" lang="en-US" sz="2400" spc="-1" strike="noStrike">
-              <a:solidFill>
-                <a:srgbClr val="404040"/>
-              </a:solidFill>
-              <a:latin typeface="Century Gothic"/>
-            </a:endParaRPr>
           </a:p>
           <a:p>
             <a:pPr marL="228600" indent="-228600">
@@ -7782,7 +8513,7 @@
               <a:buChar char="•"/>
             </a:pPr>
             <a:r>
-              <a:rPr b="0" lang="en-US" sz="2400" spc="-1" strike="noStrike">
+              <a:rPr lang="en-US" sz="2400" b="0" strike="noStrike" spc="-1">
                 <a:solidFill>
                   <a:srgbClr val="404040"/>
                 </a:solidFill>
@@ -7790,12 +8521,6 @@
               </a:rPr>
               <a:t>The round order is random, but in one round(top figure) you press “left” if you see a photo of a black person or you see a positive word (e.g., “pleasure”), and you press “right” if you see a photo of a white person or a negative word (e.g., “awful”)</a:t>
             </a:r>
-            <a:endParaRPr b="0" lang="en-US" sz="2400" spc="-1" strike="noStrike">
-              <a:solidFill>
-                <a:srgbClr val="404040"/>
-              </a:solidFill>
-              <a:latin typeface="Century Gothic"/>
-            </a:endParaRPr>
           </a:p>
         </p:txBody>
       </p:sp>
@@ -7806,7 +8531,7 @@
           <p:nvPr/>
         </p:nvPicPr>
         <p:blipFill>
-          <a:blip r:embed="rId1"/>
+          <a:blip r:embed="rId2"/>
           <a:stretch/>
         </p:blipFill>
         <p:spPr>
@@ -7824,19 +8549,14 @@
       </p:pic>
     </p:spTree>
   </p:cSld>
-  <mc:AlternateContent>
-    <mc:Choice Requires="p14">
-      <p:transition spd="slow" p14:dur="2000"/>
-    </mc:Choice>
-    <mc:Fallback>
-      <p:transition spd="slow"/>
-    </mc:Fallback>
-  </mc:AlternateContent>
+  <p:clrMapOvr>
+    <a:masterClrMapping/>
+  </p:clrMapOvr>
 </p:sld>
 </file>
 
 <file path=ppt/slides/slide16.xml><?xml version="1.0" encoding="utf-8"?>
-<p:sld xmlns:a="http://schemas.openxmlformats.org/drawingml/2006/main" xmlns:p="http://schemas.openxmlformats.org/presentationml/2006/main" xmlns:r="http://schemas.openxmlformats.org/officeDocument/2006/relationships" xmlns:p14="http://schemas.microsoft.com/office/powerpoint/2010/main" xmlns:p15="http://schemas.microsoft.com/office/powerpoint/2012/main" xmlns:mc="http://schemas.openxmlformats.org/markup-compatibility/2006">
+<p:sld xmlns:a="http://schemas.openxmlformats.org/drawingml/2006/main" xmlns:r="http://schemas.openxmlformats.org/officeDocument/2006/relationships" xmlns:p="http://schemas.openxmlformats.org/presentationml/2006/main">
   <p:cSld>
     <p:spTree>
       <p:nvGrpSpPr>
@@ -7879,6 +8599,7 @@
           <a:bodyPr numCol="1" spcCol="0" anchor="ctr">
             <a:noAutofit/>
           </a:bodyPr>
+          <a:lstStyle/>
           <a:p>
             <a:pPr indent="0">
               <a:lnSpc>
@@ -7887,15 +8608,15 @@
               <a:buNone/>
             </a:pPr>
             <a:r>
-              <a:rPr b="0" lang="en-US" sz="3800" spc="-1" strike="noStrike" cap="all">
-                <a:solidFill>
-                  <a:srgbClr val="265b4d"/>
+              <a:rPr lang="en-US" sz="3800" b="0" strike="noStrike" cap="all" spc="-1">
+                <a:solidFill>
+                  <a:srgbClr val="265B4D"/>
                 </a:solidFill>
                 <a:latin typeface="Century Gothic"/>
               </a:rPr>
               <a:t>Implicit association test</a:t>
             </a:r>
-            <a:endParaRPr b="0" lang="en-US" sz="3800" spc="-1" strike="noStrike">
+            <a:endParaRPr lang="en-US" sz="3800" b="0" strike="noStrike" spc="-1">
               <a:solidFill>
                 <a:srgbClr val="000000"/>
               </a:solidFill>
@@ -7931,6 +8652,7 @@
           <a:bodyPr numCol="1" spcCol="0" anchor="t">
             <a:noAutofit/>
           </a:bodyPr>
+          <a:lstStyle/>
           <a:p>
             <a:pPr marL="228600" indent="-228600">
               <a:lnSpc>
@@ -7946,7 +8668,7 @@
               <a:buChar char="•"/>
             </a:pPr>
             <a:r>
-              <a:rPr b="0" lang="en-US" sz="2400" spc="-1" strike="noStrike">
+              <a:rPr lang="en-US" sz="2400" b="0" strike="noStrike" spc="-1">
                 <a:solidFill>
                   <a:srgbClr val="404040"/>
                 </a:solidFill>
@@ -7954,12 +8676,6 @@
               </a:rPr>
               <a:t>The round order is random, but in another round (bottom figure) you press “left” if you see a photo of a white person or you see a positive word (e.g., “pleasure”), and you press “right” if you see a photo of a black person or a negative word (e.g., “awful”)</a:t>
             </a:r>
-            <a:endParaRPr b="0" lang="en-US" sz="2400" spc="-1" strike="noStrike">
-              <a:solidFill>
-                <a:srgbClr val="404040"/>
-              </a:solidFill>
-              <a:latin typeface="Century Gothic"/>
-            </a:endParaRPr>
           </a:p>
           <a:p>
             <a:pPr marL="228600" indent="-228600">
@@ -7976,7 +8692,7 @@
               <a:buChar char="•"/>
             </a:pPr>
             <a:r>
-              <a:rPr b="0" lang="en-US" sz="2400" spc="-1" strike="noStrike">
+              <a:rPr lang="en-US" sz="2400" b="0" strike="noStrike" spc="-1">
                 <a:solidFill>
                   <a:srgbClr val="404040"/>
                 </a:solidFill>
@@ -7984,12 +8700,6 @@
               </a:rPr>
               <a:t>If you are faster in one round than another, it means you have an implicit association between a group and good/bad.</a:t>
             </a:r>
-            <a:endParaRPr b="0" lang="en-US" sz="2400" spc="-1" strike="noStrike">
-              <a:solidFill>
-                <a:srgbClr val="404040"/>
-              </a:solidFill>
-              <a:latin typeface="Century Gothic"/>
-            </a:endParaRPr>
           </a:p>
           <a:p>
             <a:pPr marL="228600" indent="-228600">
@@ -8006,7 +8716,7 @@
               <a:buChar char="•"/>
             </a:pPr>
             <a:r>
-              <a:rPr b="0" lang="en-US" sz="2400" spc="-1" strike="noStrike">
+              <a:rPr lang="en-US" sz="2400" b="0" strike="noStrike" spc="-1">
                 <a:solidFill>
                   <a:srgbClr val="404040"/>
                 </a:solidFill>
@@ -8014,12 +8724,6 @@
               </a:rPr>
               <a:t>Most people are biased and are faster at the bottom scenario than the top scenario.</a:t>
             </a:r>
-            <a:endParaRPr b="0" lang="en-US" sz="2400" spc="-1" strike="noStrike">
-              <a:solidFill>
-                <a:srgbClr val="404040"/>
-              </a:solidFill>
-              <a:latin typeface="Century Gothic"/>
-            </a:endParaRPr>
           </a:p>
           <a:p>
             <a:pPr indent="0">
@@ -8031,7 +8735,7 @@
               </a:spcBef>
               <a:buNone/>
             </a:pPr>
-            <a:endParaRPr b="0" lang="en-US" sz="2400" spc="-1" strike="noStrike">
+            <a:endParaRPr lang="en-US" sz="2400" b="0" strike="noStrike" spc="-1">
               <a:solidFill>
                 <a:srgbClr val="404040"/>
               </a:solidFill>
@@ -8047,7 +8751,7 @@
           <p:nvPr/>
         </p:nvPicPr>
         <p:blipFill>
-          <a:blip r:embed="rId1"/>
+          <a:blip r:embed="rId2"/>
           <a:stretch/>
         </p:blipFill>
         <p:spPr>
@@ -8065,19 +8769,14 @@
       </p:pic>
     </p:spTree>
   </p:cSld>
-  <mc:AlternateContent>
-    <mc:Choice Requires="p14">
-      <p:transition spd="slow" p14:dur="2000"/>
-    </mc:Choice>
-    <mc:Fallback>
-      <p:transition spd="slow"/>
-    </mc:Fallback>
-  </mc:AlternateContent>
+  <p:clrMapOvr>
+    <a:masterClrMapping/>
+  </p:clrMapOvr>
 </p:sld>
 </file>
 
 <file path=ppt/slides/slide17.xml><?xml version="1.0" encoding="utf-8"?>
-<p:sld xmlns:a="http://schemas.openxmlformats.org/drawingml/2006/main" xmlns:p="http://schemas.openxmlformats.org/presentationml/2006/main" xmlns:r="http://schemas.openxmlformats.org/officeDocument/2006/relationships" xmlns:p14="http://schemas.microsoft.com/office/powerpoint/2010/main" xmlns:p15="http://schemas.microsoft.com/office/powerpoint/2012/main" xmlns:mc="http://schemas.openxmlformats.org/markup-compatibility/2006">
+<p:sld xmlns:a="http://schemas.openxmlformats.org/drawingml/2006/main" xmlns:r="http://schemas.openxmlformats.org/officeDocument/2006/relationships" xmlns:p="http://schemas.openxmlformats.org/presentationml/2006/main">
   <p:cSld>
     <p:spTree>
       <p:nvGrpSpPr>
@@ -8120,6 +8819,7 @@
           <a:bodyPr numCol="1" spcCol="0" anchor="ctr">
             <a:noAutofit/>
           </a:bodyPr>
+          <a:lstStyle/>
           <a:p>
             <a:pPr indent="0">
               <a:lnSpc>
@@ -8128,15 +8828,15 @@
               <a:buNone/>
             </a:pPr>
             <a:r>
-              <a:rPr b="0" lang="en-US" sz="3800" spc="-1" strike="noStrike" cap="all">
-                <a:solidFill>
-                  <a:srgbClr val="265b4d"/>
+              <a:rPr lang="en-US" sz="3800" b="0" strike="noStrike" cap="all" spc="-1">
+                <a:solidFill>
+                  <a:srgbClr val="265B4D"/>
                 </a:solidFill>
                 <a:latin typeface="Century Gothic"/>
               </a:rPr>
               <a:t>IAT homework</a:t>
             </a:r>
-            <a:endParaRPr b="0" lang="en-US" sz="3800" spc="-1" strike="noStrike">
+            <a:endParaRPr lang="en-US" sz="3800" b="0" strike="noStrike" spc="-1">
               <a:solidFill>
                 <a:srgbClr val="000000"/>
               </a:solidFill>
@@ -8172,6 +8872,7 @@
           <a:bodyPr numCol="1" spcCol="0" anchor="t">
             <a:noAutofit/>
           </a:bodyPr>
+          <a:lstStyle/>
           <a:p>
             <a:pPr marL="228600" indent="-228600">
               <a:lnSpc>
@@ -8187,7 +8888,7 @@
               <a:buChar char="•"/>
             </a:pPr>
             <a:r>
-              <a:rPr b="0" lang="en-US" sz="2400" spc="-1" strike="noStrike">
+              <a:rPr lang="en-US" sz="2400" b="0" strike="noStrike" spc="-1">
                 <a:solidFill>
                   <a:srgbClr val="404040"/>
                 </a:solidFill>
@@ -8196,17 +8897,17 @@
               <a:t>As an “other activity”, please take an IAT test at </a:t>
             </a:r>
             <a:r>
-              <a:rPr b="0" lang="en-US" sz="2400" spc="-1" strike="noStrike" u="sng">
-                <a:solidFill>
-                  <a:srgbClr val="71c5e8"/>
+              <a:rPr lang="en-US" sz="2400" b="0" u="sng" strike="noStrike" spc="-1">
+                <a:solidFill>
+                  <a:srgbClr val="71C5E8"/>
                 </a:solidFill>
                 <a:uFillTx/>
                 <a:latin typeface="Century Gothic"/>
-                <a:hlinkClick r:id="rId1"/>
+                <a:hlinkClick r:id="rId2"/>
               </a:rPr>
               <a:t>https://implicit.harvard.edu/implicit/selectatest.html</a:t>
             </a:r>
-            <a:endParaRPr b="0" lang="en-US" sz="2400" spc="-1" strike="noStrike">
+            <a:endParaRPr lang="en-US" sz="2400" b="0" strike="noStrike" spc="-1">
               <a:solidFill>
                 <a:srgbClr val="404040"/>
               </a:solidFill>
@@ -8228,7 +8929,7 @@
               <a:buChar char="•"/>
             </a:pPr>
             <a:r>
-              <a:rPr b="0" lang="en-US" sz="2400" spc="-1" strike="noStrike">
+              <a:rPr lang="en-US" sz="2400" b="0" strike="noStrike" spc="-1">
                 <a:solidFill>
                   <a:srgbClr val="404040"/>
                 </a:solidFill>
@@ -8236,15 +8937,9 @@
               </a:rPr>
               <a:t>My suggestion is to take one or more of the following:</a:t>
             </a:r>
-            <a:endParaRPr b="0" lang="en-US" sz="2400" spc="-1" strike="noStrike">
-              <a:solidFill>
-                <a:srgbClr val="404040"/>
-              </a:solidFill>
-              <a:latin typeface="Century Gothic"/>
-            </a:endParaRPr>
-          </a:p>
-          <a:p>
-            <a:pPr lvl="1" marL="685800" indent="-228600">
+          </a:p>
+          <a:p>
+            <a:pPr marL="685800" lvl="1" indent="-228600">
               <a:lnSpc>
                 <a:spcPct val="90000"/>
               </a:lnSpc>
@@ -8258,7 +8953,7 @@
               <a:buChar char="•"/>
             </a:pPr>
             <a:r>
-              <a:rPr b="0" lang="en-US" sz="2000" spc="-1" strike="noStrike">
+              <a:rPr lang="en-US" sz="2000" b="0" strike="noStrike" spc="-1">
                 <a:solidFill>
                   <a:srgbClr val="404040"/>
                 </a:solidFill>
@@ -8266,15 +8961,9 @@
               </a:rPr>
               <a:t>Race IAT – tests for bias against black people through an association between black/white faces and good/bad words</a:t>
             </a:r>
-            <a:endParaRPr b="0" lang="en-US" sz="2000" spc="-1" strike="noStrike">
-              <a:solidFill>
-                <a:srgbClr val="404040"/>
-              </a:solidFill>
-              <a:latin typeface="Century Gothic"/>
-            </a:endParaRPr>
-          </a:p>
-          <a:p>
-            <a:pPr lvl="1" marL="685800" indent="-228600">
+          </a:p>
+          <a:p>
+            <a:pPr marL="685800" lvl="1" indent="-228600">
               <a:lnSpc>
                 <a:spcPct val="90000"/>
               </a:lnSpc>
@@ -8288,7 +8977,7 @@
               <a:buChar char="•"/>
             </a:pPr>
             <a:r>
-              <a:rPr b="0" lang="en-US" sz="2000" spc="-1" strike="noStrike">
+              <a:rPr lang="en-US" sz="2000" b="0" strike="noStrike" spc="-1">
                 <a:solidFill>
                   <a:srgbClr val="404040"/>
                 </a:solidFill>
@@ -8296,15 +8985,9 @@
               </a:rPr>
               <a:t>Weapons IAT – tests for bias against black people through an association between black/white faces and weapons/harmless objects</a:t>
             </a:r>
-            <a:endParaRPr b="0" lang="en-US" sz="2000" spc="-1" strike="noStrike">
-              <a:solidFill>
-                <a:srgbClr val="404040"/>
-              </a:solidFill>
-              <a:latin typeface="Century Gothic"/>
-            </a:endParaRPr>
-          </a:p>
-          <a:p>
-            <a:pPr lvl="1" marL="685800" indent="-228600">
+          </a:p>
+          <a:p>
+            <a:pPr marL="685800" lvl="1" indent="-228600">
               <a:lnSpc>
                 <a:spcPct val="90000"/>
               </a:lnSpc>
@@ -8318,7 +9001,7 @@
               <a:buChar char="•"/>
             </a:pPr>
             <a:r>
-              <a:rPr b="0" lang="en-US" sz="2000" spc="-1" strike="noStrike">
+              <a:rPr lang="en-US" sz="2000" b="0" strike="noStrike" spc="-1">
                 <a:solidFill>
                   <a:srgbClr val="404040"/>
                 </a:solidFill>
@@ -8326,12 +9009,6 @@
               </a:rPr>
               <a:t>Skin-tone IAT – tests for bias against people with darker skin</a:t>
             </a:r>
-            <a:endParaRPr b="0" lang="en-US" sz="2000" spc="-1" strike="noStrike">
-              <a:solidFill>
-                <a:srgbClr val="404040"/>
-              </a:solidFill>
-              <a:latin typeface="Century Gothic"/>
-            </a:endParaRPr>
           </a:p>
           <a:p>
             <a:pPr marL="228600" indent="-228600">
@@ -8348,7 +9025,7 @@
               <a:buChar char="•"/>
             </a:pPr>
             <a:r>
-              <a:rPr b="0" lang="en-US" sz="2400" spc="-1" strike="noStrike">
+              <a:rPr lang="en-US" sz="2400" b="0" strike="noStrike" spc="-1">
                 <a:solidFill>
                   <a:srgbClr val="404040"/>
                 </a:solidFill>
@@ -8356,12 +9033,6 @@
               </a:rPr>
               <a:t>(If you have taken the IAT before then please take one you haven’t taken.)</a:t>
             </a:r>
-            <a:endParaRPr b="0" lang="en-US" sz="2400" spc="-1" strike="noStrike">
-              <a:solidFill>
-                <a:srgbClr val="404040"/>
-              </a:solidFill>
-              <a:latin typeface="Century Gothic"/>
-            </a:endParaRPr>
           </a:p>
           <a:p>
             <a:pPr marL="228600" indent="-228600">
@@ -8378,7 +9049,7 @@
               <a:buChar char="•"/>
             </a:pPr>
             <a:r>
-              <a:rPr b="0" lang="en-US" sz="2400" spc="-1" strike="noStrike">
+              <a:rPr lang="en-US" sz="2400" b="0" strike="noStrike" spc="-1">
                 <a:solidFill>
                   <a:srgbClr val="404040"/>
                 </a:solidFill>
@@ -8386,30 +9057,19 @@
               </a:rPr>
               <a:t>As an “other activity”, you’ll anonymously submit a very short reflection statement after completing the IAT.</a:t>
             </a:r>
-            <a:endParaRPr b="0" lang="en-US" sz="2400" spc="-1" strike="noStrike">
-              <a:solidFill>
-                <a:srgbClr val="404040"/>
-              </a:solidFill>
-              <a:latin typeface="Century Gothic"/>
-            </a:endParaRPr>
           </a:p>
         </p:txBody>
       </p:sp>
     </p:spTree>
   </p:cSld>
-  <mc:AlternateContent>
-    <mc:Choice Requires="p14">
-      <p:transition spd="slow" p14:dur="2000"/>
-    </mc:Choice>
-    <mc:Fallback>
-      <p:transition spd="slow"/>
-    </mc:Fallback>
-  </mc:AlternateContent>
+  <p:clrMapOvr>
+    <a:masterClrMapping/>
+  </p:clrMapOvr>
 </p:sld>
 </file>
 
 <file path=ppt/slides/slide18.xml><?xml version="1.0" encoding="utf-8"?>
-<p:sld xmlns:a="http://schemas.openxmlformats.org/drawingml/2006/main" xmlns:p="http://schemas.openxmlformats.org/presentationml/2006/main" xmlns:r="http://schemas.openxmlformats.org/officeDocument/2006/relationships" xmlns:p14="http://schemas.microsoft.com/office/powerpoint/2010/main" xmlns:p15="http://schemas.microsoft.com/office/powerpoint/2012/main" xmlns:mc="http://schemas.openxmlformats.org/markup-compatibility/2006">
+<p:sld xmlns:a="http://schemas.openxmlformats.org/drawingml/2006/main" xmlns:r="http://schemas.openxmlformats.org/officeDocument/2006/relationships" xmlns:p="http://schemas.openxmlformats.org/presentationml/2006/main">
   <p:cSld>
     <p:spTree>
       <p:nvGrpSpPr>
@@ -8452,6 +9112,7 @@
           <a:bodyPr numCol="1" spcCol="0" anchor="ctr">
             <a:noAutofit/>
           </a:bodyPr>
+          <a:lstStyle/>
           <a:p>
             <a:pPr indent="0">
               <a:lnSpc>
@@ -8460,15 +9121,15 @@
               <a:buNone/>
             </a:pPr>
             <a:r>
-              <a:rPr b="0" lang="en-US" sz="3800" spc="-1" strike="noStrike" cap="all">
-                <a:solidFill>
-                  <a:srgbClr val="265b4d"/>
+              <a:rPr lang="en-US" sz="3800" b="0" strike="noStrike" cap="all" spc="-1">
+                <a:solidFill>
+                  <a:srgbClr val="265B4D"/>
                 </a:solidFill>
                 <a:latin typeface="Century Gothic"/>
               </a:rPr>
               <a:t>Audit Field experiments</a:t>
             </a:r>
-            <a:endParaRPr b="0" lang="en-US" sz="3800" spc="-1" strike="noStrike">
+            <a:endParaRPr lang="en-US" sz="3800" b="0" strike="noStrike" spc="-1">
               <a:solidFill>
                 <a:srgbClr val="000000"/>
               </a:solidFill>
@@ -8504,6 +9165,7 @@
           <a:bodyPr numCol="1" spcCol="0" anchor="t">
             <a:noAutofit/>
           </a:bodyPr>
+          <a:lstStyle/>
           <a:p>
             <a:pPr marL="228600" indent="-228600">
               <a:lnSpc>
@@ -8519,7 +9181,7 @@
               <a:buChar char="•"/>
             </a:pPr>
             <a:r>
-              <a:rPr b="0" lang="en-US" sz="2400" spc="-1" strike="noStrike">
+              <a:rPr lang="en-US" sz="2400" b="0" strike="noStrike" spc="-1">
                 <a:solidFill>
                   <a:srgbClr val="404040"/>
                 </a:solidFill>
@@ -8527,12 +9189,6 @@
               </a:rPr>
               <a:t>Also called audit studies.</a:t>
             </a:r>
-            <a:endParaRPr b="0" lang="en-US" sz="2400" spc="-1" strike="noStrike">
-              <a:solidFill>
-                <a:srgbClr val="404040"/>
-              </a:solidFill>
-              <a:latin typeface="Century Gothic"/>
-            </a:endParaRPr>
           </a:p>
           <a:p>
             <a:pPr marL="228600" indent="-228600">
@@ -8549,7 +9205,7 @@
               <a:buChar char="•"/>
             </a:pPr>
             <a:r>
-              <a:rPr b="0" lang="en-US" sz="2400" spc="-1" strike="noStrike">
+              <a:rPr lang="en-US" sz="2400" b="0" strike="noStrike" spc="-1">
                 <a:solidFill>
                   <a:srgbClr val="404040"/>
                 </a:solidFill>
@@ -8557,12 +9213,6 @@
               </a:rPr>
               <a:t>Also called correspondence studies when they involve sending “correspondence” (email, mail).</a:t>
             </a:r>
-            <a:endParaRPr b="0" lang="en-US" sz="2400" spc="-1" strike="noStrike">
-              <a:solidFill>
-                <a:srgbClr val="404040"/>
-              </a:solidFill>
-              <a:latin typeface="Century Gothic"/>
-            </a:endParaRPr>
           </a:p>
           <a:p>
             <a:pPr marL="228600" indent="-228600">
@@ -8579,7 +9229,7 @@
               <a:buChar char="•"/>
             </a:pPr>
             <a:r>
-              <a:rPr b="0" lang="en-US" sz="2400" spc="-1" strike="noStrike">
+              <a:rPr lang="en-US" sz="2400" b="0" strike="noStrike" spc="-1">
                 <a:solidFill>
                   <a:srgbClr val="404040"/>
                 </a:solidFill>
@@ -8587,12 +9237,6 @@
               </a:rPr>
               <a:t>My speciality!</a:t>
             </a:r>
-            <a:endParaRPr b="0" lang="en-US" sz="2400" spc="-1" strike="noStrike">
-              <a:solidFill>
-                <a:srgbClr val="404040"/>
-              </a:solidFill>
-              <a:latin typeface="Century Gothic"/>
-            </a:endParaRPr>
           </a:p>
         </p:txBody>
       </p:sp>
@@ -8603,7 +9247,7 @@
           <p:nvPr/>
         </p:nvPicPr>
         <p:blipFill>
-          <a:blip r:embed="rId1"/>
+          <a:blip r:embed="rId2"/>
           <a:stretch/>
         </p:blipFill>
         <p:spPr>
@@ -8639,15 +9283,22 @@
           </a:ln>
         </p:spPr>
         <p:style>
-          <a:lnRef idx="0"/>
-          <a:fillRef idx="0"/>
-          <a:effectRef idx="0"/>
+          <a:lnRef idx="0">
+            <a:scrgbClr r="0" g="0" b="0"/>
+          </a:lnRef>
+          <a:fillRef idx="0">
+            <a:scrgbClr r="0" g="0" b="0"/>
+          </a:fillRef>
+          <a:effectRef idx="0">
+            <a:scrgbClr r="0" g="0" b="0"/>
+          </a:effectRef>
           <a:fontRef idx="minor"/>
         </p:style>
         <p:txBody>
-          <a:bodyPr lIns="90000" rIns="90000" tIns="45000" bIns="45000" anchor="t">
+          <a:bodyPr lIns="90000" tIns="45000" rIns="90000" bIns="45000" anchor="t">
             <a:spAutoFit/>
           </a:bodyPr>
+          <a:lstStyle/>
           <a:p>
             <a:pPr marL="343080" indent="-343080">
               <a:lnSpc>
@@ -8660,7 +9311,7 @@
               <a:buChar char="•"/>
             </a:pPr>
             <a:r>
-              <a:rPr b="0" lang="en-US" sz="2400" spc="-1" strike="noStrike">
+              <a:rPr lang="en-US" sz="2400" b="0" strike="noStrike" spc="-1">
                 <a:solidFill>
                   <a:srgbClr val="000000"/>
                 </a:solidFill>
@@ -8668,7 +9319,7 @@
               </a:rPr>
               <a:t>These are experiments in real life (the “field”).</a:t>
             </a:r>
-            <a:endParaRPr b="0" lang="en-US" sz="2400" spc="-1" strike="noStrike">
+            <a:endParaRPr lang="en-US" sz="2400" b="0" strike="noStrike" spc="-1">
               <a:solidFill>
                 <a:srgbClr val="000000"/>
               </a:solidFill>
@@ -8687,7 +9338,7 @@
               <a:buChar char="•"/>
             </a:pPr>
             <a:r>
-              <a:rPr b="0" lang="en-US" sz="2400" spc="-1" strike="noStrike">
+              <a:rPr lang="en-US" sz="2400" b="0" strike="noStrike" spc="-1">
                 <a:solidFill>
                   <a:srgbClr val="000000"/>
                 </a:solidFill>
@@ -8695,7 +9346,7 @@
               </a:rPr>
               <a:t>Most commonly these are resume correspondence studies, where researchers study hiring discrimination by applying to jobs with minority and non-minority candidates.</a:t>
             </a:r>
-            <a:endParaRPr b="0" lang="en-US" sz="2400" spc="-1" strike="noStrike">
+            <a:endParaRPr lang="en-US" sz="2400" b="0" strike="noStrike" spc="-1">
               <a:solidFill>
                 <a:srgbClr val="000000"/>
               </a:solidFill>
@@ -8714,7 +9365,7 @@
               <a:buChar char="•"/>
             </a:pPr>
             <a:r>
-              <a:rPr b="0" lang="en-US" sz="2400" spc="-1" strike="noStrike">
+              <a:rPr lang="en-US" sz="2400" b="0" strike="noStrike" spc="-1">
                 <a:solidFill>
                   <a:srgbClr val="000000"/>
                 </a:solidFill>
@@ -8722,7 +9373,7 @@
               </a:rPr>
               <a:t>All applicants are on-average identical.</a:t>
             </a:r>
-            <a:endParaRPr b="0" lang="en-US" sz="2400" spc="-1" strike="noStrike">
+            <a:endParaRPr lang="en-US" sz="2400" b="0" strike="noStrike" spc="-1">
               <a:solidFill>
                 <a:srgbClr val="000000"/>
               </a:solidFill>
@@ -8741,7 +9392,7 @@
               <a:buChar char="•"/>
             </a:pPr>
             <a:r>
-              <a:rPr b="0" lang="en-US" sz="2400" spc="-1" strike="noStrike">
+              <a:rPr lang="en-US" sz="2400" b="0" strike="noStrike" spc="-1">
                 <a:solidFill>
                   <a:srgbClr val="000000"/>
                 </a:solidFill>
@@ -8749,7 +9400,7 @@
               </a:rPr>
               <a:t>In rare cases, sometimes the researcher will hire people to go to the interviews (examples later)</a:t>
             </a:r>
-            <a:endParaRPr b="0" lang="en-US" sz="2400" spc="-1" strike="noStrike">
+            <a:endParaRPr lang="en-US" sz="2400" b="0" strike="noStrike" spc="-1">
               <a:solidFill>
                 <a:srgbClr val="000000"/>
               </a:solidFill>
@@ -8762,7 +9413,7 @@
                 <a:spcPct val="100000"/>
               </a:lnSpc>
             </a:pPr>
-            <a:endParaRPr b="0" lang="en-US" sz="2400" spc="-1" strike="noStrike">
+            <a:endParaRPr lang="en-US" sz="2400" b="0" strike="noStrike" spc="-1">
               <a:solidFill>
                 <a:srgbClr val="000000"/>
               </a:solidFill>
@@ -8773,19 +9424,14 @@
       </p:sp>
     </p:spTree>
   </p:cSld>
-  <mc:AlternateContent>
-    <mc:Choice Requires="p14">
-      <p:transition spd="slow" p14:dur="2000"/>
-    </mc:Choice>
-    <mc:Fallback>
-      <p:transition spd="slow"/>
-    </mc:Fallback>
-  </mc:AlternateContent>
+  <p:clrMapOvr>
+    <a:masterClrMapping/>
+  </p:clrMapOvr>
 </p:sld>
 </file>
 
 <file path=ppt/slides/slide19.xml><?xml version="1.0" encoding="utf-8"?>
-<p:sld xmlns:a="http://schemas.openxmlformats.org/drawingml/2006/main" xmlns:p="http://schemas.openxmlformats.org/presentationml/2006/main" xmlns:r="http://schemas.openxmlformats.org/officeDocument/2006/relationships" xmlns:p14="http://schemas.microsoft.com/office/powerpoint/2010/main" xmlns:p15="http://schemas.microsoft.com/office/powerpoint/2012/main" xmlns:mc="http://schemas.openxmlformats.org/markup-compatibility/2006">
+<p:sld xmlns:a="http://schemas.openxmlformats.org/drawingml/2006/main" xmlns:r="http://schemas.openxmlformats.org/officeDocument/2006/relationships" xmlns:p="http://schemas.openxmlformats.org/presentationml/2006/main">
   <p:cSld>
     <p:spTree>
       <p:nvGrpSpPr>
@@ -8828,6 +9474,7 @@
           <a:bodyPr numCol="1" spcCol="0" anchor="ctr">
             <a:noAutofit/>
           </a:bodyPr>
+          <a:lstStyle/>
           <a:p>
             <a:pPr indent="0">
               <a:lnSpc>
@@ -8836,15 +9483,15 @@
               <a:buNone/>
             </a:pPr>
             <a:r>
-              <a:rPr b="0" lang="en-US" sz="3800" spc="-1" strike="noStrike" cap="all">
-                <a:solidFill>
-                  <a:srgbClr val="265b4d"/>
+              <a:rPr lang="en-US" sz="3800" b="0" strike="noStrike" cap="all" spc="-1">
+                <a:solidFill>
+                  <a:srgbClr val="265B4D"/>
                 </a:solidFill>
                 <a:latin typeface="Century Gothic"/>
               </a:rPr>
               <a:t>Why Audit Field experiments?</a:t>
             </a:r>
-            <a:endParaRPr b="0" lang="en-US" sz="3800" spc="-1" strike="noStrike">
+            <a:endParaRPr lang="en-US" sz="3800" b="0" strike="noStrike" spc="-1">
               <a:solidFill>
                 <a:srgbClr val="000000"/>
               </a:solidFill>
@@ -8880,6 +9527,7 @@
           <a:bodyPr numCol="1" spcCol="0" anchor="t">
             <a:noAutofit/>
           </a:bodyPr>
+          <a:lstStyle/>
           <a:p>
             <a:pPr marL="228600" indent="-228600">
               <a:lnSpc>
@@ -8895,7 +9543,7 @@
               <a:buChar char="•"/>
             </a:pPr>
             <a:r>
-              <a:rPr b="0" lang="en-US" sz="2400" spc="-1" strike="noStrike">
+              <a:rPr lang="en-US" sz="2400" b="0" strike="noStrike" spc="-1">
                 <a:solidFill>
                   <a:srgbClr val="404040"/>
                 </a:solidFill>
@@ -8903,12 +9551,6 @@
               </a:rPr>
               <a:t>Having the applicants (“testers”) be on-average identical allows the researcher to isolate discrimination just like in a randomized control trial (RCT).</a:t>
             </a:r>
-            <a:endParaRPr b="0" lang="en-US" sz="2400" spc="-1" strike="noStrike">
-              <a:solidFill>
-                <a:srgbClr val="404040"/>
-              </a:solidFill>
-              <a:latin typeface="Century Gothic"/>
-            </a:endParaRPr>
           </a:p>
           <a:p>
             <a:pPr marL="228600" indent="-228600">
@@ -8925,7 +9567,7 @@
               <a:buChar char="•"/>
             </a:pPr>
             <a:r>
-              <a:rPr b="0" lang="en-US" sz="2400" spc="-1" strike="noStrike">
+              <a:rPr lang="en-US" sz="2400" b="0" strike="noStrike" spc="-1">
                 <a:solidFill>
                   <a:srgbClr val="404040"/>
                 </a:solidFill>
@@ -8933,12 +9575,6 @@
               </a:rPr>
               <a:t>Discrimination is measured as differences in the interview offer rates (usually referred to as the “callback rate”), or, in other studies, the positive response rate.</a:t>
             </a:r>
-            <a:endParaRPr b="0" lang="en-US" sz="2400" spc="-1" strike="noStrike">
-              <a:solidFill>
-                <a:srgbClr val="404040"/>
-              </a:solidFill>
-              <a:latin typeface="Century Gothic"/>
-            </a:endParaRPr>
           </a:p>
         </p:txBody>
       </p:sp>
@@ -8949,7 +9585,7 @@
           <p:nvPr/>
         </p:nvPicPr>
         <p:blipFill>
-          <a:blip r:embed="rId1"/>
+          <a:blip r:embed="rId2"/>
           <a:stretch/>
         </p:blipFill>
         <p:spPr>
@@ -8967,19 +9603,14 @@
       </p:pic>
     </p:spTree>
   </p:cSld>
-  <mc:AlternateContent>
-    <mc:Choice Requires="p14">
-      <p:transition spd="slow" p14:dur="2000"/>
-    </mc:Choice>
-    <mc:Fallback>
-      <p:transition spd="slow"/>
-    </mc:Fallback>
-  </mc:AlternateContent>
+  <p:clrMapOvr>
+    <a:masterClrMapping/>
+  </p:clrMapOvr>
 </p:sld>
 </file>
 
 <file path=ppt/slides/slide2.xml><?xml version="1.0" encoding="utf-8"?>
-<p:sld xmlns:a="http://schemas.openxmlformats.org/drawingml/2006/main" xmlns:p="http://schemas.openxmlformats.org/presentationml/2006/main" xmlns:r="http://schemas.openxmlformats.org/officeDocument/2006/relationships" xmlns:p14="http://schemas.microsoft.com/office/powerpoint/2010/main" xmlns:p15="http://schemas.microsoft.com/office/powerpoint/2012/main" xmlns:mc="http://schemas.openxmlformats.org/markup-compatibility/2006">
+<p:sld xmlns:a="http://schemas.openxmlformats.org/drawingml/2006/main" xmlns:r="http://schemas.openxmlformats.org/officeDocument/2006/relationships" xmlns:p="http://schemas.openxmlformats.org/presentationml/2006/main">
   <p:cSld>
     <p:spTree>
       <p:nvGrpSpPr>
@@ -9022,6 +9653,7 @@
           <a:bodyPr numCol="1" spcCol="0" anchor="ctr">
             <a:noAutofit/>
           </a:bodyPr>
+          <a:lstStyle/>
           <a:p>
             <a:pPr indent="0">
               <a:lnSpc>
@@ -9030,15 +9662,15 @@
               <a:buNone/>
             </a:pPr>
             <a:r>
-              <a:rPr b="0" lang="en-US" sz="3800" spc="-1" strike="noStrike" cap="all">
-                <a:solidFill>
-                  <a:srgbClr val="265b4d"/>
+              <a:rPr lang="en-US" sz="3800" b="0" strike="noStrike" cap="all" spc="-1">
+                <a:solidFill>
+                  <a:srgbClr val="265B4D"/>
                 </a:solidFill>
                 <a:latin typeface="Century Gothic"/>
               </a:rPr>
               <a:t>Outline</a:t>
             </a:r>
-            <a:endParaRPr b="0" lang="en-US" sz="3800" spc="-1" strike="noStrike">
+            <a:endParaRPr lang="en-US" sz="3800" b="0" strike="noStrike" spc="-1">
               <a:solidFill>
                 <a:srgbClr val="000000"/>
               </a:solidFill>
@@ -9074,6 +9706,7 @@
           <a:bodyPr numCol="1" spcCol="0" anchor="t">
             <a:noAutofit/>
           </a:bodyPr>
+          <a:lstStyle/>
           <a:p>
             <a:pPr marL="228600" indent="-228600">
               <a:lnSpc>
@@ -9089,7 +9722,7 @@
               <a:buChar char="•"/>
             </a:pPr>
             <a:r>
-              <a:rPr b="0" lang="en-US" sz="2400" spc="-1" strike="noStrike">
+              <a:rPr lang="en-US" sz="2400" b="0" strike="noStrike" spc="-1" dirty="0">
                 <a:solidFill>
                   <a:srgbClr val="404040"/>
                 </a:solidFill>
@@ -9097,380 +9730,265 @@
               </a:rPr>
               <a:t>What is discrimination?</a:t>
             </a:r>
-            <a:endParaRPr b="0" lang="en-US" sz="2400" spc="-1" strike="noStrike">
+          </a:p>
+          <a:p>
+            <a:pPr marL="228600" indent="-228600">
+              <a:lnSpc>
+                <a:spcPct val="90000"/>
+              </a:lnSpc>
+              <a:spcBef>
+                <a:spcPts val="1001"/>
+              </a:spcBef>
+              <a:buClr>
+                <a:srgbClr val="404040"/>
+              </a:buClr>
+              <a:buFont typeface="Arial"/>
+              <a:buChar char="•"/>
+            </a:pPr>
+            <a:r>
+              <a:rPr lang="en-US" sz="2400" b="0" strike="noStrike" spc="-1" dirty="0">
+                <a:solidFill>
+                  <a:srgbClr val="404040"/>
+                </a:solidFill>
+                <a:latin typeface="Century Gothic"/>
+              </a:rPr>
+              <a:t>Types of discrimination (these are all not mutually exclusive):</a:t>
+            </a:r>
+          </a:p>
+          <a:p>
+            <a:pPr marL="685800" lvl="1" indent="-228600">
+              <a:lnSpc>
+                <a:spcPct val="90000"/>
+              </a:lnSpc>
+              <a:spcBef>
+                <a:spcPts val="499"/>
+              </a:spcBef>
+              <a:buClr>
+                <a:srgbClr val="404040"/>
+              </a:buClr>
+              <a:buFont typeface="Arial"/>
+              <a:buChar char="•"/>
+            </a:pPr>
+            <a:r>
+              <a:rPr lang="en-US" sz="2000" b="0" strike="noStrike" spc="-1" dirty="0">
+                <a:solidFill>
+                  <a:srgbClr val="404040"/>
+                </a:solidFill>
+                <a:latin typeface="Century Gothic"/>
+              </a:rPr>
+              <a:t>Taste-based discrimination</a:t>
+            </a:r>
+          </a:p>
+          <a:p>
+            <a:pPr marL="685800" lvl="1" indent="-228600">
+              <a:lnSpc>
+                <a:spcPct val="90000"/>
+              </a:lnSpc>
+              <a:spcBef>
+                <a:spcPts val="499"/>
+              </a:spcBef>
+              <a:buClr>
+                <a:srgbClr val="404040"/>
+              </a:buClr>
+              <a:buFont typeface="Arial"/>
+              <a:buChar char="•"/>
+            </a:pPr>
+            <a:r>
+              <a:rPr lang="en-US" sz="2000" b="0" strike="noStrike" spc="-1" dirty="0">
+                <a:solidFill>
+                  <a:srgbClr val="404040"/>
+                </a:solidFill>
+                <a:latin typeface="Century Gothic"/>
+              </a:rPr>
+              <a:t>Statistical discrimination</a:t>
+            </a:r>
+          </a:p>
+          <a:p>
+            <a:pPr marL="685800" lvl="1" indent="-228600">
+              <a:lnSpc>
+                <a:spcPct val="90000"/>
+              </a:lnSpc>
+              <a:spcBef>
+                <a:spcPts val="499"/>
+              </a:spcBef>
+              <a:buClr>
+                <a:srgbClr val="404040"/>
+              </a:buClr>
+              <a:buFont typeface="Arial"/>
+              <a:buChar char="•"/>
+            </a:pPr>
+            <a:r>
+              <a:rPr lang="en-US" sz="2000" b="0" strike="noStrike" spc="-1" dirty="0">
+                <a:solidFill>
+                  <a:srgbClr val="404040"/>
+                </a:solidFill>
+                <a:latin typeface="Century Gothic"/>
+              </a:rPr>
+              <a:t>Implicit discrimination</a:t>
+            </a:r>
+          </a:p>
+          <a:p>
+            <a:pPr marL="228600" indent="-228600">
+              <a:lnSpc>
+                <a:spcPct val="90000"/>
+              </a:lnSpc>
+              <a:spcBef>
+                <a:spcPts val="1001"/>
+              </a:spcBef>
+              <a:buClr>
+                <a:srgbClr val="404040"/>
+              </a:buClr>
+              <a:buFont typeface="Arial"/>
+              <a:buChar char="•"/>
+            </a:pPr>
+            <a:r>
+              <a:rPr lang="en-US" sz="2400" b="0" strike="noStrike" spc="-1" dirty="0">
+                <a:solidFill>
+                  <a:srgbClr val="404040"/>
+                </a:solidFill>
+                <a:latin typeface="Century Gothic"/>
+              </a:rPr>
+              <a:t>An overview of audit field experiments</a:t>
+            </a:r>
+          </a:p>
+          <a:p>
+            <a:pPr marL="685800" lvl="1" indent="-228600">
+              <a:lnSpc>
+                <a:spcPct val="90000"/>
+              </a:lnSpc>
+              <a:spcBef>
+                <a:spcPts val="499"/>
+              </a:spcBef>
+              <a:buClr>
+                <a:srgbClr val="404040"/>
+              </a:buClr>
+              <a:buFont typeface="Arial"/>
+              <a:buChar char="•"/>
+            </a:pPr>
+            <a:r>
+              <a:rPr lang="en-US" sz="2000" b="0" strike="noStrike" spc="-1" dirty="0">
+                <a:solidFill>
+                  <a:srgbClr val="404040"/>
+                </a:solidFill>
+                <a:latin typeface="Century Gothic"/>
+              </a:rPr>
+              <a:t>Resume correspondence studies</a:t>
+            </a:r>
+          </a:p>
+          <a:p>
+            <a:pPr marL="685800" lvl="1" indent="-228600">
+              <a:lnSpc>
+                <a:spcPct val="90000"/>
+              </a:lnSpc>
+              <a:spcBef>
+                <a:spcPts val="499"/>
+              </a:spcBef>
+              <a:buClr>
+                <a:srgbClr val="404040"/>
+              </a:buClr>
+              <a:buFont typeface="Arial"/>
+              <a:buChar char="•"/>
+            </a:pPr>
+            <a:r>
+              <a:rPr lang="en-US" sz="2000" b="0" strike="noStrike" spc="-1" dirty="0">
+                <a:solidFill>
+                  <a:srgbClr val="404040"/>
+                </a:solidFill>
+                <a:latin typeface="Century Gothic"/>
+              </a:rPr>
+              <a:t>Correspondence studies of rental housing discrimination</a:t>
+            </a:r>
+          </a:p>
+          <a:p>
+            <a:pPr marL="685800" lvl="1" indent="-228600">
+              <a:lnSpc>
+                <a:spcPct val="90000"/>
+              </a:lnSpc>
+              <a:spcBef>
+                <a:spcPts val="499"/>
+              </a:spcBef>
+              <a:buClr>
+                <a:srgbClr val="404040"/>
+              </a:buClr>
+              <a:buFont typeface="Arial"/>
+              <a:buChar char="•"/>
+            </a:pPr>
+            <a:r>
+              <a:rPr lang="en-US" sz="2000" b="0" strike="noStrike" spc="-1" dirty="0">
+                <a:solidFill>
+                  <a:srgbClr val="404040"/>
+                </a:solidFill>
+                <a:latin typeface="Century Gothic"/>
+              </a:rPr>
+              <a:t>Audit experiments on transportation discrimination</a:t>
+            </a:r>
+          </a:p>
+          <a:p>
+            <a:pPr marL="1143000" lvl="2" indent="-228600">
+              <a:lnSpc>
+                <a:spcPct val="90000"/>
+              </a:lnSpc>
+              <a:spcBef>
+                <a:spcPts val="499"/>
+              </a:spcBef>
+              <a:buClr>
+                <a:srgbClr val="404040"/>
+              </a:buClr>
+              <a:buFont typeface="Arial"/>
+              <a:buChar char="•"/>
+            </a:pPr>
+            <a:r>
+              <a:rPr lang="en-US" sz="1800" b="0" strike="noStrike" spc="-1" dirty="0">
+                <a:solidFill>
+                  <a:srgbClr val="404040"/>
+                </a:solidFill>
+                <a:latin typeface="Century Gothic"/>
+              </a:rPr>
+              <a:t>Ridesharing</a:t>
+            </a:r>
+          </a:p>
+          <a:p>
+            <a:pPr marL="1143000" lvl="2" indent="-228600">
+              <a:lnSpc>
+                <a:spcPct val="90000"/>
+              </a:lnSpc>
+              <a:spcBef>
+                <a:spcPts val="499"/>
+              </a:spcBef>
+              <a:buClr>
+                <a:srgbClr val="404040"/>
+              </a:buClr>
+              <a:buFont typeface="Arial"/>
+              <a:buChar char="•"/>
+            </a:pPr>
+            <a:r>
+              <a:rPr lang="en-US" sz="1800" b="0" strike="noStrike" spc="-1">
+                <a:solidFill>
+                  <a:srgbClr val="404040"/>
+                </a:solidFill>
+                <a:latin typeface="Century Gothic"/>
+              </a:rPr>
+              <a:t>Public transportation</a:t>
+            </a:r>
+            <a:endParaRPr lang="en-US" sz="1800" b="0" strike="noStrike" spc="-1" dirty="0">
               <a:solidFill>
                 <a:srgbClr val="404040"/>
               </a:solidFill>
               <a:latin typeface="Century Gothic"/>
             </a:endParaRPr>
           </a:p>
-          <a:p>
-            <a:pPr marL="228600" indent="-228600">
-              <a:lnSpc>
-                <a:spcPct val="90000"/>
-              </a:lnSpc>
-              <a:spcBef>
-                <a:spcPts val="1001"/>
-              </a:spcBef>
-              <a:buClr>
-                <a:srgbClr val="404040"/>
-              </a:buClr>
-              <a:buFont typeface="Arial"/>
-              <a:buChar char="•"/>
-            </a:pPr>
-            <a:r>
-              <a:rPr b="0" lang="en-US" sz="2400" spc="-1" strike="noStrike">
-                <a:solidFill>
-                  <a:srgbClr val="404040"/>
-                </a:solidFill>
-                <a:latin typeface="Century Gothic"/>
-              </a:rPr>
-              <a:t>Types of discrimination (these are all not mutually exclusive):</a:t>
-            </a:r>
-            <a:endParaRPr b="0" lang="en-US" sz="2400" spc="-1" strike="noStrike">
-              <a:solidFill>
-                <a:srgbClr val="404040"/>
-              </a:solidFill>
-              <a:latin typeface="Century Gothic"/>
-            </a:endParaRPr>
-          </a:p>
-          <a:p>
-            <a:pPr lvl="1" marL="685800" indent="-228600">
-              <a:lnSpc>
-                <a:spcPct val="90000"/>
-              </a:lnSpc>
-              <a:spcBef>
-                <a:spcPts val="499"/>
-              </a:spcBef>
-              <a:buClr>
-                <a:srgbClr val="404040"/>
-              </a:buClr>
-              <a:buFont typeface="Arial"/>
-              <a:buChar char="•"/>
-            </a:pPr>
-            <a:r>
-              <a:rPr b="0" lang="en-US" sz="2000" spc="-1" strike="noStrike">
-                <a:solidFill>
-                  <a:srgbClr val="404040"/>
-                </a:solidFill>
-                <a:latin typeface="Century Gothic"/>
-              </a:rPr>
-              <a:t>Taste-based discrimination</a:t>
-            </a:r>
-            <a:endParaRPr b="0" lang="en-US" sz="2000" spc="-1" strike="noStrike">
-              <a:solidFill>
-                <a:srgbClr val="404040"/>
-              </a:solidFill>
-              <a:latin typeface="Century Gothic"/>
-            </a:endParaRPr>
-          </a:p>
-          <a:p>
-            <a:pPr lvl="1" marL="685800" indent="-228600">
-              <a:lnSpc>
-                <a:spcPct val="90000"/>
-              </a:lnSpc>
-              <a:spcBef>
-                <a:spcPts val="499"/>
-              </a:spcBef>
-              <a:buClr>
-                <a:srgbClr val="404040"/>
-              </a:buClr>
-              <a:buFont typeface="Arial"/>
-              <a:buChar char="•"/>
-            </a:pPr>
-            <a:r>
-              <a:rPr b="0" lang="en-US" sz="2000" spc="-1" strike="noStrike">
-                <a:solidFill>
-                  <a:srgbClr val="404040"/>
-                </a:solidFill>
-                <a:latin typeface="Century Gothic"/>
-              </a:rPr>
-              <a:t>Statistical discrimination</a:t>
-            </a:r>
-            <a:endParaRPr b="0" lang="en-US" sz="2000" spc="-1" strike="noStrike">
-              <a:solidFill>
-                <a:srgbClr val="404040"/>
-              </a:solidFill>
-              <a:latin typeface="Century Gothic"/>
-            </a:endParaRPr>
-          </a:p>
-          <a:p>
-            <a:pPr lvl="1" marL="685800" indent="-228600">
-              <a:lnSpc>
-                <a:spcPct val="90000"/>
-              </a:lnSpc>
-              <a:spcBef>
-                <a:spcPts val="499"/>
-              </a:spcBef>
-              <a:buClr>
-                <a:srgbClr val="404040"/>
-              </a:buClr>
-              <a:buFont typeface="Arial"/>
-              <a:buChar char="•"/>
-            </a:pPr>
-            <a:r>
-              <a:rPr b="0" lang="en-US" sz="2000" spc="-1" strike="noStrike">
-                <a:solidFill>
-                  <a:srgbClr val="404040"/>
-                </a:solidFill>
-                <a:latin typeface="Century Gothic"/>
-              </a:rPr>
-              <a:t>Implicit discrimination</a:t>
-            </a:r>
-            <a:endParaRPr b="0" lang="en-US" sz="2000" spc="-1" strike="noStrike">
-              <a:solidFill>
-                <a:srgbClr val="404040"/>
-              </a:solidFill>
-              <a:latin typeface="Century Gothic"/>
-            </a:endParaRPr>
-          </a:p>
-          <a:p>
-            <a:pPr marL="228600" indent="-228600">
-              <a:lnSpc>
-                <a:spcPct val="90000"/>
-              </a:lnSpc>
-              <a:spcBef>
-                <a:spcPts val="1001"/>
-              </a:spcBef>
-              <a:buClr>
-                <a:srgbClr val="404040"/>
-              </a:buClr>
-              <a:buFont typeface="Arial"/>
-              <a:buChar char="•"/>
-            </a:pPr>
-            <a:r>
-              <a:rPr b="0" lang="en-US" sz="2400" spc="-1" strike="noStrike">
-                <a:solidFill>
-                  <a:srgbClr val="404040"/>
-                </a:solidFill>
-                <a:latin typeface="Century Gothic"/>
-              </a:rPr>
-              <a:t>An overview of audit field experiments</a:t>
-            </a:r>
-            <a:endParaRPr b="0" lang="en-US" sz="2400" spc="-1" strike="noStrike">
-              <a:solidFill>
-                <a:srgbClr val="404040"/>
-              </a:solidFill>
-              <a:latin typeface="Century Gothic"/>
-            </a:endParaRPr>
-          </a:p>
-          <a:p>
-            <a:pPr lvl="1" marL="685800" indent="-228600">
-              <a:lnSpc>
-                <a:spcPct val="90000"/>
-              </a:lnSpc>
-              <a:spcBef>
-                <a:spcPts val="499"/>
-              </a:spcBef>
-              <a:buClr>
-                <a:srgbClr val="404040"/>
-              </a:buClr>
-              <a:buFont typeface="Arial"/>
-              <a:buChar char="•"/>
-            </a:pPr>
-            <a:r>
-              <a:rPr b="0" lang="en-US" sz="2000" spc="-1" strike="noStrike">
-                <a:solidFill>
-                  <a:srgbClr val="404040"/>
-                </a:solidFill>
-                <a:latin typeface="Century Gothic"/>
-              </a:rPr>
-              <a:t>Resume correspondence studies</a:t>
-            </a:r>
-            <a:endParaRPr b="0" lang="en-US" sz="2000" spc="-1" strike="noStrike">
-              <a:solidFill>
-                <a:srgbClr val="404040"/>
-              </a:solidFill>
-              <a:latin typeface="Century Gothic"/>
-            </a:endParaRPr>
-          </a:p>
-          <a:p>
-            <a:pPr lvl="1" marL="685800" indent="-228600">
-              <a:lnSpc>
-                <a:spcPct val="90000"/>
-              </a:lnSpc>
-              <a:spcBef>
-                <a:spcPts val="499"/>
-              </a:spcBef>
-              <a:buClr>
-                <a:srgbClr val="404040"/>
-              </a:buClr>
-              <a:buFont typeface="Arial"/>
-              <a:buChar char="•"/>
-            </a:pPr>
-            <a:r>
-              <a:rPr b="0" lang="en-US" sz="2000" spc="-1" strike="noStrike">
-                <a:solidFill>
-                  <a:srgbClr val="404040"/>
-                </a:solidFill>
-                <a:latin typeface="Century Gothic"/>
-              </a:rPr>
-              <a:t>Correspondence studies of rental housing discrimination</a:t>
-            </a:r>
-            <a:endParaRPr b="0" lang="en-US" sz="2000" spc="-1" strike="noStrike">
-              <a:solidFill>
-                <a:srgbClr val="404040"/>
-              </a:solidFill>
-              <a:latin typeface="Century Gothic"/>
-            </a:endParaRPr>
-          </a:p>
-          <a:p>
-            <a:pPr lvl="1" marL="685800" indent="-228600">
-              <a:lnSpc>
-                <a:spcPct val="90000"/>
-              </a:lnSpc>
-              <a:spcBef>
-                <a:spcPts val="499"/>
-              </a:spcBef>
-              <a:buClr>
-                <a:srgbClr val="404040"/>
-              </a:buClr>
-              <a:buFont typeface="Arial"/>
-              <a:buChar char="•"/>
-            </a:pPr>
-            <a:r>
-              <a:rPr b="0" lang="en-US" sz="2000" spc="-1" strike="noStrike">
-                <a:solidFill>
-                  <a:srgbClr val="404040"/>
-                </a:solidFill>
-                <a:latin typeface="Century Gothic"/>
-              </a:rPr>
-              <a:t>Audit experiments on transportation discrimination</a:t>
-            </a:r>
-            <a:endParaRPr b="0" lang="en-US" sz="2000" spc="-1" strike="noStrike">
-              <a:solidFill>
-                <a:srgbClr val="404040"/>
-              </a:solidFill>
-              <a:latin typeface="Century Gothic"/>
-            </a:endParaRPr>
-          </a:p>
-          <a:p>
-            <a:pPr lvl="2" marL="1143000" indent="-228600">
-              <a:lnSpc>
-                <a:spcPct val="90000"/>
-              </a:lnSpc>
-              <a:spcBef>
-                <a:spcPts val="499"/>
-              </a:spcBef>
-              <a:buClr>
-                <a:srgbClr val="404040"/>
-              </a:buClr>
-              <a:buFont typeface="Arial"/>
-              <a:buChar char="•"/>
-            </a:pPr>
-            <a:r>
-              <a:rPr b="0" lang="en-US" sz="1800" spc="-1" strike="noStrike">
-                <a:solidFill>
-                  <a:srgbClr val="404040"/>
-                </a:solidFill>
-                <a:latin typeface="Century Gothic"/>
-              </a:rPr>
-              <a:t>Ridesharing</a:t>
-            </a:r>
-            <a:endParaRPr b="0" lang="en-US" sz="1800" spc="-1" strike="noStrike">
-              <a:solidFill>
-                <a:srgbClr val="404040"/>
-              </a:solidFill>
-              <a:latin typeface="Century Gothic"/>
-            </a:endParaRPr>
-          </a:p>
-          <a:p>
-            <a:pPr lvl="2" marL="1143000" indent="-228600">
-              <a:lnSpc>
-                <a:spcPct val="90000"/>
-              </a:lnSpc>
-              <a:spcBef>
-                <a:spcPts val="499"/>
-              </a:spcBef>
-              <a:buClr>
-                <a:srgbClr val="404040"/>
-              </a:buClr>
-              <a:buFont typeface="Arial"/>
-              <a:buChar char="•"/>
-            </a:pPr>
-            <a:r>
-              <a:rPr b="0" lang="en-US" sz="1800" spc="-1" strike="noStrike">
-                <a:solidFill>
-                  <a:srgbClr val="404040"/>
-                </a:solidFill>
-                <a:latin typeface="Century Gothic"/>
-              </a:rPr>
-              <a:t>Public transportation</a:t>
-            </a:r>
-            <a:endParaRPr b="0" lang="en-US" sz="1800" spc="-1" strike="noStrike">
-              <a:solidFill>
-                <a:srgbClr val="404040"/>
-              </a:solidFill>
-              <a:latin typeface="Century Gothic"/>
-            </a:endParaRPr>
-          </a:p>
-          <a:p>
-            <a:pPr marL="228600" indent="-228600">
-              <a:lnSpc>
-                <a:spcPct val="90000"/>
-              </a:lnSpc>
-              <a:spcBef>
-                <a:spcPts val="1001"/>
-              </a:spcBef>
-              <a:buClr>
-                <a:srgbClr val="404040"/>
-              </a:buClr>
-              <a:buFont typeface="Arial"/>
-              <a:buChar char="•"/>
-            </a:pPr>
-            <a:r>
-              <a:rPr b="0" lang="en-US" sz="2400" spc="-1" strike="noStrike">
-                <a:solidFill>
-                  <a:srgbClr val="404040"/>
-                </a:solidFill>
-                <a:latin typeface="Century Gothic"/>
-              </a:rPr>
-              <a:t>Overview of my audit field experiment of sexual orientation discrimination in access to mortgages (different slide deck)</a:t>
-            </a:r>
-            <a:endParaRPr b="0" lang="en-US" sz="2400" spc="-1" strike="noStrike">
-              <a:solidFill>
-                <a:srgbClr val="404040"/>
-              </a:solidFill>
-              <a:latin typeface="Century Gothic"/>
-            </a:endParaRPr>
-          </a:p>
-          <a:p>
-            <a:pPr indent="0">
-              <a:lnSpc>
-                <a:spcPct val="90000"/>
-              </a:lnSpc>
-              <a:spcBef>
-                <a:spcPts val="1001"/>
-              </a:spcBef>
-              <a:buNone/>
-              <a:tabLst>
-                <a:tab algn="l" pos="0"/>
-              </a:tabLst>
-            </a:pPr>
-            <a:endParaRPr b="0" lang="en-US" sz="2400" spc="-1" strike="noStrike">
-              <a:solidFill>
-                <a:srgbClr val="404040"/>
-              </a:solidFill>
-              <a:latin typeface="Century Gothic"/>
-            </a:endParaRPr>
-          </a:p>
         </p:txBody>
       </p:sp>
     </p:spTree>
   </p:cSld>
-  <mc:AlternateContent>
-    <mc:Choice Requires="p14">
-      <p:transition spd="slow" p14:dur="2000"/>
-    </mc:Choice>
-    <mc:Fallback>
-      <p:transition spd="slow"/>
-    </mc:Fallback>
-  </mc:AlternateContent>
+  <p:clrMapOvr>
+    <a:masterClrMapping/>
+  </p:clrMapOvr>
 </p:sld>
 </file>
 
 <file path=ppt/slides/slide20.xml><?xml version="1.0" encoding="utf-8"?>
-<p:sld xmlns:a="http://schemas.openxmlformats.org/drawingml/2006/main" xmlns:p="http://schemas.openxmlformats.org/presentationml/2006/main" xmlns:r="http://schemas.openxmlformats.org/officeDocument/2006/relationships" xmlns:p14="http://schemas.microsoft.com/office/powerpoint/2010/main" xmlns:p15="http://schemas.microsoft.com/office/powerpoint/2012/main" xmlns:mc="http://schemas.openxmlformats.org/markup-compatibility/2006">
+<p:sld xmlns:a="http://schemas.openxmlformats.org/drawingml/2006/main" xmlns:r="http://schemas.openxmlformats.org/officeDocument/2006/relationships" xmlns:p="http://schemas.openxmlformats.org/presentationml/2006/main">
   <p:cSld>
     <p:spTree>
       <p:nvGrpSpPr>
@@ -9513,6 +10031,7 @@
           <a:bodyPr numCol="1" spcCol="0" anchor="ctr">
             <a:noAutofit/>
           </a:bodyPr>
+          <a:lstStyle/>
           <a:p>
             <a:pPr indent="0">
               <a:lnSpc>
@@ -9521,15 +10040,15 @@
               <a:buNone/>
             </a:pPr>
             <a:r>
-              <a:rPr b="0" lang="en-US" sz="3800" spc="-1" strike="noStrike" cap="all">
-                <a:solidFill>
-                  <a:srgbClr val="265b4d"/>
+              <a:rPr lang="en-US" sz="3800" b="0" strike="noStrike" cap="all" spc="-1">
+                <a:solidFill>
+                  <a:srgbClr val="265B4D"/>
                 </a:solidFill>
                 <a:latin typeface="Century Gothic"/>
               </a:rPr>
               <a:t>Example: Neumark, Burn, and Button (2019)</a:t>
             </a:r>
-            <a:endParaRPr b="0" lang="en-US" sz="3800" spc="-1" strike="noStrike">
+            <a:endParaRPr lang="en-US" sz="3800" b="0" strike="noStrike" spc="-1">
               <a:solidFill>
                 <a:srgbClr val="000000"/>
               </a:solidFill>
@@ -9565,6 +10084,7 @@
           <a:bodyPr numCol="1" spcCol="0" anchor="t">
             <a:noAutofit/>
           </a:bodyPr>
+          <a:lstStyle/>
           <a:p>
             <a:pPr marL="228600" indent="-228600">
               <a:lnSpc>
@@ -9580,7 +10100,7 @@
               <a:buChar char="•"/>
             </a:pPr>
             <a:r>
-              <a:rPr b="0" lang="en-US" sz="2800" spc="-1" strike="noStrike">
+              <a:rPr lang="en-US" sz="2800" b="0" strike="noStrike" spc="-1">
                 <a:solidFill>
                   <a:srgbClr val="404040"/>
                 </a:solidFill>
@@ -9588,12 +10108,6 @@
               </a:rPr>
               <a:t>Largest resume study to date, over 40,000 resumes sent to 13,000 jobs in 12 cities.</a:t>
             </a:r>
-            <a:endParaRPr b="0" lang="en-US" sz="2800" spc="-1" strike="noStrike">
-              <a:solidFill>
-                <a:srgbClr val="404040"/>
-              </a:solidFill>
-              <a:latin typeface="Century Gothic"/>
-            </a:endParaRPr>
           </a:p>
           <a:p>
             <a:pPr marL="228600" indent="-228600">
@@ -9610,7 +10124,7 @@
               <a:buChar char="•"/>
             </a:pPr>
             <a:r>
-              <a:rPr b="0" lang="en-US" sz="2800" spc="-1" strike="noStrike">
+              <a:rPr lang="en-US" sz="2800" b="0" strike="noStrike" spc="-1">
                 <a:solidFill>
                   <a:srgbClr val="404040"/>
                 </a:solidFill>
@@ -9618,15 +10132,9 @@
               </a:rPr>
               <a:t>Studies hiring in common “bridge” jobs that older workers often take to delay retirement: retail sales (men and women), admin. assistant (women), janitor (men), security (men)</a:t>
             </a:r>
-            <a:endParaRPr b="0" lang="en-US" sz="2800" spc="-1" strike="noStrike">
-              <a:solidFill>
-                <a:srgbClr val="404040"/>
-              </a:solidFill>
-              <a:latin typeface="Century Gothic"/>
-            </a:endParaRPr>
-          </a:p>
-          <a:p>
-            <a:pPr lvl="1" marL="685800" indent="-228600">
+          </a:p>
+          <a:p>
+            <a:pPr marL="685800" lvl="1" indent="-228600">
               <a:lnSpc>
                 <a:spcPct val="90000"/>
               </a:lnSpc>
@@ -9640,7 +10148,7 @@
               <a:buChar char="•"/>
             </a:pPr>
             <a:r>
-              <a:rPr b="0" lang="en-US" sz="2400" spc="-1" strike="noStrike">
+              <a:rPr lang="en-US" sz="2400" b="0" strike="noStrike" spc="-1">
                 <a:solidFill>
                   <a:srgbClr val="404040"/>
                 </a:solidFill>
@@ -9648,12 +10156,6 @@
               </a:rPr>
               <a:t>Younger people also commonly take these jobs.</a:t>
             </a:r>
-            <a:endParaRPr b="0" lang="en-US" sz="2400" spc="-1" strike="noStrike">
-              <a:solidFill>
-                <a:srgbClr val="404040"/>
-              </a:solidFill>
-              <a:latin typeface="Century Gothic"/>
-            </a:endParaRPr>
           </a:p>
           <a:p>
             <a:pPr marL="228600" indent="-228600">
@@ -9670,7 +10172,7 @@
               <a:buChar char="•"/>
             </a:pPr>
             <a:r>
-              <a:rPr b="0" lang="en-US" sz="2800" spc="-1" strike="noStrike">
+              <a:rPr lang="en-US" sz="2800" b="0" strike="noStrike" spc="-1">
                 <a:solidFill>
                   <a:srgbClr val="404040"/>
                 </a:solidFill>
@@ -9678,30 +10180,19 @@
               </a:rPr>
               <a:t>Resumes were for young (age 30), middle age (50) and older (65). Age 65 is new to the literature.</a:t>
             </a:r>
-            <a:endParaRPr b="0" lang="en-US" sz="2800" spc="-1" strike="noStrike">
-              <a:solidFill>
-                <a:srgbClr val="404040"/>
-              </a:solidFill>
-              <a:latin typeface="Century Gothic"/>
-            </a:endParaRPr>
           </a:p>
         </p:txBody>
       </p:sp>
     </p:spTree>
   </p:cSld>
-  <mc:AlternateContent>
-    <mc:Choice Requires="p14">
-      <p:transition spd="slow" p14:dur="2000"/>
-    </mc:Choice>
-    <mc:Fallback>
-      <p:transition spd="slow"/>
-    </mc:Fallback>
-  </mc:AlternateContent>
+  <p:clrMapOvr>
+    <a:masterClrMapping/>
+  </p:clrMapOvr>
 </p:sld>
 </file>
 
 <file path=ppt/slides/slide21.xml><?xml version="1.0" encoding="utf-8"?>
-<p:sld xmlns:a="http://schemas.openxmlformats.org/drawingml/2006/main" xmlns:p="http://schemas.openxmlformats.org/presentationml/2006/main" xmlns:r="http://schemas.openxmlformats.org/officeDocument/2006/relationships" xmlns:p14="http://schemas.microsoft.com/office/powerpoint/2010/main" xmlns:p15="http://schemas.microsoft.com/office/powerpoint/2012/main" xmlns:mc="http://schemas.openxmlformats.org/markup-compatibility/2006">
+<p:sld xmlns:a="http://schemas.openxmlformats.org/drawingml/2006/main" xmlns:r="http://schemas.openxmlformats.org/officeDocument/2006/relationships" xmlns:p="http://schemas.openxmlformats.org/presentationml/2006/main">
   <p:cSld>
     <p:spTree>
       <p:nvGrpSpPr>
@@ -9744,6 +10235,7 @@
           <a:bodyPr numCol="1" spcCol="0" anchor="ctr">
             <a:noAutofit/>
           </a:bodyPr>
+          <a:lstStyle/>
           <a:p>
             <a:pPr indent="0">
               <a:lnSpc>
@@ -9752,15 +10244,15 @@
               <a:buNone/>
             </a:pPr>
             <a:r>
-              <a:rPr b="0" lang="en-US" sz="3800" spc="-1" strike="noStrike" cap="all">
-                <a:solidFill>
-                  <a:srgbClr val="265b4d"/>
+              <a:rPr lang="en-US" sz="3800" b="0" strike="noStrike" cap="all" spc="-1">
+                <a:solidFill>
+                  <a:srgbClr val="265B4D"/>
                 </a:solidFill>
                 <a:latin typeface="Century Gothic"/>
               </a:rPr>
               <a:t>Interview (“Callback”) Rates</a:t>
             </a:r>
-            <a:endParaRPr b="0" lang="en-US" sz="3800" spc="-1" strike="noStrike">
+            <a:endParaRPr lang="en-US" sz="3800" b="0" strike="noStrike" spc="-1">
               <a:solidFill>
                 <a:srgbClr val="000000"/>
               </a:solidFill>
@@ -9776,7 +10268,7 @@
           <p:nvPr/>
         </p:nvPicPr>
         <p:blipFill>
-          <a:blip r:embed="rId1"/>
+          <a:blip r:embed="rId2"/>
           <a:stretch/>
         </p:blipFill>
         <p:spPr>
@@ -9794,19 +10286,14 @@
       </p:pic>
     </p:spTree>
   </p:cSld>
-  <mc:AlternateContent>
-    <mc:Choice Requires="p14">
-      <p:transition spd="slow" p14:dur="2000"/>
-    </mc:Choice>
-    <mc:Fallback>
-      <p:transition spd="slow"/>
-    </mc:Fallback>
-  </mc:AlternateContent>
+  <p:clrMapOvr>
+    <a:masterClrMapping/>
+  </p:clrMapOvr>
 </p:sld>
 </file>
 
 <file path=ppt/slides/slide22.xml><?xml version="1.0" encoding="utf-8"?>
-<p:sld xmlns:a="http://schemas.openxmlformats.org/drawingml/2006/main" xmlns:p="http://schemas.openxmlformats.org/presentationml/2006/main" xmlns:r="http://schemas.openxmlformats.org/officeDocument/2006/relationships" xmlns:p14="http://schemas.microsoft.com/office/powerpoint/2010/main" xmlns:p15="http://schemas.microsoft.com/office/powerpoint/2012/main" xmlns:mc="http://schemas.openxmlformats.org/markup-compatibility/2006">
+<p:sld xmlns:a="http://schemas.openxmlformats.org/drawingml/2006/main" xmlns:r="http://schemas.openxmlformats.org/officeDocument/2006/relationships" xmlns:p="http://schemas.openxmlformats.org/presentationml/2006/main">
   <p:cSld>
     <p:spTree>
       <p:nvGrpSpPr>
@@ -9849,6 +10336,7 @@
           <a:bodyPr numCol="1" spcCol="0" anchor="ctr">
             <a:noAutofit/>
           </a:bodyPr>
+          <a:lstStyle/>
           <a:p>
             <a:pPr indent="0">
               <a:lnSpc>
@@ -9857,15 +10345,15 @@
               <a:buNone/>
             </a:pPr>
             <a:r>
-              <a:rPr b="0" lang="en-US" sz="3800" spc="-1" strike="noStrike" cap="all">
-                <a:solidFill>
-                  <a:srgbClr val="265b4d"/>
+              <a:rPr lang="en-US" sz="3800" b="0" strike="noStrike" cap="all" spc="-1">
+                <a:solidFill>
+                  <a:srgbClr val="265B4D"/>
                 </a:solidFill>
                 <a:latin typeface="Century Gothic"/>
               </a:rPr>
               <a:t>Audit field experiments - Housing</a:t>
             </a:r>
-            <a:endParaRPr b="0" lang="en-US" sz="3800" spc="-1" strike="noStrike">
+            <a:endParaRPr lang="en-US" sz="3800" b="0" strike="noStrike" spc="-1">
               <a:solidFill>
                 <a:srgbClr val="000000"/>
               </a:solidFill>
@@ -9901,6 +10389,7 @@
           <a:bodyPr numCol="1" spcCol="0" anchor="t">
             <a:noAutofit/>
           </a:bodyPr>
+          <a:lstStyle/>
           <a:p>
             <a:pPr marL="228600" indent="-228600">
               <a:lnSpc>
@@ -9916,7 +10405,7 @@
               <a:buChar char="•"/>
             </a:pPr>
             <a:r>
-              <a:rPr b="0" lang="en-US" sz="2400" spc="-1" strike="noStrike">
+              <a:rPr lang="en-US" sz="2400" b="0" strike="noStrike" spc="-1">
                 <a:solidFill>
                   <a:srgbClr val="404040"/>
                 </a:solidFill>
@@ -9924,12 +10413,6 @@
               </a:rPr>
               <a:t>In addition to resume correspondence studies, which send matched resumes, there are also audit field experiments that study discrimination in…</a:t>
             </a:r>
-            <a:endParaRPr b="0" lang="en-US" sz="2400" spc="-1" strike="noStrike">
-              <a:solidFill>
-                <a:srgbClr val="404040"/>
-              </a:solidFill>
-              <a:latin typeface="Century Gothic"/>
-            </a:endParaRPr>
           </a:p>
           <a:p>
             <a:pPr marL="228600" indent="-228600">
@@ -9946,7 +10429,7 @@
               <a:buChar char="•"/>
             </a:pPr>
             <a:r>
-              <a:rPr b="0" lang="en-US" sz="2400" spc="-1" strike="noStrike">
+              <a:rPr lang="en-US" sz="2400" b="0" strike="noStrike" spc="-1">
                 <a:solidFill>
                   <a:srgbClr val="404040"/>
                 </a:solidFill>
@@ -9954,15 +10437,9 @@
               </a:rPr>
               <a:t>Rental housing </a:t>
             </a:r>
-            <a:endParaRPr b="0" lang="en-US" sz="2400" spc="-1" strike="noStrike">
-              <a:solidFill>
-                <a:srgbClr val="404040"/>
-              </a:solidFill>
-              <a:latin typeface="Century Gothic"/>
-            </a:endParaRPr>
-          </a:p>
-          <a:p>
-            <a:pPr lvl="1" marL="685800" indent="-228600">
+          </a:p>
+          <a:p>
+            <a:pPr marL="685800" lvl="1" indent="-228600">
               <a:lnSpc>
                 <a:spcPct val="90000"/>
               </a:lnSpc>
@@ -9976,7 +10453,7 @@
               <a:buChar char="•"/>
             </a:pPr>
             <a:r>
-              <a:rPr b="0" lang="en-US" sz="2000" spc="-1" strike="noStrike">
+              <a:rPr lang="en-US" sz="2000" b="0" strike="noStrike" spc="-1">
                 <a:solidFill>
                   <a:srgbClr val="404040"/>
                 </a:solidFill>
@@ -9984,12 +10461,6 @@
               </a:rPr>
               <a:t>(emails to landlords, roommate wanted ads)</a:t>
             </a:r>
-            <a:endParaRPr b="0" lang="en-US" sz="2000" spc="-1" strike="noStrike">
-              <a:solidFill>
-                <a:srgbClr val="404040"/>
-              </a:solidFill>
-              <a:latin typeface="Century Gothic"/>
-            </a:endParaRPr>
           </a:p>
           <a:p>
             <a:pPr marL="228600" indent="-228600">
@@ -10006,7 +10477,7 @@
               <a:buChar char="•"/>
             </a:pPr>
             <a:r>
-              <a:rPr b="0" lang="en-US" sz="2400" spc="-1" strike="noStrike">
+              <a:rPr lang="en-US" sz="2400" b="0" strike="noStrike" spc="-1">
                 <a:solidFill>
                   <a:srgbClr val="404040"/>
                 </a:solidFill>
@@ -10014,15 +10485,9 @@
               </a:rPr>
               <a:t>Mortgage applications </a:t>
             </a:r>
-            <a:endParaRPr b="0" lang="en-US" sz="2400" spc="-1" strike="noStrike">
-              <a:solidFill>
-                <a:srgbClr val="404040"/>
-              </a:solidFill>
-              <a:latin typeface="Century Gothic"/>
-            </a:endParaRPr>
-          </a:p>
-          <a:p>
-            <a:pPr lvl="1" marL="685800" indent="-228600">
+          </a:p>
+          <a:p>
+            <a:pPr marL="685800" lvl="1" indent="-228600">
               <a:lnSpc>
                 <a:spcPct val="90000"/>
               </a:lnSpc>
@@ -10036,7 +10501,7 @@
               <a:buChar char="•"/>
             </a:pPr>
             <a:r>
-              <a:rPr b="0" lang="en-US" sz="2000" spc="-1" strike="noStrike">
+              <a:rPr lang="en-US" sz="2000" b="0" strike="noStrike" spc="-1">
                 <a:solidFill>
                   <a:srgbClr val="404040"/>
                 </a:solidFill>
@@ -10044,30 +10509,19 @@
               </a:rPr>
               <a:t>(emails to mortgage loan originators, I have a study I am working on on this that you’ll hear more about later)</a:t>
             </a:r>
-            <a:endParaRPr b="0" lang="en-US" sz="2000" spc="-1" strike="noStrike">
-              <a:solidFill>
-                <a:srgbClr val="404040"/>
-              </a:solidFill>
-              <a:latin typeface="Century Gothic"/>
-            </a:endParaRPr>
           </a:p>
         </p:txBody>
       </p:sp>
     </p:spTree>
   </p:cSld>
-  <mc:AlternateContent>
-    <mc:Choice Requires="p14">
-      <p:transition spd="slow" p14:dur="2000"/>
-    </mc:Choice>
-    <mc:Fallback>
-      <p:transition spd="slow"/>
-    </mc:Fallback>
-  </mc:AlternateContent>
+  <p:clrMapOvr>
+    <a:masterClrMapping/>
+  </p:clrMapOvr>
 </p:sld>
 </file>
 
 <file path=ppt/slides/slide23.xml><?xml version="1.0" encoding="utf-8"?>
-<p:sld xmlns:a="http://schemas.openxmlformats.org/drawingml/2006/main" xmlns:p="http://schemas.openxmlformats.org/presentationml/2006/main" xmlns:r="http://schemas.openxmlformats.org/officeDocument/2006/relationships" xmlns:p14="http://schemas.microsoft.com/office/powerpoint/2010/main" xmlns:p15="http://schemas.microsoft.com/office/powerpoint/2012/main" xmlns:mc="http://schemas.openxmlformats.org/markup-compatibility/2006">
+<p:sld xmlns:a="http://schemas.openxmlformats.org/drawingml/2006/main" xmlns:r="http://schemas.openxmlformats.org/officeDocument/2006/relationships" xmlns:p="http://schemas.openxmlformats.org/presentationml/2006/main">
   <p:cSld>
     <p:spTree>
       <p:nvGrpSpPr>
@@ -10110,6 +10564,7 @@
           <a:bodyPr numCol="1" spcCol="0" anchor="ctr">
             <a:noAutofit/>
           </a:bodyPr>
+          <a:lstStyle/>
           <a:p>
             <a:pPr indent="0">
               <a:lnSpc>
@@ -10118,15 +10573,15 @@
               <a:buNone/>
             </a:pPr>
             <a:r>
-              <a:rPr b="0" lang="en-US" sz="3800" spc="-1" strike="noStrike" cap="all">
-                <a:solidFill>
-                  <a:srgbClr val="265b4d"/>
+              <a:rPr lang="en-US" sz="3800" b="0" strike="noStrike" cap="all" spc="-1">
+                <a:solidFill>
+                  <a:srgbClr val="265B4D"/>
                 </a:solidFill>
                 <a:latin typeface="Century Gothic"/>
               </a:rPr>
               <a:t>Audit field experiments - Transportation</a:t>
             </a:r>
-            <a:endParaRPr b="0" lang="en-US" sz="3800" spc="-1" strike="noStrike">
+            <a:endParaRPr lang="en-US" sz="3800" b="0" strike="noStrike" spc="-1">
               <a:solidFill>
                 <a:srgbClr val="000000"/>
               </a:solidFill>
@@ -10162,6 +10617,7 @@
           <a:bodyPr numCol="1" spcCol="0" anchor="t">
             <a:noAutofit/>
           </a:bodyPr>
+          <a:lstStyle/>
           <a:p>
             <a:pPr marL="228600" indent="-228600">
               <a:lnSpc>
@@ -10177,7 +10633,7 @@
               <a:buChar char="•"/>
             </a:pPr>
             <a:r>
-              <a:rPr b="0" lang="en-US" sz="2400" spc="-1" strike="noStrike">
+              <a:rPr lang="en-US" sz="2400" b="0" strike="noStrike" spc="-1">
                 <a:solidFill>
                   <a:srgbClr val="404040"/>
                 </a:solidFill>
@@ -10185,12 +10641,6 @@
               </a:rPr>
               <a:t>In addition to resume correspondence studies, which send matched resumes, there are also audit field experiments that study discrimination in…</a:t>
             </a:r>
-            <a:endParaRPr b="0" lang="en-US" sz="2400" spc="-1" strike="noStrike">
-              <a:solidFill>
-                <a:srgbClr val="404040"/>
-              </a:solidFill>
-              <a:latin typeface="Century Gothic"/>
-            </a:endParaRPr>
           </a:p>
           <a:p>
             <a:pPr marL="228600" indent="-228600">
@@ -10207,7 +10657,7 @@
               <a:buChar char="•"/>
             </a:pPr>
             <a:r>
-              <a:rPr b="0" lang="en-US" sz="2400" spc="-1" strike="noStrike">
+              <a:rPr lang="en-US" sz="2400" b="0" strike="noStrike" spc="-1">
                 <a:solidFill>
                   <a:srgbClr val="404040"/>
                 </a:solidFill>
@@ -10215,15 +10665,9 @@
               </a:rPr>
               <a:t>Ridesharing (Uber/Lyft)</a:t>
             </a:r>
-            <a:endParaRPr b="0" lang="en-US" sz="2400" spc="-1" strike="noStrike">
-              <a:solidFill>
-                <a:srgbClr val="404040"/>
-              </a:solidFill>
-              <a:latin typeface="Century Gothic"/>
-            </a:endParaRPr>
-          </a:p>
-          <a:p>
-            <a:pPr lvl="1" marL="685800" indent="-228600">
+          </a:p>
+          <a:p>
+            <a:pPr marL="685800" lvl="1" indent="-228600">
               <a:lnSpc>
                 <a:spcPct val="90000"/>
               </a:lnSpc>
@@ -10237,7 +10681,7 @@
               <a:buChar char="•"/>
             </a:pPr>
             <a:r>
-              <a:rPr b="0" lang="en-US" sz="2000" spc="-1" strike="noStrike">
+              <a:rPr lang="en-US" sz="2000" b="0" strike="noStrike" spc="-1">
                 <a:solidFill>
                   <a:srgbClr val="404040"/>
                 </a:solidFill>
@@ -10245,30 +10689,19 @@
               </a:rPr>
               <a:t>Mujcic and Frijters (2020) hired white and black RAs to attempt to board public transift without paying (i.e., they’d mention that they couldn’t pay). Bus drivers let white RAs board 72% of the time but black RAs only 36% of the time.</a:t>
             </a:r>
-            <a:endParaRPr b="0" lang="en-US" sz="2000" spc="-1" strike="noStrike">
-              <a:solidFill>
-                <a:srgbClr val="404040"/>
-              </a:solidFill>
-              <a:latin typeface="Century Gothic"/>
-            </a:endParaRPr>
           </a:p>
         </p:txBody>
       </p:sp>
     </p:spTree>
   </p:cSld>
-  <mc:AlternateContent>
-    <mc:Choice Requires="p14">
-      <p:transition spd="slow" p14:dur="2000"/>
-    </mc:Choice>
-    <mc:Fallback>
-      <p:transition spd="slow"/>
-    </mc:Fallback>
-  </mc:AlternateContent>
+  <p:clrMapOvr>
+    <a:masterClrMapping/>
+  </p:clrMapOvr>
 </p:sld>
 </file>
 
 <file path=ppt/slides/slide24.xml><?xml version="1.0" encoding="utf-8"?>
-<p:sld xmlns:a="http://schemas.openxmlformats.org/drawingml/2006/main" xmlns:p="http://schemas.openxmlformats.org/presentationml/2006/main" xmlns:r="http://schemas.openxmlformats.org/officeDocument/2006/relationships" xmlns:p14="http://schemas.microsoft.com/office/powerpoint/2010/main" xmlns:p15="http://schemas.microsoft.com/office/powerpoint/2012/main" xmlns:mc="http://schemas.openxmlformats.org/markup-compatibility/2006">
+<p:sld xmlns:a="http://schemas.openxmlformats.org/drawingml/2006/main" xmlns:r="http://schemas.openxmlformats.org/officeDocument/2006/relationships" xmlns:p="http://schemas.openxmlformats.org/presentationml/2006/main">
   <p:cSld>
     <p:spTree>
       <p:nvGrpSpPr>
@@ -10311,6 +10744,7 @@
           <a:bodyPr numCol="1" spcCol="0" anchor="ctr">
             <a:noAutofit/>
           </a:bodyPr>
+          <a:lstStyle/>
           <a:p>
             <a:pPr indent="0">
               <a:lnSpc>
@@ -10319,15 +10753,15 @@
               <a:buNone/>
             </a:pPr>
             <a:r>
-              <a:rPr b="0" lang="en-US" sz="3800" spc="-1" strike="noStrike" cap="all">
-                <a:solidFill>
-                  <a:srgbClr val="265b4d"/>
+              <a:rPr lang="en-US" sz="3800" b="0" strike="noStrike" cap="all" spc="-1">
+                <a:solidFill>
+                  <a:srgbClr val="265B4D"/>
                 </a:solidFill>
                 <a:latin typeface="Century Gothic"/>
               </a:rPr>
               <a:t>Audit field experiments - Transportation</a:t>
             </a:r>
-            <a:endParaRPr b="0" lang="en-US" sz="3800" spc="-1" strike="noStrike">
+            <a:endParaRPr lang="en-US" sz="3800" b="0" strike="noStrike" spc="-1">
               <a:solidFill>
                 <a:srgbClr val="000000"/>
               </a:solidFill>
@@ -10363,6 +10797,7 @@
           <a:bodyPr numCol="1" spcCol="0" anchor="t">
             <a:noAutofit/>
           </a:bodyPr>
+          <a:lstStyle/>
           <a:p>
             <a:pPr marL="228600" indent="-228600">
               <a:lnSpc>
@@ -10378,7 +10813,7 @@
               <a:buChar char="•"/>
             </a:pPr>
             <a:r>
-              <a:rPr b="0" lang="en-US" sz="2400" spc="-1" strike="noStrike">
+              <a:rPr lang="en-US" sz="2400" b="0" strike="noStrike" spc="-1">
                 <a:solidFill>
                   <a:srgbClr val="404040"/>
                 </a:solidFill>
@@ -10386,12 +10821,6 @@
               </a:rPr>
               <a:t>In addition to resume correspondence studies, which send matched resumes, there are also audit field experiments that study discrimination in…</a:t>
             </a:r>
-            <a:endParaRPr b="0" lang="en-US" sz="2400" spc="-1" strike="noStrike">
-              <a:solidFill>
-                <a:srgbClr val="404040"/>
-              </a:solidFill>
-              <a:latin typeface="Century Gothic"/>
-            </a:endParaRPr>
           </a:p>
           <a:p>
             <a:pPr marL="228600" indent="-228600">
@@ -10408,7 +10837,7 @@
               <a:buChar char="•"/>
             </a:pPr>
             <a:r>
-              <a:rPr b="0" lang="en-US" sz="2400" spc="-1" strike="noStrike">
+              <a:rPr lang="en-US" sz="2400" b="0" strike="noStrike" spc="-1">
                 <a:solidFill>
                   <a:srgbClr val="404040"/>
                 </a:solidFill>
@@ -10416,15 +10845,9 @@
               </a:rPr>
               <a:t>Public Transportation</a:t>
             </a:r>
-            <a:endParaRPr b="0" lang="en-US" sz="2400" spc="-1" strike="noStrike">
-              <a:solidFill>
-                <a:srgbClr val="404040"/>
-              </a:solidFill>
-              <a:latin typeface="Century Gothic"/>
-            </a:endParaRPr>
-          </a:p>
-          <a:p>
-            <a:pPr lvl="1" marL="685800" indent="-228600">
+          </a:p>
+          <a:p>
+            <a:pPr marL="685800" lvl="1" indent="-228600">
               <a:lnSpc>
                 <a:spcPct val="90000"/>
               </a:lnSpc>
@@ -10438,7 +10861,7 @@
               <a:buChar char="•"/>
             </a:pPr>
             <a:r>
-              <a:rPr b="0" lang="en-US" sz="2000" spc="-1" strike="noStrike">
+              <a:rPr lang="en-US" sz="2000" b="0" strike="noStrike" spc="-1">
                 <a:solidFill>
                   <a:srgbClr val="404040"/>
                 </a:solidFill>
@@ -10446,30 +10869,19 @@
               </a:rPr>
               <a:t>Ge et al. (2020) “In a randomized audit study, we sent passengers in Boston, MA on nearly 1000 rides on controlled routes using the Uber and Lyft smartphone apps, recording key performance metrics. Passengers randomly selected between accounts that used African American-sounding and white-sounding names. We find that the probability an Uber driver accepts a ride, sees the name, and then cancels doubles when passengers used the account attached to the African American-sounding name. In contrast, Lyft drivers observe the name before accepting a ride and, as expected, we find no effect of name on cancellations.”</a:t>
             </a:r>
-            <a:endParaRPr b="0" lang="en-US" sz="2000" spc="-1" strike="noStrike">
-              <a:solidFill>
-                <a:srgbClr val="404040"/>
-              </a:solidFill>
-              <a:latin typeface="Century Gothic"/>
-            </a:endParaRPr>
           </a:p>
         </p:txBody>
       </p:sp>
     </p:spTree>
   </p:cSld>
-  <mc:AlternateContent>
-    <mc:Choice Requires="p14">
-      <p:transition spd="slow" p14:dur="2000"/>
-    </mc:Choice>
-    <mc:Fallback>
-      <p:transition spd="slow"/>
-    </mc:Fallback>
-  </mc:AlternateContent>
+  <p:clrMapOvr>
+    <a:masterClrMapping/>
+  </p:clrMapOvr>
 </p:sld>
 </file>
 
 <file path=ppt/slides/slide3.xml><?xml version="1.0" encoding="utf-8"?>
-<p:sld xmlns:a="http://schemas.openxmlformats.org/drawingml/2006/main" xmlns:p="http://schemas.openxmlformats.org/presentationml/2006/main" xmlns:r="http://schemas.openxmlformats.org/officeDocument/2006/relationships" xmlns:p14="http://schemas.microsoft.com/office/powerpoint/2010/main" xmlns:p15="http://schemas.microsoft.com/office/powerpoint/2012/main" xmlns:mc="http://schemas.openxmlformats.org/markup-compatibility/2006">
+<p:sld xmlns:a="http://schemas.openxmlformats.org/drawingml/2006/main" xmlns:r="http://schemas.openxmlformats.org/officeDocument/2006/relationships" xmlns:p="http://schemas.openxmlformats.org/presentationml/2006/main">
   <p:cSld>
     <p:spTree>
       <p:nvGrpSpPr>
@@ -10512,6 +10924,7 @@
           <a:bodyPr numCol="1" spcCol="0" anchor="ctr">
             <a:noAutofit/>
           </a:bodyPr>
+          <a:lstStyle/>
           <a:p>
             <a:pPr indent="0">
               <a:lnSpc>
@@ -10520,15 +10933,15 @@
               <a:buNone/>
             </a:pPr>
             <a:r>
-              <a:rPr b="0" lang="en-US" sz="3800" spc="-1" strike="noStrike" cap="all">
-                <a:solidFill>
-                  <a:srgbClr val="265b4d"/>
+              <a:rPr lang="en-US" sz="3800" b="0" strike="noStrike" cap="all" spc="-1">
+                <a:solidFill>
+                  <a:srgbClr val="265B4D"/>
                 </a:solidFill>
                 <a:latin typeface="Century Gothic"/>
               </a:rPr>
               <a:t>What is discrimination?</a:t>
             </a:r>
-            <a:endParaRPr b="0" lang="en-US" sz="3800" spc="-1" strike="noStrike">
+            <a:endParaRPr lang="en-US" sz="3800" b="0" strike="noStrike" spc="-1">
               <a:solidFill>
                 <a:srgbClr val="000000"/>
               </a:solidFill>
@@ -10564,6 +10977,7 @@
           <a:bodyPr numCol="1" spcCol="0" anchor="t">
             <a:noAutofit/>
           </a:bodyPr>
+          <a:lstStyle/>
           <a:p>
             <a:pPr marL="228600" indent="-228600">
               <a:lnSpc>
@@ -10579,7 +10993,7 @@
               <a:buChar char="•"/>
             </a:pPr>
             <a:r>
-              <a:rPr b="0" lang="en-US" sz="2200" spc="-1" strike="noStrike">
+              <a:rPr lang="en-US" sz="2200" b="0" strike="noStrike" spc="-1">
                 <a:solidFill>
                   <a:srgbClr val="404040"/>
                 </a:solidFill>
@@ -10587,12 +11001,6 @@
               </a:rPr>
               <a:t>When two individuals who are the same are treated differently.</a:t>
             </a:r>
-            <a:endParaRPr b="0" lang="en-US" sz="2200" spc="-1" strike="noStrike">
-              <a:solidFill>
-                <a:srgbClr val="404040"/>
-              </a:solidFill>
-              <a:latin typeface="Century Gothic"/>
-            </a:endParaRPr>
           </a:p>
           <a:p>
             <a:pPr marL="228600" indent="-228600">
@@ -10609,7 +11017,7 @@
               <a:buChar char="•"/>
             </a:pPr>
             <a:r>
-              <a:rPr b="0" lang="en-US" sz="2200" spc="-1" strike="noStrike">
+              <a:rPr lang="en-US" sz="2200" b="0" strike="noStrike" spc="-1">
                 <a:solidFill>
                   <a:srgbClr val="404040"/>
                 </a:solidFill>
@@ -10618,7 +11026,7 @@
               <a:t>There is a lot of debate around to what extent discrimination occurs, and a </a:t>
             </a:r>
             <a:r>
-              <a:rPr b="0" i="1" lang="en-US" sz="2200" spc="-1" strike="noStrike">
+              <a:rPr lang="en-US" sz="2200" b="0" i="1" strike="noStrike" spc="-1">
                 <a:solidFill>
                   <a:srgbClr val="404040"/>
                 </a:solidFill>
@@ -10627,7 +11035,7 @@
               <a:t>part</a:t>
             </a:r>
             <a:r>
-              <a:rPr b="0" lang="en-US" sz="2200" spc="-1" strike="noStrike">
+              <a:rPr lang="en-US" sz="2200" b="0" strike="noStrike" spc="-1">
                 <a:solidFill>
                   <a:srgbClr val="404040"/>
                 </a:solidFill>
@@ -10635,12 +11043,6 @@
               </a:rPr>
               <a:t> of the reason for this debate is that discrimination is hard to measure.</a:t>
             </a:r>
-            <a:endParaRPr b="0" lang="en-US" sz="2200" spc="-1" strike="noStrike">
-              <a:solidFill>
-                <a:srgbClr val="404040"/>
-              </a:solidFill>
-              <a:latin typeface="Century Gothic"/>
-            </a:endParaRPr>
           </a:p>
           <a:p>
             <a:pPr marL="228600" indent="-228600">
@@ -10657,7 +11059,7 @@
               <a:buChar char="•"/>
             </a:pPr>
             <a:r>
-              <a:rPr b="0" lang="en-US" sz="2200" spc="-1" strike="noStrike">
+              <a:rPr lang="en-US" sz="2200" b="0" strike="noStrike" spc="-1">
                 <a:solidFill>
                   <a:srgbClr val="404040"/>
                 </a:solidFill>
@@ -10665,12 +11067,6 @@
               </a:rPr>
               <a:t>Sometimes discrimination manifests itself in extreme and obvious ways.</a:t>
             </a:r>
-            <a:endParaRPr b="0" lang="en-US" sz="2200" spc="-1" strike="noStrike">
-              <a:solidFill>
-                <a:srgbClr val="404040"/>
-              </a:solidFill>
-              <a:latin typeface="Century Gothic"/>
-            </a:endParaRPr>
           </a:p>
           <a:p>
             <a:pPr marL="228600" indent="-228600">
@@ -10687,7 +11083,7 @@
               <a:buChar char="•"/>
             </a:pPr>
             <a:r>
-              <a:rPr b="0" lang="en-US" sz="2200" spc="-1" strike="noStrike">
+              <a:rPr lang="en-US" sz="2200" b="0" strike="noStrike" spc="-1">
                 <a:solidFill>
                   <a:srgbClr val="404040"/>
                 </a:solidFill>
@@ -10695,15 +11091,9 @@
               </a:rPr>
               <a:t>But often times it’s subtle – e.g., not getting an interview offer.</a:t>
             </a:r>
-            <a:endParaRPr b="0" lang="en-US" sz="2200" spc="-1" strike="noStrike">
-              <a:solidFill>
-                <a:srgbClr val="404040"/>
-              </a:solidFill>
-              <a:latin typeface="Century Gothic"/>
-            </a:endParaRPr>
-          </a:p>
-          <a:p>
-            <a:pPr lvl="1" marL="685800" indent="-228600">
+          </a:p>
+          <a:p>
+            <a:pPr marL="685800" lvl="1" indent="-228600">
               <a:lnSpc>
                 <a:spcPct val="90000"/>
               </a:lnSpc>
@@ -10717,7 +11107,7 @@
               <a:buChar char="•"/>
             </a:pPr>
             <a:r>
-              <a:rPr b="0" lang="en-US" sz="2200" spc="-1" strike="noStrike">
+              <a:rPr lang="en-US" sz="2200" b="0" strike="noStrike" spc="-1">
                 <a:solidFill>
                   <a:srgbClr val="404040"/>
                 </a:solidFill>
@@ -10725,12 +11115,6 @@
               </a:rPr>
               <a:t>What that because of discrimination, or was there another factor?</a:t>
             </a:r>
-            <a:endParaRPr b="0" lang="en-US" sz="2200" spc="-1" strike="noStrike">
-              <a:solidFill>
-                <a:srgbClr val="404040"/>
-              </a:solidFill>
-              <a:latin typeface="Century Gothic"/>
-            </a:endParaRPr>
           </a:p>
           <a:p>
             <a:pPr marL="228600" indent="-228600">
@@ -10747,7 +11131,7 @@
               <a:buChar char="•"/>
             </a:pPr>
             <a:r>
-              <a:rPr b="0" lang="en-US" sz="2200" spc="-1" strike="noStrike">
+              <a:rPr lang="en-US" sz="2200" b="0" strike="noStrike" spc="-1">
                 <a:solidFill>
                   <a:srgbClr val="404040"/>
                 </a:solidFill>
@@ -10755,12 +11139,6 @@
               </a:rPr>
               <a:t>Isolating discrimination as the factor can be difficult due to a lack of data.</a:t>
             </a:r>
-            <a:endParaRPr b="0" lang="en-US" sz="2200" spc="-1" strike="noStrike">
-              <a:solidFill>
-                <a:srgbClr val="404040"/>
-              </a:solidFill>
-              <a:latin typeface="Century Gothic"/>
-            </a:endParaRPr>
           </a:p>
           <a:p>
             <a:pPr marL="228600" indent="-228600">
@@ -10777,7 +11155,7 @@
               <a:buChar char="•"/>
             </a:pPr>
             <a:r>
-              <a:rPr b="0" lang="en-US" sz="2200" spc="-1" strike="noStrike">
+              <a:rPr lang="en-US" sz="2200" b="0" strike="noStrike" spc="-1">
                 <a:solidFill>
                   <a:srgbClr val="404040"/>
                 </a:solidFill>
@@ -10785,30 +11163,19 @@
               </a:rPr>
               <a:t>But using data we have or can create can be important to bring evidence to the table to complement qualitative research and anecdotal evidence.</a:t>
             </a:r>
-            <a:endParaRPr b="0" lang="en-US" sz="2200" spc="-1" strike="noStrike">
-              <a:solidFill>
-                <a:srgbClr val="404040"/>
-              </a:solidFill>
-              <a:latin typeface="Century Gothic"/>
-            </a:endParaRPr>
           </a:p>
         </p:txBody>
       </p:sp>
     </p:spTree>
   </p:cSld>
-  <mc:AlternateContent>
-    <mc:Choice Requires="p14">
-      <p:transition spd="slow" p14:dur="2000"/>
-    </mc:Choice>
-    <mc:Fallback>
-      <p:transition spd="slow"/>
-    </mc:Fallback>
-  </mc:AlternateContent>
+  <p:clrMapOvr>
+    <a:masterClrMapping/>
+  </p:clrMapOvr>
 </p:sld>
 </file>
 
 <file path=ppt/slides/slide4.xml><?xml version="1.0" encoding="utf-8"?>
-<p:sld xmlns:a="http://schemas.openxmlformats.org/drawingml/2006/main" xmlns:p="http://schemas.openxmlformats.org/presentationml/2006/main" xmlns:r="http://schemas.openxmlformats.org/officeDocument/2006/relationships" xmlns:p14="http://schemas.microsoft.com/office/powerpoint/2010/main" xmlns:p15="http://schemas.microsoft.com/office/powerpoint/2012/main" xmlns:mc="http://schemas.openxmlformats.org/markup-compatibility/2006">
+<p:sld xmlns:a="http://schemas.openxmlformats.org/drawingml/2006/main" xmlns:r="http://schemas.openxmlformats.org/officeDocument/2006/relationships" xmlns:p="http://schemas.openxmlformats.org/presentationml/2006/main">
   <p:cSld>
     <p:spTree>
       <p:nvGrpSpPr>
@@ -10851,6 +11218,7 @@
           <a:bodyPr numCol="1" spcCol="0" anchor="ctr">
             <a:noAutofit/>
           </a:bodyPr>
+          <a:lstStyle/>
           <a:p>
             <a:pPr indent="0">
               <a:lnSpc>
@@ -10859,15 +11227,15 @@
               <a:buNone/>
             </a:pPr>
             <a:r>
-              <a:rPr b="0" lang="en-US" sz="3800" spc="-1" strike="noStrike" cap="all">
-                <a:solidFill>
-                  <a:srgbClr val="265b4d"/>
+              <a:rPr lang="en-US" sz="3800" b="0" strike="noStrike" cap="all" spc="-1">
+                <a:solidFill>
+                  <a:srgbClr val="265B4D"/>
                 </a:solidFill>
                 <a:latin typeface="Century Gothic"/>
               </a:rPr>
               <a:t>Types of discrimination</a:t>
             </a:r>
-            <a:endParaRPr b="0" lang="en-US" sz="3800" spc="-1" strike="noStrike">
+            <a:endParaRPr lang="en-US" sz="3800" b="0" strike="noStrike" spc="-1">
               <a:solidFill>
                 <a:srgbClr val="000000"/>
               </a:solidFill>
@@ -10903,6 +11271,7 @@
           <a:bodyPr numCol="1" spcCol="0" anchor="t">
             <a:noAutofit/>
           </a:bodyPr>
+          <a:lstStyle/>
           <a:p>
             <a:pPr marL="228600" indent="-228600">
               <a:lnSpc>
@@ -10918,7 +11287,7 @@
               <a:buChar char="•"/>
             </a:pPr>
             <a:r>
-              <a:rPr b="0" lang="en-US" sz="2400" spc="-1" strike="noStrike">
+              <a:rPr lang="en-US" sz="2400" b="0" strike="noStrike" spc="-1">
                 <a:solidFill>
                   <a:srgbClr val="404040"/>
                 </a:solidFill>
@@ -10926,7 +11295,31 @@
               </a:rPr>
               <a:t>There are different types of discrimination. Economists typically focus on:</a:t>
             </a:r>
-            <a:endParaRPr b="0" lang="en-US" sz="2400" spc="-1" strike="noStrike">
+          </a:p>
+          <a:p>
+            <a:pPr marL="685800" lvl="1" indent="-228600">
+              <a:lnSpc>
+                <a:spcPct val="90000"/>
+              </a:lnSpc>
+              <a:spcBef>
+                <a:spcPts val="499"/>
+              </a:spcBef>
+              <a:buClr>
+                <a:srgbClr val="404040"/>
+              </a:buClr>
+              <a:buFont typeface="Arial"/>
+              <a:buChar char="•"/>
+            </a:pPr>
+            <a:r>
+              <a:rPr lang="en-US" sz="2000" b="1" strike="noStrike" spc="-1">
+                <a:solidFill>
+                  <a:srgbClr val="404040"/>
+                </a:solidFill>
+                <a:latin typeface="Century Gothic"/>
+              </a:rPr>
+              <a:t>Taste-based discrimination</a:t>
+            </a:r>
+            <a:endParaRPr lang="en-US" sz="2000" b="0" strike="noStrike" spc="-1">
               <a:solidFill>
                 <a:srgbClr val="404040"/>
               </a:solidFill>
@@ -10934,7 +11327,7 @@
             </a:endParaRPr>
           </a:p>
           <a:p>
-            <a:pPr lvl="1" marL="685800" indent="-228600">
+            <a:pPr marL="685800" lvl="1" indent="-228600">
               <a:lnSpc>
                 <a:spcPct val="90000"/>
               </a:lnSpc>
@@ -10948,15 +11341,15 @@
               <a:buChar char="•"/>
             </a:pPr>
             <a:r>
-              <a:rPr b="1" lang="en-US" sz="2000" spc="-1" strike="noStrike">
+              <a:rPr lang="en-US" sz="2000" b="1" strike="noStrike" spc="-1">
                 <a:solidFill>
                   <a:srgbClr val="404040"/>
                 </a:solidFill>
                 <a:latin typeface="Century Gothic"/>
               </a:rPr>
-              <a:t>Taste-based discrimination</a:t>
-            </a:r>
-            <a:endParaRPr b="0" lang="en-US" sz="2000" spc="-1" strike="noStrike">
+              <a:t>Statistical discrimination</a:t>
+            </a:r>
+            <a:endParaRPr lang="en-US" sz="2000" b="0" strike="noStrike" spc="-1">
               <a:solidFill>
                 <a:srgbClr val="404040"/>
               </a:solidFill>
@@ -10964,7 +11357,7 @@
             </a:endParaRPr>
           </a:p>
           <a:p>
-            <a:pPr lvl="1" marL="685800" indent="-228600">
+            <a:pPr marL="685800" lvl="1" indent="-228600">
               <a:lnSpc>
                 <a:spcPct val="90000"/>
               </a:lnSpc>
@@ -10978,167 +11371,114 @@
               <a:buChar char="•"/>
             </a:pPr>
             <a:r>
-              <a:rPr b="1" lang="en-US" sz="2000" spc="-1" strike="noStrike">
+              <a:rPr lang="en-US" sz="2000" b="0" strike="noStrike" spc="-1">
                 <a:solidFill>
                   <a:srgbClr val="404040"/>
                 </a:solidFill>
                 <a:latin typeface="Century Gothic"/>
               </a:rPr>
-              <a:t>Statistical discrimination</a:t>
-            </a:r>
-            <a:endParaRPr b="0" lang="en-US" sz="2000" spc="-1" strike="noStrike">
+              <a:t>Often economists try to determine to what extent discrimination is taste-based vs. statistical</a:t>
+            </a:r>
+          </a:p>
+          <a:p>
+            <a:pPr marL="228600" indent="-228600">
+              <a:lnSpc>
+                <a:spcPct val="90000"/>
+              </a:lnSpc>
+              <a:spcBef>
+                <a:spcPts val="1001"/>
+              </a:spcBef>
+              <a:buClr>
+                <a:srgbClr val="404040"/>
+              </a:buClr>
+              <a:buFont typeface="Arial"/>
+              <a:buChar char="•"/>
+            </a:pPr>
+            <a:r>
+              <a:rPr lang="en-US" sz="2400" b="0" strike="noStrike" spc="-1">
+                <a:solidFill>
+                  <a:srgbClr val="404040"/>
+                </a:solidFill>
+                <a:latin typeface="Century Gothic"/>
+              </a:rPr>
+              <a:t>Sociologists and psychologists also study discrimination.</a:t>
+            </a:r>
+          </a:p>
+          <a:p>
+            <a:pPr marL="685800" lvl="1" indent="-228600">
+              <a:lnSpc>
+                <a:spcPct val="90000"/>
+              </a:lnSpc>
+              <a:spcBef>
+                <a:spcPts val="499"/>
+              </a:spcBef>
+              <a:buClr>
+                <a:srgbClr val="404040"/>
+              </a:buClr>
+              <a:buFont typeface="Arial"/>
+              <a:buChar char="•"/>
+            </a:pPr>
+            <a:r>
+              <a:rPr lang="en-US" sz="2000" b="0" strike="noStrike" spc="-1">
+                <a:solidFill>
+                  <a:srgbClr val="404040"/>
+                </a:solidFill>
+                <a:latin typeface="Century Gothic"/>
+              </a:rPr>
+              <a:t>Sociologists are aware of the taste-based discrimination vs. statistical discrimination situation, but focus on discrimination more broadly, instructing concepts such as structural discrimination and systemic disadvantage.</a:t>
+            </a:r>
+          </a:p>
+          <a:p>
+            <a:pPr marL="685800" lvl="1" indent="-228600">
+              <a:lnSpc>
+                <a:spcPct val="90000"/>
+              </a:lnSpc>
+              <a:spcBef>
+                <a:spcPts val="499"/>
+              </a:spcBef>
+              <a:buClr>
+                <a:srgbClr val="404040"/>
+              </a:buClr>
+              <a:buFont typeface="Arial"/>
+              <a:buChar char="•"/>
+            </a:pPr>
+            <a:r>
+              <a:rPr lang="en-US" sz="2000" b="0" strike="noStrike" spc="-1">
+                <a:solidFill>
+                  <a:srgbClr val="404040"/>
+                </a:solidFill>
+                <a:latin typeface="Century Gothic"/>
+              </a:rPr>
+              <a:t>Psychologists coined/discovered </a:t>
+            </a:r>
+            <a:r>
+              <a:rPr lang="en-US" sz="2000" b="1" strike="noStrike" spc="-1">
+                <a:solidFill>
+                  <a:srgbClr val="404040"/>
+                </a:solidFill>
+                <a:latin typeface="Century Gothic"/>
+              </a:rPr>
+              <a:t>implicit discrimination</a:t>
+            </a:r>
+            <a:endParaRPr lang="en-US" sz="2000" b="0" strike="noStrike" spc="-1">
               <a:solidFill>
                 <a:srgbClr val="404040"/>
               </a:solidFill>
               <a:latin typeface="Century Gothic"/>
             </a:endParaRPr>
           </a:p>
-          <a:p>
-            <a:pPr lvl="1" marL="685800" indent="-228600">
-              <a:lnSpc>
-                <a:spcPct val="90000"/>
-              </a:lnSpc>
-              <a:spcBef>
-                <a:spcPts val="499"/>
-              </a:spcBef>
-              <a:buClr>
-                <a:srgbClr val="404040"/>
-              </a:buClr>
-              <a:buFont typeface="Arial"/>
-              <a:buChar char="•"/>
-            </a:pPr>
-            <a:r>
-              <a:rPr b="0" lang="en-US" sz="2000" spc="-1" strike="noStrike">
-                <a:solidFill>
-                  <a:srgbClr val="404040"/>
-                </a:solidFill>
-                <a:latin typeface="Century Gothic"/>
-              </a:rPr>
-              <a:t>Often economists try to determine to what extent discrimination is taste-based vs. statistical</a:t>
-            </a:r>
-            <a:endParaRPr b="0" lang="en-US" sz="2000" spc="-1" strike="noStrike">
-              <a:solidFill>
-                <a:srgbClr val="404040"/>
-              </a:solidFill>
-              <a:latin typeface="Century Gothic"/>
-            </a:endParaRPr>
-          </a:p>
-          <a:p>
-            <a:pPr marL="228600" indent="-228600">
-              <a:lnSpc>
-                <a:spcPct val="90000"/>
-              </a:lnSpc>
-              <a:spcBef>
-                <a:spcPts val="1001"/>
-              </a:spcBef>
-              <a:buClr>
-                <a:srgbClr val="404040"/>
-              </a:buClr>
-              <a:buFont typeface="Arial"/>
-              <a:buChar char="•"/>
-            </a:pPr>
-            <a:r>
-              <a:rPr b="0" lang="en-US" sz="2400" spc="-1" strike="noStrike">
-                <a:solidFill>
-                  <a:srgbClr val="404040"/>
-                </a:solidFill>
-                <a:latin typeface="Century Gothic"/>
-              </a:rPr>
-              <a:t>Sociologists and psychologists also study discrimination.</a:t>
-            </a:r>
-            <a:endParaRPr b="0" lang="en-US" sz="2400" spc="-1" strike="noStrike">
-              <a:solidFill>
-                <a:srgbClr val="404040"/>
-              </a:solidFill>
-              <a:latin typeface="Century Gothic"/>
-            </a:endParaRPr>
-          </a:p>
-          <a:p>
-            <a:pPr lvl="1" marL="685800" indent="-228600">
-              <a:lnSpc>
-                <a:spcPct val="90000"/>
-              </a:lnSpc>
-              <a:spcBef>
-                <a:spcPts val="499"/>
-              </a:spcBef>
-              <a:buClr>
-                <a:srgbClr val="404040"/>
-              </a:buClr>
-              <a:buFont typeface="Arial"/>
-              <a:buChar char="•"/>
-            </a:pPr>
-            <a:r>
-              <a:rPr b="0" lang="en-US" sz="2000" spc="-1" strike="noStrike">
-                <a:solidFill>
-                  <a:srgbClr val="404040"/>
-                </a:solidFill>
-                <a:latin typeface="Century Gothic"/>
-              </a:rPr>
-              <a:t>Sociologists are aware of the taste-based discrimination vs. statistical discrimination situation, but focus on discrimination more broadly, instructing concepts such as structural discrimination and systemic disadvantage.</a:t>
-            </a:r>
-            <a:endParaRPr b="0" lang="en-US" sz="2000" spc="-1" strike="noStrike">
-              <a:solidFill>
-                <a:srgbClr val="404040"/>
-              </a:solidFill>
-              <a:latin typeface="Century Gothic"/>
-            </a:endParaRPr>
-          </a:p>
-          <a:p>
-            <a:pPr lvl="1" marL="685800" indent="-228600">
-              <a:lnSpc>
-                <a:spcPct val="90000"/>
-              </a:lnSpc>
-              <a:spcBef>
-                <a:spcPts val="499"/>
-              </a:spcBef>
-              <a:buClr>
-                <a:srgbClr val="404040"/>
-              </a:buClr>
-              <a:buFont typeface="Arial"/>
-              <a:buChar char="•"/>
-            </a:pPr>
-            <a:r>
-              <a:rPr b="0" lang="en-US" sz="2000" spc="-1" strike="noStrike">
-                <a:solidFill>
-                  <a:srgbClr val="404040"/>
-                </a:solidFill>
-                <a:latin typeface="Century Gothic"/>
-              </a:rPr>
-              <a:t>Psychologists coined/discovered </a:t>
-            </a:r>
-            <a:r>
-              <a:rPr b="1" lang="en-US" sz="2000" spc="-1" strike="noStrike">
-                <a:solidFill>
-                  <a:srgbClr val="404040"/>
-                </a:solidFill>
-                <a:latin typeface="Century Gothic"/>
-              </a:rPr>
-              <a:t>implicit discrimination</a:t>
-            </a:r>
-            <a:endParaRPr b="0" lang="en-US" sz="2000" spc="-1" strike="noStrike">
-              <a:solidFill>
-                <a:srgbClr val="404040"/>
-              </a:solidFill>
-              <a:latin typeface="Century Gothic"/>
-            </a:endParaRPr>
-          </a:p>
         </p:txBody>
       </p:sp>
     </p:spTree>
   </p:cSld>
-  <mc:AlternateContent>
-    <mc:Choice Requires="p14">
-      <p:transition spd="slow" p14:dur="2000"/>
-    </mc:Choice>
-    <mc:Fallback>
-      <p:transition spd="slow"/>
-    </mc:Fallback>
-  </mc:AlternateContent>
+  <p:clrMapOvr>
+    <a:masterClrMapping/>
+  </p:clrMapOvr>
 </p:sld>
 </file>
 
 <file path=ppt/slides/slide5.xml><?xml version="1.0" encoding="utf-8"?>
-<p:sld xmlns:a="http://schemas.openxmlformats.org/drawingml/2006/main" xmlns:p="http://schemas.openxmlformats.org/presentationml/2006/main" xmlns:r="http://schemas.openxmlformats.org/officeDocument/2006/relationships" xmlns:p14="http://schemas.microsoft.com/office/powerpoint/2010/main" xmlns:p15="http://schemas.microsoft.com/office/powerpoint/2012/main" xmlns:mc="http://schemas.openxmlformats.org/markup-compatibility/2006">
+<p:sld xmlns:a="http://schemas.openxmlformats.org/drawingml/2006/main" xmlns:r="http://schemas.openxmlformats.org/officeDocument/2006/relationships" xmlns:p="http://schemas.openxmlformats.org/presentationml/2006/main">
   <p:cSld>
     <p:spTree>
       <p:nvGrpSpPr>
@@ -11181,6 +11521,7 @@
           <a:bodyPr numCol="1" spcCol="0" anchor="ctr">
             <a:noAutofit/>
           </a:bodyPr>
+          <a:lstStyle/>
           <a:p>
             <a:pPr indent="0">
               <a:lnSpc>
@@ -11189,15 +11530,15 @@
               <a:buNone/>
             </a:pPr>
             <a:r>
-              <a:rPr b="0" lang="en-US" sz="3800" spc="-1" strike="noStrike" cap="all">
-                <a:solidFill>
-                  <a:srgbClr val="265b4d"/>
+              <a:rPr lang="en-US" sz="3800" b="0" strike="noStrike" cap="all" spc="-1">
+                <a:solidFill>
+                  <a:srgbClr val="265B4D"/>
                 </a:solidFill>
                 <a:latin typeface="Century Gothic"/>
               </a:rPr>
               <a:t>Taste-Based Discrimination – “Animus”</a:t>
             </a:r>
-            <a:endParaRPr b="0" lang="en-US" sz="3800" spc="-1" strike="noStrike">
+            <a:endParaRPr lang="en-US" sz="3800" b="0" strike="noStrike" spc="-1">
               <a:solidFill>
                 <a:srgbClr val="000000"/>
               </a:solidFill>
@@ -11233,6 +11574,7 @@
           <a:bodyPr numCol="1" spcCol="0" anchor="t">
             <a:noAutofit/>
           </a:bodyPr>
+          <a:lstStyle/>
           <a:p>
             <a:pPr marL="228600" indent="-228600">
               <a:lnSpc>
@@ -11248,7 +11590,7 @@
               <a:buChar char="•"/>
             </a:pPr>
             <a:r>
-              <a:rPr b="0" lang="en-US" sz="2400" spc="-1" strike="noStrike">
+              <a:rPr lang="en-US" sz="2400" b="0" strike="noStrike" spc="-1">
                 <a:solidFill>
                   <a:srgbClr val="404040"/>
                 </a:solidFill>
@@ -11256,15 +11598,9 @@
               </a:rPr>
               <a:t>Discrimination that occurs due to not liking or having animus against a group.</a:t>
             </a:r>
-            <a:endParaRPr b="0" lang="en-US" sz="2400" spc="-1" strike="noStrike">
-              <a:solidFill>
-                <a:srgbClr val="404040"/>
-              </a:solidFill>
-              <a:latin typeface="Century Gothic"/>
-            </a:endParaRPr>
-          </a:p>
-          <a:p>
-            <a:pPr lvl="1" marL="685800" indent="-228600">
+          </a:p>
+          <a:p>
+            <a:pPr marL="685800" lvl="1" indent="-228600">
               <a:lnSpc>
                 <a:spcPct val="90000"/>
               </a:lnSpc>
@@ -11278,7 +11614,7 @@
               <a:buChar char="•"/>
             </a:pPr>
             <a:r>
-              <a:rPr b="0" lang="en-US" sz="2000" spc="-1" strike="noStrike">
+              <a:rPr lang="en-US" sz="2000" b="0" strike="noStrike" spc="-1">
                 <a:solidFill>
                   <a:srgbClr val="404040"/>
                 </a:solidFill>
@@ -11286,12 +11622,6 @@
               </a:rPr>
               <a:t>Think outright racism, homophobia, sexism, transphobia, ageism, etc.</a:t>
             </a:r>
-            <a:endParaRPr b="0" lang="en-US" sz="2000" spc="-1" strike="noStrike">
-              <a:solidFill>
-                <a:srgbClr val="404040"/>
-              </a:solidFill>
-              <a:latin typeface="Century Gothic"/>
-            </a:endParaRPr>
           </a:p>
           <a:p>
             <a:pPr marL="228600" indent="-228600">
@@ -11308,7 +11638,7 @@
               <a:buChar char="•"/>
             </a:pPr>
             <a:r>
-              <a:rPr b="0" lang="en-US" sz="2400" spc="-1" strike="noStrike">
+              <a:rPr lang="en-US" sz="2400" b="0" strike="noStrike" spc="-1">
                 <a:solidFill>
                   <a:srgbClr val="404040"/>
                 </a:solidFill>
@@ -11316,12 +11646,6 @@
               </a:rPr>
               <a:t>The term was coined by Gary Becker, a famous labor economist who is known for being one of the first to apply economics to study discrimination in the labor market.</a:t>
             </a:r>
-            <a:endParaRPr b="0" lang="en-US" sz="2400" spc="-1" strike="noStrike">
-              <a:solidFill>
-                <a:srgbClr val="404040"/>
-              </a:solidFill>
-              <a:latin typeface="Century Gothic"/>
-            </a:endParaRPr>
           </a:p>
           <a:p>
             <a:pPr marL="228600" indent="-228600">
@@ -11338,7 +11662,7 @@
               <a:buChar char="•"/>
             </a:pPr>
             <a:r>
-              <a:rPr b="0" lang="en-US" sz="2400" spc="-1" strike="noStrike">
+              <a:rPr lang="en-US" sz="2400" b="0" strike="noStrike" spc="-1">
                 <a:solidFill>
                   <a:srgbClr val="404040"/>
                 </a:solidFill>
@@ -11346,30 +11670,19 @@
               </a:rPr>
               <a:t>Unsurprisingly, taste-based discrimination is seen as uniformly bad, both because it is inequitable, but it also creates inefficiencies (e.g., not hiring the employee who is the best fit for the company.)</a:t>
             </a:r>
-            <a:endParaRPr b="0" lang="en-US" sz="2400" spc="-1" strike="noStrike">
-              <a:solidFill>
-                <a:srgbClr val="404040"/>
-              </a:solidFill>
-              <a:latin typeface="Century Gothic"/>
-            </a:endParaRPr>
           </a:p>
         </p:txBody>
       </p:sp>
     </p:spTree>
   </p:cSld>
-  <mc:AlternateContent>
-    <mc:Choice Requires="p14">
-      <p:transition spd="slow" p14:dur="2000"/>
-    </mc:Choice>
-    <mc:Fallback>
-      <p:transition spd="slow"/>
-    </mc:Fallback>
-  </mc:AlternateContent>
+  <p:clrMapOvr>
+    <a:masterClrMapping/>
+  </p:clrMapOvr>
 </p:sld>
 </file>
 
 <file path=ppt/slides/slide6.xml><?xml version="1.0" encoding="utf-8"?>
-<p:sld xmlns:a="http://schemas.openxmlformats.org/drawingml/2006/main" xmlns:p="http://schemas.openxmlformats.org/presentationml/2006/main" xmlns:r="http://schemas.openxmlformats.org/officeDocument/2006/relationships" xmlns:p14="http://schemas.microsoft.com/office/powerpoint/2010/main" xmlns:p15="http://schemas.microsoft.com/office/powerpoint/2012/main" xmlns:mc="http://schemas.openxmlformats.org/markup-compatibility/2006">
+<p:sld xmlns:a="http://schemas.openxmlformats.org/drawingml/2006/main" xmlns:r="http://schemas.openxmlformats.org/officeDocument/2006/relationships" xmlns:p="http://schemas.openxmlformats.org/presentationml/2006/main">
   <p:cSld>
     <p:spTree>
       <p:nvGrpSpPr>
@@ -11412,6 +11725,7 @@
           <a:bodyPr numCol="1" spcCol="0" anchor="ctr">
             <a:noAutofit/>
           </a:bodyPr>
+          <a:lstStyle/>
           <a:p>
             <a:pPr indent="0">
               <a:lnSpc>
@@ -11420,15 +11734,15 @@
               <a:buNone/>
             </a:pPr>
             <a:r>
-              <a:rPr b="0" lang="en-US" sz="3800" spc="-1" strike="noStrike" cap="all">
-                <a:solidFill>
-                  <a:srgbClr val="265b4d"/>
+              <a:rPr lang="en-US" sz="3800" b="0" strike="noStrike" cap="all" spc="-1">
+                <a:solidFill>
+                  <a:srgbClr val="265B4D"/>
                 </a:solidFill>
                 <a:latin typeface="Century Gothic"/>
               </a:rPr>
               <a:t>Taste-Based Discrimination – “Animus”</a:t>
             </a:r>
-            <a:endParaRPr b="0" lang="en-US" sz="3800" spc="-1" strike="noStrike">
+            <a:endParaRPr lang="en-US" sz="3800" b="0" strike="noStrike" spc="-1">
               <a:solidFill>
                 <a:srgbClr val="000000"/>
               </a:solidFill>
@@ -11464,6 +11778,7 @@
           <a:bodyPr numCol="1" spcCol="0" anchor="t">
             <a:noAutofit/>
           </a:bodyPr>
+          <a:lstStyle/>
           <a:p>
             <a:pPr marL="228600" indent="-228600">
               <a:lnSpc>
@@ -11479,7 +11794,7 @@
               <a:buChar char="•"/>
             </a:pPr>
             <a:r>
-              <a:rPr b="0" lang="en-US" sz="2400" spc="-1" strike="noStrike">
+              <a:rPr lang="en-US" sz="2400" b="0" strike="noStrike" spc="-1">
                 <a:solidFill>
                   <a:srgbClr val="404040"/>
                 </a:solidFill>
@@ -11487,12 +11802,6 @@
               </a:rPr>
               <a:t>It’s often hard to measure to what extent discrimination is taste-based since:</a:t>
             </a:r>
-            <a:endParaRPr b="0" lang="en-US" sz="2400" spc="-1" strike="noStrike">
-              <a:solidFill>
-                <a:srgbClr val="404040"/>
-              </a:solidFill>
-              <a:latin typeface="Century Gothic"/>
-            </a:endParaRPr>
           </a:p>
           <a:p>
             <a:pPr marL="457200" indent="-457200">
@@ -11509,7 +11818,7 @@
               <a:buAutoNum type="arabicParenR"/>
             </a:pPr>
             <a:r>
-              <a:rPr b="0" lang="en-US" sz="2400" spc="-1" strike="noStrike">
+              <a:rPr lang="en-US" sz="2400" b="0" strike="noStrike" spc="-1">
                 <a:solidFill>
                   <a:srgbClr val="404040"/>
                 </a:solidFill>
@@ -11517,12 +11826,6 @@
               </a:rPr>
               <a:t>It’s hard to perfectly witness discrimination in a way where it can be obviously isolated</a:t>
             </a:r>
-            <a:endParaRPr b="0" lang="en-US" sz="2400" spc="-1" strike="noStrike">
-              <a:solidFill>
-                <a:srgbClr val="404040"/>
-              </a:solidFill>
-              <a:latin typeface="Century Gothic"/>
-            </a:endParaRPr>
           </a:p>
           <a:p>
             <a:pPr marL="457200" indent="-457200">
@@ -11539,7 +11842,7 @@
               <a:buAutoNum type="arabicParenR"/>
             </a:pPr>
             <a:r>
-              <a:rPr b="0" lang="en-US" sz="2400" spc="-1" strike="noStrike">
+              <a:rPr lang="en-US" sz="2400" b="0" strike="noStrike" spc="-1">
                 <a:solidFill>
                   <a:srgbClr val="404040"/>
                 </a:solidFill>
@@ -11548,7 +11851,7 @@
               <a:t>People </a:t>
             </a:r>
             <a:r>
-              <a:rPr b="0" i="1" lang="en-US" sz="2400" spc="-1" strike="noStrike">
+              <a:rPr lang="en-US" sz="2400" b="0" i="1" strike="noStrike" spc="-1">
                 <a:solidFill>
                   <a:srgbClr val="404040"/>
                 </a:solidFill>
@@ -11557,7 +11860,7 @@
               <a:t>usually</a:t>
             </a:r>
             <a:r>
-              <a:rPr b="0" lang="en-US" sz="2400" spc="-1" strike="noStrike">
+              <a:rPr lang="en-US" sz="2400" b="0" strike="noStrike" spc="-1">
                 <a:solidFill>
                   <a:srgbClr val="404040"/>
                 </a:solidFill>
@@ -11565,30 +11868,19 @@
               </a:rPr>
               <a:t> aren’t going to reveal that they are bigots, although outright, observable sexism, homophobia, anti-Semitism, racism, etc., are becoming more common.</a:t>
             </a:r>
-            <a:endParaRPr b="0" lang="en-US" sz="2400" spc="-1" strike="noStrike">
-              <a:solidFill>
-                <a:srgbClr val="404040"/>
-              </a:solidFill>
-              <a:latin typeface="Century Gothic"/>
-            </a:endParaRPr>
           </a:p>
         </p:txBody>
       </p:sp>
     </p:spTree>
   </p:cSld>
-  <mc:AlternateContent>
-    <mc:Choice Requires="p14">
-      <p:transition spd="slow" p14:dur="2000"/>
-    </mc:Choice>
-    <mc:Fallback>
-      <p:transition spd="slow"/>
-    </mc:Fallback>
-  </mc:AlternateContent>
+  <p:clrMapOvr>
+    <a:masterClrMapping/>
+  </p:clrMapOvr>
 </p:sld>
 </file>
 
 <file path=ppt/slides/slide7.xml><?xml version="1.0" encoding="utf-8"?>
-<p:sld xmlns:a="http://schemas.openxmlformats.org/drawingml/2006/main" xmlns:p="http://schemas.openxmlformats.org/presentationml/2006/main" xmlns:r="http://schemas.openxmlformats.org/officeDocument/2006/relationships" xmlns:p14="http://schemas.microsoft.com/office/powerpoint/2010/main" xmlns:p15="http://schemas.microsoft.com/office/powerpoint/2012/main" xmlns:mc="http://schemas.openxmlformats.org/markup-compatibility/2006">
+<p:sld xmlns:a="http://schemas.openxmlformats.org/drawingml/2006/main" xmlns:r="http://schemas.openxmlformats.org/officeDocument/2006/relationships" xmlns:p="http://schemas.openxmlformats.org/presentationml/2006/main">
   <p:cSld>
     <p:spTree>
       <p:nvGrpSpPr>
@@ -11631,6 +11923,7 @@
           <a:bodyPr numCol="1" spcCol="0" anchor="ctr">
             <a:noAutofit/>
           </a:bodyPr>
+          <a:lstStyle/>
           <a:p>
             <a:pPr indent="0">
               <a:lnSpc>
@@ -11639,15 +11932,15 @@
               <a:buNone/>
             </a:pPr>
             <a:r>
-              <a:rPr b="0" lang="en-US" sz="3800" spc="-1" strike="noStrike" cap="all">
-                <a:solidFill>
-                  <a:srgbClr val="265b4d"/>
+              <a:rPr lang="en-US" sz="3800" b="0" strike="noStrike" cap="all" spc="-1">
+                <a:solidFill>
+                  <a:srgbClr val="265B4D"/>
                 </a:solidFill>
                 <a:latin typeface="Century Gothic"/>
               </a:rPr>
               <a:t>Statistical discrimination</a:t>
             </a:r>
-            <a:endParaRPr b="0" lang="en-US" sz="3800" spc="-1" strike="noStrike">
+            <a:endParaRPr lang="en-US" sz="3800" b="0" strike="noStrike" spc="-1">
               <a:solidFill>
                 <a:srgbClr val="000000"/>
               </a:solidFill>
@@ -11683,6 +11976,7 @@
           <a:bodyPr numCol="1" spcCol="0" anchor="t">
             <a:noAutofit/>
           </a:bodyPr>
+          <a:lstStyle/>
           <a:p>
             <a:pPr marL="228600" indent="-228600">
               <a:lnSpc>
@@ -11698,7 +11992,7 @@
               <a:buChar char="•"/>
             </a:pPr>
             <a:r>
-              <a:rPr b="0" lang="en-US" sz="2400" spc="-1" strike="noStrike">
+              <a:rPr lang="en-US" sz="2400" b="0" strike="noStrike" spc="-1">
                 <a:solidFill>
                   <a:srgbClr val="404040"/>
                 </a:solidFill>
@@ -11707,7 +12001,7 @@
               <a:t>This theory is typically attributed to Kenneth Arrow's 1973 work </a:t>
             </a:r>
             <a:r>
-              <a:rPr b="0" i="1" lang="en-US" sz="2400" spc="-1" strike="noStrike">
+              <a:rPr lang="en-US" sz="2400" b="0" i="1" strike="noStrike" spc="-1">
                 <a:solidFill>
                   <a:srgbClr val="404040"/>
                 </a:solidFill>
@@ -11716,7 +12010,7 @@
               <a:t>The Theory of Discrimination </a:t>
             </a:r>
             <a:r>
-              <a:rPr b="0" lang="en-US" sz="2400" spc="-1" strike="noStrike">
+              <a:rPr lang="en-US" sz="2400" b="0" strike="noStrike" spc="-1">
                 <a:solidFill>
                   <a:srgbClr val="404040"/>
                 </a:solidFill>
@@ -11725,7 +12019,7 @@
               <a:t>and to Edmund Phelp's 1972 paper </a:t>
             </a:r>
             <a:r>
-              <a:rPr b="0" i="1" lang="en-US" sz="2400" spc="-1" strike="noStrike">
+              <a:rPr lang="en-US" sz="2400" b="0" i="1" strike="noStrike" spc="-1">
                 <a:solidFill>
                   <a:srgbClr val="404040"/>
                 </a:solidFill>
@@ -11733,7 +12027,7 @@
               </a:rPr>
               <a:t>The Statistical Theory of Racism and Sexism. </a:t>
             </a:r>
-            <a:endParaRPr b="0" lang="en-US" sz="2400" spc="-1" strike="noStrike">
+            <a:endParaRPr lang="en-US" sz="2400" b="0" strike="noStrike" spc="-1">
               <a:solidFill>
                 <a:srgbClr val="404040"/>
               </a:solidFill>
@@ -11755,7 +12049,7 @@
               <a:buChar char="•"/>
             </a:pPr>
             <a:r>
-              <a:rPr b="0" lang="en-US" sz="2400" spc="-1" strike="noStrike">
+              <a:rPr lang="en-US" sz="2400" b="0" strike="noStrike" spc="-1">
                 <a:solidFill>
                   <a:srgbClr val="404040"/>
                 </a:solidFill>
@@ -11763,12 +12057,6 @@
               </a:rPr>
               <a:t>The idea is that some discrimination is based on individuals using actual or perceived information about the differences between groups – i.e. actual or perceived statistical differences between groups.</a:t>
             </a:r>
-            <a:endParaRPr b="0" lang="en-US" sz="2400" spc="-1" strike="noStrike">
-              <a:solidFill>
-                <a:srgbClr val="404040"/>
-              </a:solidFill>
-              <a:latin typeface="Century Gothic"/>
-            </a:endParaRPr>
           </a:p>
           <a:p>
             <a:pPr marL="228600" indent="-228600">
@@ -11785,7 +12073,7 @@
               <a:buChar char="•"/>
             </a:pPr>
             <a:r>
-              <a:rPr b="0" lang="en-US" sz="2400" spc="-1" strike="noStrike">
+              <a:rPr lang="en-US" sz="2400" b="0" strike="noStrike" spc="-1">
                 <a:solidFill>
                   <a:srgbClr val="404040"/>
                 </a:solidFill>
@@ -11793,30 +12081,19 @@
               </a:rPr>
               <a:t>Minority status – such as race or ethnicity – is used a proxy for something else.</a:t>
             </a:r>
-            <a:endParaRPr b="0" lang="en-US" sz="2400" spc="-1" strike="noStrike">
-              <a:solidFill>
-                <a:srgbClr val="404040"/>
-              </a:solidFill>
-              <a:latin typeface="Century Gothic"/>
-            </a:endParaRPr>
           </a:p>
         </p:txBody>
       </p:sp>
     </p:spTree>
   </p:cSld>
-  <mc:AlternateContent>
-    <mc:Choice Requires="p14">
-      <p:transition spd="slow" p14:dur="2000"/>
-    </mc:Choice>
-    <mc:Fallback>
-      <p:transition spd="slow"/>
-    </mc:Fallback>
-  </mc:AlternateContent>
+  <p:clrMapOvr>
+    <a:masterClrMapping/>
+  </p:clrMapOvr>
 </p:sld>
 </file>
 
 <file path=ppt/slides/slide8.xml><?xml version="1.0" encoding="utf-8"?>
-<p:sld xmlns:a="http://schemas.openxmlformats.org/drawingml/2006/main" xmlns:p="http://schemas.openxmlformats.org/presentationml/2006/main" xmlns:r="http://schemas.openxmlformats.org/officeDocument/2006/relationships" xmlns:p14="http://schemas.microsoft.com/office/powerpoint/2010/main" xmlns:p15="http://schemas.microsoft.com/office/powerpoint/2012/main" xmlns:mc="http://schemas.openxmlformats.org/markup-compatibility/2006">
+<p:sld xmlns:a="http://schemas.openxmlformats.org/drawingml/2006/main" xmlns:r="http://schemas.openxmlformats.org/officeDocument/2006/relationships" xmlns:p="http://schemas.openxmlformats.org/presentationml/2006/main">
   <p:cSld>
     <p:spTree>
       <p:nvGrpSpPr>
@@ -11859,6 +12136,7 @@
           <a:bodyPr numCol="1" spcCol="0" anchor="ctr">
             <a:noAutofit/>
           </a:bodyPr>
+          <a:lstStyle/>
           <a:p>
             <a:pPr indent="0">
               <a:lnSpc>
@@ -11867,15 +12145,15 @@
               <a:buNone/>
             </a:pPr>
             <a:r>
-              <a:rPr b="0" lang="en-US" sz="3800" spc="-1" strike="noStrike" cap="all">
-                <a:solidFill>
-                  <a:srgbClr val="265b4d"/>
+              <a:rPr lang="en-US" sz="3800" b="0" strike="noStrike" cap="all" spc="-1">
+                <a:solidFill>
+                  <a:srgbClr val="265B4D"/>
                 </a:solidFill>
                 <a:latin typeface="Century Gothic"/>
               </a:rPr>
               <a:t>Statistical discrimination</a:t>
             </a:r>
-            <a:endParaRPr b="0" lang="en-US" sz="3800" spc="-1" strike="noStrike">
+            <a:endParaRPr lang="en-US" sz="3800" b="0" strike="noStrike" spc="-1">
               <a:solidFill>
                 <a:srgbClr val="000000"/>
               </a:solidFill>
@@ -11911,6 +12189,7 @@
           <a:bodyPr numCol="1" spcCol="0" anchor="t">
             <a:noAutofit/>
           </a:bodyPr>
+          <a:lstStyle/>
           <a:p>
             <a:pPr marL="228600" indent="-228600">
               <a:lnSpc>
@@ -11926,7 +12205,7 @@
               <a:buChar char="•"/>
             </a:pPr>
             <a:r>
-              <a:rPr b="0" lang="en-US" sz="2400" spc="-1" strike="noStrike">
+              <a:rPr lang="en-US" sz="2400" b="0" strike="noStrike" spc="-1">
                 <a:solidFill>
                   <a:srgbClr val="404040"/>
                 </a:solidFill>
@@ -11934,15 +12213,9 @@
               </a:rPr>
               <a:t>The best way to describe what is meant by statistical discrimination is to give some examples from different contexts:</a:t>
             </a:r>
-            <a:endParaRPr b="0" lang="en-US" sz="2400" spc="-1" strike="noStrike">
-              <a:solidFill>
-                <a:srgbClr val="404040"/>
-              </a:solidFill>
-              <a:latin typeface="Century Gothic"/>
-            </a:endParaRPr>
-          </a:p>
-          <a:p>
-            <a:pPr lvl="1" marL="685800" indent="-228600">
+          </a:p>
+          <a:p>
+            <a:pPr marL="685800" lvl="1" indent="-228600">
               <a:lnSpc>
                 <a:spcPct val="90000"/>
               </a:lnSpc>
@@ -11956,7 +12229,7 @@
               <a:buChar char="•"/>
             </a:pPr>
             <a:r>
-              <a:rPr b="0" lang="en-US" sz="2000" spc="-1" strike="noStrike">
+              <a:rPr lang="en-US" sz="2000" b="0" strike="noStrike" spc="-1">
                 <a:solidFill>
                   <a:srgbClr val="404040"/>
                 </a:solidFill>
@@ -11964,15 +12237,9 @@
               </a:rPr>
               <a:t>Employment (which you’ll see in the Agan and Starr, 2018, paper on “Ban the Box”)</a:t>
             </a:r>
-            <a:endParaRPr b="0" lang="en-US" sz="2000" spc="-1" strike="noStrike">
-              <a:solidFill>
-                <a:srgbClr val="404040"/>
-              </a:solidFill>
-              <a:latin typeface="Century Gothic"/>
-            </a:endParaRPr>
-          </a:p>
-          <a:p>
-            <a:pPr lvl="1" marL="685800" indent="-228600">
+          </a:p>
+          <a:p>
+            <a:pPr marL="685800" lvl="1" indent="-228600">
               <a:lnSpc>
                 <a:spcPct val="90000"/>
               </a:lnSpc>
@@ -11986,7 +12253,7 @@
               <a:buChar char="•"/>
             </a:pPr>
             <a:r>
-              <a:rPr b="0" lang="en-US" sz="2000" spc="-1" strike="noStrike">
+              <a:rPr lang="en-US" sz="2000" b="0" strike="noStrike" spc="-1">
                 <a:solidFill>
                   <a:srgbClr val="404040"/>
                 </a:solidFill>
@@ -11994,15 +12261,9 @@
               </a:rPr>
               <a:t>Housing (which you’ll see in a few papers, including my experiment on sexual orientation discrimination in mortgage loans)</a:t>
             </a:r>
-            <a:endParaRPr b="0" lang="en-US" sz="2000" spc="-1" strike="noStrike">
-              <a:solidFill>
-                <a:srgbClr val="404040"/>
-              </a:solidFill>
-              <a:latin typeface="Century Gothic"/>
-            </a:endParaRPr>
-          </a:p>
-          <a:p>
-            <a:pPr lvl="1" marL="685800" indent="-228600">
+          </a:p>
+          <a:p>
+            <a:pPr marL="685800" lvl="1" indent="-228600">
               <a:lnSpc>
                 <a:spcPct val="90000"/>
               </a:lnSpc>
@@ -12016,7 +12277,7 @@
               <a:buChar char="•"/>
             </a:pPr>
             <a:r>
-              <a:rPr b="0" lang="en-US" sz="2000" spc="-1" strike="noStrike">
+              <a:rPr lang="en-US" sz="2000" b="0" strike="noStrike" spc="-1">
                 <a:solidFill>
                   <a:srgbClr val="404040"/>
                 </a:solidFill>
@@ -12024,30 +12285,19 @@
               </a:rPr>
               <a:t>Policing (which you’ll see in a few papers, such as Antonovics and Knight, 2009)</a:t>
             </a:r>
-            <a:endParaRPr b="0" lang="en-US" sz="2000" spc="-1" strike="noStrike">
-              <a:solidFill>
-                <a:srgbClr val="404040"/>
-              </a:solidFill>
-              <a:latin typeface="Century Gothic"/>
-            </a:endParaRPr>
           </a:p>
         </p:txBody>
       </p:sp>
     </p:spTree>
   </p:cSld>
-  <mc:AlternateContent>
-    <mc:Choice Requires="p14">
-      <p:transition spd="slow" p14:dur="2000"/>
-    </mc:Choice>
-    <mc:Fallback>
-      <p:transition spd="slow"/>
-    </mc:Fallback>
-  </mc:AlternateContent>
+  <p:clrMapOvr>
+    <a:masterClrMapping/>
+  </p:clrMapOvr>
 </p:sld>
 </file>
 
 <file path=ppt/slides/slide9.xml><?xml version="1.0" encoding="utf-8"?>
-<p:sld xmlns:a="http://schemas.openxmlformats.org/drawingml/2006/main" xmlns:p="http://schemas.openxmlformats.org/presentationml/2006/main" xmlns:r="http://schemas.openxmlformats.org/officeDocument/2006/relationships" xmlns:p14="http://schemas.microsoft.com/office/powerpoint/2010/main" xmlns:p15="http://schemas.microsoft.com/office/powerpoint/2012/main" xmlns:mc="http://schemas.openxmlformats.org/markup-compatibility/2006">
+<p:sld xmlns:a="http://schemas.openxmlformats.org/drawingml/2006/main" xmlns:r="http://schemas.openxmlformats.org/officeDocument/2006/relationships" xmlns:p="http://schemas.openxmlformats.org/presentationml/2006/main">
   <p:cSld>
     <p:spTree>
       <p:nvGrpSpPr>
@@ -12090,6 +12340,7 @@
           <a:bodyPr numCol="1" spcCol="0" anchor="ctr">
             <a:noAutofit/>
           </a:bodyPr>
+          <a:lstStyle/>
           <a:p>
             <a:pPr indent="0">
               <a:lnSpc>
@@ -12098,15 +12349,15 @@
               <a:buNone/>
             </a:pPr>
             <a:r>
-              <a:rPr b="0" lang="en-US" sz="3800" spc="-1" strike="noStrike" cap="all">
-                <a:solidFill>
-                  <a:srgbClr val="265b4d"/>
+              <a:rPr lang="en-US" sz="3800" b="0" strike="noStrike" cap="all" spc="-1">
+                <a:solidFill>
+                  <a:srgbClr val="265B4D"/>
                 </a:solidFill>
                 <a:latin typeface="Century Gothic"/>
               </a:rPr>
               <a:t>Statistical discrimination - Employment</a:t>
             </a:r>
-            <a:endParaRPr b="0" lang="en-US" sz="3800" spc="-1" strike="noStrike">
+            <a:endParaRPr lang="en-US" sz="3800" b="0" strike="noStrike" spc="-1">
               <a:solidFill>
                 <a:srgbClr val="000000"/>
               </a:solidFill>
@@ -12142,6 +12393,7 @@
           <a:bodyPr numCol="1" spcCol="0" anchor="t">
             <a:noAutofit/>
           </a:bodyPr>
+          <a:lstStyle/>
           <a:p>
             <a:pPr marL="228600" indent="-228600">
               <a:lnSpc>
@@ -12157,7 +12409,7 @@
               <a:buChar char="•"/>
             </a:pPr>
             <a:r>
-              <a:rPr b="0" lang="en-US" sz="2400" spc="-1" strike="noStrike">
+              <a:rPr lang="en-US" sz="2400" b="0" strike="noStrike" spc="-1">
                 <a:solidFill>
                   <a:srgbClr val="404040"/>
                 </a:solidFill>
@@ -12165,12 +12417,6 @@
               </a:rPr>
               <a:t>In the face of imperfect information (employers don’t know everything about job applicants), employers may make assumptions about job applicants based on the minority group they are in.</a:t>
             </a:r>
-            <a:endParaRPr b="0" lang="en-US" sz="2400" spc="-1" strike="noStrike">
-              <a:solidFill>
-                <a:srgbClr val="404040"/>
-              </a:solidFill>
-              <a:latin typeface="Century Gothic"/>
-            </a:endParaRPr>
           </a:p>
           <a:p>
             <a:pPr marL="228600" indent="-228600">
@@ -12187,7 +12433,7 @@
               <a:buChar char="•"/>
             </a:pPr>
             <a:r>
-              <a:rPr b="0" lang="en-US" sz="2400" spc="-1" strike="noStrike">
+              <a:rPr lang="en-US" sz="2400" b="0" strike="noStrike" spc="-1">
                 <a:solidFill>
                   <a:srgbClr val="404040"/>
                 </a:solidFill>
@@ -12195,12 +12441,6 @@
               </a:rPr>
               <a:t>Agan and Starr (2018) study discrimination against Hispanics, African Americans, and those with criminal records in job applications.</a:t>
             </a:r>
-            <a:endParaRPr b="0" lang="en-US" sz="2400" spc="-1" strike="noStrike">
-              <a:solidFill>
-                <a:srgbClr val="404040"/>
-              </a:solidFill>
-              <a:latin typeface="Century Gothic"/>
-            </a:endParaRPr>
           </a:p>
           <a:p>
             <a:pPr marL="228600" indent="-228600">
@@ -12217,7 +12457,7 @@
               <a:buChar char="•"/>
             </a:pPr>
             <a:r>
-              <a:rPr b="0" lang="en-US" sz="2400" spc="-1" strike="noStrike">
+              <a:rPr lang="en-US" sz="2400" b="0" strike="noStrike" spc="-1">
                 <a:solidFill>
                   <a:srgbClr val="404040"/>
                 </a:solidFill>
@@ -12225,12 +12465,6 @@
               </a:rPr>
               <a:t>They note that employers statistically discriminate against Hispanics and African Americans by assuming they are more likely to have criminal records in cases when criminal record data is not available to them.</a:t>
             </a:r>
-            <a:endParaRPr b="0" lang="en-US" sz="2400" spc="-1" strike="noStrike">
-              <a:solidFill>
-                <a:srgbClr val="404040"/>
-              </a:solidFill>
-              <a:latin typeface="Century Gothic"/>
-            </a:endParaRPr>
           </a:p>
           <a:p>
             <a:pPr marL="228600" indent="-228600">
@@ -12247,7 +12481,7 @@
               <a:buChar char="•"/>
             </a:pPr>
             <a:r>
-              <a:rPr b="0" lang="en-US" sz="2400" spc="-1" strike="noStrike">
+              <a:rPr lang="en-US" sz="2400" b="0" strike="noStrike" spc="-1">
                 <a:solidFill>
                   <a:srgbClr val="404040"/>
                 </a:solidFill>
@@ -12255,25 +12489,14 @@
               </a:rPr>
               <a:t>Race and ethnicity are unfortunately used as a proxy for criminal records.</a:t>
             </a:r>
-            <a:endParaRPr b="0" lang="en-US" sz="2400" spc="-1" strike="noStrike">
-              <a:solidFill>
-                <a:srgbClr val="404040"/>
-              </a:solidFill>
-              <a:latin typeface="Century Gothic"/>
-            </a:endParaRPr>
           </a:p>
         </p:txBody>
       </p:sp>
     </p:spTree>
   </p:cSld>
-  <mc:AlternateContent>
-    <mc:Choice Requires="p14">
-      <p:transition spd="slow" p14:dur="2000"/>
-    </mc:Choice>
-    <mc:Fallback>
-      <p:transition spd="slow"/>
-    </mc:Fallback>
-  </mc:AlternateContent>
+  <p:clrMapOvr>
+    <a:masterClrMapping/>
+  </p:clrMapOvr>
 </p:sld>
 </file>
 
@@ -12285,37 +12508,37 @@
         <a:srgbClr val="000000"/>
       </a:dk1>
       <a:lt1>
-        <a:srgbClr val="ffffff"/>
+        <a:srgbClr val="FFFFFF"/>
       </a:lt1>
       <a:dk2>
         <a:srgbClr val="404040"/>
       </a:dk2>
       <a:lt2>
-        <a:srgbClr val="e7e6e6"/>
+        <a:srgbClr val="E7E6E6"/>
       </a:lt2>
       <a:accent1>
-        <a:srgbClr val="71c5e8"/>
+        <a:srgbClr val="71C5E8"/>
       </a:accent1>
       <a:accent2>
-        <a:srgbClr val="285c4d"/>
+        <a:srgbClr val="285C4D"/>
       </a:accent2>
       <a:accent3>
-        <a:srgbClr val="a5a5a5"/>
+        <a:srgbClr val="A5A5A5"/>
       </a:accent3>
       <a:accent4>
-        <a:srgbClr val="b9d9eb"/>
+        <a:srgbClr val="B9D9EB"/>
       </a:accent4>
       <a:accent5>
-        <a:srgbClr val="daaa00"/>
+        <a:srgbClr val="DAAA00"/>
       </a:accent5>
       <a:accent6>
-        <a:srgbClr val="78be20"/>
+        <a:srgbClr val="78BE20"/>
       </a:accent6>
       <a:hlink>
-        <a:srgbClr val="71c5e8"/>
+        <a:srgbClr val="71C5E8"/>
       </a:hlink>
       <a:folHlink>
-        <a:srgbClr val="a5a5a5"/>
+        <a:srgbClr val="A5A5A5"/>
       </a:folHlink>
     </a:clrScheme>
     <a:fontScheme name="Office">
@@ -12477,6 +12700,8 @@
       </a:bgFillStyleLst>
     </a:fmtScheme>
   </a:themeElements>
+  <a:objectDefaults/>
+  <a:extraClrSchemeLst/>
 </a:theme>
 </file>
 
@@ -12488,37 +12713,37 @@
         <a:srgbClr val="000000"/>
       </a:dk1>
       <a:lt1>
-        <a:srgbClr val="ffffff"/>
+        <a:srgbClr val="FFFFFF"/>
       </a:lt1>
       <a:dk2>
         <a:srgbClr val="404040"/>
       </a:dk2>
       <a:lt2>
-        <a:srgbClr val="e7e6e6"/>
+        <a:srgbClr val="E7E6E6"/>
       </a:lt2>
       <a:accent1>
-        <a:srgbClr val="71c5e8"/>
+        <a:srgbClr val="71C5E8"/>
       </a:accent1>
       <a:accent2>
-        <a:srgbClr val="285c4d"/>
+        <a:srgbClr val="285C4D"/>
       </a:accent2>
       <a:accent3>
-        <a:srgbClr val="a5a5a5"/>
+        <a:srgbClr val="A5A5A5"/>
       </a:accent3>
       <a:accent4>
-        <a:srgbClr val="b9d9eb"/>
+        <a:srgbClr val="B9D9EB"/>
       </a:accent4>
       <a:accent5>
-        <a:srgbClr val="daaa00"/>
+        <a:srgbClr val="DAAA00"/>
       </a:accent5>
       <a:accent6>
-        <a:srgbClr val="78be20"/>
+        <a:srgbClr val="78BE20"/>
       </a:accent6>
       <a:hlink>
-        <a:srgbClr val="71c5e8"/>
+        <a:srgbClr val="71C5E8"/>
       </a:hlink>
       <a:folHlink>
-        <a:srgbClr val="a5a5a5"/>
+        <a:srgbClr val="A5A5A5"/>
       </a:folHlink>
     </a:clrScheme>
     <a:fontScheme name="Office">
@@ -12680,6 +12905,8 @@
       </a:bgFillStyleLst>
     </a:fmtScheme>
   </a:themeElements>
+  <a:objectDefaults/>
+  <a:extraClrSchemeLst/>
 </a:theme>
 </file>
 
@@ -12697,31 +12924,31 @@
         <a:srgbClr val="404040"/>
       </a:dk2>
       <a:lt2>
-        <a:srgbClr val="e7e6e6"/>
+        <a:srgbClr val="E7E6E6"/>
       </a:lt2>
       <a:accent1>
-        <a:srgbClr val="71c5e8"/>
+        <a:srgbClr val="71C5E8"/>
       </a:accent1>
       <a:accent2>
-        <a:srgbClr val="285c4d"/>
+        <a:srgbClr val="285C4D"/>
       </a:accent2>
       <a:accent3>
-        <a:srgbClr val="a5a5a5"/>
+        <a:srgbClr val="A5A5A5"/>
       </a:accent3>
       <a:accent4>
-        <a:srgbClr val="b9d9eb"/>
+        <a:srgbClr val="B9D9EB"/>
       </a:accent4>
       <a:accent5>
-        <a:srgbClr val="daaa00"/>
+        <a:srgbClr val="DAAA00"/>
       </a:accent5>
       <a:accent6>
-        <a:srgbClr val="78be20"/>
+        <a:srgbClr val="78BE20"/>
       </a:accent6>
       <a:hlink>
-        <a:srgbClr val="71c5e8"/>
+        <a:srgbClr val="71C5E8"/>
       </a:hlink>
       <a:folHlink>
-        <a:srgbClr val="a5a5a5"/>
+        <a:srgbClr val="A5A5A5"/>
       </a:folHlink>
     </a:clrScheme>
     <a:fontScheme name="Office">
@@ -12883,5 +13110,7 @@
       </a:bgFillStyleLst>
     </a:fmtScheme>
   </a:themeElements>
+  <a:objectDefaults/>
+  <a:extraClrSchemeLst/>
 </a:theme>
 </file>
--- a/slides/08-week8/02-thur/UrbanEconomicsIntrotoDiscrimination.pptx
+++ b/slides/08-week8/02-thur/UrbanEconomicsIntrotoDiscrimination.pptx
@@ -131,6 +131,11 @@
       </a:defRPr>
     </a:lvl9pPr>
   </p:defaultTextStyle>
+  <p:extLst>
+    <p:ext uri="{EFAFB233-063F-42B5-8137-9DF3F51BA10A}">
+      <p15:sldGuideLst xmlns:p15="http://schemas.microsoft.com/office/powerpoint/2012/main"/>
+    </p:ext>
+  </p:extLst>
 </p:presentation>
 </file>
 
@@ -7204,6 +7209,26 @@
           </a:bodyPr>
           <a:lstStyle/>
           <a:p>
+            <a:pPr marL="0" indent="0">
+              <a:lnSpc>
+                <a:spcPct val="90000"/>
+              </a:lnSpc>
+              <a:spcBef>
+                <a:spcPts val="1001"/>
+              </a:spcBef>
+              <a:buClr>
+                <a:srgbClr val="404040"/>
+              </a:buClr>
+              <a:buNone/>
+            </a:pPr>
+            <a:endParaRPr lang="en-US" sz="2400" b="0" strike="noStrike" spc="-1" dirty="0">
+              <a:solidFill>
+                <a:srgbClr val="404040"/>
+              </a:solidFill>
+              <a:latin typeface="Century Gothic"/>
+            </a:endParaRPr>
+          </a:p>
+          <a:p>
             <a:pPr marL="228600" indent="-228600">
               <a:lnSpc>
                 <a:spcPct val="90000"/>
@@ -7218,13 +7243,13 @@
               <a:buChar char="•"/>
             </a:pPr>
             <a:r>
-              <a:rPr lang="en-US" sz="2400" b="0" strike="noStrike" spc="-1">
+              <a:rPr lang="en-US" sz="2400" b="0" strike="noStrike" spc="-1" dirty="0">
                 <a:solidFill>
                   <a:srgbClr val="404040"/>
                 </a:solidFill>
                 <a:latin typeface="Century Gothic"/>
               </a:rPr>
-              <a:t>You’ll hear later in the course about a research project I am working on that quantifies sexual orientation discrimination in access to mortgage loans.</a:t>
+              <a:t>One concern we have is that mortgage loan originators – who people work with to get mortgages – may statistically discriminate against applicants based on perceptions of their credit worthiness.</a:t>
             </a:r>
           </a:p>
           <a:p>
@@ -7242,31 +7267,7 @@
               <a:buChar char="•"/>
             </a:pPr>
             <a:r>
-              <a:rPr lang="en-US" sz="2400" b="0" strike="noStrike" spc="-1">
-                <a:solidFill>
-                  <a:srgbClr val="404040"/>
-                </a:solidFill>
-                <a:latin typeface="Century Gothic"/>
-              </a:rPr>
-              <a:t>One concern we have is that mortgage loan originators – who people work with to get mortgages – may statistically discriminate against applicants based on perceptions of their credit worthiness.</a:t>
-            </a:r>
-          </a:p>
-          <a:p>
-            <a:pPr marL="228600" indent="-228600">
-              <a:lnSpc>
-                <a:spcPct val="90000"/>
-              </a:lnSpc>
-              <a:spcBef>
-                <a:spcPts val="1001"/>
-              </a:spcBef>
-              <a:buClr>
-                <a:srgbClr val="404040"/>
-              </a:buClr>
-              <a:buFont typeface="Arial"/>
-              <a:buChar char="•"/>
-            </a:pPr>
-            <a:r>
-              <a:rPr lang="en-US" sz="2400" b="0" strike="noStrike" spc="-1">
+              <a:rPr lang="en-US" sz="2400" b="0" strike="noStrike" spc="-1" dirty="0">
                 <a:solidFill>
                   <a:srgbClr val="404040"/>
                 </a:solidFill>
